--- a/A_Documentation/Defense.pptx
+++ b/A_Documentation/Defense.pptx
@@ -2,14 +2,41 @@
 <file path=ppt/presentation.xml><?xml version="1.0" encoding="utf-8"?>
 <p:presentation xmlns:a="http://schemas.openxmlformats.org/drawingml/2006/main" xmlns:r="http://schemas.openxmlformats.org/officeDocument/2006/relationships" xmlns:p="http://schemas.openxmlformats.org/presentationml/2006/main" saveSubsetFonts="1">
   <p:sldMasterIdLst>
-    <p:sldMasterId id="2147483648" r:id="rId1"/>
+    <p:sldMasterId id="2147483720" r:id="rId1"/>
   </p:sldMasterIdLst>
+  <p:notesMasterIdLst>
+    <p:notesMasterId r:id="rId31"/>
+  </p:notesMasterIdLst>
   <p:sldIdLst>
     <p:sldId id="256" r:id="rId2"/>
     <p:sldId id="257" r:id="rId3"/>
     <p:sldId id="258" r:id="rId4"/>
-    <p:sldId id="259" r:id="rId5"/>
-    <p:sldId id="260" r:id="rId6"/>
+    <p:sldId id="278" r:id="rId5"/>
+    <p:sldId id="259" r:id="rId6"/>
+    <p:sldId id="286" r:id="rId7"/>
+    <p:sldId id="260" r:id="rId8"/>
+    <p:sldId id="277" r:id="rId9"/>
+    <p:sldId id="275" r:id="rId10"/>
+    <p:sldId id="276" r:id="rId11"/>
+    <p:sldId id="280" r:id="rId12"/>
+    <p:sldId id="281" r:id="rId13"/>
+    <p:sldId id="282" r:id="rId14"/>
+    <p:sldId id="261" r:id="rId15"/>
+    <p:sldId id="262" r:id="rId16"/>
+    <p:sldId id="263" r:id="rId17"/>
+    <p:sldId id="265" r:id="rId18"/>
+    <p:sldId id="283" r:id="rId19"/>
+    <p:sldId id="266" r:id="rId20"/>
+    <p:sldId id="267" r:id="rId21"/>
+    <p:sldId id="268" r:id="rId22"/>
+    <p:sldId id="269" r:id="rId23"/>
+    <p:sldId id="270" r:id="rId24"/>
+    <p:sldId id="271" r:id="rId25"/>
+    <p:sldId id="284" r:id="rId26"/>
+    <p:sldId id="273" r:id="rId27"/>
+    <p:sldId id="285" r:id="rId28"/>
+    <p:sldId id="274" r:id="rId29"/>
+    <p:sldId id="279" r:id="rId30"/>
   </p:sldIdLst>
   <p:sldSz cx="12192000" cy="6858000"/>
   <p:notesSz cx="6858000" cy="9144000"/>
@@ -108,7 +135,362 @@
       </a:defRPr>
     </a:lvl9pPr>
   </p:defaultTextStyle>
+  <p:extLst>
+    <p:ext uri="{EFAFB233-063F-42B5-8137-9DF3F51BA10A}">
+      <p15:sldGuideLst xmlns:p15="http://schemas.microsoft.com/office/powerpoint/2012/main"/>
+    </p:ext>
+  </p:extLst>
 </p:presentation>
+</file>
+
+<file path=ppt/notesMasters/notesMaster1.xml><?xml version="1.0" encoding="utf-8"?>
+<p:notesMaster xmlns:a="http://schemas.openxmlformats.org/drawingml/2006/main" xmlns:r="http://schemas.openxmlformats.org/officeDocument/2006/relationships" xmlns:p="http://schemas.openxmlformats.org/presentationml/2006/main">
+  <p:cSld>
+    <p:bg>
+      <p:bgRef idx="1001">
+        <a:schemeClr val="bg1"/>
+      </p:bgRef>
+    </p:bg>
+    <p:spTree>
+      <p:nvGrpSpPr>
+        <p:cNvPr id="1" name=""/>
+        <p:cNvGrpSpPr/>
+        <p:nvPr/>
+      </p:nvGrpSpPr>
+      <p:grpSpPr>
+        <a:xfrm>
+          <a:off x="0" y="0"/>
+          <a:ext cx="0" cy="0"/>
+          <a:chOff x="0" y="0"/>
+          <a:chExt cx="0" cy="0"/>
+        </a:xfrm>
+      </p:grpSpPr>
+      <p:sp>
+        <p:nvSpPr>
+          <p:cNvPr id="2" name="Header Placeholder 1"/>
+          <p:cNvSpPr>
+            <a:spLocks noGrp="1"/>
+          </p:cNvSpPr>
+          <p:nvPr>
+            <p:ph type="hdr" sz="quarter"/>
+          </p:nvPr>
+        </p:nvSpPr>
+        <p:spPr>
+          <a:xfrm>
+            <a:off x="0" y="0"/>
+            <a:ext cx="2971800" cy="458788"/>
+          </a:xfrm>
+          <a:prstGeom prst="rect">
+            <a:avLst/>
+          </a:prstGeom>
+        </p:spPr>
+        <p:txBody>
+          <a:bodyPr vert="horz" lIns="91440" tIns="45720" rIns="91440" bIns="45720" rtlCol="0"/>
+          <a:lstStyle>
+            <a:lvl1pPr algn="l">
+              <a:defRPr sz="1200"/>
+            </a:lvl1pPr>
+          </a:lstStyle>
+          <a:p>
+            <a:endParaRPr lang="fr-CH"/>
+          </a:p>
+        </p:txBody>
+      </p:sp>
+      <p:sp>
+        <p:nvSpPr>
+          <p:cNvPr id="3" name="Date Placeholder 2"/>
+          <p:cNvSpPr>
+            <a:spLocks noGrp="1"/>
+          </p:cNvSpPr>
+          <p:nvPr>
+            <p:ph type="dt" idx="1"/>
+          </p:nvPr>
+        </p:nvSpPr>
+        <p:spPr>
+          <a:xfrm>
+            <a:off x="3884613" y="0"/>
+            <a:ext cx="2971800" cy="458788"/>
+          </a:xfrm>
+          <a:prstGeom prst="rect">
+            <a:avLst/>
+          </a:prstGeom>
+        </p:spPr>
+        <p:txBody>
+          <a:bodyPr vert="horz" lIns="91440" tIns="45720" rIns="91440" bIns="45720" rtlCol="0"/>
+          <a:lstStyle>
+            <a:lvl1pPr algn="r">
+              <a:defRPr sz="1200"/>
+            </a:lvl1pPr>
+          </a:lstStyle>
+          <a:p>
+            <a:fld id="{C6333347-8B99-4D12-8D18-1FE76537B012}" type="datetimeFigureOut">
+              <a:rPr lang="fr-CH" smtClean="0"/>
+              <a:t>06.09.2026</a:t>
+            </a:fld>
+            <a:endParaRPr lang="fr-CH"/>
+          </a:p>
+        </p:txBody>
+      </p:sp>
+      <p:sp>
+        <p:nvSpPr>
+          <p:cNvPr id="4" name="Slide Image Placeholder 3"/>
+          <p:cNvSpPr>
+            <a:spLocks noGrp="1" noRot="1" noChangeAspect="1"/>
+          </p:cNvSpPr>
+          <p:nvPr>
+            <p:ph type="sldImg" idx="2"/>
+          </p:nvPr>
+        </p:nvSpPr>
+        <p:spPr>
+          <a:xfrm>
+            <a:off x="685800" y="1143000"/>
+            <a:ext cx="5486400" cy="3086100"/>
+          </a:xfrm>
+          <a:prstGeom prst="rect">
+            <a:avLst/>
+          </a:prstGeom>
+          <a:noFill/>
+          <a:ln w="12700">
+            <a:solidFill>
+              <a:prstClr val="black"/>
+            </a:solidFill>
+          </a:ln>
+        </p:spPr>
+        <p:txBody>
+          <a:bodyPr vert="horz" lIns="91440" tIns="45720" rIns="91440" bIns="45720" rtlCol="0" anchor="ctr"/>
+          <a:lstStyle/>
+          <a:p>
+            <a:endParaRPr lang="fr-CH"/>
+          </a:p>
+        </p:txBody>
+      </p:sp>
+      <p:sp>
+        <p:nvSpPr>
+          <p:cNvPr id="5" name="Notes Placeholder 4"/>
+          <p:cNvSpPr>
+            <a:spLocks noGrp="1"/>
+          </p:cNvSpPr>
+          <p:nvPr>
+            <p:ph type="body" sz="quarter" idx="3"/>
+          </p:nvPr>
+        </p:nvSpPr>
+        <p:spPr>
+          <a:xfrm>
+            <a:off x="685800" y="4400550"/>
+            <a:ext cx="5486400" cy="3600450"/>
+          </a:xfrm>
+          <a:prstGeom prst="rect">
+            <a:avLst/>
+          </a:prstGeom>
+        </p:spPr>
+        <p:txBody>
+          <a:bodyPr vert="horz" lIns="91440" tIns="45720" rIns="91440" bIns="45720" rtlCol="0"/>
+          <a:lstStyle/>
+          <a:p>
+            <a:pPr lvl="0"/>
+            <a:r>
+              <a:rPr lang="en-US"/>
+              <a:t>Click to edit Master text styles</a:t>
+            </a:r>
+          </a:p>
+          <a:p>
+            <a:pPr lvl="1"/>
+            <a:r>
+              <a:rPr lang="en-US"/>
+              <a:t>Second level</a:t>
+            </a:r>
+          </a:p>
+          <a:p>
+            <a:pPr lvl="2"/>
+            <a:r>
+              <a:rPr lang="en-US"/>
+              <a:t>Third level</a:t>
+            </a:r>
+          </a:p>
+          <a:p>
+            <a:pPr lvl="3"/>
+            <a:r>
+              <a:rPr lang="en-US"/>
+              <a:t>Fourth level</a:t>
+            </a:r>
+          </a:p>
+          <a:p>
+            <a:pPr lvl="4"/>
+            <a:r>
+              <a:rPr lang="en-US"/>
+              <a:t>Fifth level</a:t>
+            </a:r>
+            <a:endParaRPr lang="fr-CH"/>
+          </a:p>
+        </p:txBody>
+      </p:sp>
+      <p:sp>
+        <p:nvSpPr>
+          <p:cNvPr id="6" name="Footer Placeholder 5"/>
+          <p:cNvSpPr>
+            <a:spLocks noGrp="1"/>
+          </p:cNvSpPr>
+          <p:nvPr>
+            <p:ph type="ftr" sz="quarter" idx="4"/>
+          </p:nvPr>
+        </p:nvSpPr>
+        <p:spPr>
+          <a:xfrm>
+            <a:off x="0" y="8685213"/>
+            <a:ext cx="2971800" cy="458787"/>
+          </a:xfrm>
+          <a:prstGeom prst="rect">
+            <a:avLst/>
+          </a:prstGeom>
+        </p:spPr>
+        <p:txBody>
+          <a:bodyPr vert="horz" lIns="91440" tIns="45720" rIns="91440" bIns="45720" rtlCol="0" anchor="b"/>
+          <a:lstStyle>
+            <a:lvl1pPr algn="l">
+              <a:defRPr sz="1200"/>
+            </a:lvl1pPr>
+          </a:lstStyle>
+          <a:p>
+            <a:endParaRPr lang="fr-CH"/>
+          </a:p>
+        </p:txBody>
+      </p:sp>
+      <p:sp>
+        <p:nvSpPr>
+          <p:cNvPr id="7" name="Slide Number Placeholder 6"/>
+          <p:cNvSpPr>
+            <a:spLocks noGrp="1"/>
+          </p:cNvSpPr>
+          <p:nvPr>
+            <p:ph type="sldNum" sz="quarter" idx="5"/>
+          </p:nvPr>
+        </p:nvSpPr>
+        <p:spPr>
+          <a:xfrm>
+            <a:off x="3884613" y="8685213"/>
+            <a:ext cx="2971800" cy="458787"/>
+          </a:xfrm>
+          <a:prstGeom prst="rect">
+            <a:avLst/>
+          </a:prstGeom>
+        </p:spPr>
+        <p:txBody>
+          <a:bodyPr vert="horz" lIns="91440" tIns="45720" rIns="91440" bIns="45720" rtlCol="0" anchor="b"/>
+          <a:lstStyle>
+            <a:lvl1pPr algn="r">
+              <a:defRPr sz="1200"/>
+            </a:lvl1pPr>
+          </a:lstStyle>
+          <a:p>
+            <a:fld id="{CA203382-5070-4CE6-A40F-9C8D959A2799}" type="slidenum">
+              <a:rPr lang="fr-CH" smtClean="0"/>
+              <a:t>‹#›</a:t>
+            </a:fld>
+            <a:endParaRPr lang="fr-CH"/>
+          </a:p>
+        </p:txBody>
+      </p:sp>
+    </p:spTree>
+    <p:extLst>
+      <p:ext uri="{BB962C8B-B14F-4D97-AF65-F5344CB8AC3E}">
+        <p14:creationId xmlns:p14="http://schemas.microsoft.com/office/powerpoint/2010/main" val="197159056"/>
+      </p:ext>
+    </p:extLst>
+  </p:cSld>
+  <p:clrMap bg1="lt1" tx1="dk1" bg2="lt2" tx2="dk2" accent1="accent1" accent2="accent2" accent3="accent3" accent4="accent4" accent5="accent5" accent6="accent6" hlink="hlink" folHlink="folHlink"/>
+  <p:notesStyle>
+    <a:lvl1pPr marL="0" algn="l" defTabSz="914400" rtl="0" eaLnBrk="1" latinLnBrk="0" hangingPunct="1">
+      <a:defRPr sz="1200" kern="1200">
+        <a:solidFill>
+          <a:schemeClr val="tx1"/>
+        </a:solidFill>
+        <a:latin typeface="+mn-lt"/>
+        <a:ea typeface="+mn-ea"/>
+        <a:cs typeface="+mn-cs"/>
+      </a:defRPr>
+    </a:lvl1pPr>
+    <a:lvl2pPr marL="457200" algn="l" defTabSz="914400" rtl="0" eaLnBrk="1" latinLnBrk="0" hangingPunct="1">
+      <a:defRPr sz="1200" kern="1200">
+        <a:solidFill>
+          <a:schemeClr val="tx1"/>
+        </a:solidFill>
+        <a:latin typeface="+mn-lt"/>
+        <a:ea typeface="+mn-ea"/>
+        <a:cs typeface="+mn-cs"/>
+      </a:defRPr>
+    </a:lvl2pPr>
+    <a:lvl3pPr marL="914400" algn="l" defTabSz="914400" rtl="0" eaLnBrk="1" latinLnBrk="0" hangingPunct="1">
+      <a:defRPr sz="1200" kern="1200">
+        <a:solidFill>
+          <a:schemeClr val="tx1"/>
+        </a:solidFill>
+        <a:latin typeface="+mn-lt"/>
+        <a:ea typeface="+mn-ea"/>
+        <a:cs typeface="+mn-cs"/>
+      </a:defRPr>
+    </a:lvl3pPr>
+    <a:lvl4pPr marL="1371600" algn="l" defTabSz="914400" rtl="0" eaLnBrk="1" latinLnBrk="0" hangingPunct="1">
+      <a:defRPr sz="1200" kern="1200">
+        <a:solidFill>
+          <a:schemeClr val="tx1"/>
+        </a:solidFill>
+        <a:latin typeface="+mn-lt"/>
+        <a:ea typeface="+mn-ea"/>
+        <a:cs typeface="+mn-cs"/>
+      </a:defRPr>
+    </a:lvl4pPr>
+    <a:lvl5pPr marL="1828800" algn="l" defTabSz="914400" rtl="0" eaLnBrk="1" latinLnBrk="0" hangingPunct="1">
+      <a:defRPr sz="1200" kern="1200">
+        <a:solidFill>
+          <a:schemeClr val="tx1"/>
+        </a:solidFill>
+        <a:latin typeface="+mn-lt"/>
+        <a:ea typeface="+mn-ea"/>
+        <a:cs typeface="+mn-cs"/>
+      </a:defRPr>
+    </a:lvl5pPr>
+    <a:lvl6pPr marL="2286000" algn="l" defTabSz="914400" rtl="0" eaLnBrk="1" latinLnBrk="0" hangingPunct="1">
+      <a:defRPr sz="1200" kern="1200">
+        <a:solidFill>
+          <a:schemeClr val="tx1"/>
+        </a:solidFill>
+        <a:latin typeface="+mn-lt"/>
+        <a:ea typeface="+mn-ea"/>
+        <a:cs typeface="+mn-cs"/>
+      </a:defRPr>
+    </a:lvl6pPr>
+    <a:lvl7pPr marL="2743200" algn="l" defTabSz="914400" rtl="0" eaLnBrk="1" latinLnBrk="0" hangingPunct="1">
+      <a:defRPr sz="1200" kern="1200">
+        <a:solidFill>
+          <a:schemeClr val="tx1"/>
+        </a:solidFill>
+        <a:latin typeface="+mn-lt"/>
+        <a:ea typeface="+mn-ea"/>
+        <a:cs typeface="+mn-cs"/>
+      </a:defRPr>
+    </a:lvl7pPr>
+    <a:lvl8pPr marL="3200400" algn="l" defTabSz="914400" rtl="0" eaLnBrk="1" latinLnBrk="0" hangingPunct="1">
+      <a:defRPr sz="1200" kern="1200">
+        <a:solidFill>
+          <a:schemeClr val="tx1"/>
+        </a:solidFill>
+        <a:latin typeface="+mn-lt"/>
+        <a:ea typeface="+mn-ea"/>
+        <a:cs typeface="+mn-cs"/>
+      </a:defRPr>
+    </a:lvl8pPr>
+    <a:lvl9pPr marL="3657600" algn="l" defTabSz="914400" rtl="0" eaLnBrk="1" latinLnBrk="0" hangingPunct="1">
+      <a:defRPr sz="1200" kern="1200">
+        <a:solidFill>
+          <a:schemeClr val="tx1"/>
+        </a:solidFill>
+        <a:latin typeface="+mn-lt"/>
+        <a:ea typeface="+mn-ea"/>
+        <a:cs typeface="+mn-cs"/>
+      </a:defRPr>
+    </a:lvl9pPr>
+  </p:notesStyle>
+</p:notesMaster>
 </file>
 
 <file path=ppt/slideLayouts/slideLayout1.xml><?xml version="1.0" encoding="utf-8"?>
@@ -133,7 +515,7 @@
           <p:cNvPr id="2" name="Title 1">
             <a:extLst>
               <a:ext uri="{FF2B5EF4-FFF2-40B4-BE49-F238E27FC236}">
-                <a16:creationId xmlns:a16="http://schemas.microsoft.com/office/drawing/2014/main" id="{73E164A9-89AE-1720-40FF-357961EB2E88}"/>
+                <a16:creationId xmlns:a16="http://schemas.microsoft.com/office/drawing/2014/main" id="{CB0997A1-6E6F-2180-8BB1-E2719BA48EAF}"/>
               </a:ext>
             </a:extLst>
           </p:cNvPr>
@@ -171,7 +553,7 @@
           <p:cNvPr id="3" name="Subtitle 2">
             <a:extLst>
               <a:ext uri="{FF2B5EF4-FFF2-40B4-BE49-F238E27FC236}">
-                <a16:creationId xmlns:a16="http://schemas.microsoft.com/office/drawing/2014/main" id="{BC867FD3-CD42-4D4D-88A3-7951E7B3DADF}"/>
+                <a16:creationId xmlns:a16="http://schemas.microsoft.com/office/drawing/2014/main" id="{C0AD172B-6A71-C146-077C-A685AC58473E}"/>
               </a:ext>
             </a:extLst>
           </p:cNvPr>
@@ -242,7 +624,7 @@
           <p:cNvPr id="4" name="Date Placeholder 3">
             <a:extLst>
               <a:ext uri="{FF2B5EF4-FFF2-40B4-BE49-F238E27FC236}">
-                <a16:creationId xmlns:a16="http://schemas.microsoft.com/office/drawing/2014/main" id="{7584A9D6-6D2B-1AC3-2A41-49E94E3B18D1}"/>
+                <a16:creationId xmlns:a16="http://schemas.microsoft.com/office/drawing/2014/main" id="{9328C133-C471-D423-2E0C-ED87E3C848EF}"/>
               </a:ext>
             </a:extLst>
           </p:cNvPr>
@@ -258,9 +640,9 @@
           <a:bodyPr/>
           <a:lstStyle/>
           <a:p>
-            <a:fld id="{890F2168-053D-46F3-B710-B37CFDF6B0DF}" type="datetimeFigureOut">
+            <a:fld id="{4402F845-7D1D-4BC7-9D07-41BA32719176}" type="datetime1">
               <a:rPr lang="fr-CH" smtClean="0"/>
-              <a:t>28.08.2026</a:t>
+              <a:t>06.09.2026</a:t>
             </a:fld>
             <a:endParaRPr lang="fr-CH"/>
           </a:p>
@@ -271,7 +653,7 @@
           <p:cNvPr id="5" name="Footer Placeholder 4">
             <a:extLst>
               <a:ext uri="{FF2B5EF4-FFF2-40B4-BE49-F238E27FC236}">
-                <a16:creationId xmlns:a16="http://schemas.microsoft.com/office/drawing/2014/main" id="{61FFC364-0514-B686-B8F7-4FA954B20E4F}"/>
+                <a16:creationId xmlns:a16="http://schemas.microsoft.com/office/drawing/2014/main" id="{434A1515-0DE7-92D4-FEAB-3B9410F2315F}"/>
               </a:ext>
             </a:extLst>
           </p:cNvPr>
@@ -296,7 +678,7 @@
           <p:cNvPr id="6" name="Slide Number Placeholder 5">
             <a:extLst>
               <a:ext uri="{FF2B5EF4-FFF2-40B4-BE49-F238E27FC236}">
-                <a16:creationId xmlns:a16="http://schemas.microsoft.com/office/drawing/2014/main" id="{76E7D0EA-0F01-7DE5-1153-DF7D43E62211}"/>
+                <a16:creationId xmlns:a16="http://schemas.microsoft.com/office/drawing/2014/main" id="{31A44AC7-1921-E817-2EBB-D97FEE43B8E8}"/>
               </a:ext>
             </a:extLst>
           </p:cNvPr>
@@ -323,7 +705,7 @@
     </p:spTree>
     <p:extLst>
       <p:ext uri="{BB962C8B-B14F-4D97-AF65-F5344CB8AC3E}">
-        <p14:creationId xmlns:p14="http://schemas.microsoft.com/office/powerpoint/2010/main" val="1761912423"/>
+        <p14:creationId xmlns:p14="http://schemas.microsoft.com/office/powerpoint/2010/main" val="2215932828"/>
       </p:ext>
     </p:extLst>
   </p:cSld>
@@ -355,7 +737,7 @@
           <p:cNvPr id="2" name="Title 1">
             <a:extLst>
               <a:ext uri="{FF2B5EF4-FFF2-40B4-BE49-F238E27FC236}">
-                <a16:creationId xmlns:a16="http://schemas.microsoft.com/office/drawing/2014/main" id="{474A61D4-1B10-C54C-E10C-760AA67895DA}"/>
+                <a16:creationId xmlns:a16="http://schemas.microsoft.com/office/drawing/2014/main" id="{51CAE9CF-8B4C-218B-3A01-128E477B40A8}"/>
               </a:ext>
             </a:extLst>
           </p:cNvPr>
@@ -384,7 +766,7 @@
           <p:cNvPr id="3" name="Vertical Text Placeholder 2">
             <a:extLst>
               <a:ext uri="{FF2B5EF4-FFF2-40B4-BE49-F238E27FC236}">
-                <a16:creationId xmlns:a16="http://schemas.microsoft.com/office/drawing/2014/main" id="{062ED505-4B76-A584-BC18-00B8BE49FEB9}"/>
+                <a16:creationId xmlns:a16="http://schemas.microsoft.com/office/drawing/2014/main" id="{B5DC4A1F-4B4C-B1B1-3693-3ACE8E3D4636}"/>
               </a:ext>
             </a:extLst>
           </p:cNvPr>
@@ -442,7 +824,7 @@
           <p:cNvPr id="4" name="Date Placeholder 3">
             <a:extLst>
               <a:ext uri="{FF2B5EF4-FFF2-40B4-BE49-F238E27FC236}">
-                <a16:creationId xmlns:a16="http://schemas.microsoft.com/office/drawing/2014/main" id="{0B9C9E98-DEFA-5CCB-187E-6154AD770FF5}"/>
+                <a16:creationId xmlns:a16="http://schemas.microsoft.com/office/drawing/2014/main" id="{A3CEC5D6-EC04-D8F0-FC8D-806EAAB75D50}"/>
               </a:ext>
             </a:extLst>
           </p:cNvPr>
@@ -458,9 +840,9 @@
           <a:bodyPr/>
           <a:lstStyle/>
           <a:p>
-            <a:fld id="{890F2168-053D-46F3-B710-B37CFDF6B0DF}" type="datetimeFigureOut">
+            <a:fld id="{14CC4612-9EF6-4B04-A368-185401C2C328}" type="datetime1">
               <a:rPr lang="fr-CH" smtClean="0"/>
-              <a:t>28.08.2026</a:t>
+              <a:t>06.09.2026</a:t>
             </a:fld>
             <a:endParaRPr lang="fr-CH"/>
           </a:p>
@@ -471,7 +853,7 @@
           <p:cNvPr id="5" name="Footer Placeholder 4">
             <a:extLst>
               <a:ext uri="{FF2B5EF4-FFF2-40B4-BE49-F238E27FC236}">
-                <a16:creationId xmlns:a16="http://schemas.microsoft.com/office/drawing/2014/main" id="{88315D0F-367B-FD03-D0AC-938B57C73D0E}"/>
+                <a16:creationId xmlns:a16="http://schemas.microsoft.com/office/drawing/2014/main" id="{CA84FA7F-A686-2FB5-4525-2FC4D80DDEC2}"/>
               </a:ext>
             </a:extLst>
           </p:cNvPr>
@@ -496,7 +878,7 @@
           <p:cNvPr id="6" name="Slide Number Placeholder 5">
             <a:extLst>
               <a:ext uri="{FF2B5EF4-FFF2-40B4-BE49-F238E27FC236}">
-                <a16:creationId xmlns:a16="http://schemas.microsoft.com/office/drawing/2014/main" id="{5E4D040B-D4A0-29F3-3FCE-3F8B3863528B}"/>
+                <a16:creationId xmlns:a16="http://schemas.microsoft.com/office/drawing/2014/main" id="{D61FB267-E4B9-E67F-47C6-98AB7FBA58BE}"/>
               </a:ext>
             </a:extLst>
           </p:cNvPr>
@@ -523,13 +905,14 @@
     </p:spTree>
     <p:extLst>
       <p:ext uri="{BB962C8B-B14F-4D97-AF65-F5344CB8AC3E}">
-        <p14:creationId xmlns:p14="http://schemas.microsoft.com/office/powerpoint/2010/main" val="1478439147"/>
+        <p14:creationId xmlns:p14="http://schemas.microsoft.com/office/powerpoint/2010/main" val="563466126"/>
       </p:ext>
     </p:extLst>
   </p:cSld>
   <p:clrMapOvr>
     <a:masterClrMapping/>
   </p:clrMapOvr>
+  <p:hf hdr="0" ftr="0" dt="0"/>
 </p:sldLayout>
 </file>
 
@@ -555,7 +938,7 @@
           <p:cNvPr id="2" name="Vertical Title 1">
             <a:extLst>
               <a:ext uri="{FF2B5EF4-FFF2-40B4-BE49-F238E27FC236}">
-                <a16:creationId xmlns:a16="http://schemas.microsoft.com/office/drawing/2014/main" id="{2FC74743-E2EE-C670-93CB-E2C21C67ACF7}"/>
+                <a16:creationId xmlns:a16="http://schemas.microsoft.com/office/drawing/2014/main" id="{4CF0260E-5F15-4301-6B04-C4FB61B3726F}"/>
               </a:ext>
             </a:extLst>
           </p:cNvPr>
@@ -589,7 +972,7 @@
           <p:cNvPr id="3" name="Vertical Text Placeholder 2">
             <a:extLst>
               <a:ext uri="{FF2B5EF4-FFF2-40B4-BE49-F238E27FC236}">
-                <a16:creationId xmlns:a16="http://schemas.microsoft.com/office/drawing/2014/main" id="{3AA53ABC-936B-10C4-D701-D9792950044E}"/>
+                <a16:creationId xmlns:a16="http://schemas.microsoft.com/office/drawing/2014/main" id="{84CA2C6E-883D-1352-1D49-1330AF0A9145}"/>
               </a:ext>
             </a:extLst>
           </p:cNvPr>
@@ -652,7 +1035,7 @@
           <p:cNvPr id="4" name="Date Placeholder 3">
             <a:extLst>
               <a:ext uri="{FF2B5EF4-FFF2-40B4-BE49-F238E27FC236}">
-                <a16:creationId xmlns:a16="http://schemas.microsoft.com/office/drawing/2014/main" id="{72C98EF3-1F9A-732A-9228-821234C05150}"/>
+                <a16:creationId xmlns:a16="http://schemas.microsoft.com/office/drawing/2014/main" id="{B31C8BA1-7427-C543-6DCD-0D5CE0FF96AB}"/>
               </a:ext>
             </a:extLst>
           </p:cNvPr>
@@ -668,9 +1051,9 @@
           <a:bodyPr/>
           <a:lstStyle/>
           <a:p>
-            <a:fld id="{890F2168-053D-46F3-B710-B37CFDF6B0DF}" type="datetimeFigureOut">
+            <a:fld id="{14CC4612-9EF6-4B04-A368-185401C2C328}" type="datetime1">
               <a:rPr lang="fr-CH" smtClean="0"/>
-              <a:t>28.08.2026</a:t>
+              <a:t>06.09.2026</a:t>
             </a:fld>
             <a:endParaRPr lang="fr-CH"/>
           </a:p>
@@ -681,7 +1064,7 @@
           <p:cNvPr id="5" name="Footer Placeholder 4">
             <a:extLst>
               <a:ext uri="{FF2B5EF4-FFF2-40B4-BE49-F238E27FC236}">
-                <a16:creationId xmlns:a16="http://schemas.microsoft.com/office/drawing/2014/main" id="{171757DA-815A-9AA9-8AE1-0345BDADE666}"/>
+                <a16:creationId xmlns:a16="http://schemas.microsoft.com/office/drawing/2014/main" id="{EBB1DF18-646D-8B0A-6A88-0B2D557FAD8D}"/>
               </a:ext>
             </a:extLst>
           </p:cNvPr>
@@ -706,7 +1089,7 @@
           <p:cNvPr id="6" name="Slide Number Placeholder 5">
             <a:extLst>
               <a:ext uri="{FF2B5EF4-FFF2-40B4-BE49-F238E27FC236}">
-                <a16:creationId xmlns:a16="http://schemas.microsoft.com/office/drawing/2014/main" id="{6F52ACF0-2593-052C-92AB-D249F8B0EC13}"/>
+                <a16:creationId xmlns:a16="http://schemas.microsoft.com/office/drawing/2014/main" id="{F1479738-0A2E-F38F-9DAC-29395EED28FF}"/>
               </a:ext>
             </a:extLst>
           </p:cNvPr>
@@ -733,13 +1116,14 @@
     </p:spTree>
     <p:extLst>
       <p:ext uri="{BB962C8B-B14F-4D97-AF65-F5344CB8AC3E}">
-        <p14:creationId xmlns:p14="http://schemas.microsoft.com/office/powerpoint/2010/main" val="2746206484"/>
+        <p14:creationId xmlns:p14="http://schemas.microsoft.com/office/powerpoint/2010/main" val="2136211709"/>
       </p:ext>
     </p:extLst>
   </p:cSld>
   <p:clrMapOvr>
     <a:masterClrMapping/>
   </p:clrMapOvr>
+  <p:hf hdr="0" ftr="0" dt="0"/>
 </p:sldLayout>
 </file>
 
@@ -765,7 +1149,7 @@
           <p:cNvPr id="2" name="Title 1">
             <a:extLst>
               <a:ext uri="{FF2B5EF4-FFF2-40B4-BE49-F238E27FC236}">
-                <a16:creationId xmlns:a16="http://schemas.microsoft.com/office/drawing/2014/main" id="{47A9CF67-EBE8-0534-170B-CD4F95866D2A}"/>
+                <a16:creationId xmlns:a16="http://schemas.microsoft.com/office/drawing/2014/main" id="{A5771989-ED3F-6B39-4777-BEB6E8C73048}"/>
               </a:ext>
             </a:extLst>
           </p:cNvPr>
@@ -794,7 +1178,7 @@
           <p:cNvPr id="3" name="Content Placeholder 2">
             <a:extLst>
               <a:ext uri="{FF2B5EF4-FFF2-40B4-BE49-F238E27FC236}">
-                <a16:creationId xmlns:a16="http://schemas.microsoft.com/office/drawing/2014/main" id="{3CB557C1-6417-15E2-6C54-50EA70CF08AE}"/>
+                <a16:creationId xmlns:a16="http://schemas.microsoft.com/office/drawing/2014/main" id="{053BA919-5484-4863-6700-328738AC8CD8}"/>
               </a:ext>
             </a:extLst>
           </p:cNvPr>
@@ -852,7 +1236,7 @@
           <p:cNvPr id="4" name="Date Placeholder 3">
             <a:extLst>
               <a:ext uri="{FF2B5EF4-FFF2-40B4-BE49-F238E27FC236}">
-                <a16:creationId xmlns:a16="http://schemas.microsoft.com/office/drawing/2014/main" id="{E727AFAC-2835-55B8-52A0-D8F761A60C3B}"/>
+                <a16:creationId xmlns:a16="http://schemas.microsoft.com/office/drawing/2014/main" id="{D59A6397-4118-2E39-4399-EDE2FE2B605C}"/>
               </a:ext>
             </a:extLst>
           </p:cNvPr>
@@ -868,9 +1252,9 @@
           <a:bodyPr/>
           <a:lstStyle/>
           <a:p>
-            <a:fld id="{890F2168-053D-46F3-B710-B37CFDF6B0DF}" type="datetimeFigureOut">
+            <a:fld id="{B00C96F7-2F60-4A9F-A586-72D490FA45D0}" type="datetime1">
               <a:rPr lang="fr-CH" smtClean="0"/>
-              <a:t>28.08.2026</a:t>
+              <a:t>06.09.2026</a:t>
             </a:fld>
             <a:endParaRPr lang="fr-CH"/>
           </a:p>
@@ -881,7 +1265,7 @@
           <p:cNvPr id="5" name="Footer Placeholder 4">
             <a:extLst>
               <a:ext uri="{FF2B5EF4-FFF2-40B4-BE49-F238E27FC236}">
-                <a16:creationId xmlns:a16="http://schemas.microsoft.com/office/drawing/2014/main" id="{5F2CB1D6-FDF5-EA79-0137-ADC3767C684B}"/>
+                <a16:creationId xmlns:a16="http://schemas.microsoft.com/office/drawing/2014/main" id="{416FC59B-9FFE-2A5F-0C74-D345574AD521}"/>
               </a:ext>
             </a:extLst>
           </p:cNvPr>
@@ -906,7 +1290,7 @@
           <p:cNvPr id="6" name="Slide Number Placeholder 5">
             <a:extLst>
               <a:ext uri="{FF2B5EF4-FFF2-40B4-BE49-F238E27FC236}">
-                <a16:creationId xmlns:a16="http://schemas.microsoft.com/office/drawing/2014/main" id="{AA180781-3911-C37D-4BFB-9C77A616DCCB}"/>
+                <a16:creationId xmlns:a16="http://schemas.microsoft.com/office/drawing/2014/main" id="{31302EDF-EF51-3B2C-119C-AFAFC23A6320}"/>
               </a:ext>
             </a:extLst>
           </p:cNvPr>
@@ -933,7 +1317,7 @@
     </p:spTree>
     <p:extLst>
       <p:ext uri="{BB962C8B-B14F-4D97-AF65-F5344CB8AC3E}">
-        <p14:creationId xmlns:p14="http://schemas.microsoft.com/office/powerpoint/2010/main" val="3379349847"/>
+        <p14:creationId xmlns:p14="http://schemas.microsoft.com/office/powerpoint/2010/main" val="2854453724"/>
       </p:ext>
     </p:extLst>
   </p:cSld>
@@ -965,7 +1349,7 @@
           <p:cNvPr id="2" name="Title 1">
             <a:extLst>
               <a:ext uri="{FF2B5EF4-FFF2-40B4-BE49-F238E27FC236}">
-                <a16:creationId xmlns:a16="http://schemas.microsoft.com/office/drawing/2014/main" id="{D2FF0417-CE9C-DCFD-2DB4-D057FC35816C}"/>
+                <a16:creationId xmlns:a16="http://schemas.microsoft.com/office/drawing/2014/main" id="{54B71EA0-C1B6-1720-A799-BA1272880BBA}"/>
               </a:ext>
             </a:extLst>
           </p:cNvPr>
@@ -1003,7 +1387,7 @@
           <p:cNvPr id="3" name="Text Placeholder 2">
             <a:extLst>
               <a:ext uri="{FF2B5EF4-FFF2-40B4-BE49-F238E27FC236}">
-                <a16:creationId xmlns:a16="http://schemas.microsoft.com/office/drawing/2014/main" id="{C705F2BF-FB61-BDB9-E4D5-2AE606C65A1A}"/>
+                <a16:creationId xmlns:a16="http://schemas.microsoft.com/office/drawing/2014/main" id="{61D25794-BC3D-867B-909E-CBB0BDAC8581}"/>
               </a:ext>
             </a:extLst>
           </p:cNvPr>
@@ -1128,7 +1512,7 @@
           <p:cNvPr id="4" name="Date Placeholder 3">
             <a:extLst>
               <a:ext uri="{FF2B5EF4-FFF2-40B4-BE49-F238E27FC236}">
-                <a16:creationId xmlns:a16="http://schemas.microsoft.com/office/drawing/2014/main" id="{BDC12F90-0CE3-A85E-DA86-5AD15AAA101F}"/>
+                <a16:creationId xmlns:a16="http://schemas.microsoft.com/office/drawing/2014/main" id="{87870935-260E-9C3B-0A75-AFF148867DF4}"/>
               </a:ext>
             </a:extLst>
           </p:cNvPr>
@@ -1144,9 +1528,9 @@
           <a:bodyPr/>
           <a:lstStyle/>
           <a:p>
-            <a:fld id="{890F2168-053D-46F3-B710-B37CFDF6B0DF}" type="datetimeFigureOut">
+            <a:fld id="{14CC4612-9EF6-4B04-A368-185401C2C328}" type="datetime1">
               <a:rPr lang="fr-CH" smtClean="0"/>
-              <a:t>28.08.2026</a:t>
+              <a:t>06.09.2026</a:t>
             </a:fld>
             <a:endParaRPr lang="fr-CH"/>
           </a:p>
@@ -1157,7 +1541,7 @@
           <p:cNvPr id="5" name="Footer Placeholder 4">
             <a:extLst>
               <a:ext uri="{FF2B5EF4-FFF2-40B4-BE49-F238E27FC236}">
-                <a16:creationId xmlns:a16="http://schemas.microsoft.com/office/drawing/2014/main" id="{0A991CF0-6D4C-275F-DC96-E0E20B569A88}"/>
+                <a16:creationId xmlns:a16="http://schemas.microsoft.com/office/drawing/2014/main" id="{0B53D519-08A9-43EA-E370-0EFD62D95DC1}"/>
               </a:ext>
             </a:extLst>
           </p:cNvPr>
@@ -1182,7 +1566,7 @@
           <p:cNvPr id="6" name="Slide Number Placeholder 5">
             <a:extLst>
               <a:ext uri="{FF2B5EF4-FFF2-40B4-BE49-F238E27FC236}">
-                <a16:creationId xmlns:a16="http://schemas.microsoft.com/office/drawing/2014/main" id="{1B44FD71-1EEB-17F9-71B1-2A1AB7B32D93}"/>
+                <a16:creationId xmlns:a16="http://schemas.microsoft.com/office/drawing/2014/main" id="{41A80460-C264-3A16-0D74-4AF02FC7F40D}"/>
               </a:ext>
             </a:extLst>
           </p:cNvPr>
@@ -1209,13 +1593,14 @@
     </p:spTree>
     <p:extLst>
       <p:ext uri="{BB962C8B-B14F-4D97-AF65-F5344CB8AC3E}">
-        <p14:creationId xmlns:p14="http://schemas.microsoft.com/office/powerpoint/2010/main" val="1161663660"/>
+        <p14:creationId xmlns:p14="http://schemas.microsoft.com/office/powerpoint/2010/main" val="770270337"/>
       </p:ext>
     </p:extLst>
   </p:cSld>
   <p:clrMapOvr>
     <a:masterClrMapping/>
   </p:clrMapOvr>
+  <p:hf hdr="0" ftr="0" dt="0"/>
 </p:sldLayout>
 </file>
 
@@ -1241,7 +1626,7 @@
           <p:cNvPr id="2" name="Title 1">
             <a:extLst>
               <a:ext uri="{FF2B5EF4-FFF2-40B4-BE49-F238E27FC236}">
-                <a16:creationId xmlns:a16="http://schemas.microsoft.com/office/drawing/2014/main" id="{23177775-193B-5AFF-DCB9-481EA32E3A9D}"/>
+                <a16:creationId xmlns:a16="http://schemas.microsoft.com/office/drawing/2014/main" id="{D706EB34-0CF2-1A0C-B009-FB4503C85B2A}"/>
               </a:ext>
             </a:extLst>
           </p:cNvPr>
@@ -1270,7 +1655,7 @@
           <p:cNvPr id="3" name="Content Placeholder 2">
             <a:extLst>
               <a:ext uri="{FF2B5EF4-FFF2-40B4-BE49-F238E27FC236}">
-                <a16:creationId xmlns:a16="http://schemas.microsoft.com/office/drawing/2014/main" id="{5747B83F-E4CA-4602-1EAF-E2ECC2ED1BB5}"/>
+                <a16:creationId xmlns:a16="http://schemas.microsoft.com/office/drawing/2014/main" id="{8B9AC426-F0B7-43FD-73D7-55C0E63CD574}"/>
               </a:ext>
             </a:extLst>
           </p:cNvPr>
@@ -1333,7 +1718,7 @@
           <p:cNvPr id="4" name="Content Placeholder 3">
             <a:extLst>
               <a:ext uri="{FF2B5EF4-FFF2-40B4-BE49-F238E27FC236}">
-                <a16:creationId xmlns:a16="http://schemas.microsoft.com/office/drawing/2014/main" id="{DA9071DF-66DC-30AC-BBD6-97A6ED8C142C}"/>
+                <a16:creationId xmlns:a16="http://schemas.microsoft.com/office/drawing/2014/main" id="{10CDDD91-56E1-EF47-5790-F5270FC5B1A2}"/>
               </a:ext>
             </a:extLst>
           </p:cNvPr>
@@ -1396,7 +1781,7 @@
           <p:cNvPr id="5" name="Date Placeholder 4">
             <a:extLst>
               <a:ext uri="{FF2B5EF4-FFF2-40B4-BE49-F238E27FC236}">
-                <a16:creationId xmlns:a16="http://schemas.microsoft.com/office/drawing/2014/main" id="{F8963E46-65D5-F883-8CC9-27BCE2B82C96}"/>
+                <a16:creationId xmlns:a16="http://schemas.microsoft.com/office/drawing/2014/main" id="{846545B2-47DA-7C2B-6F40-8B344D926FF3}"/>
               </a:ext>
             </a:extLst>
           </p:cNvPr>
@@ -1412,9 +1797,9 @@
           <a:bodyPr/>
           <a:lstStyle/>
           <a:p>
-            <a:fld id="{890F2168-053D-46F3-B710-B37CFDF6B0DF}" type="datetimeFigureOut">
+            <a:fld id="{14CC4612-9EF6-4B04-A368-185401C2C328}" type="datetime1">
               <a:rPr lang="fr-CH" smtClean="0"/>
-              <a:t>28.08.2026</a:t>
+              <a:t>06.09.2026</a:t>
             </a:fld>
             <a:endParaRPr lang="fr-CH"/>
           </a:p>
@@ -1425,7 +1810,7 @@
           <p:cNvPr id="6" name="Footer Placeholder 5">
             <a:extLst>
               <a:ext uri="{FF2B5EF4-FFF2-40B4-BE49-F238E27FC236}">
-                <a16:creationId xmlns:a16="http://schemas.microsoft.com/office/drawing/2014/main" id="{2377BA93-88B6-E966-7F81-A45DBFC7BF91}"/>
+                <a16:creationId xmlns:a16="http://schemas.microsoft.com/office/drawing/2014/main" id="{D68B9A8C-10A0-11D6-B705-8B2DB87002AE}"/>
               </a:ext>
             </a:extLst>
           </p:cNvPr>
@@ -1450,7 +1835,7 @@
           <p:cNvPr id="7" name="Slide Number Placeholder 6">
             <a:extLst>
               <a:ext uri="{FF2B5EF4-FFF2-40B4-BE49-F238E27FC236}">
-                <a16:creationId xmlns:a16="http://schemas.microsoft.com/office/drawing/2014/main" id="{0805C479-D4DD-27B3-4F0D-B4B5E582F341}"/>
+                <a16:creationId xmlns:a16="http://schemas.microsoft.com/office/drawing/2014/main" id="{BB071D17-2709-6767-EB91-D24D92D2BEB4}"/>
               </a:ext>
             </a:extLst>
           </p:cNvPr>
@@ -1477,13 +1862,14 @@
     </p:spTree>
     <p:extLst>
       <p:ext uri="{BB962C8B-B14F-4D97-AF65-F5344CB8AC3E}">
-        <p14:creationId xmlns:p14="http://schemas.microsoft.com/office/powerpoint/2010/main" val="2829203461"/>
+        <p14:creationId xmlns:p14="http://schemas.microsoft.com/office/powerpoint/2010/main" val="3801722526"/>
       </p:ext>
     </p:extLst>
   </p:cSld>
   <p:clrMapOvr>
     <a:masterClrMapping/>
   </p:clrMapOvr>
+  <p:hf hdr="0" ftr="0" dt="0"/>
 </p:sldLayout>
 </file>
 
@@ -1509,7 +1895,7 @@
           <p:cNvPr id="2" name="Title 1">
             <a:extLst>
               <a:ext uri="{FF2B5EF4-FFF2-40B4-BE49-F238E27FC236}">
-                <a16:creationId xmlns:a16="http://schemas.microsoft.com/office/drawing/2014/main" id="{DF3A184F-4630-B93F-8952-562BA2B76EBE}"/>
+                <a16:creationId xmlns:a16="http://schemas.microsoft.com/office/drawing/2014/main" id="{81706FDA-7174-5E86-DCCE-A670D3E4D413}"/>
               </a:ext>
             </a:extLst>
           </p:cNvPr>
@@ -1543,7 +1929,7 @@
           <p:cNvPr id="3" name="Text Placeholder 2">
             <a:extLst>
               <a:ext uri="{FF2B5EF4-FFF2-40B4-BE49-F238E27FC236}">
-                <a16:creationId xmlns:a16="http://schemas.microsoft.com/office/drawing/2014/main" id="{164A4FBC-5C2A-B4E3-3011-B4E3D8D86F07}"/>
+                <a16:creationId xmlns:a16="http://schemas.microsoft.com/office/drawing/2014/main" id="{4B713595-D9E5-EBE2-F0DC-0EF1BF13EC78}"/>
               </a:ext>
             </a:extLst>
           </p:cNvPr>
@@ -1614,7 +2000,7 @@
           <p:cNvPr id="4" name="Content Placeholder 3">
             <a:extLst>
               <a:ext uri="{FF2B5EF4-FFF2-40B4-BE49-F238E27FC236}">
-                <a16:creationId xmlns:a16="http://schemas.microsoft.com/office/drawing/2014/main" id="{0D0E1713-79CE-6622-8E67-2D330E84FD27}"/>
+                <a16:creationId xmlns:a16="http://schemas.microsoft.com/office/drawing/2014/main" id="{A0EF8F41-C6AB-C771-6653-916D9186D88F}"/>
               </a:ext>
             </a:extLst>
           </p:cNvPr>
@@ -1677,7 +2063,7 @@
           <p:cNvPr id="5" name="Text Placeholder 4">
             <a:extLst>
               <a:ext uri="{FF2B5EF4-FFF2-40B4-BE49-F238E27FC236}">
-                <a16:creationId xmlns:a16="http://schemas.microsoft.com/office/drawing/2014/main" id="{12BDCB7F-5EE6-0DA4-201C-B87D47EAF9B3}"/>
+                <a16:creationId xmlns:a16="http://schemas.microsoft.com/office/drawing/2014/main" id="{EC20976E-3DB9-D82C-33FA-03A4FF7FDF0C}"/>
               </a:ext>
             </a:extLst>
           </p:cNvPr>
@@ -1748,7 +2134,7 @@
           <p:cNvPr id="6" name="Content Placeholder 5">
             <a:extLst>
               <a:ext uri="{FF2B5EF4-FFF2-40B4-BE49-F238E27FC236}">
-                <a16:creationId xmlns:a16="http://schemas.microsoft.com/office/drawing/2014/main" id="{E1668D31-950B-3A0F-48AE-D9E53501FC45}"/>
+                <a16:creationId xmlns:a16="http://schemas.microsoft.com/office/drawing/2014/main" id="{4EA523E7-E6C3-8637-4F51-914A7E3EDEEC}"/>
               </a:ext>
             </a:extLst>
           </p:cNvPr>
@@ -1811,7 +2197,7 @@
           <p:cNvPr id="7" name="Date Placeholder 6">
             <a:extLst>
               <a:ext uri="{FF2B5EF4-FFF2-40B4-BE49-F238E27FC236}">
-                <a16:creationId xmlns:a16="http://schemas.microsoft.com/office/drawing/2014/main" id="{CA64AE47-4122-5EA9-9806-3DD6068FE266}"/>
+                <a16:creationId xmlns:a16="http://schemas.microsoft.com/office/drawing/2014/main" id="{09D494D8-B672-8FFB-FB9F-41A12C8C06E2}"/>
               </a:ext>
             </a:extLst>
           </p:cNvPr>
@@ -1827,9 +2213,9 @@
           <a:bodyPr/>
           <a:lstStyle/>
           <a:p>
-            <a:fld id="{890F2168-053D-46F3-B710-B37CFDF6B0DF}" type="datetimeFigureOut">
+            <a:fld id="{14CC4612-9EF6-4B04-A368-185401C2C328}" type="datetime1">
               <a:rPr lang="fr-CH" smtClean="0"/>
-              <a:t>28.08.2026</a:t>
+              <a:t>06.09.2026</a:t>
             </a:fld>
             <a:endParaRPr lang="fr-CH"/>
           </a:p>
@@ -1840,7 +2226,7 @@
           <p:cNvPr id="8" name="Footer Placeholder 7">
             <a:extLst>
               <a:ext uri="{FF2B5EF4-FFF2-40B4-BE49-F238E27FC236}">
-                <a16:creationId xmlns:a16="http://schemas.microsoft.com/office/drawing/2014/main" id="{839F3069-6D69-AA66-6790-9BC8A52B680F}"/>
+                <a16:creationId xmlns:a16="http://schemas.microsoft.com/office/drawing/2014/main" id="{E25F2003-2640-4A01-E629-73E366F3E8BD}"/>
               </a:ext>
             </a:extLst>
           </p:cNvPr>
@@ -1865,7 +2251,7 @@
           <p:cNvPr id="9" name="Slide Number Placeholder 8">
             <a:extLst>
               <a:ext uri="{FF2B5EF4-FFF2-40B4-BE49-F238E27FC236}">
-                <a16:creationId xmlns:a16="http://schemas.microsoft.com/office/drawing/2014/main" id="{61D81368-DD2E-AC68-26B6-4BFCC92C9DAA}"/>
+                <a16:creationId xmlns:a16="http://schemas.microsoft.com/office/drawing/2014/main" id="{696E9B90-0CE5-4EED-2CAE-F81BD5656696}"/>
               </a:ext>
             </a:extLst>
           </p:cNvPr>
@@ -1892,13 +2278,14 @@
     </p:spTree>
     <p:extLst>
       <p:ext uri="{BB962C8B-B14F-4D97-AF65-F5344CB8AC3E}">
-        <p14:creationId xmlns:p14="http://schemas.microsoft.com/office/powerpoint/2010/main" val="2092825706"/>
+        <p14:creationId xmlns:p14="http://schemas.microsoft.com/office/powerpoint/2010/main" val="56077604"/>
       </p:ext>
     </p:extLst>
   </p:cSld>
   <p:clrMapOvr>
     <a:masterClrMapping/>
   </p:clrMapOvr>
+  <p:hf hdr="0" ftr="0" dt="0"/>
 </p:sldLayout>
 </file>
 
@@ -1924,7 +2311,7 @@
           <p:cNvPr id="2" name="Title 1">
             <a:extLst>
               <a:ext uri="{FF2B5EF4-FFF2-40B4-BE49-F238E27FC236}">
-                <a16:creationId xmlns:a16="http://schemas.microsoft.com/office/drawing/2014/main" id="{C9823E95-7AFD-29EF-FC7F-3D110E90B76A}"/>
+                <a16:creationId xmlns:a16="http://schemas.microsoft.com/office/drawing/2014/main" id="{02643EC2-9641-04DE-2C1E-85A6616B5231}"/>
               </a:ext>
             </a:extLst>
           </p:cNvPr>
@@ -1953,7 +2340,7 @@
           <p:cNvPr id="3" name="Date Placeholder 2">
             <a:extLst>
               <a:ext uri="{FF2B5EF4-FFF2-40B4-BE49-F238E27FC236}">
-                <a16:creationId xmlns:a16="http://schemas.microsoft.com/office/drawing/2014/main" id="{F8027324-5010-55F3-1732-734C346AD2BE}"/>
+                <a16:creationId xmlns:a16="http://schemas.microsoft.com/office/drawing/2014/main" id="{78597638-9DE4-68CB-6965-1B481B536C6B}"/>
               </a:ext>
             </a:extLst>
           </p:cNvPr>
@@ -1969,9 +2356,9 @@
           <a:bodyPr/>
           <a:lstStyle/>
           <a:p>
-            <a:fld id="{890F2168-053D-46F3-B710-B37CFDF6B0DF}" type="datetimeFigureOut">
+            <a:fld id="{14CC4612-9EF6-4B04-A368-185401C2C328}" type="datetime1">
               <a:rPr lang="fr-CH" smtClean="0"/>
-              <a:t>28.08.2026</a:t>
+              <a:t>06.09.2026</a:t>
             </a:fld>
             <a:endParaRPr lang="fr-CH"/>
           </a:p>
@@ -1982,7 +2369,7 @@
           <p:cNvPr id="4" name="Footer Placeholder 3">
             <a:extLst>
               <a:ext uri="{FF2B5EF4-FFF2-40B4-BE49-F238E27FC236}">
-                <a16:creationId xmlns:a16="http://schemas.microsoft.com/office/drawing/2014/main" id="{0D67B4BD-2611-FEDF-B726-6568D22149AB}"/>
+                <a16:creationId xmlns:a16="http://schemas.microsoft.com/office/drawing/2014/main" id="{AD589D38-BCA3-84BF-085C-18A8E76CFE08}"/>
               </a:ext>
             </a:extLst>
           </p:cNvPr>
@@ -2007,7 +2394,7 @@
           <p:cNvPr id="5" name="Slide Number Placeholder 4">
             <a:extLst>
               <a:ext uri="{FF2B5EF4-FFF2-40B4-BE49-F238E27FC236}">
-                <a16:creationId xmlns:a16="http://schemas.microsoft.com/office/drawing/2014/main" id="{DC0A4813-5E50-4B05-DC77-A7572C43BE32}"/>
+                <a16:creationId xmlns:a16="http://schemas.microsoft.com/office/drawing/2014/main" id="{4799ABB2-223B-C99F-AEBC-1B31DBF8BC36}"/>
               </a:ext>
             </a:extLst>
           </p:cNvPr>
@@ -2034,13 +2421,14 @@
     </p:spTree>
     <p:extLst>
       <p:ext uri="{BB962C8B-B14F-4D97-AF65-F5344CB8AC3E}">
-        <p14:creationId xmlns:p14="http://schemas.microsoft.com/office/powerpoint/2010/main" val="1055458203"/>
+        <p14:creationId xmlns:p14="http://schemas.microsoft.com/office/powerpoint/2010/main" val="809054982"/>
       </p:ext>
     </p:extLst>
   </p:cSld>
   <p:clrMapOvr>
     <a:masterClrMapping/>
   </p:clrMapOvr>
+  <p:hf hdr="0" ftr="0" dt="0"/>
 </p:sldLayout>
 </file>
 
@@ -2066,7 +2454,7 @@
           <p:cNvPr id="2" name="Date Placeholder 1">
             <a:extLst>
               <a:ext uri="{FF2B5EF4-FFF2-40B4-BE49-F238E27FC236}">
-                <a16:creationId xmlns:a16="http://schemas.microsoft.com/office/drawing/2014/main" id="{A9237615-B6DA-65AE-113A-1BA6204DD262}"/>
+                <a16:creationId xmlns:a16="http://schemas.microsoft.com/office/drawing/2014/main" id="{559F4673-80F9-88C5-DBC3-15B75D3215DA}"/>
               </a:ext>
             </a:extLst>
           </p:cNvPr>
@@ -2082,9 +2470,9 @@
           <a:bodyPr/>
           <a:lstStyle/>
           <a:p>
-            <a:fld id="{890F2168-053D-46F3-B710-B37CFDF6B0DF}" type="datetimeFigureOut">
+            <a:fld id="{14CC4612-9EF6-4B04-A368-185401C2C328}" type="datetime1">
               <a:rPr lang="fr-CH" smtClean="0"/>
-              <a:t>28.08.2026</a:t>
+              <a:t>06.09.2026</a:t>
             </a:fld>
             <a:endParaRPr lang="fr-CH"/>
           </a:p>
@@ -2095,7 +2483,7 @@
           <p:cNvPr id="3" name="Footer Placeholder 2">
             <a:extLst>
               <a:ext uri="{FF2B5EF4-FFF2-40B4-BE49-F238E27FC236}">
-                <a16:creationId xmlns:a16="http://schemas.microsoft.com/office/drawing/2014/main" id="{E8519980-164C-17AE-CDBF-3EC05F504B41}"/>
+                <a16:creationId xmlns:a16="http://schemas.microsoft.com/office/drawing/2014/main" id="{A0BE5DDE-9B2E-F30D-6207-72D2DE1713B2}"/>
               </a:ext>
             </a:extLst>
           </p:cNvPr>
@@ -2120,7 +2508,7 @@
           <p:cNvPr id="4" name="Slide Number Placeholder 3">
             <a:extLst>
               <a:ext uri="{FF2B5EF4-FFF2-40B4-BE49-F238E27FC236}">
-                <a16:creationId xmlns:a16="http://schemas.microsoft.com/office/drawing/2014/main" id="{AA39F078-AA06-4422-66E5-803CA03071AC}"/>
+                <a16:creationId xmlns:a16="http://schemas.microsoft.com/office/drawing/2014/main" id="{456BF931-5BDE-F60A-B944-7AE9AD7393BA}"/>
               </a:ext>
             </a:extLst>
           </p:cNvPr>
@@ -2147,13 +2535,14 @@
     </p:spTree>
     <p:extLst>
       <p:ext uri="{BB962C8B-B14F-4D97-AF65-F5344CB8AC3E}">
-        <p14:creationId xmlns:p14="http://schemas.microsoft.com/office/powerpoint/2010/main" val="1393123421"/>
+        <p14:creationId xmlns:p14="http://schemas.microsoft.com/office/powerpoint/2010/main" val="1246363286"/>
       </p:ext>
     </p:extLst>
   </p:cSld>
   <p:clrMapOvr>
     <a:masterClrMapping/>
   </p:clrMapOvr>
+  <p:hf hdr="0" ftr="0" dt="0"/>
 </p:sldLayout>
 </file>
 
@@ -2179,7 +2568,7 @@
           <p:cNvPr id="2" name="Title 1">
             <a:extLst>
               <a:ext uri="{FF2B5EF4-FFF2-40B4-BE49-F238E27FC236}">
-                <a16:creationId xmlns:a16="http://schemas.microsoft.com/office/drawing/2014/main" id="{8A2E1322-2E2A-A8D1-E164-71A7AEE3A9CF}"/>
+                <a16:creationId xmlns:a16="http://schemas.microsoft.com/office/drawing/2014/main" id="{3C0BB233-F318-5C0E-F841-01335983711B}"/>
               </a:ext>
             </a:extLst>
           </p:cNvPr>
@@ -2217,7 +2606,7 @@
           <p:cNvPr id="3" name="Content Placeholder 2">
             <a:extLst>
               <a:ext uri="{FF2B5EF4-FFF2-40B4-BE49-F238E27FC236}">
-                <a16:creationId xmlns:a16="http://schemas.microsoft.com/office/drawing/2014/main" id="{72A645AD-17C2-3E4D-5624-4B53DF546B69}"/>
+                <a16:creationId xmlns:a16="http://schemas.microsoft.com/office/drawing/2014/main" id="{9D89042F-4989-4888-3A24-C1861A35744F}"/>
               </a:ext>
             </a:extLst>
           </p:cNvPr>
@@ -2308,7 +2697,7 @@
           <p:cNvPr id="4" name="Text Placeholder 3">
             <a:extLst>
               <a:ext uri="{FF2B5EF4-FFF2-40B4-BE49-F238E27FC236}">
-                <a16:creationId xmlns:a16="http://schemas.microsoft.com/office/drawing/2014/main" id="{B4440A95-AE7A-C1F1-EE7D-099FAE6C5B31}"/>
+                <a16:creationId xmlns:a16="http://schemas.microsoft.com/office/drawing/2014/main" id="{94B5DC54-DA9A-63B0-D4F3-5A70A7B2A8E1}"/>
               </a:ext>
             </a:extLst>
           </p:cNvPr>
@@ -2379,7 +2768,7 @@
           <p:cNvPr id="5" name="Date Placeholder 4">
             <a:extLst>
               <a:ext uri="{FF2B5EF4-FFF2-40B4-BE49-F238E27FC236}">
-                <a16:creationId xmlns:a16="http://schemas.microsoft.com/office/drawing/2014/main" id="{77A73EE3-DC53-3FA8-A215-B2D59853632E}"/>
+                <a16:creationId xmlns:a16="http://schemas.microsoft.com/office/drawing/2014/main" id="{F7C259B4-7B7B-0085-7C73-A845E2D93C35}"/>
               </a:ext>
             </a:extLst>
           </p:cNvPr>
@@ -2395,9 +2784,9 @@
           <a:bodyPr/>
           <a:lstStyle/>
           <a:p>
-            <a:fld id="{890F2168-053D-46F3-B710-B37CFDF6B0DF}" type="datetimeFigureOut">
+            <a:fld id="{14CC4612-9EF6-4B04-A368-185401C2C328}" type="datetime1">
               <a:rPr lang="fr-CH" smtClean="0"/>
-              <a:t>28.08.2026</a:t>
+              <a:t>06.09.2026</a:t>
             </a:fld>
             <a:endParaRPr lang="fr-CH"/>
           </a:p>
@@ -2408,7 +2797,7 @@
           <p:cNvPr id="6" name="Footer Placeholder 5">
             <a:extLst>
               <a:ext uri="{FF2B5EF4-FFF2-40B4-BE49-F238E27FC236}">
-                <a16:creationId xmlns:a16="http://schemas.microsoft.com/office/drawing/2014/main" id="{E9CAE87F-2EB8-F862-1AD8-EA3F36412748}"/>
+                <a16:creationId xmlns:a16="http://schemas.microsoft.com/office/drawing/2014/main" id="{B6FD6EF9-5820-10BC-D798-C8CCEC83D0AF}"/>
               </a:ext>
             </a:extLst>
           </p:cNvPr>
@@ -2433,7 +2822,7 @@
           <p:cNvPr id="7" name="Slide Number Placeholder 6">
             <a:extLst>
               <a:ext uri="{FF2B5EF4-FFF2-40B4-BE49-F238E27FC236}">
-                <a16:creationId xmlns:a16="http://schemas.microsoft.com/office/drawing/2014/main" id="{77151F6C-BE07-D249-C808-D9DFAAEF6E63}"/>
+                <a16:creationId xmlns:a16="http://schemas.microsoft.com/office/drawing/2014/main" id="{E1F0E150-816C-8421-E1EE-97B8C5161A2C}"/>
               </a:ext>
             </a:extLst>
           </p:cNvPr>
@@ -2460,13 +2849,14 @@
     </p:spTree>
     <p:extLst>
       <p:ext uri="{BB962C8B-B14F-4D97-AF65-F5344CB8AC3E}">
-        <p14:creationId xmlns:p14="http://schemas.microsoft.com/office/powerpoint/2010/main" val="2061020996"/>
+        <p14:creationId xmlns:p14="http://schemas.microsoft.com/office/powerpoint/2010/main" val="1448586433"/>
       </p:ext>
     </p:extLst>
   </p:cSld>
   <p:clrMapOvr>
     <a:masterClrMapping/>
   </p:clrMapOvr>
+  <p:hf hdr="0" ftr="0" dt="0"/>
 </p:sldLayout>
 </file>
 
@@ -2492,7 +2882,7 @@
           <p:cNvPr id="2" name="Title 1">
             <a:extLst>
               <a:ext uri="{FF2B5EF4-FFF2-40B4-BE49-F238E27FC236}">
-                <a16:creationId xmlns:a16="http://schemas.microsoft.com/office/drawing/2014/main" id="{B99B9ECA-956F-C77B-2C02-782C8329F385}"/>
+                <a16:creationId xmlns:a16="http://schemas.microsoft.com/office/drawing/2014/main" id="{C3005728-1878-53D9-D960-C1B0774CE859}"/>
               </a:ext>
             </a:extLst>
           </p:cNvPr>
@@ -2530,7 +2920,7 @@
           <p:cNvPr id="3" name="Picture Placeholder 2">
             <a:extLst>
               <a:ext uri="{FF2B5EF4-FFF2-40B4-BE49-F238E27FC236}">
-                <a16:creationId xmlns:a16="http://schemas.microsoft.com/office/drawing/2014/main" id="{A1C13F42-9A7B-AD97-021A-D3034E8B147F}"/>
+                <a16:creationId xmlns:a16="http://schemas.microsoft.com/office/drawing/2014/main" id="{913CA4E1-744C-D2EF-FFFA-0F5C0A95C547}"/>
               </a:ext>
             </a:extLst>
           </p:cNvPr>
@@ -2597,7 +2987,7 @@
           <p:cNvPr id="4" name="Text Placeholder 3">
             <a:extLst>
               <a:ext uri="{FF2B5EF4-FFF2-40B4-BE49-F238E27FC236}">
-                <a16:creationId xmlns:a16="http://schemas.microsoft.com/office/drawing/2014/main" id="{847A448C-9230-78E7-8C50-2BF3FB02A5E5}"/>
+                <a16:creationId xmlns:a16="http://schemas.microsoft.com/office/drawing/2014/main" id="{1EA588D7-1F0B-7060-C0E9-D6381CE03579}"/>
               </a:ext>
             </a:extLst>
           </p:cNvPr>
@@ -2668,7 +3058,7 @@
           <p:cNvPr id="5" name="Date Placeholder 4">
             <a:extLst>
               <a:ext uri="{FF2B5EF4-FFF2-40B4-BE49-F238E27FC236}">
-                <a16:creationId xmlns:a16="http://schemas.microsoft.com/office/drawing/2014/main" id="{268D9F51-E5BC-6A53-E882-09D495E0BC81}"/>
+                <a16:creationId xmlns:a16="http://schemas.microsoft.com/office/drawing/2014/main" id="{B581EB4D-C399-4BB0-3C4F-EE43DC264D13}"/>
               </a:ext>
             </a:extLst>
           </p:cNvPr>
@@ -2684,9 +3074,9 @@
           <a:bodyPr/>
           <a:lstStyle/>
           <a:p>
-            <a:fld id="{890F2168-053D-46F3-B710-B37CFDF6B0DF}" type="datetimeFigureOut">
+            <a:fld id="{14CC4612-9EF6-4B04-A368-185401C2C328}" type="datetime1">
               <a:rPr lang="fr-CH" smtClean="0"/>
-              <a:t>28.08.2026</a:t>
+              <a:t>06.09.2026</a:t>
             </a:fld>
             <a:endParaRPr lang="fr-CH"/>
           </a:p>
@@ -2697,7 +3087,7 @@
           <p:cNvPr id="6" name="Footer Placeholder 5">
             <a:extLst>
               <a:ext uri="{FF2B5EF4-FFF2-40B4-BE49-F238E27FC236}">
-                <a16:creationId xmlns:a16="http://schemas.microsoft.com/office/drawing/2014/main" id="{43C2F128-AD24-A833-DB02-3BC3E2116435}"/>
+                <a16:creationId xmlns:a16="http://schemas.microsoft.com/office/drawing/2014/main" id="{10DFA6B0-6801-DB79-1FED-669ADD16AA45}"/>
               </a:ext>
             </a:extLst>
           </p:cNvPr>
@@ -2722,7 +3112,7 @@
           <p:cNvPr id="7" name="Slide Number Placeholder 6">
             <a:extLst>
               <a:ext uri="{FF2B5EF4-FFF2-40B4-BE49-F238E27FC236}">
-                <a16:creationId xmlns:a16="http://schemas.microsoft.com/office/drawing/2014/main" id="{DDB7E6A0-0D27-5595-6821-513E8BEA7FA7}"/>
+                <a16:creationId xmlns:a16="http://schemas.microsoft.com/office/drawing/2014/main" id="{CDC8AD56-2180-7E36-6EE8-AFBBD5C6DEE4}"/>
               </a:ext>
             </a:extLst>
           </p:cNvPr>
@@ -2749,13 +3139,14 @@
     </p:spTree>
     <p:extLst>
       <p:ext uri="{BB962C8B-B14F-4D97-AF65-F5344CB8AC3E}">
-        <p14:creationId xmlns:p14="http://schemas.microsoft.com/office/powerpoint/2010/main" val="2197494518"/>
+        <p14:creationId xmlns:p14="http://schemas.microsoft.com/office/powerpoint/2010/main" val="1954388692"/>
       </p:ext>
     </p:extLst>
   </p:cSld>
   <p:clrMapOvr>
     <a:masterClrMapping/>
   </p:clrMapOvr>
+  <p:hf hdr="0" ftr="0" dt="0"/>
 </p:sldLayout>
 </file>
 
@@ -2786,7 +3177,7 @@
           <p:cNvPr id="2" name="Title Placeholder 1">
             <a:extLst>
               <a:ext uri="{FF2B5EF4-FFF2-40B4-BE49-F238E27FC236}">
-                <a16:creationId xmlns:a16="http://schemas.microsoft.com/office/drawing/2014/main" id="{BD556559-1579-6F90-EBB5-93246B897D28}"/>
+                <a16:creationId xmlns:a16="http://schemas.microsoft.com/office/drawing/2014/main" id="{FD620DD9-DE91-72BB-7E5E-8F84D63BBAAD}"/>
               </a:ext>
             </a:extLst>
           </p:cNvPr>
@@ -2825,7 +3216,7 @@
           <p:cNvPr id="3" name="Text Placeholder 2">
             <a:extLst>
               <a:ext uri="{FF2B5EF4-FFF2-40B4-BE49-F238E27FC236}">
-                <a16:creationId xmlns:a16="http://schemas.microsoft.com/office/drawing/2014/main" id="{3A6A379E-E9DC-07E2-2C5C-35F8350ABDE2}"/>
+                <a16:creationId xmlns:a16="http://schemas.microsoft.com/office/drawing/2014/main" id="{E6462762-CB9D-210C-FDF6-3A076ED0B403}"/>
               </a:ext>
             </a:extLst>
           </p:cNvPr>
@@ -2893,7 +3284,7 @@
           <p:cNvPr id="4" name="Date Placeholder 3">
             <a:extLst>
               <a:ext uri="{FF2B5EF4-FFF2-40B4-BE49-F238E27FC236}">
-                <a16:creationId xmlns:a16="http://schemas.microsoft.com/office/drawing/2014/main" id="{84958212-B871-CAEF-E8B2-56FC929AFBF5}"/>
+                <a16:creationId xmlns:a16="http://schemas.microsoft.com/office/drawing/2014/main" id="{7657641A-465F-474D-0D3D-15D4CA7C91FA}"/>
               </a:ext>
             </a:extLst>
           </p:cNvPr>
@@ -2927,9 +3318,9 @@
             </a:lvl1pPr>
           </a:lstStyle>
           <a:p>
-            <a:fld id="{890F2168-053D-46F3-B710-B37CFDF6B0DF}" type="datetimeFigureOut">
+            <a:fld id="{14CC4612-9EF6-4B04-A368-185401C2C328}" type="datetime1">
               <a:rPr lang="fr-CH" smtClean="0"/>
-              <a:t>28.08.2026</a:t>
+              <a:t>06.09.2026</a:t>
             </a:fld>
             <a:endParaRPr lang="fr-CH"/>
           </a:p>
@@ -2940,7 +3331,7 @@
           <p:cNvPr id="5" name="Footer Placeholder 4">
             <a:extLst>
               <a:ext uri="{FF2B5EF4-FFF2-40B4-BE49-F238E27FC236}">
-                <a16:creationId xmlns:a16="http://schemas.microsoft.com/office/drawing/2014/main" id="{1F786798-8DDE-599D-F161-852035C31ED9}"/>
+                <a16:creationId xmlns:a16="http://schemas.microsoft.com/office/drawing/2014/main" id="{A674FB3C-F293-6636-3CEC-E8B3ECC6D31C}"/>
               </a:ext>
             </a:extLst>
           </p:cNvPr>
@@ -2983,7 +3374,7 @@
           <p:cNvPr id="6" name="Slide Number Placeholder 5">
             <a:extLst>
               <a:ext uri="{FF2B5EF4-FFF2-40B4-BE49-F238E27FC236}">
-                <a16:creationId xmlns:a16="http://schemas.microsoft.com/office/drawing/2014/main" id="{DA1AD2BF-1850-FF89-24A3-FA57F4ADDEC0}"/>
+                <a16:creationId xmlns:a16="http://schemas.microsoft.com/office/drawing/2014/main" id="{C45713D6-692E-301D-24B5-6017B1888D1D}"/>
               </a:ext>
             </a:extLst>
           </p:cNvPr>
@@ -3028,24 +3419,25 @@
     </p:spTree>
     <p:extLst>
       <p:ext uri="{BB962C8B-B14F-4D97-AF65-F5344CB8AC3E}">
-        <p14:creationId xmlns:p14="http://schemas.microsoft.com/office/powerpoint/2010/main" val="84793795"/>
+        <p14:creationId xmlns:p14="http://schemas.microsoft.com/office/powerpoint/2010/main" val="2604032912"/>
       </p:ext>
     </p:extLst>
   </p:cSld>
   <p:clrMap bg1="lt1" tx1="dk1" bg2="lt2" tx2="dk2" accent1="accent1" accent2="accent2" accent3="accent3" accent4="accent4" accent5="accent5" accent6="accent6" hlink="hlink" folHlink="folHlink"/>
   <p:sldLayoutIdLst>
-    <p:sldLayoutId id="2147483649" r:id="rId1"/>
-    <p:sldLayoutId id="2147483650" r:id="rId2"/>
-    <p:sldLayoutId id="2147483651" r:id="rId3"/>
-    <p:sldLayoutId id="2147483652" r:id="rId4"/>
-    <p:sldLayoutId id="2147483653" r:id="rId5"/>
-    <p:sldLayoutId id="2147483654" r:id="rId6"/>
-    <p:sldLayoutId id="2147483655" r:id="rId7"/>
-    <p:sldLayoutId id="2147483656" r:id="rId8"/>
-    <p:sldLayoutId id="2147483657" r:id="rId9"/>
-    <p:sldLayoutId id="2147483658" r:id="rId10"/>
-    <p:sldLayoutId id="2147483659" r:id="rId11"/>
+    <p:sldLayoutId id="2147483721" r:id="rId1"/>
+    <p:sldLayoutId id="2147483722" r:id="rId2"/>
+    <p:sldLayoutId id="2147483723" r:id="rId3"/>
+    <p:sldLayoutId id="2147483724" r:id="rId4"/>
+    <p:sldLayoutId id="2147483725" r:id="rId5"/>
+    <p:sldLayoutId id="2147483726" r:id="rId6"/>
+    <p:sldLayoutId id="2147483727" r:id="rId7"/>
+    <p:sldLayoutId id="2147483728" r:id="rId8"/>
+    <p:sldLayoutId id="2147483729" r:id="rId9"/>
+    <p:sldLayoutId id="2147483730" r:id="rId10"/>
+    <p:sldLayoutId id="2147483731" r:id="rId11"/>
   </p:sldLayoutIdLst>
+  <p:hf hdr="0" ftr="0" dt="0"/>
   <p:txStyles>
     <p:titleStyle>
       <a:lvl1pPr algn="l" defTabSz="914400" rtl="0" eaLnBrk="1" latinLnBrk="0" hangingPunct="1">
@@ -3326,6 +3718,11 @@
       </a:lvl9pPr>
     </p:otherStyle>
   </p:txStyles>
+  <p:extLst>
+    <p:ext uri="{27BBF7A9-308A-43DC-89C8-2F10F3537804}">
+      <p15:sldGuideLst xmlns:p15="http://schemas.microsoft.com/office/powerpoint/2012/main"/>
+    </p:ext>
+  </p:extLst>
 </p:sldMaster>
 </file>
 
@@ -3368,10 +3765,16 @@
           <a:lstStyle/>
           <a:p>
             <a:r>
-              <a:rPr lang="en-US" dirty="0"/>
+              <a:rPr lang="en-US" b="1" dirty="0">
+                <a:latin typeface="Space Grotesk" pitchFamily="2" charset="0"/>
+                <a:cs typeface="Space Grotesk" pitchFamily="2" charset="0"/>
+              </a:rPr>
               <a:t>Self-Balancing-Bot</a:t>
             </a:r>
-            <a:endParaRPr lang="fr-CH" dirty="0"/>
+            <a:endParaRPr lang="fr-CH" b="1" dirty="0">
+              <a:latin typeface="Space Grotesk" pitchFamily="2" charset="0"/>
+              <a:cs typeface="Space Grotesk" pitchFamily="2" charset="0"/>
+            </a:endParaRPr>
           </a:p>
         </p:txBody>
       </p:sp>
@@ -3397,22 +3800,69 @@
           <a:lstStyle/>
           <a:p>
             <a:r>
-              <a:rPr lang="en-US" dirty="0"/>
+              <a:rPr lang="en-US" dirty="0">
+                <a:latin typeface="Space Grotesk" pitchFamily="2" charset="0"/>
+                <a:cs typeface="Space Grotesk" pitchFamily="2" charset="0"/>
+              </a:rPr>
               <a:t>Travail de Bachelor 2026</a:t>
             </a:r>
           </a:p>
           <a:p>
             <a:r>
-              <a:rPr lang="en-US" dirty="0"/>
+              <a:rPr lang="en-US" dirty="0">
+                <a:latin typeface="Space Grotesk" pitchFamily="2" charset="0"/>
+                <a:cs typeface="Space Grotesk" pitchFamily="2" charset="0"/>
+              </a:rPr>
               <a:t>GE EEM</a:t>
             </a:r>
           </a:p>
           <a:p>
             <a:r>
-              <a:rPr lang="en-US" dirty="0"/>
+              <a:rPr lang="en-US" dirty="0">
+                <a:latin typeface="Space Grotesk" pitchFamily="2" charset="0"/>
+                <a:cs typeface="Space Grotesk" pitchFamily="2" charset="0"/>
+              </a:rPr>
               <a:t>Ding Jérémy </a:t>
             </a:r>
-            <a:endParaRPr lang="fr-CH" dirty="0"/>
+            <a:endParaRPr lang="fr-CH" dirty="0">
+              <a:latin typeface="Space Grotesk" pitchFamily="2" charset="0"/>
+              <a:cs typeface="Space Grotesk" pitchFamily="2" charset="0"/>
+            </a:endParaRPr>
+          </a:p>
+        </p:txBody>
+      </p:sp>
+      <p:sp>
+        <p:nvSpPr>
+          <p:cNvPr id="4" name="Slide Number Placeholder 3">
+            <a:extLst>
+              <a:ext uri="{FF2B5EF4-FFF2-40B4-BE49-F238E27FC236}">
+                <a16:creationId xmlns:a16="http://schemas.microsoft.com/office/drawing/2014/main" id="{ED577DA1-9BB4-44BA-DF57-781301D42A17}"/>
+              </a:ext>
+            </a:extLst>
+          </p:cNvPr>
+          <p:cNvSpPr>
+            <a:spLocks noGrp="1"/>
+          </p:cNvSpPr>
+          <p:nvPr>
+            <p:ph type="sldNum" sz="quarter" idx="12"/>
+          </p:nvPr>
+        </p:nvSpPr>
+        <p:spPr/>
+        <p:txBody>
+          <a:bodyPr/>
+          <a:lstStyle/>
+          <a:p>
+            <a:fld id="{27610C65-3251-4B31-A496-D9D978F99BA5}" type="slidenum">
+              <a:rPr lang="fr-CH" smtClean="0">
+                <a:latin typeface="Space Grotesk" pitchFamily="2" charset="0"/>
+                <a:cs typeface="Space Grotesk" pitchFamily="2" charset="0"/>
+              </a:rPr>
+              <a:t>1</a:t>
+            </a:fld>
+            <a:endParaRPr lang="fr-CH">
+              <a:latin typeface="Space Grotesk" pitchFamily="2" charset="0"/>
+              <a:cs typeface="Space Grotesk" pitchFamily="2" charset="0"/>
+            </a:endParaRPr>
           </a:p>
         </p:txBody>
       </p:sp>
@@ -3429,7 +3879,880 @@
 </p:sld>
 </file>
 
-<file path=ppt/slides/slide2.xml><?xml version="1.0" encoding="utf-8"?>
+<file path=ppt/slides/slide10.xml><?xml version="1.0" encoding="utf-8"?>
+<p:sld xmlns:a="http://schemas.openxmlformats.org/drawingml/2006/main" xmlns:r="http://schemas.openxmlformats.org/officeDocument/2006/relationships" xmlns:p="http://schemas.openxmlformats.org/presentationml/2006/main">
+  <p:cSld>
+    <p:spTree>
+      <p:nvGrpSpPr>
+        <p:cNvPr id="1" name="">
+          <a:extLst>
+            <a:ext uri="{FF2B5EF4-FFF2-40B4-BE49-F238E27FC236}">
+              <a16:creationId xmlns:a16="http://schemas.microsoft.com/office/drawing/2014/main" id="{7AE537BC-BC3E-45D2-BB7B-B09432B26B0F}"/>
+            </a:ext>
+          </a:extLst>
+        </p:cNvPr>
+        <p:cNvGrpSpPr/>
+        <p:nvPr/>
+      </p:nvGrpSpPr>
+      <p:grpSpPr>
+        <a:xfrm>
+          <a:off x="0" y="0"/>
+          <a:ext cx="0" cy="0"/>
+          <a:chOff x="0" y="0"/>
+          <a:chExt cx="0" cy="0"/>
+        </a:xfrm>
+      </p:grpSpPr>
+      <p:sp>
+        <p:nvSpPr>
+          <p:cNvPr id="2" name="Title 1">
+            <a:extLst>
+              <a:ext uri="{FF2B5EF4-FFF2-40B4-BE49-F238E27FC236}">
+                <a16:creationId xmlns:a16="http://schemas.microsoft.com/office/drawing/2014/main" id="{C962462E-3486-E98C-EE45-15606C800234}"/>
+              </a:ext>
+            </a:extLst>
+          </p:cNvPr>
+          <p:cNvSpPr>
+            <a:spLocks noGrp="1"/>
+          </p:cNvSpPr>
+          <p:nvPr>
+            <p:ph type="title"/>
+          </p:nvPr>
+        </p:nvSpPr>
+        <p:spPr>
+          <a:xfrm>
+            <a:off x="838200" y="353095"/>
+            <a:ext cx="10515600" cy="1325563"/>
+          </a:xfrm>
+        </p:spPr>
+        <p:txBody>
+          <a:bodyPr>
+            <a:normAutofit/>
+          </a:bodyPr>
+          <a:lstStyle/>
+          <a:p>
+            <a:r>
+              <a:rPr lang="en-US" dirty="0" err="1">
+                <a:solidFill>
+                  <a:schemeClr val="accent2">
+                    <a:lumMod val="75000"/>
+                  </a:schemeClr>
+                </a:solidFill>
+                <a:latin typeface="Space Grotesk" pitchFamily="2" charset="0"/>
+                <a:cs typeface="Space Grotesk" pitchFamily="2" charset="0"/>
+              </a:rPr>
+              <a:t>Programmation</a:t>
+            </a:r>
+            <a:br>
+              <a:rPr lang="en-US" dirty="0">
+                <a:latin typeface="Space Grotesk" pitchFamily="2" charset="0"/>
+                <a:cs typeface="Space Grotesk" pitchFamily="2" charset="0"/>
+              </a:rPr>
+            </a:br>
+            <a:endParaRPr lang="fr-CH" sz="2800" dirty="0">
+              <a:latin typeface="Space Grotesk" pitchFamily="2" charset="0"/>
+              <a:cs typeface="Space Grotesk" pitchFamily="2" charset="0"/>
+            </a:endParaRPr>
+          </a:p>
+        </p:txBody>
+      </p:sp>
+      <p:sp>
+        <p:nvSpPr>
+          <p:cNvPr id="12" name="Content Placeholder 2">
+            <a:extLst>
+              <a:ext uri="{FF2B5EF4-FFF2-40B4-BE49-F238E27FC236}">
+                <a16:creationId xmlns:a16="http://schemas.microsoft.com/office/drawing/2014/main" id="{2532A7E9-0886-316B-3C2E-542C691E6AFE}"/>
+              </a:ext>
+            </a:extLst>
+          </p:cNvPr>
+          <p:cNvSpPr>
+            <a:spLocks noGrp="1"/>
+          </p:cNvSpPr>
+          <p:nvPr>
+            <p:ph idx="1"/>
+          </p:nvPr>
+        </p:nvSpPr>
+        <p:spPr/>
+        <p:txBody>
+          <a:bodyPr/>
+          <a:lstStyle/>
+          <a:p>
+            <a:pPr>
+              <a:lnSpc>
+                <a:spcPct val="150000"/>
+              </a:lnSpc>
+            </a:pPr>
+            <a:r>
+              <a:rPr lang="en-US" dirty="0" err="1">
+                <a:latin typeface="Space Grotesk" pitchFamily="2" charset="0"/>
+                <a:cs typeface="Space Grotesk" pitchFamily="2" charset="0"/>
+              </a:rPr>
+              <a:t>Librairie</a:t>
+            </a:r>
+            <a:r>
+              <a:rPr lang="en-US" dirty="0">
+                <a:latin typeface="Space Grotesk" pitchFamily="2" charset="0"/>
+                <a:cs typeface="Space Grotesk" pitchFamily="2" charset="0"/>
+              </a:rPr>
+              <a:t> TMC2226</a:t>
+            </a:r>
+          </a:p>
+          <a:p>
+            <a:pPr>
+              <a:lnSpc>
+                <a:spcPct val="150000"/>
+              </a:lnSpc>
+            </a:pPr>
+            <a:r>
+              <a:rPr lang="en-US" dirty="0">
+                <a:latin typeface="Space Grotesk" pitchFamily="2" charset="0"/>
+                <a:cs typeface="Space Grotesk" pitchFamily="2" charset="0"/>
+              </a:rPr>
+              <a:t>main.cpp</a:t>
+            </a:r>
+          </a:p>
+          <a:p>
+            <a:pPr>
+              <a:lnSpc>
+                <a:spcPct val="150000"/>
+              </a:lnSpc>
+            </a:pPr>
+            <a:r>
+              <a:rPr lang="en-US" dirty="0">
+                <a:latin typeface="Space Grotesk" pitchFamily="2" charset="0"/>
+                <a:cs typeface="Space Grotesk" pitchFamily="2" charset="0"/>
+              </a:rPr>
+              <a:t>+ 1000 </a:t>
+            </a:r>
+            <a:r>
+              <a:rPr lang="en-US" dirty="0" err="1">
+                <a:latin typeface="Space Grotesk" pitchFamily="2" charset="0"/>
+                <a:cs typeface="Space Grotesk" pitchFamily="2" charset="0"/>
+              </a:rPr>
+              <a:t>lignes</a:t>
+            </a:r>
+            <a:endParaRPr lang="en-US" dirty="0">
+              <a:latin typeface="Space Grotesk" pitchFamily="2" charset="0"/>
+              <a:cs typeface="Space Grotesk" pitchFamily="2" charset="0"/>
+            </a:endParaRPr>
+          </a:p>
+          <a:p>
+            <a:endParaRPr lang="en-US" dirty="0">
+              <a:latin typeface="Space Grotesk" pitchFamily="2" charset="0"/>
+              <a:cs typeface="Space Grotesk" pitchFamily="2" charset="0"/>
+            </a:endParaRPr>
+          </a:p>
+          <a:p>
+            <a:endParaRPr lang="fr-CH" dirty="0"/>
+          </a:p>
+        </p:txBody>
+      </p:sp>
+      <p:sp>
+        <p:nvSpPr>
+          <p:cNvPr id="14" name="Slide Number Placeholder 13">
+            <a:extLst>
+              <a:ext uri="{FF2B5EF4-FFF2-40B4-BE49-F238E27FC236}">
+                <a16:creationId xmlns:a16="http://schemas.microsoft.com/office/drawing/2014/main" id="{73898196-9556-E704-D3ED-7DB0FDAA793A}"/>
+              </a:ext>
+            </a:extLst>
+          </p:cNvPr>
+          <p:cNvSpPr>
+            <a:spLocks noGrp="1"/>
+          </p:cNvSpPr>
+          <p:nvPr>
+            <p:ph type="sldNum" sz="quarter" idx="12"/>
+          </p:nvPr>
+        </p:nvSpPr>
+        <p:spPr/>
+        <p:txBody>
+          <a:bodyPr/>
+          <a:lstStyle/>
+          <a:p>
+            <a:fld id="{27610C65-3251-4B31-A496-D9D978F99BA5}" type="slidenum">
+              <a:rPr lang="fr-CH" smtClean="0"/>
+              <a:t>10</a:t>
+            </a:fld>
+            <a:endParaRPr lang="fr-CH"/>
+          </a:p>
+        </p:txBody>
+      </p:sp>
+      <p:pic>
+        <p:nvPicPr>
+          <p:cNvPr id="4" name="Picture 3" descr="File:PlatformIO logo.svg - Wikimedia Commons">
+            <a:extLst>
+              <a:ext uri="{FF2B5EF4-FFF2-40B4-BE49-F238E27FC236}">
+                <a16:creationId xmlns:a16="http://schemas.microsoft.com/office/drawing/2014/main" id="{40C56044-71E4-B50C-B743-19AAAC143177}"/>
+              </a:ext>
+            </a:extLst>
+          </p:cNvPr>
+          <p:cNvPicPr>
+            <a:picLocks noChangeAspect="1"/>
+          </p:cNvPicPr>
+          <p:nvPr/>
+        </p:nvPicPr>
+        <p:blipFill>
+          <a:blip r:embed="rId2"/>
+          <a:stretch>
+            <a:fillRect/>
+          </a:stretch>
+        </p:blipFill>
+        <p:spPr>
+          <a:xfrm>
+            <a:off x="9595597" y="1015877"/>
+            <a:ext cx="2197664" cy="2197664"/>
+          </a:xfrm>
+          <a:prstGeom prst="rect">
+            <a:avLst/>
+          </a:prstGeom>
+        </p:spPr>
+      </p:pic>
+      <p:pic>
+        <p:nvPicPr>
+          <p:cNvPr id="7" name="Picture 6" descr="Visual Studio Code Icon SVG Vector &amp; PNG Free Download | UXWing">
+            <a:extLst>
+              <a:ext uri="{FF2B5EF4-FFF2-40B4-BE49-F238E27FC236}">
+                <a16:creationId xmlns:a16="http://schemas.microsoft.com/office/drawing/2014/main" id="{01A9FEF9-1384-CE0F-F6ED-2B57927E35B1}"/>
+              </a:ext>
+            </a:extLst>
+          </p:cNvPr>
+          <p:cNvPicPr>
+            <a:picLocks noChangeAspect="1"/>
+          </p:cNvPicPr>
+          <p:nvPr/>
+        </p:nvPicPr>
+        <p:blipFill>
+          <a:blip r:embed="rId3"/>
+          <a:stretch>
+            <a:fillRect/>
+          </a:stretch>
+        </p:blipFill>
+        <p:spPr>
+          <a:xfrm>
+            <a:off x="6777143" y="944742"/>
+            <a:ext cx="2032205" cy="2032205"/>
+          </a:xfrm>
+          <a:prstGeom prst="rect">
+            <a:avLst/>
+          </a:prstGeom>
+        </p:spPr>
+      </p:pic>
+      <p:pic>
+        <p:nvPicPr>
+          <p:cNvPr id="10" name="Picture 9" descr="Download C++ Logo in SVG Vector or PNG File Format - Logo.wine">
+            <a:extLst>
+              <a:ext uri="{FF2B5EF4-FFF2-40B4-BE49-F238E27FC236}">
+                <a16:creationId xmlns:a16="http://schemas.microsoft.com/office/drawing/2014/main" id="{939885FB-B1AB-754B-0176-43C8469862BD}"/>
+              </a:ext>
+            </a:extLst>
+          </p:cNvPr>
+          <p:cNvPicPr>
+            <a:picLocks noChangeAspect="1"/>
+          </p:cNvPicPr>
+          <p:nvPr/>
+        </p:nvPicPr>
+        <p:blipFill>
+          <a:blip r:embed="rId4"/>
+          <a:stretch>
+            <a:fillRect/>
+          </a:stretch>
+        </p:blipFill>
+        <p:spPr>
+          <a:xfrm>
+            <a:off x="5876427" y="3392928"/>
+            <a:ext cx="3944556" cy="2918972"/>
+          </a:xfrm>
+          <a:prstGeom prst="rect">
+            <a:avLst/>
+          </a:prstGeom>
+        </p:spPr>
+      </p:pic>
+      <p:pic>
+        <p:nvPicPr>
+          <p:cNvPr id="11" name="Picture 10" descr="Getting Started With ESP-IDF | Set Up Espressif IDE – RoboticWorx">
+            <a:extLst>
+              <a:ext uri="{FF2B5EF4-FFF2-40B4-BE49-F238E27FC236}">
+                <a16:creationId xmlns:a16="http://schemas.microsoft.com/office/drawing/2014/main" id="{E4E14F80-7C47-AE01-0F2F-F5C9E4A77953}"/>
+              </a:ext>
+            </a:extLst>
+          </p:cNvPr>
+          <p:cNvPicPr>
+            <a:picLocks noChangeAspect="1"/>
+          </p:cNvPicPr>
+          <p:nvPr/>
+        </p:nvPicPr>
+        <p:blipFill>
+          <a:blip r:embed="rId5"/>
+          <a:stretch>
+            <a:fillRect/>
+          </a:stretch>
+        </p:blipFill>
+        <p:spPr>
+          <a:xfrm>
+            <a:off x="8934351" y="3799128"/>
+            <a:ext cx="3306081" cy="2377835"/>
+          </a:xfrm>
+          <a:prstGeom prst="rect">
+            <a:avLst/>
+          </a:prstGeom>
+        </p:spPr>
+      </p:pic>
+    </p:spTree>
+    <p:extLst>
+      <p:ext uri="{BB962C8B-B14F-4D97-AF65-F5344CB8AC3E}">
+        <p14:creationId xmlns:p14="http://schemas.microsoft.com/office/powerpoint/2010/main" val="3275279707"/>
+      </p:ext>
+    </p:extLst>
+  </p:cSld>
+  <p:clrMapOvr>
+    <a:masterClrMapping/>
+  </p:clrMapOvr>
+</p:sld>
+</file>
+
+<file path=ppt/slides/slide11.xml><?xml version="1.0" encoding="utf-8"?>
+<p:sld xmlns:a="http://schemas.openxmlformats.org/drawingml/2006/main" xmlns:r="http://schemas.openxmlformats.org/officeDocument/2006/relationships" xmlns:p="http://schemas.openxmlformats.org/presentationml/2006/main">
+  <p:cSld>
+    <p:spTree>
+      <p:nvGrpSpPr>
+        <p:cNvPr id="1" name="">
+          <a:extLst>
+            <a:ext uri="{FF2B5EF4-FFF2-40B4-BE49-F238E27FC236}">
+              <a16:creationId xmlns:a16="http://schemas.microsoft.com/office/drawing/2014/main" id="{A854E5AF-A051-A3BB-D1EB-AF637B2E5A87}"/>
+            </a:ext>
+          </a:extLst>
+        </p:cNvPr>
+        <p:cNvGrpSpPr/>
+        <p:nvPr/>
+      </p:nvGrpSpPr>
+      <p:grpSpPr>
+        <a:xfrm>
+          <a:off x="0" y="0"/>
+          <a:ext cx="0" cy="0"/>
+          <a:chOff x="0" y="0"/>
+          <a:chExt cx="0" cy="0"/>
+        </a:xfrm>
+      </p:grpSpPr>
+      <p:sp>
+        <p:nvSpPr>
+          <p:cNvPr id="2" name="Title 1">
+            <a:extLst>
+              <a:ext uri="{FF2B5EF4-FFF2-40B4-BE49-F238E27FC236}">
+                <a16:creationId xmlns:a16="http://schemas.microsoft.com/office/drawing/2014/main" id="{142FFCC7-14E8-A500-D55D-8A7ED5ADC19E}"/>
+              </a:ext>
+            </a:extLst>
+          </p:cNvPr>
+          <p:cNvSpPr>
+            <a:spLocks noGrp="1"/>
+          </p:cNvSpPr>
+          <p:nvPr>
+            <p:ph type="title"/>
+          </p:nvPr>
+        </p:nvSpPr>
+        <p:spPr/>
+        <p:txBody>
+          <a:bodyPr>
+            <a:normAutofit/>
+          </a:bodyPr>
+          <a:lstStyle/>
+          <a:p>
+            <a:r>
+              <a:rPr lang="en-US" dirty="0" err="1">
+                <a:solidFill>
+                  <a:schemeClr val="accent2">
+                    <a:lumMod val="75000"/>
+                  </a:schemeClr>
+                </a:solidFill>
+                <a:latin typeface="Space Grotesk" pitchFamily="2" charset="0"/>
+                <a:cs typeface="Space Grotesk" pitchFamily="2" charset="0"/>
+              </a:rPr>
+              <a:t>Programmation</a:t>
+            </a:r>
+            <a:br>
+              <a:rPr lang="en-US" dirty="0">
+                <a:solidFill>
+                  <a:schemeClr val="accent2">
+                    <a:lumMod val="75000"/>
+                  </a:schemeClr>
+                </a:solidFill>
+                <a:latin typeface="Space Grotesk" pitchFamily="2" charset="0"/>
+                <a:cs typeface="Space Grotesk" pitchFamily="2" charset="0"/>
+              </a:rPr>
+            </a:br>
+            <a:r>
+              <a:rPr lang="en-US" sz="2800" dirty="0" err="1">
+                <a:solidFill>
+                  <a:schemeClr val="accent2">
+                    <a:lumMod val="75000"/>
+                  </a:schemeClr>
+                </a:solidFill>
+                <a:latin typeface="Space Grotesk" pitchFamily="2" charset="0"/>
+                <a:cs typeface="Space Grotesk" pitchFamily="2" charset="0"/>
+              </a:rPr>
+              <a:t>Ordinogramme</a:t>
+            </a:r>
+            <a:endParaRPr lang="fr-CH" dirty="0">
+              <a:solidFill>
+                <a:schemeClr val="accent2">
+                  <a:lumMod val="75000"/>
+                </a:schemeClr>
+              </a:solidFill>
+            </a:endParaRPr>
+          </a:p>
+        </p:txBody>
+      </p:sp>
+      <p:pic>
+        <p:nvPicPr>
+          <p:cNvPr id="5" name="Content Placeholder 4">
+            <a:extLst>
+              <a:ext uri="{FF2B5EF4-FFF2-40B4-BE49-F238E27FC236}">
+                <a16:creationId xmlns:a16="http://schemas.microsoft.com/office/drawing/2014/main" id="{0567B435-00D8-6670-945D-D9AC2D0AB134}"/>
+              </a:ext>
+            </a:extLst>
+          </p:cNvPr>
+          <p:cNvPicPr>
+            <a:picLocks noGrp="1" noChangeAspect="1"/>
+          </p:cNvPicPr>
+          <p:nvPr>
+            <p:ph idx="1"/>
+          </p:nvPr>
+        </p:nvPicPr>
+        <p:blipFill>
+          <a:blip r:embed="rId2">
+            <a:extLst>
+              <a:ext uri="{28A0092B-C50C-407E-A947-70E740481C1C}">
+                <a14:useLocalDpi xmlns:a14="http://schemas.microsoft.com/office/drawing/2010/main" val="0"/>
+              </a:ext>
+            </a:extLst>
+          </a:blip>
+          <a:srcRect l="38515" b="55346"/>
+          <a:stretch>
+            <a:fillRect/>
+          </a:stretch>
+        </p:blipFill>
+        <p:spPr>
+          <a:xfrm>
+            <a:off x="838200" y="1974312"/>
+            <a:ext cx="3694471" cy="4518562"/>
+          </a:xfrm>
+          <a:prstGeom prst="rect">
+            <a:avLst/>
+          </a:prstGeom>
+        </p:spPr>
+      </p:pic>
+      <p:sp>
+        <p:nvSpPr>
+          <p:cNvPr id="9" name="Slide Number Placeholder 8">
+            <a:extLst>
+              <a:ext uri="{FF2B5EF4-FFF2-40B4-BE49-F238E27FC236}">
+                <a16:creationId xmlns:a16="http://schemas.microsoft.com/office/drawing/2014/main" id="{EFDCABB0-9CBE-52A1-F856-8E0110991836}"/>
+              </a:ext>
+            </a:extLst>
+          </p:cNvPr>
+          <p:cNvSpPr>
+            <a:spLocks noGrp="1"/>
+          </p:cNvSpPr>
+          <p:nvPr>
+            <p:ph type="sldNum" sz="quarter" idx="12"/>
+          </p:nvPr>
+        </p:nvSpPr>
+        <p:spPr/>
+        <p:txBody>
+          <a:bodyPr/>
+          <a:lstStyle/>
+          <a:p>
+            <a:fld id="{27610C65-3251-4B31-A496-D9D978F99BA5}" type="slidenum">
+              <a:rPr lang="fr-CH" smtClean="0"/>
+              <a:t>11</a:t>
+            </a:fld>
+            <a:endParaRPr lang="fr-CH"/>
+          </a:p>
+        </p:txBody>
+      </p:sp>
+      <p:pic>
+        <p:nvPicPr>
+          <p:cNvPr id="8" name="Picture 7">
+            <a:extLst>
+              <a:ext uri="{FF2B5EF4-FFF2-40B4-BE49-F238E27FC236}">
+                <a16:creationId xmlns:a16="http://schemas.microsoft.com/office/drawing/2014/main" id="{87C7BF76-6855-7436-0477-8C4423A68F97}"/>
+              </a:ext>
+            </a:extLst>
+          </p:cNvPr>
+          <p:cNvPicPr>
+            <a:picLocks noChangeAspect="1"/>
+          </p:cNvPicPr>
+          <p:nvPr/>
+        </p:nvPicPr>
+        <p:blipFill>
+          <a:blip r:embed="rId3">
+            <a:extLst>
+              <a:ext uri="{28A0092B-C50C-407E-A947-70E740481C1C}">
+                <a14:useLocalDpi xmlns:a14="http://schemas.microsoft.com/office/drawing/2010/main" val="0"/>
+              </a:ext>
+            </a:extLst>
+          </a:blip>
+          <a:srcRect t="43663"/>
+          <a:stretch>
+            <a:fillRect/>
+          </a:stretch>
+        </p:blipFill>
+        <p:spPr>
+          <a:xfrm>
+            <a:off x="5677631" y="1007048"/>
+            <a:ext cx="5782177" cy="5485827"/>
+          </a:xfrm>
+          <a:prstGeom prst="rect">
+            <a:avLst/>
+          </a:prstGeom>
+        </p:spPr>
+      </p:pic>
+    </p:spTree>
+    <p:extLst>
+      <p:ext uri="{BB962C8B-B14F-4D97-AF65-F5344CB8AC3E}">
+        <p14:creationId xmlns:p14="http://schemas.microsoft.com/office/powerpoint/2010/main" val="2557207474"/>
+      </p:ext>
+    </p:extLst>
+  </p:cSld>
+  <p:clrMapOvr>
+    <a:masterClrMapping/>
+  </p:clrMapOvr>
+</p:sld>
+</file>
+
+<file path=ppt/slides/slide12.xml><?xml version="1.0" encoding="utf-8"?>
+<p:sld xmlns:a="http://schemas.openxmlformats.org/drawingml/2006/main" xmlns:r="http://schemas.openxmlformats.org/officeDocument/2006/relationships" xmlns:p="http://schemas.openxmlformats.org/presentationml/2006/main">
+  <p:cSld>
+    <p:spTree>
+      <p:nvGrpSpPr>
+        <p:cNvPr id="1" name="">
+          <a:extLst>
+            <a:ext uri="{FF2B5EF4-FFF2-40B4-BE49-F238E27FC236}">
+              <a16:creationId xmlns:a16="http://schemas.microsoft.com/office/drawing/2014/main" id="{0CC06B33-0089-A384-E970-7B554C69ED9C}"/>
+            </a:ext>
+          </a:extLst>
+        </p:cNvPr>
+        <p:cNvGrpSpPr/>
+        <p:nvPr/>
+      </p:nvGrpSpPr>
+      <p:grpSpPr>
+        <a:xfrm>
+          <a:off x="0" y="0"/>
+          <a:ext cx="0" cy="0"/>
+          <a:chOff x="0" y="0"/>
+          <a:chExt cx="0" cy="0"/>
+        </a:xfrm>
+      </p:grpSpPr>
+      <p:sp>
+        <p:nvSpPr>
+          <p:cNvPr id="2" name="Title 1">
+            <a:extLst>
+              <a:ext uri="{FF2B5EF4-FFF2-40B4-BE49-F238E27FC236}">
+                <a16:creationId xmlns:a16="http://schemas.microsoft.com/office/drawing/2014/main" id="{A131165F-AC98-F90F-7E85-63F61EE73987}"/>
+              </a:ext>
+            </a:extLst>
+          </p:cNvPr>
+          <p:cNvSpPr>
+            <a:spLocks noGrp="1"/>
+          </p:cNvSpPr>
+          <p:nvPr>
+            <p:ph type="title"/>
+          </p:nvPr>
+        </p:nvSpPr>
+        <p:spPr>
+          <a:xfrm>
+            <a:off x="838200" y="337189"/>
+            <a:ext cx="10515600" cy="1325563"/>
+          </a:xfrm>
+        </p:spPr>
+        <p:txBody>
+          <a:bodyPr>
+            <a:normAutofit/>
+          </a:bodyPr>
+          <a:lstStyle/>
+          <a:p>
+            <a:r>
+              <a:rPr lang="en-US" dirty="0" err="1">
+                <a:solidFill>
+                  <a:schemeClr val="accent2">
+                    <a:lumMod val="75000"/>
+                  </a:schemeClr>
+                </a:solidFill>
+                <a:latin typeface="Space Grotesk" pitchFamily="2" charset="0"/>
+                <a:cs typeface="Space Grotesk" pitchFamily="2" charset="0"/>
+              </a:rPr>
+              <a:t>Programmation</a:t>
+            </a:r>
+            <a:br>
+              <a:rPr lang="en-US" dirty="0">
+                <a:solidFill>
+                  <a:schemeClr val="accent2">
+                    <a:lumMod val="75000"/>
+                  </a:schemeClr>
+                </a:solidFill>
+                <a:latin typeface="Space Grotesk" pitchFamily="2" charset="0"/>
+                <a:cs typeface="Space Grotesk" pitchFamily="2" charset="0"/>
+              </a:rPr>
+            </a:br>
+            <a:r>
+              <a:rPr lang="en-US" sz="2800" dirty="0" err="1">
+                <a:solidFill>
+                  <a:schemeClr val="accent2">
+                    <a:lumMod val="75000"/>
+                  </a:schemeClr>
+                </a:solidFill>
+                <a:latin typeface="Space Grotesk" pitchFamily="2" charset="0"/>
+                <a:cs typeface="Space Grotesk" pitchFamily="2" charset="0"/>
+              </a:rPr>
+              <a:t>Commandes</a:t>
+            </a:r>
+            <a:endParaRPr lang="fr-CH" dirty="0">
+              <a:solidFill>
+                <a:schemeClr val="accent2">
+                  <a:lumMod val="75000"/>
+                </a:schemeClr>
+              </a:solidFill>
+              <a:latin typeface="Space Grotesk" pitchFamily="2" charset="0"/>
+              <a:cs typeface="Space Grotesk" pitchFamily="2" charset="0"/>
+            </a:endParaRPr>
+          </a:p>
+        </p:txBody>
+      </p:sp>
+      <p:sp>
+        <p:nvSpPr>
+          <p:cNvPr id="9" name="Slide Number Placeholder 8">
+            <a:extLst>
+              <a:ext uri="{FF2B5EF4-FFF2-40B4-BE49-F238E27FC236}">
+                <a16:creationId xmlns:a16="http://schemas.microsoft.com/office/drawing/2014/main" id="{7DCF9ABC-AC9F-6965-FEDF-2645980E07B4}"/>
+              </a:ext>
+            </a:extLst>
+          </p:cNvPr>
+          <p:cNvSpPr>
+            <a:spLocks noGrp="1"/>
+          </p:cNvSpPr>
+          <p:nvPr>
+            <p:ph type="sldNum" sz="quarter" idx="12"/>
+          </p:nvPr>
+        </p:nvSpPr>
+        <p:spPr/>
+        <p:txBody>
+          <a:bodyPr/>
+          <a:lstStyle/>
+          <a:p>
+            <a:fld id="{27610C65-3251-4B31-A496-D9D978F99BA5}" type="slidenum">
+              <a:rPr lang="fr-CH" smtClean="0"/>
+              <a:t>12</a:t>
+            </a:fld>
+            <a:endParaRPr lang="fr-CH"/>
+          </a:p>
+        </p:txBody>
+      </p:sp>
+      <p:pic>
+        <p:nvPicPr>
+          <p:cNvPr id="13" name="Picture 12">
+            <a:extLst>
+              <a:ext uri="{FF2B5EF4-FFF2-40B4-BE49-F238E27FC236}">
+                <a16:creationId xmlns:a16="http://schemas.microsoft.com/office/drawing/2014/main" id="{4870563F-ED58-9621-38A7-E2AF25F5EED0}"/>
+              </a:ext>
+            </a:extLst>
+          </p:cNvPr>
+          <p:cNvPicPr>
+            <a:picLocks noChangeAspect="1"/>
+          </p:cNvPicPr>
+          <p:nvPr/>
+        </p:nvPicPr>
+        <p:blipFill>
+          <a:blip r:embed="rId2"/>
+          <a:stretch>
+            <a:fillRect/>
+          </a:stretch>
+        </p:blipFill>
+        <p:spPr>
+          <a:xfrm>
+            <a:off x="2499364" y="2027877"/>
+            <a:ext cx="7193272" cy="4328473"/>
+          </a:xfrm>
+          <a:prstGeom prst="rect">
+            <a:avLst/>
+          </a:prstGeom>
+        </p:spPr>
+      </p:pic>
+    </p:spTree>
+    <p:extLst>
+      <p:ext uri="{BB962C8B-B14F-4D97-AF65-F5344CB8AC3E}">
+        <p14:creationId xmlns:p14="http://schemas.microsoft.com/office/powerpoint/2010/main" val="469541583"/>
+      </p:ext>
+    </p:extLst>
+  </p:cSld>
+  <p:clrMapOvr>
+    <a:masterClrMapping/>
+  </p:clrMapOvr>
+</p:sld>
+</file>
+
+<file path=ppt/slides/slide13.xml><?xml version="1.0" encoding="utf-8"?>
+<p:sld xmlns:a="http://schemas.openxmlformats.org/drawingml/2006/main" xmlns:r="http://schemas.openxmlformats.org/officeDocument/2006/relationships" xmlns:p="http://schemas.openxmlformats.org/presentationml/2006/main">
+  <p:cSld>
+    <p:spTree>
+      <p:nvGrpSpPr>
+        <p:cNvPr id="1" name="">
+          <a:extLst>
+            <a:ext uri="{FF2B5EF4-FFF2-40B4-BE49-F238E27FC236}">
+              <a16:creationId xmlns:a16="http://schemas.microsoft.com/office/drawing/2014/main" id="{8F72943C-F6AA-C73A-C8AD-2F7717DD7ECE}"/>
+            </a:ext>
+          </a:extLst>
+        </p:cNvPr>
+        <p:cNvGrpSpPr/>
+        <p:nvPr/>
+      </p:nvGrpSpPr>
+      <p:grpSpPr>
+        <a:xfrm>
+          <a:off x="0" y="0"/>
+          <a:ext cx="0" cy="0"/>
+          <a:chOff x="0" y="0"/>
+          <a:chExt cx="0" cy="0"/>
+        </a:xfrm>
+      </p:grpSpPr>
+      <p:sp>
+        <p:nvSpPr>
+          <p:cNvPr id="2" name="Title 1">
+            <a:extLst>
+              <a:ext uri="{FF2B5EF4-FFF2-40B4-BE49-F238E27FC236}">
+                <a16:creationId xmlns:a16="http://schemas.microsoft.com/office/drawing/2014/main" id="{6685B4D7-9ADD-551B-835D-64F276DE1F87}"/>
+              </a:ext>
+            </a:extLst>
+          </p:cNvPr>
+          <p:cNvSpPr>
+            <a:spLocks noGrp="1"/>
+          </p:cNvSpPr>
+          <p:nvPr>
+            <p:ph type="title"/>
+          </p:nvPr>
+        </p:nvSpPr>
+        <p:spPr/>
+        <p:txBody>
+          <a:bodyPr>
+            <a:normAutofit/>
+          </a:bodyPr>
+          <a:lstStyle/>
+          <a:p>
+            <a:r>
+              <a:rPr lang="en-US" dirty="0" err="1">
+                <a:solidFill>
+                  <a:schemeClr val="accent2">
+                    <a:lumMod val="75000"/>
+                  </a:schemeClr>
+                </a:solidFill>
+                <a:latin typeface="Space Grotesk" pitchFamily="2" charset="0"/>
+                <a:cs typeface="Space Grotesk" pitchFamily="2" charset="0"/>
+              </a:rPr>
+              <a:t>Programmation</a:t>
+            </a:r>
+            <a:br>
+              <a:rPr lang="en-US" dirty="0">
+                <a:solidFill>
+                  <a:schemeClr val="accent2">
+                    <a:lumMod val="75000"/>
+                  </a:schemeClr>
+                </a:solidFill>
+                <a:latin typeface="Space Grotesk" pitchFamily="2" charset="0"/>
+                <a:cs typeface="Space Grotesk" pitchFamily="2" charset="0"/>
+              </a:rPr>
+            </a:br>
+            <a:r>
+              <a:rPr lang="en-US" sz="2800" dirty="0" err="1">
+                <a:solidFill>
+                  <a:schemeClr val="accent2">
+                    <a:lumMod val="75000"/>
+                  </a:schemeClr>
+                </a:solidFill>
+                <a:latin typeface="Space Grotesk" pitchFamily="2" charset="0"/>
+                <a:cs typeface="Space Grotesk" pitchFamily="2" charset="0"/>
+              </a:rPr>
+              <a:t>Commandes</a:t>
+            </a:r>
+            <a:endParaRPr lang="fr-CH" dirty="0">
+              <a:solidFill>
+                <a:schemeClr val="accent2">
+                  <a:lumMod val="75000"/>
+                </a:schemeClr>
+              </a:solidFill>
+              <a:latin typeface="Space Grotesk" pitchFamily="2" charset="0"/>
+              <a:cs typeface="Space Grotesk" pitchFamily="2" charset="0"/>
+            </a:endParaRPr>
+          </a:p>
+        </p:txBody>
+      </p:sp>
+      <p:sp>
+        <p:nvSpPr>
+          <p:cNvPr id="9" name="Slide Number Placeholder 8">
+            <a:extLst>
+              <a:ext uri="{FF2B5EF4-FFF2-40B4-BE49-F238E27FC236}">
+                <a16:creationId xmlns:a16="http://schemas.microsoft.com/office/drawing/2014/main" id="{9546A6A1-FC6A-5D69-C681-FCD86776F298}"/>
+              </a:ext>
+            </a:extLst>
+          </p:cNvPr>
+          <p:cNvSpPr>
+            <a:spLocks noGrp="1"/>
+          </p:cNvSpPr>
+          <p:nvPr>
+            <p:ph type="sldNum" sz="quarter" idx="12"/>
+          </p:nvPr>
+        </p:nvSpPr>
+        <p:spPr/>
+        <p:txBody>
+          <a:bodyPr/>
+          <a:lstStyle/>
+          <a:p>
+            <a:fld id="{27610C65-3251-4B31-A496-D9D978F99BA5}" type="slidenum">
+              <a:rPr lang="fr-CH" smtClean="0"/>
+              <a:t>13</a:t>
+            </a:fld>
+            <a:endParaRPr lang="fr-CH"/>
+          </a:p>
+        </p:txBody>
+      </p:sp>
+      <p:pic>
+        <p:nvPicPr>
+          <p:cNvPr id="4" name="Picture 3">
+            <a:extLst>
+              <a:ext uri="{FF2B5EF4-FFF2-40B4-BE49-F238E27FC236}">
+                <a16:creationId xmlns:a16="http://schemas.microsoft.com/office/drawing/2014/main" id="{23DBD409-5C34-8EA6-2300-6E49DFF47E10}"/>
+              </a:ext>
+            </a:extLst>
+          </p:cNvPr>
+          <p:cNvPicPr>
+            <a:picLocks noChangeAspect="1"/>
+          </p:cNvPicPr>
+          <p:nvPr/>
+        </p:nvPicPr>
+        <p:blipFill>
+          <a:blip r:embed="rId2"/>
+          <a:stretch>
+            <a:fillRect/>
+          </a:stretch>
+        </p:blipFill>
+        <p:spPr>
+          <a:xfrm>
+            <a:off x="1728061" y="1996061"/>
+            <a:ext cx="8735878" cy="4360289"/>
+          </a:xfrm>
+          <a:prstGeom prst="rect">
+            <a:avLst/>
+          </a:prstGeom>
+        </p:spPr>
+      </p:pic>
+    </p:spTree>
+    <p:extLst>
+      <p:ext uri="{BB962C8B-B14F-4D97-AF65-F5344CB8AC3E}">
+        <p14:creationId xmlns:p14="http://schemas.microsoft.com/office/powerpoint/2010/main" val="590726098"/>
+      </p:ext>
+    </p:extLst>
+  </p:cSld>
+  <p:clrMapOvr>
+    <a:masterClrMapping/>
+  </p:clrMapOvr>
+</p:sld>
+</file>
+
+<file path=ppt/slides/slide14.xml><?xml version="1.0" encoding="utf-8"?>
 <p:sld xmlns:a="http://schemas.openxmlformats.org/drawingml/2006/main" xmlns:r="http://schemas.openxmlformats.org/officeDocument/2006/relationships" xmlns:p="http://schemas.openxmlformats.org/presentationml/2006/main">
   <p:cSld>
     <p:spTree>
@@ -3451,7 +4774,7 @@
           <p:cNvPr id="2" name="Title 1">
             <a:extLst>
               <a:ext uri="{FF2B5EF4-FFF2-40B4-BE49-F238E27FC236}">
-                <a16:creationId xmlns:a16="http://schemas.microsoft.com/office/drawing/2014/main" id="{63A5FD1F-5096-488C-1A0C-9EE83D1BE8B9}"/>
+                <a16:creationId xmlns:a16="http://schemas.microsoft.com/office/drawing/2014/main" id="{456BA9D6-B78B-E020-C6D4-871170ADD6EF}"/>
               </a:ext>
             </a:extLst>
           </p:cNvPr>
@@ -3468,27 +4791,93 @@
           <a:lstStyle/>
           <a:p>
             <a:r>
-              <a:rPr lang="en-US" dirty="0" err="1"/>
-              <a:t>Sommaire</a:t>
-            </a:r>
-            <a:endParaRPr lang="fr-CH" dirty="0"/>
-          </a:p>
-        </p:txBody>
-      </p:sp>
-      <p:sp>
-        <p:nvSpPr>
-          <p:cNvPr id="3" name="Content Placeholder 2">
-            <a:extLst>
-              <a:ext uri="{FF2B5EF4-FFF2-40B4-BE49-F238E27FC236}">
-                <a16:creationId xmlns:a16="http://schemas.microsoft.com/office/drawing/2014/main" id="{7B354B8D-740D-9311-6631-7380DD5AFE40}"/>
-              </a:ext>
-            </a:extLst>
-          </p:cNvPr>
-          <p:cNvSpPr>
-            <a:spLocks noGrp="1"/>
-          </p:cNvSpPr>
+              <a:rPr lang="en-US" dirty="0">
+                <a:solidFill>
+                  <a:schemeClr val="accent2">
+                    <a:lumMod val="75000"/>
+                  </a:schemeClr>
+                </a:solidFill>
+                <a:latin typeface="Space Grotesk" pitchFamily="2" charset="0"/>
+                <a:cs typeface="Space Grotesk" pitchFamily="2" charset="0"/>
+              </a:rPr>
+              <a:t>Interface de </a:t>
+            </a:r>
+            <a:r>
+              <a:rPr lang="en-US" dirty="0" err="1">
+                <a:solidFill>
+                  <a:schemeClr val="accent2">
+                    <a:lumMod val="75000"/>
+                  </a:schemeClr>
+                </a:solidFill>
+                <a:latin typeface="Space Grotesk" pitchFamily="2" charset="0"/>
+                <a:cs typeface="Space Grotesk" pitchFamily="2" charset="0"/>
+              </a:rPr>
+              <a:t>contrôle</a:t>
+            </a:r>
+            <a:endParaRPr lang="fr-CH" dirty="0">
+              <a:solidFill>
+                <a:schemeClr val="accent2">
+                  <a:lumMod val="75000"/>
+                </a:schemeClr>
+              </a:solidFill>
+              <a:latin typeface="Space Grotesk" pitchFamily="2" charset="0"/>
+              <a:cs typeface="Space Grotesk" pitchFamily="2" charset="0"/>
+            </a:endParaRPr>
+          </a:p>
+        </p:txBody>
+      </p:sp>
+      <p:pic>
+        <p:nvPicPr>
+          <p:cNvPr id="9" name="Content Placeholder 8">
+            <a:extLst>
+              <a:ext uri="{FF2B5EF4-FFF2-40B4-BE49-F238E27FC236}">
+                <a16:creationId xmlns:a16="http://schemas.microsoft.com/office/drawing/2014/main" id="{9F6C4543-7E9C-BF6E-4445-0C46020D5EB8}"/>
+              </a:ext>
+            </a:extLst>
+          </p:cNvPr>
+          <p:cNvPicPr>
+            <a:picLocks noGrp="1" noChangeAspect="1"/>
+          </p:cNvPicPr>
           <p:nvPr>
             <p:ph idx="1"/>
+          </p:nvPr>
+        </p:nvPicPr>
+        <p:blipFill>
+          <a:blip r:embed="rId2">
+            <a:extLst>
+              <a:ext uri="{28A0092B-C50C-407E-A947-70E740481C1C}">
+                <a14:useLocalDpi xmlns:a14="http://schemas.microsoft.com/office/drawing/2010/main" val="0"/>
+              </a:ext>
+            </a:extLst>
+          </a:blip>
+          <a:stretch>
+            <a:fillRect/>
+          </a:stretch>
+        </p:blipFill>
+        <p:spPr>
+          <a:xfrm rot="17549617">
+            <a:off x="5984651" y="794837"/>
+            <a:ext cx="5480790" cy="5626886"/>
+          </a:xfrm>
+          <a:prstGeom prst="rect">
+            <a:avLst/>
+          </a:prstGeom>
+        </p:spPr>
+      </p:pic>
+      <p:sp>
+        <p:nvSpPr>
+          <p:cNvPr id="3" name="Slide Number Placeholder 2">
+            <a:extLst>
+              <a:ext uri="{FF2B5EF4-FFF2-40B4-BE49-F238E27FC236}">
+                <a16:creationId xmlns:a16="http://schemas.microsoft.com/office/drawing/2014/main" id="{531269C5-0E83-02AD-B5F0-201C85197FBB}"/>
+              </a:ext>
+            </a:extLst>
+          </p:cNvPr>
+          <p:cNvSpPr>
+            <a:spLocks noGrp="1"/>
+          </p:cNvSpPr>
+          <p:nvPr>
+            <p:ph type="sldNum" sz="quarter" idx="12"/>
           </p:nvPr>
         </p:nvSpPr>
         <p:spPr/>
@@ -3496,48 +4885,230 @@
           <a:bodyPr/>
           <a:lstStyle/>
           <a:p>
-            <a:r>
-              <a:rPr lang="en-US" dirty="0"/>
-              <a:t>Introduction</a:t>
-            </a:r>
-            <a:endParaRPr lang="fr-CH" dirty="0"/>
-          </a:p>
-          <a:p>
-            <a:r>
-              <a:rPr lang="fr-CH" dirty="0"/>
-              <a:t>Cahier des charges</a:t>
-            </a:r>
-          </a:p>
-          <a:p>
-            <a:r>
-              <a:rPr lang="fr-CH" dirty="0"/>
-              <a:t>Principe physique</a:t>
-            </a:r>
-          </a:p>
-          <a:p>
-            <a:r>
-              <a:rPr lang="fr-CH" dirty="0"/>
-              <a:t>Maquette</a:t>
-            </a:r>
-          </a:p>
-          <a:p>
-            <a:r>
-              <a:rPr lang="fr-CH" dirty="0"/>
-              <a:t>Simulation</a:t>
-            </a:r>
-            <a:endParaRPr lang="en-US" dirty="0"/>
-          </a:p>
-          <a:p>
-            <a:r>
-              <a:rPr lang="en-US" dirty="0" err="1"/>
-              <a:t>Mesures</a:t>
-            </a:r>
-            <a:endParaRPr lang="en-US" dirty="0"/>
-          </a:p>
-          <a:p>
-            <a:r>
-              <a:rPr lang="en-US" dirty="0"/>
-              <a:t>Conclusion</a:t>
+            <a:fld id="{27610C65-3251-4B31-A496-D9D978F99BA5}" type="slidenum">
+              <a:rPr lang="fr-CH" smtClean="0"/>
+              <a:t>14</a:t>
+            </a:fld>
+            <a:endParaRPr lang="fr-CH"/>
+          </a:p>
+        </p:txBody>
+      </p:sp>
+      <p:sp>
+        <p:nvSpPr>
+          <p:cNvPr id="12" name="Content Placeholder 2">
+            <a:extLst>
+              <a:ext uri="{FF2B5EF4-FFF2-40B4-BE49-F238E27FC236}">
+                <a16:creationId xmlns:a16="http://schemas.microsoft.com/office/drawing/2014/main" id="{B39205BE-EAC9-B818-9A73-12844E7DAB16}"/>
+              </a:ext>
+            </a:extLst>
+          </p:cNvPr>
+          <p:cNvSpPr txBox="1">
+            <a:spLocks/>
+          </p:cNvSpPr>
+          <p:nvPr/>
+        </p:nvSpPr>
+        <p:spPr>
+          <a:xfrm>
+            <a:off x="838200" y="1825625"/>
+            <a:ext cx="10515600" cy="4351338"/>
+          </a:xfrm>
+          <a:prstGeom prst="rect">
+            <a:avLst/>
+          </a:prstGeom>
+        </p:spPr>
+        <p:txBody>
+          <a:bodyPr vert="horz" lIns="91440" tIns="45720" rIns="91440" bIns="45720" rtlCol="0">
+            <a:normAutofit/>
+          </a:bodyPr>
+          <a:lstStyle>
+            <a:lvl1pPr marL="228600" indent="-228600" algn="l" defTabSz="914400" rtl="0" eaLnBrk="1" latinLnBrk="0" hangingPunct="1">
+              <a:lnSpc>
+                <a:spcPct val="90000"/>
+              </a:lnSpc>
+              <a:spcBef>
+                <a:spcPts val="1000"/>
+              </a:spcBef>
+              <a:buFont typeface="Arial" panose="020B0604020202020204" pitchFamily="34" charset="0"/>
+              <a:buChar char="•"/>
+              <a:defRPr sz="2800" kern="1200">
+                <a:solidFill>
+                  <a:schemeClr val="tx1"/>
+                </a:solidFill>
+                <a:latin typeface="+mn-lt"/>
+                <a:ea typeface="+mn-ea"/>
+                <a:cs typeface="+mn-cs"/>
+              </a:defRPr>
+            </a:lvl1pPr>
+            <a:lvl2pPr marL="685800" indent="-228600" algn="l" defTabSz="914400" rtl="0" eaLnBrk="1" latinLnBrk="0" hangingPunct="1">
+              <a:lnSpc>
+                <a:spcPct val="90000"/>
+              </a:lnSpc>
+              <a:spcBef>
+                <a:spcPts val="500"/>
+              </a:spcBef>
+              <a:buFont typeface="Arial" panose="020B0604020202020204" pitchFamily="34" charset="0"/>
+              <a:buChar char="•"/>
+              <a:defRPr sz="2400" kern="1200">
+                <a:solidFill>
+                  <a:schemeClr val="tx1"/>
+                </a:solidFill>
+                <a:latin typeface="+mn-lt"/>
+                <a:ea typeface="+mn-ea"/>
+                <a:cs typeface="+mn-cs"/>
+              </a:defRPr>
+            </a:lvl2pPr>
+            <a:lvl3pPr marL="1143000" indent="-228600" algn="l" defTabSz="914400" rtl="0" eaLnBrk="1" latinLnBrk="0" hangingPunct="1">
+              <a:lnSpc>
+                <a:spcPct val="90000"/>
+              </a:lnSpc>
+              <a:spcBef>
+                <a:spcPts val="500"/>
+              </a:spcBef>
+              <a:buFont typeface="Arial" panose="020B0604020202020204" pitchFamily="34" charset="0"/>
+              <a:buChar char="•"/>
+              <a:defRPr sz="2000" kern="1200">
+                <a:solidFill>
+                  <a:schemeClr val="tx1"/>
+                </a:solidFill>
+                <a:latin typeface="+mn-lt"/>
+                <a:ea typeface="+mn-ea"/>
+                <a:cs typeface="+mn-cs"/>
+              </a:defRPr>
+            </a:lvl3pPr>
+            <a:lvl4pPr marL="1600200" indent="-228600" algn="l" defTabSz="914400" rtl="0" eaLnBrk="1" latinLnBrk="0" hangingPunct="1">
+              <a:lnSpc>
+                <a:spcPct val="90000"/>
+              </a:lnSpc>
+              <a:spcBef>
+                <a:spcPts val="500"/>
+              </a:spcBef>
+              <a:buFont typeface="Arial" panose="020B0604020202020204" pitchFamily="34" charset="0"/>
+              <a:buChar char="•"/>
+              <a:defRPr sz="1800" kern="1200">
+                <a:solidFill>
+                  <a:schemeClr val="tx1"/>
+                </a:solidFill>
+                <a:latin typeface="+mn-lt"/>
+                <a:ea typeface="+mn-ea"/>
+                <a:cs typeface="+mn-cs"/>
+              </a:defRPr>
+            </a:lvl4pPr>
+            <a:lvl5pPr marL="2057400" indent="-228600" algn="l" defTabSz="914400" rtl="0" eaLnBrk="1" latinLnBrk="0" hangingPunct="1">
+              <a:lnSpc>
+                <a:spcPct val="90000"/>
+              </a:lnSpc>
+              <a:spcBef>
+                <a:spcPts val="500"/>
+              </a:spcBef>
+              <a:buFont typeface="Arial" panose="020B0604020202020204" pitchFamily="34" charset="0"/>
+              <a:buChar char="•"/>
+              <a:defRPr sz="1800" kern="1200">
+                <a:solidFill>
+                  <a:schemeClr val="tx1"/>
+                </a:solidFill>
+                <a:latin typeface="+mn-lt"/>
+                <a:ea typeface="+mn-ea"/>
+                <a:cs typeface="+mn-cs"/>
+              </a:defRPr>
+            </a:lvl5pPr>
+            <a:lvl6pPr marL="2514600" indent="-228600" algn="l" defTabSz="914400" rtl="0" eaLnBrk="1" latinLnBrk="0" hangingPunct="1">
+              <a:lnSpc>
+                <a:spcPct val="90000"/>
+              </a:lnSpc>
+              <a:spcBef>
+                <a:spcPts val="500"/>
+              </a:spcBef>
+              <a:buFont typeface="Arial" panose="020B0604020202020204" pitchFamily="34" charset="0"/>
+              <a:buChar char="•"/>
+              <a:defRPr sz="1800" kern="1200">
+                <a:solidFill>
+                  <a:schemeClr val="tx1"/>
+                </a:solidFill>
+                <a:latin typeface="+mn-lt"/>
+                <a:ea typeface="+mn-ea"/>
+                <a:cs typeface="+mn-cs"/>
+              </a:defRPr>
+            </a:lvl6pPr>
+            <a:lvl7pPr marL="2971800" indent="-228600" algn="l" defTabSz="914400" rtl="0" eaLnBrk="1" latinLnBrk="0" hangingPunct="1">
+              <a:lnSpc>
+                <a:spcPct val="90000"/>
+              </a:lnSpc>
+              <a:spcBef>
+                <a:spcPts val="500"/>
+              </a:spcBef>
+              <a:buFont typeface="Arial" panose="020B0604020202020204" pitchFamily="34" charset="0"/>
+              <a:buChar char="•"/>
+              <a:defRPr sz="1800" kern="1200">
+                <a:solidFill>
+                  <a:schemeClr val="tx1"/>
+                </a:solidFill>
+                <a:latin typeface="+mn-lt"/>
+                <a:ea typeface="+mn-ea"/>
+                <a:cs typeface="+mn-cs"/>
+              </a:defRPr>
+            </a:lvl7pPr>
+            <a:lvl8pPr marL="3429000" indent="-228600" algn="l" defTabSz="914400" rtl="0" eaLnBrk="1" latinLnBrk="0" hangingPunct="1">
+              <a:lnSpc>
+                <a:spcPct val="90000"/>
+              </a:lnSpc>
+              <a:spcBef>
+                <a:spcPts val="500"/>
+              </a:spcBef>
+              <a:buFont typeface="Arial" panose="020B0604020202020204" pitchFamily="34" charset="0"/>
+              <a:buChar char="•"/>
+              <a:defRPr sz="1800" kern="1200">
+                <a:solidFill>
+                  <a:schemeClr val="tx1"/>
+                </a:solidFill>
+                <a:latin typeface="+mn-lt"/>
+                <a:ea typeface="+mn-ea"/>
+                <a:cs typeface="+mn-cs"/>
+              </a:defRPr>
+            </a:lvl8pPr>
+            <a:lvl9pPr marL="3886200" indent="-228600" algn="l" defTabSz="914400" rtl="0" eaLnBrk="1" latinLnBrk="0" hangingPunct="1">
+              <a:lnSpc>
+                <a:spcPct val="90000"/>
+              </a:lnSpc>
+              <a:spcBef>
+                <a:spcPts val="500"/>
+              </a:spcBef>
+              <a:buFont typeface="Arial" panose="020B0604020202020204" pitchFamily="34" charset="0"/>
+              <a:buChar char="•"/>
+              <a:defRPr sz="1800" kern="1200">
+                <a:solidFill>
+                  <a:schemeClr val="tx1"/>
+                </a:solidFill>
+                <a:latin typeface="+mn-lt"/>
+                <a:ea typeface="+mn-ea"/>
+                <a:cs typeface="+mn-cs"/>
+              </a:defRPr>
+            </a:lvl9pPr>
+          </a:lstStyle>
+          <a:p>
+            <a:r>
+              <a:rPr lang="en-US" dirty="0">
+                <a:latin typeface="Space Grotesk" pitchFamily="2" charset="0"/>
+                <a:cs typeface="Space Grotesk" pitchFamily="2" charset="0"/>
+              </a:rPr>
+              <a:t>Progressive Web App</a:t>
+            </a:r>
+          </a:p>
+          <a:p>
+            <a:r>
+              <a:rPr lang="en-US" dirty="0">
+                <a:latin typeface="Space Grotesk" pitchFamily="2" charset="0"/>
+                <a:cs typeface="Space Grotesk" pitchFamily="2" charset="0"/>
+              </a:rPr>
+              <a:t>JS, HTML, CSS</a:t>
+            </a:r>
+          </a:p>
+          <a:p>
+            <a:r>
+              <a:rPr lang="en-US" dirty="0">
+                <a:latin typeface="Space Grotesk" pitchFamily="2" charset="0"/>
+                <a:cs typeface="Space Grotesk" pitchFamily="2" charset="0"/>
+              </a:rPr>
+              <a:t>WebSocket</a:t>
             </a:r>
           </a:p>
           <a:p>
@@ -3548,7 +5119,7 @@
     </p:spTree>
     <p:extLst>
       <p:ext uri="{BB962C8B-B14F-4D97-AF65-F5344CB8AC3E}">
-        <p14:creationId xmlns:p14="http://schemas.microsoft.com/office/powerpoint/2010/main" val="3107572406"/>
+        <p14:creationId xmlns:p14="http://schemas.microsoft.com/office/powerpoint/2010/main" val="3912721824"/>
       </p:ext>
     </p:extLst>
   </p:cSld>
@@ -3558,9 +5129,1416 @@
 </p:sld>
 </file>
 
-<file path=ppt/slides/slide3.xml><?xml version="1.0" encoding="utf-8"?>
+<file path=ppt/slides/slide15.xml><?xml version="1.0" encoding="utf-8"?>
 <p:sld xmlns:a="http://schemas.openxmlformats.org/drawingml/2006/main" xmlns:r="http://schemas.openxmlformats.org/officeDocument/2006/relationships" xmlns:p="http://schemas.openxmlformats.org/presentationml/2006/main">
   <p:cSld>
+    <p:spTree>
+      <p:nvGrpSpPr>
+        <p:cNvPr id="1" name="">
+          <a:extLst>
+            <a:ext uri="{FF2B5EF4-FFF2-40B4-BE49-F238E27FC236}">
+              <a16:creationId xmlns:a16="http://schemas.microsoft.com/office/drawing/2014/main" id="{B0F499C2-8E27-D3B3-A10A-27096C153617}"/>
+            </a:ext>
+          </a:extLst>
+        </p:cNvPr>
+        <p:cNvGrpSpPr/>
+        <p:nvPr/>
+      </p:nvGrpSpPr>
+      <p:grpSpPr>
+        <a:xfrm>
+          <a:off x="0" y="0"/>
+          <a:ext cx="0" cy="0"/>
+          <a:chOff x="0" y="0"/>
+          <a:chExt cx="0" cy="0"/>
+        </a:xfrm>
+      </p:grpSpPr>
+      <p:sp>
+        <p:nvSpPr>
+          <p:cNvPr id="2" name="Title 1">
+            <a:extLst>
+              <a:ext uri="{FF2B5EF4-FFF2-40B4-BE49-F238E27FC236}">
+                <a16:creationId xmlns:a16="http://schemas.microsoft.com/office/drawing/2014/main" id="{458CAD3F-E12F-4BAA-FECA-2CE872CA261A}"/>
+              </a:ext>
+            </a:extLst>
+          </p:cNvPr>
+          <p:cNvSpPr>
+            <a:spLocks noGrp="1"/>
+          </p:cNvSpPr>
+          <p:nvPr>
+            <p:ph type="title"/>
+          </p:nvPr>
+        </p:nvSpPr>
+        <p:spPr/>
+        <p:txBody>
+          <a:bodyPr/>
+          <a:lstStyle/>
+          <a:p>
+            <a:r>
+              <a:rPr lang="en-US" dirty="0">
+                <a:solidFill>
+                  <a:schemeClr val="accent2">
+                    <a:lumMod val="75000"/>
+                  </a:schemeClr>
+                </a:solidFill>
+                <a:latin typeface="Space Grotesk" pitchFamily="2" charset="0"/>
+                <a:cs typeface="Space Grotesk" pitchFamily="2" charset="0"/>
+              </a:rPr>
+              <a:t>Interface de </a:t>
+            </a:r>
+            <a:r>
+              <a:rPr lang="en-US" dirty="0" err="1">
+                <a:solidFill>
+                  <a:schemeClr val="accent2">
+                    <a:lumMod val="75000"/>
+                  </a:schemeClr>
+                </a:solidFill>
+                <a:latin typeface="Space Grotesk" pitchFamily="2" charset="0"/>
+                <a:cs typeface="Space Grotesk" pitchFamily="2" charset="0"/>
+              </a:rPr>
+              <a:t>contrôle</a:t>
+            </a:r>
+            <a:br>
+              <a:rPr lang="en-US" dirty="0">
+                <a:solidFill>
+                  <a:schemeClr val="accent2">
+                    <a:lumMod val="75000"/>
+                  </a:schemeClr>
+                </a:solidFill>
+                <a:latin typeface="Space Grotesk" pitchFamily="2" charset="0"/>
+                <a:cs typeface="Space Grotesk" pitchFamily="2" charset="0"/>
+              </a:rPr>
+            </a:br>
+            <a:r>
+              <a:rPr lang="en-US" sz="2800" dirty="0">
+                <a:solidFill>
+                  <a:schemeClr val="accent2">
+                    <a:lumMod val="75000"/>
+                  </a:schemeClr>
+                </a:solidFill>
+                <a:latin typeface="Space Grotesk" pitchFamily="2" charset="0"/>
+                <a:cs typeface="Space Grotesk" pitchFamily="2" charset="0"/>
+              </a:rPr>
+              <a:t>Joysticks</a:t>
+            </a:r>
+            <a:endParaRPr lang="fr-CH" dirty="0">
+              <a:solidFill>
+                <a:schemeClr val="accent2">
+                  <a:lumMod val="75000"/>
+                </a:schemeClr>
+              </a:solidFill>
+              <a:latin typeface="Space Grotesk" pitchFamily="2" charset="0"/>
+              <a:cs typeface="Space Grotesk" pitchFamily="2" charset="0"/>
+            </a:endParaRPr>
+          </a:p>
+        </p:txBody>
+      </p:sp>
+      <p:pic>
+        <p:nvPicPr>
+          <p:cNvPr id="6" name="Content Placeholder 5">
+            <a:extLst>
+              <a:ext uri="{FF2B5EF4-FFF2-40B4-BE49-F238E27FC236}">
+                <a16:creationId xmlns:a16="http://schemas.microsoft.com/office/drawing/2014/main" id="{05F044E4-20C1-ECF1-255A-7A69E0A8601A}"/>
+              </a:ext>
+            </a:extLst>
+          </p:cNvPr>
+          <p:cNvPicPr>
+            <a:picLocks noGrp="1" noChangeAspect="1"/>
+          </p:cNvPicPr>
+          <p:nvPr>
+            <p:ph idx="1"/>
+          </p:nvPr>
+        </p:nvPicPr>
+        <p:blipFill>
+          <a:blip r:embed="rId2">
+            <a:extLst>
+              <a:ext uri="{28A0092B-C50C-407E-A947-70E740481C1C}">
+                <a14:useLocalDpi xmlns:a14="http://schemas.microsoft.com/office/drawing/2010/main" val="0"/>
+              </a:ext>
+            </a:extLst>
+          </a:blip>
+          <a:stretch>
+            <a:fillRect/>
+          </a:stretch>
+        </p:blipFill>
+        <p:spPr>
+          <a:xfrm>
+            <a:off x="891998" y="1825625"/>
+            <a:ext cx="10408003" cy="4351338"/>
+          </a:xfrm>
+          <a:prstGeom prst="rect">
+            <a:avLst/>
+          </a:prstGeom>
+        </p:spPr>
+      </p:pic>
+      <p:sp>
+        <p:nvSpPr>
+          <p:cNvPr id="3" name="Slide Number Placeholder 2">
+            <a:extLst>
+              <a:ext uri="{FF2B5EF4-FFF2-40B4-BE49-F238E27FC236}">
+                <a16:creationId xmlns:a16="http://schemas.microsoft.com/office/drawing/2014/main" id="{4773D9BD-168B-7944-1BAC-820D26137F53}"/>
+              </a:ext>
+            </a:extLst>
+          </p:cNvPr>
+          <p:cNvSpPr>
+            <a:spLocks noGrp="1"/>
+          </p:cNvSpPr>
+          <p:nvPr>
+            <p:ph type="sldNum" sz="quarter" idx="12"/>
+          </p:nvPr>
+        </p:nvSpPr>
+        <p:spPr/>
+        <p:txBody>
+          <a:bodyPr/>
+          <a:lstStyle/>
+          <a:p>
+            <a:fld id="{27610C65-3251-4B31-A496-D9D978F99BA5}" type="slidenum">
+              <a:rPr lang="fr-CH" smtClean="0"/>
+              <a:t>15</a:t>
+            </a:fld>
+            <a:endParaRPr lang="fr-CH"/>
+          </a:p>
+        </p:txBody>
+      </p:sp>
+      <p:sp>
+        <p:nvSpPr>
+          <p:cNvPr id="12" name="Content Placeholder 2">
+            <a:extLst>
+              <a:ext uri="{FF2B5EF4-FFF2-40B4-BE49-F238E27FC236}">
+                <a16:creationId xmlns:a16="http://schemas.microsoft.com/office/drawing/2014/main" id="{D6AFDF58-7EB5-0F79-FA83-7921FF8AF999}"/>
+              </a:ext>
+            </a:extLst>
+          </p:cNvPr>
+          <p:cNvSpPr txBox="1">
+            <a:spLocks/>
+          </p:cNvSpPr>
+          <p:nvPr/>
+        </p:nvSpPr>
+        <p:spPr>
+          <a:xfrm>
+            <a:off x="838200" y="1825625"/>
+            <a:ext cx="10515600" cy="4351338"/>
+          </a:xfrm>
+          <a:prstGeom prst="rect">
+            <a:avLst/>
+          </a:prstGeom>
+        </p:spPr>
+        <p:txBody>
+          <a:bodyPr vert="horz" lIns="91440" tIns="45720" rIns="91440" bIns="45720" rtlCol="0">
+            <a:normAutofit/>
+          </a:bodyPr>
+          <a:lstStyle>
+            <a:lvl1pPr marL="228600" indent="-228600" algn="l" defTabSz="914400" rtl="0" eaLnBrk="1" latinLnBrk="0" hangingPunct="1">
+              <a:lnSpc>
+                <a:spcPct val="90000"/>
+              </a:lnSpc>
+              <a:spcBef>
+                <a:spcPts val="1000"/>
+              </a:spcBef>
+              <a:buFont typeface="Arial" panose="020B0604020202020204" pitchFamily="34" charset="0"/>
+              <a:buChar char="•"/>
+              <a:defRPr sz="2800" kern="1200">
+                <a:solidFill>
+                  <a:schemeClr val="tx1"/>
+                </a:solidFill>
+                <a:latin typeface="+mn-lt"/>
+                <a:ea typeface="+mn-ea"/>
+                <a:cs typeface="+mn-cs"/>
+              </a:defRPr>
+            </a:lvl1pPr>
+            <a:lvl2pPr marL="685800" indent="-228600" algn="l" defTabSz="914400" rtl="0" eaLnBrk="1" latinLnBrk="0" hangingPunct="1">
+              <a:lnSpc>
+                <a:spcPct val="90000"/>
+              </a:lnSpc>
+              <a:spcBef>
+                <a:spcPts val="500"/>
+              </a:spcBef>
+              <a:buFont typeface="Arial" panose="020B0604020202020204" pitchFamily="34" charset="0"/>
+              <a:buChar char="•"/>
+              <a:defRPr sz="2400" kern="1200">
+                <a:solidFill>
+                  <a:schemeClr val="tx1"/>
+                </a:solidFill>
+                <a:latin typeface="+mn-lt"/>
+                <a:ea typeface="+mn-ea"/>
+                <a:cs typeface="+mn-cs"/>
+              </a:defRPr>
+            </a:lvl2pPr>
+            <a:lvl3pPr marL="1143000" indent="-228600" algn="l" defTabSz="914400" rtl="0" eaLnBrk="1" latinLnBrk="0" hangingPunct="1">
+              <a:lnSpc>
+                <a:spcPct val="90000"/>
+              </a:lnSpc>
+              <a:spcBef>
+                <a:spcPts val="500"/>
+              </a:spcBef>
+              <a:buFont typeface="Arial" panose="020B0604020202020204" pitchFamily="34" charset="0"/>
+              <a:buChar char="•"/>
+              <a:defRPr sz="2000" kern="1200">
+                <a:solidFill>
+                  <a:schemeClr val="tx1"/>
+                </a:solidFill>
+                <a:latin typeface="+mn-lt"/>
+                <a:ea typeface="+mn-ea"/>
+                <a:cs typeface="+mn-cs"/>
+              </a:defRPr>
+            </a:lvl3pPr>
+            <a:lvl4pPr marL="1600200" indent="-228600" algn="l" defTabSz="914400" rtl="0" eaLnBrk="1" latinLnBrk="0" hangingPunct="1">
+              <a:lnSpc>
+                <a:spcPct val="90000"/>
+              </a:lnSpc>
+              <a:spcBef>
+                <a:spcPts val="500"/>
+              </a:spcBef>
+              <a:buFont typeface="Arial" panose="020B0604020202020204" pitchFamily="34" charset="0"/>
+              <a:buChar char="•"/>
+              <a:defRPr sz="1800" kern="1200">
+                <a:solidFill>
+                  <a:schemeClr val="tx1"/>
+                </a:solidFill>
+                <a:latin typeface="+mn-lt"/>
+                <a:ea typeface="+mn-ea"/>
+                <a:cs typeface="+mn-cs"/>
+              </a:defRPr>
+            </a:lvl4pPr>
+            <a:lvl5pPr marL="2057400" indent="-228600" algn="l" defTabSz="914400" rtl="0" eaLnBrk="1" latinLnBrk="0" hangingPunct="1">
+              <a:lnSpc>
+                <a:spcPct val="90000"/>
+              </a:lnSpc>
+              <a:spcBef>
+                <a:spcPts val="500"/>
+              </a:spcBef>
+              <a:buFont typeface="Arial" panose="020B0604020202020204" pitchFamily="34" charset="0"/>
+              <a:buChar char="•"/>
+              <a:defRPr sz="1800" kern="1200">
+                <a:solidFill>
+                  <a:schemeClr val="tx1"/>
+                </a:solidFill>
+                <a:latin typeface="+mn-lt"/>
+                <a:ea typeface="+mn-ea"/>
+                <a:cs typeface="+mn-cs"/>
+              </a:defRPr>
+            </a:lvl5pPr>
+            <a:lvl6pPr marL="2514600" indent="-228600" algn="l" defTabSz="914400" rtl="0" eaLnBrk="1" latinLnBrk="0" hangingPunct="1">
+              <a:lnSpc>
+                <a:spcPct val="90000"/>
+              </a:lnSpc>
+              <a:spcBef>
+                <a:spcPts val="500"/>
+              </a:spcBef>
+              <a:buFont typeface="Arial" panose="020B0604020202020204" pitchFamily="34" charset="0"/>
+              <a:buChar char="•"/>
+              <a:defRPr sz="1800" kern="1200">
+                <a:solidFill>
+                  <a:schemeClr val="tx1"/>
+                </a:solidFill>
+                <a:latin typeface="+mn-lt"/>
+                <a:ea typeface="+mn-ea"/>
+                <a:cs typeface="+mn-cs"/>
+              </a:defRPr>
+            </a:lvl6pPr>
+            <a:lvl7pPr marL="2971800" indent="-228600" algn="l" defTabSz="914400" rtl="0" eaLnBrk="1" latinLnBrk="0" hangingPunct="1">
+              <a:lnSpc>
+                <a:spcPct val="90000"/>
+              </a:lnSpc>
+              <a:spcBef>
+                <a:spcPts val="500"/>
+              </a:spcBef>
+              <a:buFont typeface="Arial" panose="020B0604020202020204" pitchFamily="34" charset="0"/>
+              <a:buChar char="•"/>
+              <a:defRPr sz="1800" kern="1200">
+                <a:solidFill>
+                  <a:schemeClr val="tx1"/>
+                </a:solidFill>
+                <a:latin typeface="+mn-lt"/>
+                <a:ea typeface="+mn-ea"/>
+                <a:cs typeface="+mn-cs"/>
+              </a:defRPr>
+            </a:lvl7pPr>
+            <a:lvl8pPr marL="3429000" indent="-228600" algn="l" defTabSz="914400" rtl="0" eaLnBrk="1" latinLnBrk="0" hangingPunct="1">
+              <a:lnSpc>
+                <a:spcPct val="90000"/>
+              </a:lnSpc>
+              <a:spcBef>
+                <a:spcPts val="500"/>
+              </a:spcBef>
+              <a:buFont typeface="Arial" panose="020B0604020202020204" pitchFamily="34" charset="0"/>
+              <a:buChar char="•"/>
+              <a:defRPr sz="1800" kern="1200">
+                <a:solidFill>
+                  <a:schemeClr val="tx1"/>
+                </a:solidFill>
+                <a:latin typeface="+mn-lt"/>
+                <a:ea typeface="+mn-ea"/>
+                <a:cs typeface="+mn-cs"/>
+              </a:defRPr>
+            </a:lvl8pPr>
+            <a:lvl9pPr marL="3886200" indent="-228600" algn="l" defTabSz="914400" rtl="0" eaLnBrk="1" latinLnBrk="0" hangingPunct="1">
+              <a:lnSpc>
+                <a:spcPct val="90000"/>
+              </a:lnSpc>
+              <a:spcBef>
+                <a:spcPts val="500"/>
+              </a:spcBef>
+              <a:buFont typeface="Arial" panose="020B0604020202020204" pitchFamily="34" charset="0"/>
+              <a:buChar char="•"/>
+              <a:defRPr sz="1800" kern="1200">
+                <a:solidFill>
+                  <a:schemeClr val="tx1"/>
+                </a:solidFill>
+                <a:latin typeface="+mn-lt"/>
+                <a:ea typeface="+mn-ea"/>
+                <a:cs typeface="+mn-cs"/>
+              </a:defRPr>
+            </a:lvl9pPr>
+          </a:lstStyle>
+          <a:p>
+            <a:endParaRPr lang="fr-CH" dirty="0"/>
+          </a:p>
+        </p:txBody>
+      </p:sp>
+    </p:spTree>
+    <p:extLst>
+      <p:ext uri="{BB962C8B-B14F-4D97-AF65-F5344CB8AC3E}">
+        <p14:creationId xmlns:p14="http://schemas.microsoft.com/office/powerpoint/2010/main" val="2518891822"/>
+      </p:ext>
+    </p:extLst>
+  </p:cSld>
+  <p:clrMapOvr>
+    <a:masterClrMapping/>
+  </p:clrMapOvr>
+</p:sld>
+</file>
+
+<file path=ppt/slides/slide16.xml><?xml version="1.0" encoding="utf-8"?>
+<p:sld xmlns:a="http://schemas.openxmlformats.org/drawingml/2006/main" xmlns:r="http://schemas.openxmlformats.org/officeDocument/2006/relationships" xmlns:p="http://schemas.openxmlformats.org/presentationml/2006/main">
+  <p:cSld>
+    <p:spTree>
+      <p:nvGrpSpPr>
+        <p:cNvPr id="1" name="">
+          <a:extLst>
+            <a:ext uri="{FF2B5EF4-FFF2-40B4-BE49-F238E27FC236}">
+              <a16:creationId xmlns:a16="http://schemas.microsoft.com/office/drawing/2014/main" id="{6DD62F41-357F-C706-7459-1C6AF03DEE4B}"/>
+            </a:ext>
+          </a:extLst>
+        </p:cNvPr>
+        <p:cNvGrpSpPr/>
+        <p:nvPr/>
+      </p:nvGrpSpPr>
+      <p:grpSpPr>
+        <a:xfrm>
+          <a:off x="0" y="0"/>
+          <a:ext cx="0" cy="0"/>
+          <a:chOff x="0" y="0"/>
+          <a:chExt cx="0" cy="0"/>
+        </a:xfrm>
+      </p:grpSpPr>
+      <p:sp>
+        <p:nvSpPr>
+          <p:cNvPr id="2" name="Title 1">
+            <a:extLst>
+              <a:ext uri="{FF2B5EF4-FFF2-40B4-BE49-F238E27FC236}">
+                <a16:creationId xmlns:a16="http://schemas.microsoft.com/office/drawing/2014/main" id="{4B7D17C9-4D2F-CAEC-CCB4-31BFE42ECCCF}"/>
+              </a:ext>
+            </a:extLst>
+          </p:cNvPr>
+          <p:cNvSpPr>
+            <a:spLocks noGrp="1"/>
+          </p:cNvSpPr>
+          <p:nvPr>
+            <p:ph type="title"/>
+          </p:nvPr>
+        </p:nvSpPr>
+        <p:spPr/>
+        <p:txBody>
+          <a:bodyPr/>
+          <a:lstStyle/>
+          <a:p>
+            <a:r>
+              <a:rPr lang="en-US" dirty="0">
+                <a:solidFill>
+                  <a:schemeClr val="accent2">
+                    <a:lumMod val="75000"/>
+                  </a:schemeClr>
+                </a:solidFill>
+                <a:latin typeface="Space Grotesk" pitchFamily="2" charset="0"/>
+                <a:cs typeface="Space Grotesk" pitchFamily="2" charset="0"/>
+              </a:rPr>
+              <a:t>Interface de </a:t>
+            </a:r>
+            <a:r>
+              <a:rPr lang="en-US" dirty="0" err="1">
+                <a:solidFill>
+                  <a:schemeClr val="accent2">
+                    <a:lumMod val="75000"/>
+                  </a:schemeClr>
+                </a:solidFill>
+                <a:latin typeface="Space Grotesk" pitchFamily="2" charset="0"/>
+                <a:cs typeface="Space Grotesk" pitchFamily="2" charset="0"/>
+              </a:rPr>
+              <a:t>contrôle</a:t>
+            </a:r>
+            <a:br>
+              <a:rPr lang="en-US" dirty="0">
+                <a:solidFill>
+                  <a:schemeClr val="accent2">
+                    <a:lumMod val="75000"/>
+                  </a:schemeClr>
+                </a:solidFill>
+                <a:latin typeface="Space Grotesk" pitchFamily="2" charset="0"/>
+                <a:cs typeface="Space Grotesk" pitchFamily="2" charset="0"/>
+              </a:rPr>
+            </a:br>
+            <a:r>
+              <a:rPr lang="en-US" sz="2800" dirty="0" err="1">
+                <a:solidFill>
+                  <a:schemeClr val="accent2">
+                    <a:lumMod val="75000"/>
+                  </a:schemeClr>
+                </a:solidFill>
+                <a:latin typeface="Space Grotesk" pitchFamily="2" charset="0"/>
+                <a:cs typeface="Space Grotesk" pitchFamily="2" charset="0"/>
+              </a:rPr>
+              <a:t>Réglages</a:t>
+            </a:r>
+            <a:r>
+              <a:rPr lang="en-US" sz="2800" dirty="0">
+                <a:solidFill>
+                  <a:schemeClr val="accent2">
+                    <a:lumMod val="75000"/>
+                  </a:schemeClr>
+                </a:solidFill>
+                <a:latin typeface="Space Grotesk" pitchFamily="2" charset="0"/>
+                <a:cs typeface="Space Grotesk" pitchFamily="2" charset="0"/>
+              </a:rPr>
+              <a:t> PID</a:t>
+            </a:r>
+            <a:endParaRPr lang="fr-CH" dirty="0">
+              <a:solidFill>
+                <a:schemeClr val="accent2">
+                  <a:lumMod val="75000"/>
+                </a:schemeClr>
+              </a:solidFill>
+              <a:latin typeface="Space Grotesk" pitchFamily="2" charset="0"/>
+              <a:cs typeface="Space Grotesk" pitchFamily="2" charset="0"/>
+            </a:endParaRPr>
+          </a:p>
+        </p:txBody>
+      </p:sp>
+      <p:pic>
+        <p:nvPicPr>
+          <p:cNvPr id="7" name="Content Placeholder 6">
+            <a:extLst>
+              <a:ext uri="{FF2B5EF4-FFF2-40B4-BE49-F238E27FC236}">
+                <a16:creationId xmlns:a16="http://schemas.microsoft.com/office/drawing/2014/main" id="{2B47582E-0C38-503B-8ACA-3A7A5098571B}"/>
+              </a:ext>
+            </a:extLst>
+          </p:cNvPr>
+          <p:cNvPicPr>
+            <a:picLocks noGrp="1" noChangeAspect="1"/>
+          </p:cNvPicPr>
+          <p:nvPr>
+            <p:ph idx="1"/>
+          </p:nvPr>
+        </p:nvPicPr>
+        <p:blipFill>
+          <a:blip r:embed="rId2">
+            <a:extLst>
+              <a:ext uri="{28A0092B-C50C-407E-A947-70E740481C1C}">
+                <a14:useLocalDpi xmlns:a14="http://schemas.microsoft.com/office/drawing/2010/main" val="0"/>
+              </a:ext>
+            </a:extLst>
+          </a:blip>
+          <a:stretch>
+            <a:fillRect/>
+          </a:stretch>
+        </p:blipFill>
+        <p:spPr>
+          <a:xfrm>
+            <a:off x="986393" y="1825625"/>
+            <a:ext cx="10219213" cy="4351338"/>
+          </a:xfrm>
+          <a:prstGeom prst="rect">
+            <a:avLst/>
+          </a:prstGeom>
+        </p:spPr>
+      </p:pic>
+      <p:sp>
+        <p:nvSpPr>
+          <p:cNvPr id="3" name="Slide Number Placeholder 2">
+            <a:extLst>
+              <a:ext uri="{FF2B5EF4-FFF2-40B4-BE49-F238E27FC236}">
+                <a16:creationId xmlns:a16="http://schemas.microsoft.com/office/drawing/2014/main" id="{E66D2C85-6BBF-CBFD-4987-185F0497073B}"/>
+              </a:ext>
+            </a:extLst>
+          </p:cNvPr>
+          <p:cNvSpPr>
+            <a:spLocks noGrp="1"/>
+          </p:cNvSpPr>
+          <p:nvPr>
+            <p:ph type="sldNum" sz="quarter" idx="12"/>
+          </p:nvPr>
+        </p:nvSpPr>
+        <p:spPr/>
+        <p:txBody>
+          <a:bodyPr/>
+          <a:lstStyle/>
+          <a:p>
+            <a:fld id="{27610C65-3251-4B31-A496-D9D978F99BA5}" type="slidenum">
+              <a:rPr lang="fr-CH" smtClean="0"/>
+              <a:t>16</a:t>
+            </a:fld>
+            <a:endParaRPr lang="fr-CH"/>
+          </a:p>
+        </p:txBody>
+      </p:sp>
+      <p:sp>
+        <p:nvSpPr>
+          <p:cNvPr id="12" name="Content Placeholder 2">
+            <a:extLst>
+              <a:ext uri="{FF2B5EF4-FFF2-40B4-BE49-F238E27FC236}">
+                <a16:creationId xmlns:a16="http://schemas.microsoft.com/office/drawing/2014/main" id="{6A736BA0-E17C-D179-6876-0EEE9B13B8C4}"/>
+              </a:ext>
+            </a:extLst>
+          </p:cNvPr>
+          <p:cNvSpPr txBox="1">
+            <a:spLocks/>
+          </p:cNvSpPr>
+          <p:nvPr/>
+        </p:nvSpPr>
+        <p:spPr>
+          <a:xfrm>
+            <a:off x="838200" y="1825625"/>
+            <a:ext cx="10515600" cy="4351338"/>
+          </a:xfrm>
+          <a:prstGeom prst="rect">
+            <a:avLst/>
+          </a:prstGeom>
+        </p:spPr>
+        <p:txBody>
+          <a:bodyPr vert="horz" lIns="91440" tIns="45720" rIns="91440" bIns="45720" rtlCol="0">
+            <a:normAutofit/>
+          </a:bodyPr>
+          <a:lstStyle>
+            <a:lvl1pPr marL="228600" indent="-228600" algn="l" defTabSz="914400" rtl="0" eaLnBrk="1" latinLnBrk="0" hangingPunct="1">
+              <a:lnSpc>
+                <a:spcPct val="90000"/>
+              </a:lnSpc>
+              <a:spcBef>
+                <a:spcPts val="1000"/>
+              </a:spcBef>
+              <a:buFont typeface="Arial" panose="020B0604020202020204" pitchFamily="34" charset="0"/>
+              <a:buChar char="•"/>
+              <a:defRPr sz="2800" kern="1200">
+                <a:solidFill>
+                  <a:schemeClr val="tx1"/>
+                </a:solidFill>
+                <a:latin typeface="+mn-lt"/>
+                <a:ea typeface="+mn-ea"/>
+                <a:cs typeface="+mn-cs"/>
+              </a:defRPr>
+            </a:lvl1pPr>
+            <a:lvl2pPr marL="685800" indent="-228600" algn="l" defTabSz="914400" rtl="0" eaLnBrk="1" latinLnBrk="0" hangingPunct="1">
+              <a:lnSpc>
+                <a:spcPct val="90000"/>
+              </a:lnSpc>
+              <a:spcBef>
+                <a:spcPts val="500"/>
+              </a:spcBef>
+              <a:buFont typeface="Arial" panose="020B0604020202020204" pitchFamily="34" charset="0"/>
+              <a:buChar char="•"/>
+              <a:defRPr sz="2400" kern="1200">
+                <a:solidFill>
+                  <a:schemeClr val="tx1"/>
+                </a:solidFill>
+                <a:latin typeface="+mn-lt"/>
+                <a:ea typeface="+mn-ea"/>
+                <a:cs typeface="+mn-cs"/>
+              </a:defRPr>
+            </a:lvl2pPr>
+            <a:lvl3pPr marL="1143000" indent="-228600" algn="l" defTabSz="914400" rtl="0" eaLnBrk="1" latinLnBrk="0" hangingPunct="1">
+              <a:lnSpc>
+                <a:spcPct val="90000"/>
+              </a:lnSpc>
+              <a:spcBef>
+                <a:spcPts val="500"/>
+              </a:spcBef>
+              <a:buFont typeface="Arial" panose="020B0604020202020204" pitchFamily="34" charset="0"/>
+              <a:buChar char="•"/>
+              <a:defRPr sz="2000" kern="1200">
+                <a:solidFill>
+                  <a:schemeClr val="tx1"/>
+                </a:solidFill>
+                <a:latin typeface="+mn-lt"/>
+                <a:ea typeface="+mn-ea"/>
+                <a:cs typeface="+mn-cs"/>
+              </a:defRPr>
+            </a:lvl3pPr>
+            <a:lvl4pPr marL="1600200" indent="-228600" algn="l" defTabSz="914400" rtl="0" eaLnBrk="1" latinLnBrk="0" hangingPunct="1">
+              <a:lnSpc>
+                <a:spcPct val="90000"/>
+              </a:lnSpc>
+              <a:spcBef>
+                <a:spcPts val="500"/>
+              </a:spcBef>
+              <a:buFont typeface="Arial" panose="020B0604020202020204" pitchFamily="34" charset="0"/>
+              <a:buChar char="•"/>
+              <a:defRPr sz="1800" kern="1200">
+                <a:solidFill>
+                  <a:schemeClr val="tx1"/>
+                </a:solidFill>
+                <a:latin typeface="+mn-lt"/>
+                <a:ea typeface="+mn-ea"/>
+                <a:cs typeface="+mn-cs"/>
+              </a:defRPr>
+            </a:lvl4pPr>
+            <a:lvl5pPr marL="2057400" indent="-228600" algn="l" defTabSz="914400" rtl="0" eaLnBrk="1" latinLnBrk="0" hangingPunct="1">
+              <a:lnSpc>
+                <a:spcPct val="90000"/>
+              </a:lnSpc>
+              <a:spcBef>
+                <a:spcPts val="500"/>
+              </a:spcBef>
+              <a:buFont typeface="Arial" panose="020B0604020202020204" pitchFamily="34" charset="0"/>
+              <a:buChar char="•"/>
+              <a:defRPr sz="1800" kern="1200">
+                <a:solidFill>
+                  <a:schemeClr val="tx1"/>
+                </a:solidFill>
+                <a:latin typeface="+mn-lt"/>
+                <a:ea typeface="+mn-ea"/>
+                <a:cs typeface="+mn-cs"/>
+              </a:defRPr>
+            </a:lvl5pPr>
+            <a:lvl6pPr marL="2514600" indent="-228600" algn="l" defTabSz="914400" rtl="0" eaLnBrk="1" latinLnBrk="0" hangingPunct="1">
+              <a:lnSpc>
+                <a:spcPct val="90000"/>
+              </a:lnSpc>
+              <a:spcBef>
+                <a:spcPts val="500"/>
+              </a:spcBef>
+              <a:buFont typeface="Arial" panose="020B0604020202020204" pitchFamily="34" charset="0"/>
+              <a:buChar char="•"/>
+              <a:defRPr sz="1800" kern="1200">
+                <a:solidFill>
+                  <a:schemeClr val="tx1"/>
+                </a:solidFill>
+                <a:latin typeface="+mn-lt"/>
+                <a:ea typeface="+mn-ea"/>
+                <a:cs typeface="+mn-cs"/>
+              </a:defRPr>
+            </a:lvl6pPr>
+            <a:lvl7pPr marL="2971800" indent="-228600" algn="l" defTabSz="914400" rtl="0" eaLnBrk="1" latinLnBrk="0" hangingPunct="1">
+              <a:lnSpc>
+                <a:spcPct val="90000"/>
+              </a:lnSpc>
+              <a:spcBef>
+                <a:spcPts val="500"/>
+              </a:spcBef>
+              <a:buFont typeface="Arial" panose="020B0604020202020204" pitchFamily="34" charset="0"/>
+              <a:buChar char="•"/>
+              <a:defRPr sz="1800" kern="1200">
+                <a:solidFill>
+                  <a:schemeClr val="tx1"/>
+                </a:solidFill>
+                <a:latin typeface="+mn-lt"/>
+                <a:ea typeface="+mn-ea"/>
+                <a:cs typeface="+mn-cs"/>
+              </a:defRPr>
+            </a:lvl7pPr>
+            <a:lvl8pPr marL="3429000" indent="-228600" algn="l" defTabSz="914400" rtl="0" eaLnBrk="1" latinLnBrk="0" hangingPunct="1">
+              <a:lnSpc>
+                <a:spcPct val="90000"/>
+              </a:lnSpc>
+              <a:spcBef>
+                <a:spcPts val="500"/>
+              </a:spcBef>
+              <a:buFont typeface="Arial" panose="020B0604020202020204" pitchFamily="34" charset="0"/>
+              <a:buChar char="•"/>
+              <a:defRPr sz="1800" kern="1200">
+                <a:solidFill>
+                  <a:schemeClr val="tx1"/>
+                </a:solidFill>
+                <a:latin typeface="+mn-lt"/>
+                <a:ea typeface="+mn-ea"/>
+                <a:cs typeface="+mn-cs"/>
+              </a:defRPr>
+            </a:lvl8pPr>
+            <a:lvl9pPr marL="3886200" indent="-228600" algn="l" defTabSz="914400" rtl="0" eaLnBrk="1" latinLnBrk="0" hangingPunct="1">
+              <a:lnSpc>
+                <a:spcPct val="90000"/>
+              </a:lnSpc>
+              <a:spcBef>
+                <a:spcPts val="500"/>
+              </a:spcBef>
+              <a:buFont typeface="Arial" panose="020B0604020202020204" pitchFamily="34" charset="0"/>
+              <a:buChar char="•"/>
+              <a:defRPr sz="1800" kern="1200">
+                <a:solidFill>
+                  <a:schemeClr val="tx1"/>
+                </a:solidFill>
+                <a:latin typeface="+mn-lt"/>
+                <a:ea typeface="+mn-ea"/>
+                <a:cs typeface="+mn-cs"/>
+              </a:defRPr>
+            </a:lvl9pPr>
+          </a:lstStyle>
+          <a:p>
+            <a:endParaRPr lang="fr-CH" dirty="0"/>
+          </a:p>
+        </p:txBody>
+      </p:sp>
+    </p:spTree>
+    <p:extLst>
+      <p:ext uri="{BB962C8B-B14F-4D97-AF65-F5344CB8AC3E}">
+        <p14:creationId xmlns:p14="http://schemas.microsoft.com/office/powerpoint/2010/main" val="1794083544"/>
+      </p:ext>
+    </p:extLst>
+  </p:cSld>
+  <p:clrMapOvr>
+    <a:masterClrMapping/>
+  </p:clrMapOvr>
+</p:sld>
+</file>
+
+<file path=ppt/slides/slide17.xml><?xml version="1.0" encoding="utf-8"?>
+<p:sld xmlns:a="http://schemas.openxmlformats.org/drawingml/2006/main" xmlns:r="http://schemas.openxmlformats.org/officeDocument/2006/relationships" xmlns:p="http://schemas.openxmlformats.org/presentationml/2006/main">
+  <p:cSld>
+    <p:spTree>
+      <p:nvGrpSpPr>
+        <p:cNvPr id="1" name="">
+          <a:extLst>
+            <a:ext uri="{FF2B5EF4-FFF2-40B4-BE49-F238E27FC236}">
+              <a16:creationId xmlns:a16="http://schemas.microsoft.com/office/drawing/2014/main" id="{9E03273D-A1BF-7B7A-7805-692E4C80E9A5}"/>
+            </a:ext>
+          </a:extLst>
+        </p:cNvPr>
+        <p:cNvGrpSpPr/>
+        <p:nvPr/>
+      </p:nvGrpSpPr>
+      <p:grpSpPr>
+        <a:xfrm>
+          <a:off x="0" y="0"/>
+          <a:ext cx="0" cy="0"/>
+          <a:chOff x="0" y="0"/>
+          <a:chExt cx="0" cy="0"/>
+        </a:xfrm>
+      </p:grpSpPr>
+      <p:sp>
+        <p:nvSpPr>
+          <p:cNvPr id="2" name="Title 1">
+            <a:extLst>
+              <a:ext uri="{FF2B5EF4-FFF2-40B4-BE49-F238E27FC236}">
+                <a16:creationId xmlns:a16="http://schemas.microsoft.com/office/drawing/2014/main" id="{CBE337C2-15BF-35BE-8148-8931C2B0D618}"/>
+              </a:ext>
+            </a:extLst>
+          </p:cNvPr>
+          <p:cNvSpPr>
+            <a:spLocks noGrp="1"/>
+          </p:cNvSpPr>
+          <p:nvPr>
+            <p:ph type="title"/>
+          </p:nvPr>
+        </p:nvSpPr>
+        <p:spPr>
+          <a:xfrm>
+            <a:off x="838200" y="373901"/>
+            <a:ext cx="10515600" cy="1325563"/>
+          </a:xfrm>
+        </p:spPr>
+        <p:txBody>
+          <a:bodyPr/>
+          <a:lstStyle/>
+          <a:p>
+            <a:r>
+              <a:rPr lang="en-US" dirty="0">
+                <a:solidFill>
+                  <a:schemeClr val="accent6">
+                    <a:lumMod val="75000"/>
+                  </a:schemeClr>
+                </a:solidFill>
+                <a:latin typeface="Space Grotesk" pitchFamily="2" charset="0"/>
+                <a:cs typeface="Space Grotesk" pitchFamily="2" charset="0"/>
+              </a:rPr>
+              <a:t>Simulation</a:t>
+            </a:r>
+            <a:br>
+              <a:rPr lang="en-US" dirty="0">
+                <a:solidFill>
+                  <a:schemeClr val="accent6">
+                    <a:lumMod val="75000"/>
+                  </a:schemeClr>
+                </a:solidFill>
+                <a:latin typeface="Space Grotesk" pitchFamily="2" charset="0"/>
+                <a:cs typeface="Space Grotesk" pitchFamily="2" charset="0"/>
+              </a:rPr>
+            </a:br>
+            <a:r>
+              <a:rPr lang="en-US" sz="2800" dirty="0" err="1">
+                <a:solidFill>
+                  <a:schemeClr val="accent6">
+                    <a:lumMod val="75000"/>
+                  </a:schemeClr>
+                </a:solidFill>
+                <a:latin typeface="Space Grotesk" pitchFamily="2" charset="0"/>
+                <a:cs typeface="Space Grotesk" pitchFamily="2" charset="0"/>
+              </a:rPr>
+              <a:t>Hypothèses</a:t>
+            </a:r>
+            <a:endParaRPr lang="fr-CH" dirty="0">
+              <a:solidFill>
+                <a:schemeClr val="accent6">
+                  <a:lumMod val="75000"/>
+                </a:schemeClr>
+              </a:solidFill>
+              <a:latin typeface="Space Grotesk" pitchFamily="2" charset="0"/>
+              <a:cs typeface="Space Grotesk" pitchFamily="2" charset="0"/>
+            </a:endParaRPr>
+          </a:p>
+        </p:txBody>
+      </p:sp>
+      <p:sp>
+        <p:nvSpPr>
+          <p:cNvPr id="5" name="Content Placeholder 4">
+            <a:extLst>
+              <a:ext uri="{FF2B5EF4-FFF2-40B4-BE49-F238E27FC236}">
+                <a16:creationId xmlns:a16="http://schemas.microsoft.com/office/drawing/2014/main" id="{46021B8A-82C9-B722-6065-B2C7A7CBAB27}"/>
+              </a:ext>
+            </a:extLst>
+          </p:cNvPr>
+          <p:cNvSpPr>
+            <a:spLocks noGrp="1"/>
+          </p:cNvSpPr>
+          <p:nvPr>
+            <p:ph idx="1"/>
+          </p:nvPr>
+        </p:nvSpPr>
+        <p:spPr/>
+        <p:txBody>
+          <a:bodyPr/>
+          <a:lstStyle/>
+          <a:p>
+            <a:r>
+              <a:rPr lang="en-US" dirty="0">
+                <a:latin typeface="Space Grotesk" pitchFamily="2" charset="0"/>
+                <a:cs typeface="Space Grotesk" pitchFamily="2" charset="0"/>
+              </a:rPr>
+              <a:t>Couple </a:t>
+            </a:r>
+            <a:r>
+              <a:rPr lang="en-US" dirty="0" err="1">
+                <a:latin typeface="Space Grotesk" pitchFamily="2" charset="0"/>
+                <a:cs typeface="Space Grotesk" pitchFamily="2" charset="0"/>
+              </a:rPr>
+              <a:t>continu</a:t>
+            </a:r>
+            <a:endParaRPr lang="en-US" dirty="0">
+              <a:latin typeface="Space Grotesk" pitchFamily="2" charset="0"/>
+              <a:cs typeface="Space Grotesk" pitchFamily="2" charset="0"/>
+            </a:endParaRPr>
+          </a:p>
+          <a:p>
+            <a:r>
+              <a:rPr lang="en-US" dirty="0" err="1">
+                <a:latin typeface="Space Grotesk" pitchFamily="2" charset="0"/>
+                <a:cs typeface="Space Grotesk" pitchFamily="2" charset="0"/>
+              </a:rPr>
+              <a:t>Aucun</a:t>
+            </a:r>
+            <a:r>
+              <a:rPr lang="en-US" dirty="0">
+                <a:latin typeface="Space Grotesk" pitchFamily="2" charset="0"/>
+                <a:cs typeface="Space Grotesk" pitchFamily="2" charset="0"/>
+              </a:rPr>
+              <a:t> </a:t>
+            </a:r>
+            <a:r>
+              <a:rPr lang="en-US" dirty="0" err="1">
+                <a:latin typeface="Space Grotesk" pitchFamily="2" charset="0"/>
+                <a:cs typeface="Space Grotesk" pitchFamily="2" charset="0"/>
+              </a:rPr>
+              <a:t>frottement</a:t>
+            </a:r>
+            <a:endParaRPr lang="en-US" dirty="0">
+              <a:latin typeface="Space Grotesk" pitchFamily="2" charset="0"/>
+              <a:cs typeface="Space Grotesk" pitchFamily="2" charset="0"/>
+            </a:endParaRPr>
+          </a:p>
+          <a:p>
+            <a:r>
+              <a:rPr lang="en-US" dirty="0" err="1">
+                <a:latin typeface="Space Grotesk" pitchFamily="2" charset="0"/>
+                <a:cs typeface="Space Grotesk" pitchFamily="2" charset="0"/>
+              </a:rPr>
+              <a:t>Rigidité</a:t>
+            </a:r>
+            <a:r>
+              <a:rPr lang="en-US" dirty="0">
+                <a:latin typeface="Space Grotesk" pitchFamily="2" charset="0"/>
+                <a:cs typeface="Space Grotesk" pitchFamily="2" charset="0"/>
+              </a:rPr>
+              <a:t> </a:t>
+            </a:r>
+            <a:r>
+              <a:rPr lang="en-US" dirty="0" err="1">
+                <a:latin typeface="Space Grotesk" pitchFamily="2" charset="0"/>
+                <a:cs typeface="Space Grotesk" pitchFamily="2" charset="0"/>
+              </a:rPr>
+              <a:t>parfaite</a:t>
+            </a:r>
+            <a:r>
+              <a:rPr lang="en-US" dirty="0">
+                <a:latin typeface="Space Grotesk" pitchFamily="2" charset="0"/>
+                <a:cs typeface="Space Grotesk" pitchFamily="2" charset="0"/>
+              </a:rPr>
+              <a:t> du chassis</a:t>
+            </a:r>
+          </a:p>
+          <a:p>
+            <a:endParaRPr lang="fr-CH" dirty="0"/>
+          </a:p>
+        </p:txBody>
+      </p:sp>
+      <p:sp>
+        <p:nvSpPr>
+          <p:cNvPr id="3" name="Slide Number Placeholder 2">
+            <a:extLst>
+              <a:ext uri="{FF2B5EF4-FFF2-40B4-BE49-F238E27FC236}">
+                <a16:creationId xmlns:a16="http://schemas.microsoft.com/office/drawing/2014/main" id="{6F09A62C-FBAA-6841-6112-6FD0E1A4DCC1}"/>
+              </a:ext>
+            </a:extLst>
+          </p:cNvPr>
+          <p:cNvSpPr>
+            <a:spLocks noGrp="1"/>
+          </p:cNvSpPr>
+          <p:nvPr>
+            <p:ph type="sldNum" sz="quarter" idx="12"/>
+          </p:nvPr>
+        </p:nvSpPr>
+        <p:spPr/>
+        <p:txBody>
+          <a:bodyPr/>
+          <a:lstStyle/>
+          <a:p>
+            <a:fld id="{27610C65-3251-4B31-A496-D9D978F99BA5}" type="slidenum">
+              <a:rPr lang="fr-CH" smtClean="0"/>
+              <a:t>17</a:t>
+            </a:fld>
+            <a:endParaRPr lang="fr-CH"/>
+          </a:p>
+        </p:txBody>
+      </p:sp>
+    </p:spTree>
+    <p:extLst>
+      <p:ext uri="{BB962C8B-B14F-4D97-AF65-F5344CB8AC3E}">
+        <p14:creationId xmlns:p14="http://schemas.microsoft.com/office/powerpoint/2010/main" val="1691298889"/>
+      </p:ext>
+    </p:extLst>
+  </p:cSld>
+  <p:clrMapOvr>
+    <a:masterClrMapping/>
+  </p:clrMapOvr>
+</p:sld>
+</file>
+
+<file path=ppt/slides/slide18.xml><?xml version="1.0" encoding="utf-8"?>
+<p:sld xmlns:a="http://schemas.openxmlformats.org/drawingml/2006/main" xmlns:r="http://schemas.openxmlformats.org/officeDocument/2006/relationships" xmlns:p="http://schemas.openxmlformats.org/presentationml/2006/main">
+  <p:cSld>
+    <p:spTree>
+      <p:nvGrpSpPr>
+        <p:cNvPr id="1" name="">
+          <a:extLst>
+            <a:ext uri="{FF2B5EF4-FFF2-40B4-BE49-F238E27FC236}">
+              <a16:creationId xmlns:a16="http://schemas.microsoft.com/office/drawing/2014/main" id="{ED630EFB-3778-9A7A-46A1-0F677FDFC30B}"/>
+            </a:ext>
+          </a:extLst>
+        </p:cNvPr>
+        <p:cNvGrpSpPr/>
+        <p:nvPr/>
+      </p:nvGrpSpPr>
+      <p:grpSpPr>
+        <a:xfrm>
+          <a:off x="0" y="0"/>
+          <a:ext cx="0" cy="0"/>
+          <a:chOff x="0" y="0"/>
+          <a:chExt cx="0" cy="0"/>
+        </a:xfrm>
+      </p:grpSpPr>
+      <p:sp>
+        <p:nvSpPr>
+          <p:cNvPr id="2" name="Title 1">
+            <a:extLst>
+              <a:ext uri="{FF2B5EF4-FFF2-40B4-BE49-F238E27FC236}">
+                <a16:creationId xmlns:a16="http://schemas.microsoft.com/office/drawing/2014/main" id="{4D4753F5-2BE2-6836-8E5A-FA28D4E26F27}"/>
+              </a:ext>
+            </a:extLst>
+          </p:cNvPr>
+          <p:cNvSpPr>
+            <a:spLocks noGrp="1"/>
+          </p:cNvSpPr>
+          <p:nvPr>
+            <p:ph type="title"/>
+          </p:nvPr>
+        </p:nvSpPr>
+        <p:spPr>
+          <a:xfrm>
+            <a:off x="838200" y="373901"/>
+            <a:ext cx="10515600" cy="1325563"/>
+          </a:xfrm>
+        </p:spPr>
+        <p:txBody>
+          <a:bodyPr/>
+          <a:lstStyle/>
+          <a:p>
+            <a:r>
+              <a:rPr lang="en-US" dirty="0">
+                <a:solidFill>
+                  <a:schemeClr val="accent6">
+                    <a:lumMod val="75000"/>
+                  </a:schemeClr>
+                </a:solidFill>
+                <a:latin typeface="Space Grotesk" pitchFamily="2" charset="0"/>
+                <a:cs typeface="Space Grotesk" pitchFamily="2" charset="0"/>
+              </a:rPr>
+              <a:t>Simulation</a:t>
+            </a:r>
+            <a:br>
+              <a:rPr lang="en-US" dirty="0">
+                <a:solidFill>
+                  <a:schemeClr val="accent6">
+                    <a:lumMod val="75000"/>
+                  </a:schemeClr>
+                </a:solidFill>
+                <a:latin typeface="Space Grotesk" pitchFamily="2" charset="0"/>
+                <a:cs typeface="Space Grotesk" pitchFamily="2" charset="0"/>
+              </a:rPr>
+            </a:br>
+            <a:r>
+              <a:rPr lang="en-US" sz="2800" dirty="0" err="1">
+                <a:solidFill>
+                  <a:schemeClr val="accent6">
+                    <a:lumMod val="75000"/>
+                  </a:schemeClr>
+                </a:solidFill>
+                <a:latin typeface="Space Grotesk" pitchFamily="2" charset="0"/>
+                <a:cs typeface="Space Grotesk" pitchFamily="2" charset="0"/>
+              </a:rPr>
+              <a:t>Complet</a:t>
+            </a:r>
+            <a:endParaRPr lang="fr-CH" dirty="0">
+              <a:solidFill>
+                <a:schemeClr val="accent6">
+                  <a:lumMod val="75000"/>
+                </a:schemeClr>
+              </a:solidFill>
+              <a:latin typeface="Space Grotesk" pitchFamily="2" charset="0"/>
+              <a:cs typeface="Space Grotesk" pitchFamily="2" charset="0"/>
+            </a:endParaRPr>
+          </a:p>
+        </p:txBody>
+      </p:sp>
+      <p:pic>
+        <p:nvPicPr>
+          <p:cNvPr id="21" name="Content Placeholder 20">
+            <a:extLst>
+              <a:ext uri="{FF2B5EF4-FFF2-40B4-BE49-F238E27FC236}">
+                <a16:creationId xmlns:a16="http://schemas.microsoft.com/office/drawing/2014/main" id="{17654B95-455E-3149-02C7-8CEE3BD1B9E1}"/>
+              </a:ext>
+            </a:extLst>
+          </p:cNvPr>
+          <p:cNvPicPr>
+            <a:picLocks noGrp="1" noChangeAspect="1"/>
+          </p:cNvPicPr>
+          <p:nvPr>
+            <p:ph idx="1"/>
+          </p:nvPr>
+        </p:nvPicPr>
+        <p:blipFill>
+          <a:blip r:embed="rId2">
+            <a:extLst>
+              <a:ext uri="{28A0092B-C50C-407E-A947-70E740481C1C}">
+                <a14:useLocalDpi xmlns:a14="http://schemas.microsoft.com/office/drawing/2010/main" val="0"/>
+              </a:ext>
+            </a:extLst>
+          </a:blip>
+          <a:srcRect l="-769" t="21846" r="769" b="23637"/>
+          <a:stretch>
+            <a:fillRect/>
+          </a:stretch>
+        </p:blipFill>
+        <p:spPr>
+          <a:xfrm>
+            <a:off x="838200" y="1594418"/>
+            <a:ext cx="10335799" cy="4354098"/>
+          </a:xfrm>
+          <a:prstGeom prst="rect">
+            <a:avLst/>
+          </a:prstGeom>
+        </p:spPr>
+      </p:pic>
+      <p:sp>
+        <p:nvSpPr>
+          <p:cNvPr id="3" name="Slide Number Placeholder 2">
+            <a:extLst>
+              <a:ext uri="{FF2B5EF4-FFF2-40B4-BE49-F238E27FC236}">
+                <a16:creationId xmlns:a16="http://schemas.microsoft.com/office/drawing/2014/main" id="{6F7C0E79-B220-3275-BC90-1A984B1B5701}"/>
+              </a:ext>
+            </a:extLst>
+          </p:cNvPr>
+          <p:cNvSpPr>
+            <a:spLocks noGrp="1"/>
+          </p:cNvSpPr>
+          <p:nvPr>
+            <p:ph type="sldNum" sz="quarter" idx="12"/>
+          </p:nvPr>
+        </p:nvSpPr>
+        <p:spPr/>
+        <p:txBody>
+          <a:bodyPr/>
+          <a:lstStyle/>
+          <a:p>
+            <a:fld id="{27610C65-3251-4B31-A496-D9D978F99BA5}" type="slidenum">
+              <a:rPr lang="fr-CH" smtClean="0"/>
+              <a:t>18</a:t>
+            </a:fld>
+            <a:endParaRPr lang="fr-CH"/>
+          </a:p>
+        </p:txBody>
+      </p:sp>
+    </p:spTree>
+    <p:extLst>
+      <p:ext uri="{BB962C8B-B14F-4D97-AF65-F5344CB8AC3E}">
+        <p14:creationId xmlns:p14="http://schemas.microsoft.com/office/powerpoint/2010/main" val="1204793142"/>
+      </p:ext>
+    </p:extLst>
+  </p:cSld>
+  <p:clrMapOvr>
+    <a:masterClrMapping/>
+  </p:clrMapOvr>
+</p:sld>
+</file>
+
+<file path=ppt/slides/slide19.xml><?xml version="1.0" encoding="utf-8"?>
+<p:sld xmlns:a="http://schemas.openxmlformats.org/drawingml/2006/main" xmlns:r="http://schemas.openxmlformats.org/officeDocument/2006/relationships" xmlns:p="http://schemas.openxmlformats.org/presentationml/2006/main">
+  <p:cSld>
+    <p:spTree>
+      <p:nvGrpSpPr>
+        <p:cNvPr id="1" name="">
+          <a:extLst>
+            <a:ext uri="{FF2B5EF4-FFF2-40B4-BE49-F238E27FC236}">
+              <a16:creationId xmlns:a16="http://schemas.microsoft.com/office/drawing/2014/main" id="{F4300B99-DAF1-DAAE-3D6D-6E5473ECC729}"/>
+            </a:ext>
+          </a:extLst>
+        </p:cNvPr>
+        <p:cNvGrpSpPr/>
+        <p:nvPr/>
+      </p:nvGrpSpPr>
+      <p:grpSpPr>
+        <a:xfrm>
+          <a:off x="0" y="0"/>
+          <a:ext cx="0" cy="0"/>
+          <a:chOff x="0" y="0"/>
+          <a:chExt cx="0" cy="0"/>
+        </a:xfrm>
+      </p:grpSpPr>
+      <p:sp>
+        <p:nvSpPr>
+          <p:cNvPr id="2" name="Title 1">
+            <a:extLst>
+              <a:ext uri="{FF2B5EF4-FFF2-40B4-BE49-F238E27FC236}">
+                <a16:creationId xmlns:a16="http://schemas.microsoft.com/office/drawing/2014/main" id="{3168ED04-4F37-7A71-0A0C-4B0812235744}"/>
+              </a:ext>
+            </a:extLst>
+          </p:cNvPr>
+          <p:cNvSpPr>
+            <a:spLocks noGrp="1"/>
+          </p:cNvSpPr>
+          <p:nvPr>
+            <p:ph type="title"/>
+          </p:nvPr>
+        </p:nvSpPr>
+        <p:spPr>
+          <a:xfrm>
+            <a:off x="838200" y="373901"/>
+            <a:ext cx="10515600" cy="1325563"/>
+          </a:xfrm>
+        </p:spPr>
+        <p:txBody>
+          <a:bodyPr/>
+          <a:lstStyle/>
+          <a:p>
+            <a:r>
+              <a:rPr lang="en-US" dirty="0">
+                <a:solidFill>
+                  <a:schemeClr val="accent6">
+                    <a:lumMod val="75000"/>
+                  </a:schemeClr>
+                </a:solidFill>
+                <a:latin typeface="Space Grotesk" pitchFamily="2" charset="0"/>
+                <a:cs typeface="Space Grotesk" pitchFamily="2" charset="0"/>
+              </a:rPr>
+              <a:t>Simulation</a:t>
+            </a:r>
+            <a:br>
+              <a:rPr lang="en-US" dirty="0">
+                <a:solidFill>
+                  <a:schemeClr val="accent6">
+                    <a:lumMod val="75000"/>
+                  </a:schemeClr>
+                </a:solidFill>
+                <a:latin typeface="Space Grotesk" pitchFamily="2" charset="0"/>
+                <a:cs typeface="Space Grotesk" pitchFamily="2" charset="0"/>
+              </a:rPr>
+            </a:br>
+            <a:r>
+              <a:rPr lang="en-US" sz="2800" dirty="0" err="1">
+                <a:solidFill>
+                  <a:schemeClr val="accent6">
+                    <a:lumMod val="75000"/>
+                  </a:schemeClr>
+                </a:solidFill>
+                <a:latin typeface="Space Grotesk" pitchFamily="2" charset="0"/>
+                <a:cs typeface="Space Grotesk" pitchFamily="2" charset="0"/>
+              </a:rPr>
+              <a:t>Consigne</a:t>
+            </a:r>
+            <a:endParaRPr lang="fr-CH" dirty="0">
+              <a:solidFill>
+                <a:schemeClr val="accent6">
+                  <a:lumMod val="75000"/>
+                </a:schemeClr>
+              </a:solidFill>
+              <a:latin typeface="Space Grotesk" pitchFamily="2" charset="0"/>
+              <a:cs typeface="Space Grotesk" pitchFamily="2" charset="0"/>
+            </a:endParaRPr>
+          </a:p>
+        </p:txBody>
+      </p:sp>
+      <p:sp>
+        <p:nvSpPr>
+          <p:cNvPr id="4" name="Content Placeholder 3">
+            <a:extLst>
+              <a:ext uri="{FF2B5EF4-FFF2-40B4-BE49-F238E27FC236}">
+                <a16:creationId xmlns:a16="http://schemas.microsoft.com/office/drawing/2014/main" id="{E675CC0C-1A93-347B-CF6A-DC38B5C8114D}"/>
+              </a:ext>
+            </a:extLst>
+          </p:cNvPr>
+          <p:cNvSpPr>
+            <a:spLocks noGrp="1"/>
+          </p:cNvSpPr>
+          <p:nvPr>
+            <p:ph idx="1"/>
+          </p:nvPr>
+        </p:nvSpPr>
+        <p:spPr/>
+        <p:txBody>
+          <a:bodyPr/>
+          <a:lstStyle/>
+          <a:p>
+            <a:endParaRPr lang="fr-CH" dirty="0"/>
+          </a:p>
+        </p:txBody>
+      </p:sp>
+      <p:sp>
+        <p:nvSpPr>
+          <p:cNvPr id="3" name="Slide Number Placeholder 2">
+            <a:extLst>
+              <a:ext uri="{FF2B5EF4-FFF2-40B4-BE49-F238E27FC236}">
+                <a16:creationId xmlns:a16="http://schemas.microsoft.com/office/drawing/2014/main" id="{9888E6C5-D0BE-A894-E8E4-D616EA261A17}"/>
+              </a:ext>
+            </a:extLst>
+          </p:cNvPr>
+          <p:cNvSpPr>
+            <a:spLocks noGrp="1"/>
+          </p:cNvSpPr>
+          <p:nvPr>
+            <p:ph type="sldNum" sz="quarter" idx="12"/>
+          </p:nvPr>
+        </p:nvSpPr>
+        <p:spPr/>
+        <p:txBody>
+          <a:bodyPr/>
+          <a:lstStyle/>
+          <a:p>
+            <a:fld id="{27610C65-3251-4B31-A496-D9D978F99BA5}" type="slidenum">
+              <a:rPr lang="fr-CH" smtClean="0"/>
+              <a:t>19</a:t>
+            </a:fld>
+            <a:endParaRPr lang="fr-CH"/>
+          </a:p>
+        </p:txBody>
+      </p:sp>
+      <p:pic>
+        <p:nvPicPr>
+          <p:cNvPr id="5" name="Content Placeholder 20">
+            <a:extLst>
+              <a:ext uri="{FF2B5EF4-FFF2-40B4-BE49-F238E27FC236}">
+                <a16:creationId xmlns:a16="http://schemas.microsoft.com/office/drawing/2014/main" id="{5610D220-F5ED-E2A4-B26D-0A8307EE6CFF}"/>
+              </a:ext>
+            </a:extLst>
+          </p:cNvPr>
+          <p:cNvPicPr>
+            <a:picLocks noChangeAspect="1"/>
+          </p:cNvPicPr>
+          <p:nvPr/>
+        </p:nvPicPr>
+        <p:blipFill>
+          <a:blip r:embed="rId2">
+            <a:extLst>
+              <a:ext uri="{28A0092B-C50C-407E-A947-70E740481C1C}">
+                <a14:useLocalDpi xmlns:a14="http://schemas.microsoft.com/office/drawing/2010/main" val="0"/>
+              </a:ext>
+            </a:extLst>
+          </a:blip>
+          <a:srcRect t="50992" r="62379" b="30213"/>
+          <a:stretch>
+            <a:fillRect/>
+          </a:stretch>
+        </p:blipFill>
+        <p:spPr>
+          <a:xfrm>
+            <a:off x="838200" y="1825625"/>
+            <a:ext cx="10377668" cy="4006173"/>
+          </a:xfrm>
+          <a:prstGeom prst="rect">
+            <a:avLst/>
+          </a:prstGeom>
+        </p:spPr>
+      </p:pic>
+    </p:spTree>
+    <p:extLst>
+      <p:ext uri="{BB962C8B-B14F-4D97-AF65-F5344CB8AC3E}">
+        <p14:creationId xmlns:p14="http://schemas.microsoft.com/office/powerpoint/2010/main" val="3862166215"/>
+      </p:ext>
+    </p:extLst>
+  </p:cSld>
+  <p:clrMapOvr>
+    <a:masterClrMapping/>
+  </p:clrMapOvr>
+  <mc:AlternateContent xmlns:mc="http://schemas.openxmlformats.org/markup-compatibility/2006" xmlns:p159="http://schemas.microsoft.com/office/powerpoint/2015/09/main">
+    <mc:Choice Requires="p159">
+      <p:transition spd="slow">
+        <p159:morph option="byObject"/>
+      </p:transition>
+    </mc:Choice>
+    <mc:Fallback xmlns="">
+      <p:transition spd="slow">
+        <p:fade/>
+      </p:transition>
+    </mc:Fallback>
+  </mc:AlternateContent>
+</p:sld>
+</file>
+
+<file path=ppt/slides/slide2.xml><?xml version="1.0" encoding="utf-8"?>
+<p:sld xmlns:a="http://schemas.openxmlformats.org/drawingml/2006/main" xmlns:r="http://schemas.openxmlformats.org/officeDocument/2006/relationships" xmlns:p="http://schemas.openxmlformats.org/presentationml/2006/main">
+  <p:cSld>
+    <p:bg>
+      <p:bgPr>
+        <a:solidFill>
+          <a:schemeClr val="bg1"/>
+        </a:solidFill>
+        <a:effectLst/>
+      </p:bgPr>
+    </p:bg>
     <p:spTree>
       <p:nvGrpSpPr>
         <p:cNvPr id="1" name=""/>
@@ -3580,7 +6558,7 @@
           <p:cNvPr id="2" name="Title 1">
             <a:extLst>
               <a:ext uri="{FF2B5EF4-FFF2-40B4-BE49-F238E27FC236}">
-                <a16:creationId xmlns:a16="http://schemas.microsoft.com/office/drawing/2014/main" id="{40C85619-A7CF-CFBF-4566-13A23166F336}"/>
+                <a16:creationId xmlns:a16="http://schemas.microsoft.com/office/drawing/2014/main" id="{63A5FD1F-5096-488C-1A0C-9EE83D1BE8B9}"/>
               </a:ext>
             </a:extLst>
           </p:cNvPr>
@@ -3591,33 +6569,1566 @@
             <p:ph type="title"/>
           </p:nvPr>
         </p:nvSpPr>
+        <p:spPr>
+          <a:xfrm>
+            <a:off x="804274" y="280781"/>
+            <a:ext cx="4977976" cy="1454051"/>
+          </a:xfrm>
+        </p:spPr>
+        <p:txBody>
+          <a:bodyPr>
+            <a:normAutofit/>
+          </a:bodyPr>
+          <a:lstStyle/>
+          <a:p>
+            <a:r>
+              <a:rPr lang="en-US" dirty="0" err="1">
+                <a:latin typeface="Space Grotesk" pitchFamily="2" charset="0"/>
+                <a:cs typeface="Space Grotesk" pitchFamily="2" charset="0"/>
+              </a:rPr>
+              <a:t>Sommaire</a:t>
+            </a:r>
+            <a:endParaRPr lang="fr-CH" sz="3600" dirty="0">
+              <a:latin typeface="Space Grotesk" pitchFamily="2" charset="0"/>
+              <a:cs typeface="Space Grotesk" pitchFamily="2" charset="0"/>
+            </a:endParaRPr>
+          </a:p>
+        </p:txBody>
+      </p:sp>
+      <p:sp>
+        <p:nvSpPr>
+          <p:cNvPr id="3" name="Content Placeholder 2">
+            <a:extLst>
+              <a:ext uri="{FF2B5EF4-FFF2-40B4-BE49-F238E27FC236}">
+                <a16:creationId xmlns:a16="http://schemas.microsoft.com/office/drawing/2014/main" id="{7B354B8D-740D-9311-6631-7380DD5AFE40}"/>
+              </a:ext>
+            </a:extLst>
+          </p:cNvPr>
+          <p:cNvSpPr>
+            <a:spLocks noGrp="1"/>
+          </p:cNvSpPr>
+          <p:nvPr>
+            <p:ph idx="1"/>
+          </p:nvPr>
+        </p:nvSpPr>
+        <p:spPr>
+          <a:xfrm>
+            <a:off x="804672" y="2075901"/>
+            <a:ext cx="4977578" cy="4340737"/>
+          </a:xfrm>
+        </p:spPr>
+        <p:txBody>
+          <a:bodyPr anchor="ctr">
+            <a:normAutofit/>
+          </a:bodyPr>
+          <a:lstStyle/>
+          <a:p>
+            <a:pPr marL="0" indent="0">
+              <a:buNone/>
+            </a:pPr>
+            <a:endParaRPr lang="en-US" sz="2200" dirty="0">
+              <a:solidFill>
+                <a:schemeClr val="accent4">
+                  <a:lumMod val="75000"/>
+                </a:schemeClr>
+              </a:solidFill>
+              <a:latin typeface="Space Grotesk" pitchFamily="2" charset="0"/>
+              <a:cs typeface="Space Grotesk" pitchFamily="2" charset="0"/>
+            </a:endParaRPr>
+          </a:p>
+          <a:p>
+            <a:pPr marL="0" indent="0">
+              <a:buNone/>
+            </a:pPr>
+            <a:r>
+              <a:rPr lang="en-US" sz="2200" dirty="0">
+                <a:solidFill>
+                  <a:schemeClr val="accent4">
+                    <a:lumMod val="75000"/>
+                  </a:schemeClr>
+                </a:solidFill>
+                <a:latin typeface="Space Grotesk" pitchFamily="2" charset="0"/>
+                <a:cs typeface="Space Grotesk" pitchFamily="2" charset="0"/>
+              </a:rPr>
+              <a:t>Introduction</a:t>
+            </a:r>
+            <a:endParaRPr lang="fr-CH" sz="2200" dirty="0">
+              <a:solidFill>
+                <a:schemeClr val="accent4">
+                  <a:lumMod val="75000"/>
+                </a:schemeClr>
+              </a:solidFill>
+              <a:latin typeface="Space Grotesk" pitchFamily="2" charset="0"/>
+              <a:cs typeface="Space Grotesk" pitchFamily="2" charset="0"/>
+            </a:endParaRPr>
+          </a:p>
+          <a:p>
+            <a:pPr marL="0" indent="0">
+              <a:buNone/>
+            </a:pPr>
+            <a:r>
+              <a:rPr lang="fr-CH" sz="2200" dirty="0">
+                <a:solidFill>
+                  <a:schemeClr val="accent4">
+                    <a:lumMod val="75000"/>
+                  </a:schemeClr>
+                </a:solidFill>
+                <a:latin typeface="Space Grotesk" pitchFamily="2" charset="0"/>
+                <a:cs typeface="Space Grotesk" pitchFamily="2" charset="0"/>
+              </a:rPr>
+              <a:t>Cahier des charges</a:t>
+            </a:r>
+          </a:p>
+          <a:p>
+            <a:pPr marL="0" indent="0">
+              <a:buNone/>
+            </a:pPr>
+            <a:r>
+              <a:rPr lang="fr-CH" sz="2200" dirty="0">
+                <a:solidFill>
+                  <a:schemeClr val="accent4">
+                    <a:lumMod val="75000"/>
+                  </a:schemeClr>
+                </a:solidFill>
+                <a:latin typeface="Space Grotesk" pitchFamily="2" charset="0"/>
+                <a:cs typeface="Space Grotesk" pitchFamily="2" charset="0"/>
+              </a:rPr>
+              <a:t>Principe physique</a:t>
+            </a:r>
+          </a:p>
+          <a:p>
+            <a:pPr marL="0" indent="0">
+              <a:buNone/>
+            </a:pPr>
+            <a:r>
+              <a:rPr lang="fr-CH" sz="2200" dirty="0">
+                <a:solidFill>
+                  <a:schemeClr val="accent4">
+                    <a:lumMod val="75000"/>
+                  </a:schemeClr>
+                </a:solidFill>
+                <a:latin typeface="Space Grotesk" pitchFamily="2" charset="0"/>
+                <a:cs typeface="Space Grotesk" pitchFamily="2" charset="0"/>
+              </a:rPr>
+              <a:t>Régulation</a:t>
+            </a:r>
+          </a:p>
+          <a:p>
+            <a:endParaRPr lang="fr-CH" sz="1700" dirty="0">
+              <a:solidFill>
+                <a:schemeClr val="tx2"/>
+              </a:solidFill>
+              <a:latin typeface="Space Grotesk" pitchFamily="2" charset="0"/>
+              <a:cs typeface="Space Grotesk" pitchFamily="2" charset="0"/>
+            </a:endParaRPr>
+          </a:p>
+        </p:txBody>
+      </p:sp>
+      <p:sp>
+        <p:nvSpPr>
+          <p:cNvPr id="4" name="Slide Number Placeholder 3">
+            <a:extLst>
+              <a:ext uri="{FF2B5EF4-FFF2-40B4-BE49-F238E27FC236}">
+                <a16:creationId xmlns:a16="http://schemas.microsoft.com/office/drawing/2014/main" id="{E98C5107-2773-2A72-C61A-204E70BE057A}"/>
+              </a:ext>
+            </a:extLst>
+          </p:cNvPr>
+          <p:cNvSpPr>
+            <a:spLocks noGrp="1"/>
+          </p:cNvSpPr>
+          <p:nvPr>
+            <p:ph type="sldNum" sz="quarter" idx="12"/>
+          </p:nvPr>
+        </p:nvSpPr>
         <p:spPr/>
+        <p:txBody>
+          <a:bodyPr>
+            <a:normAutofit/>
+          </a:bodyPr>
+          <a:lstStyle/>
+          <a:p>
+            <a:pPr>
+              <a:spcAft>
+                <a:spcPts val="600"/>
+              </a:spcAft>
+            </a:pPr>
+            <a:fld id="{27610C65-3251-4B31-A496-D9D978F99BA5}" type="slidenum">
+              <a:rPr lang="fr-CH" smtClean="0">
+                <a:latin typeface="Space Grotesk" pitchFamily="2" charset="0"/>
+                <a:cs typeface="Space Grotesk" pitchFamily="2" charset="0"/>
+              </a:rPr>
+              <a:pPr>
+                <a:spcAft>
+                  <a:spcPts val="600"/>
+                </a:spcAft>
+              </a:pPr>
+              <a:t>2</a:t>
+            </a:fld>
+            <a:endParaRPr lang="fr-CH">
+              <a:latin typeface="Space Grotesk" pitchFamily="2" charset="0"/>
+              <a:cs typeface="Space Grotesk" pitchFamily="2" charset="0"/>
+            </a:endParaRPr>
+          </a:p>
+        </p:txBody>
+      </p:sp>
+      <p:sp>
+        <p:nvSpPr>
+          <p:cNvPr id="5" name="Content Placeholder 2">
+            <a:extLst>
+              <a:ext uri="{FF2B5EF4-FFF2-40B4-BE49-F238E27FC236}">
+                <a16:creationId xmlns:a16="http://schemas.microsoft.com/office/drawing/2014/main" id="{792801B8-1D58-00BA-ABDD-9E457664A133}"/>
+              </a:ext>
+            </a:extLst>
+          </p:cNvPr>
+          <p:cNvSpPr txBox="1">
+            <a:spLocks/>
+          </p:cNvSpPr>
+          <p:nvPr/>
+        </p:nvSpPr>
+        <p:spPr>
+          <a:xfrm>
+            <a:off x="804274" y="2674374"/>
+            <a:ext cx="650900" cy="754626"/>
+          </a:xfrm>
+          <a:prstGeom prst="rect">
+            <a:avLst/>
+          </a:prstGeom>
+        </p:spPr>
+        <p:txBody>
+          <a:bodyPr vert="horz" lIns="91440" tIns="45720" rIns="91440" bIns="45720" rtlCol="0" anchor="ctr">
+            <a:normAutofit fontScale="92500" lnSpcReduction="10000"/>
+          </a:bodyPr>
+          <a:lstStyle>
+            <a:lvl1pPr marL="228600" indent="-228600" algn="l" defTabSz="914400" rtl="0" eaLnBrk="1" latinLnBrk="0" hangingPunct="1">
+              <a:lnSpc>
+                <a:spcPct val="90000"/>
+              </a:lnSpc>
+              <a:spcBef>
+                <a:spcPts val="1000"/>
+              </a:spcBef>
+              <a:buFont typeface="Arial" panose="020B0604020202020204" pitchFamily="34" charset="0"/>
+              <a:buChar char="•"/>
+              <a:defRPr sz="2800" kern="1200">
+                <a:solidFill>
+                  <a:schemeClr val="tx1"/>
+                </a:solidFill>
+                <a:latin typeface="+mn-lt"/>
+                <a:ea typeface="+mn-ea"/>
+                <a:cs typeface="+mn-cs"/>
+              </a:defRPr>
+            </a:lvl1pPr>
+            <a:lvl2pPr marL="685800" indent="-228600" algn="l" defTabSz="914400" rtl="0" eaLnBrk="1" latinLnBrk="0" hangingPunct="1">
+              <a:lnSpc>
+                <a:spcPct val="90000"/>
+              </a:lnSpc>
+              <a:spcBef>
+                <a:spcPts val="500"/>
+              </a:spcBef>
+              <a:buFont typeface="Arial" panose="020B0604020202020204" pitchFamily="34" charset="0"/>
+              <a:buChar char="•"/>
+              <a:defRPr sz="2400" kern="1200">
+                <a:solidFill>
+                  <a:schemeClr val="tx1"/>
+                </a:solidFill>
+                <a:latin typeface="+mn-lt"/>
+                <a:ea typeface="+mn-ea"/>
+                <a:cs typeface="+mn-cs"/>
+              </a:defRPr>
+            </a:lvl2pPr>
+            <a:lvl3pPr marL="1143000" indent="-228600" algn="l" defTabSz="914400" rtl="0" eaLnBrk="1" latinLnBrk="0" hangingPunct="1">
+              <a:lnSpc>
+                <a:spcPct val="90000"/>
+              </a:lnSpc>
+              <a:spcBef>
+                <a:spcPts val="500"/>
+              </a:spcBef>
+              <a:buFont typeface="Arial" panose="020B0604020202020204" pitchFamily="34" charset="0"/>
+              <a:buChar char="•"/>
+              <a:defRPr sz="2000" kern="1200">
+                <a:solidFill>
+                  <a:schemeClr val="tx1"/>
+                </a:solidFill>
+                <a:latin typeface="+mn-lt"/>
+                <a:ea typeface="+mn-ea"/>
+                <a:cs typeface="+mn-cs"/>
+              </a:defRPr>
+            </a:lvl3pPr>
+            <a:lvl4pPr marL="1600200" indent="-228600" algn="l" defTabSz="914400" rtl="0" eaLnBrk="1" latinLnBrk="0" hangingPunct="1">
+              <a:lnSpc>
+                <a:spcPct val="90000"/>
+              </a:lnSpc>
+              <a:spcBef>
+                <a:spcPts val="500"/>
+              </a:spcBef>
+              <a:buFont typeface="Arial" panose="020B0604020202020204" pitchFamily="34" charset="0"/>
+              <a:buChar char="•"/>
+              <a:defRPr sz="1800" kern="1200">
+                <a:solidFill>
+                  <a:schemeClr val="tx1"/>
+                </a:solidFill>
+                <a:latin typeface="+mn-lt"/>
+                <a:ea typeface="+mn-ea"/>
+                <a:cs typeface="+mn-cs"/>
+              </a:defRPr>
+            </a:lvl4pPr>
+            <a:lvl5pPr marL="2057400" indent="-228600" algn="l" defTabSz="914400" rtl="0" eaLnBrk="1" latinLnBrk="0" hangingPunct="1">
+              <a:lnSpc>
+                <a:spcPct val="90000"/>
+              </a:lnSpc>
+              <a:spcBef>
+                <a:spcPts val="500"/>
+              </a:spcBef>
+              <a:buFont typeface="Arial" panose="020B0604020202020204" pitchFamily="34" charset="0"/>
+              <a:buChar char="•"/>
+              <a:defRPr sz="1800" kern="1200">
+                <a:solidFill>
+                  <a:schemeClr val="tx1"/>
+                </a:solidFill>
+                <a:latin typeface="+mn-lt"/>
+                <a:ea typeface="+mn-ea"/>
+                <a:cs typeface="+mn-cs"/>
+              </a:defRPr>
+            </a:lvl5pPr>
+            <a:lvl6pPr marL="2514600" indent="-228600" algn="l" defTabSz="914400" rtl="0" eaLnBrk="1" latinLnBrk="0" hangingPunct="1">
+              <a:lnSpc>
+                <a:spcPct val="90000"/>
+              </a:lnSpc>
+              <a:spcBef>
+                <a:spcPts val="500"/>
+              </a:spcBef>
+              <a:buFont typeface="Arial" panose="020B0604020202020204" pitchFamily="34" charset="0"/>
+              <a:buChar char="•"/>
+              <a:defRPr sz="1800" kern="1200">
+                <a:solidFill>
+                  <a:schemeClr val="tx1"/>
+                </a:solidFill>
+                <a:latin typeface="+mn-lt"/>
+                <a:ea typeface="+mn-ea"/>
+                <a:cs typeface="+mn-cs"/>
+              </a:defRPr>
+            </a:lvl6pPr>
+            <a:lvl7pPr marL="2971800" indent="-228600" algn="l" defTabSz="914400" rtl="0" eaLnBrk="1" latinLnBrk="0" hangingPunct="1">
+              <a:lnSpc>
+                <a:spcPct val="90000"/>
+              </a:lnSpc>
+              <a:spcBef>
+                <a:spcPts val="500"/>
+              </a:spcBef>
+              <a:buFont typeface="Arial" panose="020B0604020202020204" pitchFamily="34" charset="0"/>
+              <a:buChar char="•"/>
+              <a:defRPr sz="1800" kern="1200">
+                <a:solidFill>
+                  <a:schemeClr val="tx1"/>
+                </a:solidFill>
+                <a:latin typeface="+mn-lt"/>
+                <a:ea typeface="+mn-ea"/>
+                <a:cs typeface="+mn-cs"/>
+              </a:defRPr>
+            </a:lvl7pPr>
+            <a:lvl8pPr marL="3429000" indent="-228600" algn="l" defTabSz="914400" rtl="0" eaLnBrk="1" latinLnBrk="0" hangingPunct="1">
+              <a:lnSpc>
+                <a:spcPct val="90000"/>
+              </a:lnSpc>
+              <a:spcBef>
+                <a:spcPts val="500"/>
+              </a:spcBef>
+              <a:buFont typeface="Arial" panose="020B0604020202020204" pitchFamily="34" charset="0"/>
+              <a:buChar char="•"/>
+              <a:defRPr sz="1800" kern="1200">
+                <a:solidFill>
+                  <a:schemeClr val="tx1"/>
+                </a:solidFill>
+                <a:latin typeface="+mn-lt"/>
+                <a:ea typeface="+mn-ea"/>
+                <a:cs typeface="+mn-cs"/>
+              </a:defRPr>
+            </a:lvl8pPr>
+            <a:lvl9pPr marL="3886200" indent="-228600" algn="l" defTabSz="914400" rtl="0" eaLnBrk="1" latinLnBrk="0" hangingPunct="1">
+              <a:lnSpc>
+                <a:spcPct val="90000"/>
+              </a:lnSpc>
+              <a:spcBef>
+                <a:spcPts val="500"/>
+              </a:spcBef>
+              <a:buFont typeface="Arial" panose="020B0604020202020204" pitchFamily="34" charset="0"/>
+              <a:buChar char="•"/>
+              <a:defRPr sz="1800" kern="1200">
+                <a:solidFill>
+                  <a:schemeClr val="tx1"/>
+                </a:solidFill>
+                <a:latin typeface="+mn-lt"/>
+                <a:ea typeface="+mn-ea"/>
+                <a:cs typeface="+mn-cs"/>
+              </a:defRPr>
+            </a:lvl9pPr>
+          </a:lstStyle>
+          <a:p>
+            <a:pPr marL="0" indent="0">
+              <a:buNone/>
+            </a:pPr>
+            <a:r>
+              <a:rPr lang="en-US" sz="5400" b="1" dirty="0">
+                <a:solidFill>
+                  <a:schemeClr val="accent4">
+                    <a:lumMod val="75000"/>
+                  </a:schemeClr>
+                </a:solidFill>
+                <a:latin typeface="Space Grotesk" pitchFamily="2" charset="0"/>
+                <a:cs typeface="Space Grotesk" pitchFamily="2" charset="0"/>
+              </a:rPr>
+              <a:t>1</a:t>
+            </a:r>
+            <a:endParaRPr lang="fr-CH" sz="4400" b="1" dirty="0">
+              <a:solidFill>
+                <a:schemeClr val="tx2"/>
+              </a:solidFill>
+              <a:latin typeface="Space Grotesk" pitchFamily="2" charset="0"/>
+              <a:cs typeface="Space Grotesk" pitchFamily="2" charset="0"/>
+            </a:endParaRPr>
+          </a:p>
+        </p:txBody>
+      </p:sp>
+      <p:sp>
+        <p:nvSpPr>
+          <p:cNvPr id="6" name="Content Placeholder 2">
+            <a:extLst>
+              <a:ext uri="{FF2B5EF4-FFF2-40B4-BE49-F238E27FC236}">
+                <a16:creationId xmlns:a16="http://schemas.microsoft.com/office/drawing/2014/main" id="{CA5C65A3-9702-E892-B6A2-A0F608881619}"/>
+              </a:ext>
+            </a:extLst>
+          </p:cNvPr>
+          <p:cNvSpPr txBox="1">
+            <a:spLocks/>
+          </p:cNvSpPr>
+          <p:nvPr/>
+        </p:nvSpPr>
+        <p:spPr>
+          <a:xfrm>
+            <a:off x="8181054" y="2075901"/>
+            <a:ext cx="4977578" cy="4340737"/>
+          </a:xfrm>
+          <a:prstGeom prst="rect">
+            <a:avLst/>
+          </a:prstGeom>
+        </p:spPr>
+        <p:txBody>
+          <a:bodyPr vert="horz" lIns="91440" tIns="45720" rIns="91440" bIns="45720" rtlCol="0" anchor="ctr">
+            <a:normAutofit/>
+          </a:bodyPr>
+          <a:lstStyle>
+            <a:lvl1pPr marL="228600" indent="-228600" algn="l" defTabSz="914400" rtl="0" eaLnBrk="1" latinLnBrk="0" hangingPunct="1">
+              <a:lnSpc>
+                <a:spcPct val="90000"/>
+              </a:lnSpc>
+              <a:spcBef>
+                <a:spcPts val="1000"/>
+              </a:spcBef>
+              <a:buFont typeface="Arial" panose="020B0604020202020204" pitchFamily="34" charset="0"/>
+              <a:buChar char="•"/>
+              <a:defRPr sz="2800" kern="1200">
+                <a:solidFill>
+                  <a:schemeClr val="tx1"/>
+                </a:solidFill>
+                <a:latin typeface="+mn-lt"/>
+                <a:ea typeface="+mn-ea"/>
+                <a:cs typeface="+mn-cs"/>
+              </a:defRPr>
+            </a:lvl1pPr>
+            <a:lvl2pPr marL="685800" indent="-228600" algn="l" defTabSz="914400" rtl="0" eaLnBrk="1" latinLnBrk="0" hangingPunct="1">
+              <a:lnSpc>
+                <a:spcPct val="90000"/>
+              </a:lnSpc>
+              <a:spcBef>
+                <a:spcPts val="500"/>
+              </a:spcBef>
+              <a:buFont typeface="Arial" panose="020B0604020202020204" pitchFamily="34" charset="0"/>
+              <a:buChar char="•"/>
+              <a:defRPr sz="2400" kern="1200">
+                <a:solidFill>
+                  <a:schemeClr val="tx1"/>
+                </a:solidFill>
+                <a:latin typeface="+mn-lt"/>
+                <a:ea typeface="+mn-ea"/>
+                <a:cs typeface="+mn-cs"/>
+              </a:defRPr>
+            </a:lvl2pPr>
+            <a:lvl3pPr marL="1143000" indent="-228600" algn="l" defTabSz="914400" rtl="0" eaLnBrk="1" latinLnBrk="0" hangingPunct="1">
+              <a:lnSpc>
+                <a:spcPct val="90000"/>
+              </a:lnSpc>
+              <a:spcBef>
+                <a:spcPts val="500"/>
+              </a:spcBef>
+              <a:buFont typeface="Arial" panose="020B0604020202020204" pitchFamily="34" charset="0"/>
+              <a:buChar char="•"/>
+              <a:defRPr sz="2000" kern="1200">
+                <a:solidFill>
+                  <a:schemeClr val="tx1"/>
+                </a:solidFill>
+                <a:latin typeface="+mn-lt"/>
+                <a:ea typeface="+mn-ea"/>
+                <a:cs typeface="+mn-cs"/>
+              </a:defRPr>
+            </a:lvl3pPr>
+            <a:lvl4pPr marL="1600200" indent="-228600" algn="l" defTabSz="914400" rtl="0" eaLnBrk="1" latinLnBrk="0" hangingPunct="1">
+              <a:lnSpc>
+                <a:spcPct val="90000"/>
+              </a:lnSpc>
+              <a:spcBef>
+                <a:spcPts val="500"/>
+              </a:spcBef>
+              <a:buFont typeface="Arial" panose="020B0604020202020204" pitchFamily="34" charset="0"/>
+              <a:buChar char="•"/>
+              <a:defRPr sz="1800" kern="1200">
+                <a:solidFill>
+                  <a:schemeClr val="tx1"/>
+                </a:solidFill>
+                <a:latin typeface="+mn-lt"/>
+                <a:ea typeface="+mn-ea"/>
+                <a:cs typeface="+mn-cs"/>
+              </a:defRPr>
+            </a:lvl4pPr>
+            <a:lvl5pPr marL="2057400" indent="-228600" algn="l" defTabSz="914400" rtl="0" eaLnBrk="1" latinLnBrk="0" hangingPunct="1">
+              <a:lnSpc>
+                <a:spcPct val="90000"/>
+              </a:lnSpc>
+              <a:spcBef>
+                <a:spcPts val="500"/>
+              </a:spcBef>
+              <a:buFont typeface="Arial" panose="020B0604020202020204" pitchFamily="34" charset="0"/>
+              <a:buChar char="•"/>
+              <a:defRPr sz="1800" kern="1200">
+                <a:solidFill>
+                  <a:schemeClr val="tx1"/>
+                </a:solidFill>
+                <a:latin typeface="+mn-lt"/>
+                <a:ea typeface="+mn-ea"/>
+                <a:cs typeface="+mn-cs"/>
+              </a:defRPr>
+            </a:lvl5pPr>
+            <a:lvl6pPr marL="2514600" indent="-228600" algn="l" defTabSz="914400" rtl="0" eaLnBrk="1" latinLnBrk="0" hangingPunct="1">
+              <a:lnSpc>
+                <a:spcPct val="90000"/>
+              </a:lnSpc>
+              <a:spcBef>
+                <a:spcPts val="500"/>
+              </a:spcBef>
+              <a:buFont typeface="Arial" panose="020B0604020202020204" pitchFamily="34" charset="0"/>
+              <a:buChar char="•"/>
+              <a:defRPr sz="1800" kern="1200">
+                <a:solidFill>
+                  <a:schemeClr val="tx1"/>
+                </a:solidFill>
+                <a:latin typeface="+mn-lt"/>
+                <a:ea typeface="+mn-ea"/>
+                <a:cs typeface="+mn-cs"/>
+              </a:defRPr>
+            </a:lvl6pPr>
+            <a:lvl7pPr marL="2971800" indent="-228600" algn="l" defTabSz="914400" rtl="0" eaLnBrk="1" latinLnBrk="0" hangingPunct="1">
+              <a:lnSpc>
+                <a:spcPct val="90000"/>
+              </a:lnSpc>
+              <a:spcBef>
+                <a:spcPts val="500"/>
+              </a:spcBef>
+              <a:buFont typeface="Arial" panose="020B0604020202020204" pitchFamily="34" charset="0"/>
+              <a:buChar char="•"/>
+              <a:defRPr sz="1800" kern="1200">
+                <a:solidFill>
+                  <a:schemeClr val="tx1"/>
+                </a:solidFill>
+                <a:latin typeface="+mn-lt"/>
+                <a:ea typeface="+mn-ea"/>
+                <a:cs typeface="+mn-cs"/>
+              </a:defRPr>
+            </a:lvl7pPr>
+            <a:lvl8pPr marL="3429000" indent="-228600" algn="l" defTabSz="914400" rtl="0" eaLnBrk="1" latinLnBrk="0" hangingPunct="1">
+              <a:lnSpc>
+                <a:spcPct val="90000"/>
+              </a:lnSpc>
+              <a:spcBef>
+                <a:spcPts val="500"/>
+              </a:spcBef>
+              <a:buFont typeface="Arial" panose="020B0604020202020204" pitchFamily="34" charset="0"/>
+              <a:buChar char="•"/>
+              <a:defRPr sz="1800" kern="1200">
+                <a:solidFill>
+                  <a:schemeClr val="tx1"/>
+                </a:solidFill>
+                <a:latin typeface="+mn-lt"/>
+                <a:ea typeface="+mn-ea"/>
+                <a:cs typeface="+mn-cs"/>
+              </a:defRPr>
+            </a:lvl8pPr>
+            <a:lvl9pPr marL="3886200" indent="-228600" algn="l" defTabSz="914400" rtl="0" eaLnBrk="1" latinLnBrk="0" hangingPunct="1">
+              <a:lnSpc>
+                <a:spcPct val="90000"/>
+              </a:lnSpc>
+              <a:spcBef>
+                <a:spcPts val="500"/>
+              </a:spcBef>
+              <a:buFont typeface="Arial" panose="020B0604020202020204" pitchFamily="34" charset="0"/>
+              <a:buChar char="•"/>
+              <a:defRPr sz="1800" kern="1200">
+                <a:solidFill>
+                  <a:schemeClr val="tx1"/>
+                </a:solidFill>
+                <a:latin typeface="+mn-lt"/>
+                <a:ea typeface="+mn-ea"/>
+                <a:cs typeface="+mn-cs"/>
+              </a:defRPr>
+            </a:lvl9pPr>
+          </a:lstStyle>
+          <a:p>
+            <a:pPr marL="0" indent="0">
+              <a:buNone/>
+            </a:pPr>
+            <a:r>
+              <a:rPr lang="fr-CH" sz="2200" dirty="0">
+                <a:solidFill>
+                  <a:schemeClr val="accent6">
+                    <a:lumMod val="75000"/>
+                  </a:schemeClr>
+                </a:solidFill>
+                <a:latin typeface="Space Grotesk" pitchFamily="2" charset="0"/>
+                <a:cs typeface="Space Grotesk" pitchFamily="2" charset="0"/>
+              </a:rPr>
+              <a:t>Simulation</a:t>
+            </a:r>
+            <a:endParaRPr lang="en-US" sz="2200" dirty="0">
+              <a:solidFill>
+                <a:schemeClr val="accent6">
+                  <a:lumMod val="75000"/>
+                </a:schemeClr>
+              </a:solidFill>
+              <a:latin typeface="Space Grotesk" pitchFamily="2" charset="0"/>
+              <a:cs typeface="Space Grotesk" pitchFamily="2" charset="0"/>
+            </a:endParaRPr>
+          </a:p>
+          <a:p>
+            <a:pPr marL="0" indent="0">
+              <a:buNone/>
+            </a:pPr>
+            <a:r>
+              <a:rPr lang="en-US" sz="2200" dirty="0" err="1">
+                <a:solidFill>
+                  <a:schemeClr val="accent6">
+                    <a:lumMod val="75000"/>
+                  </a:schemeClr>
+                </a:solidFill>
+                <a:latin typeface="Space Grotesk" pitchFamily="2" charset="0"/>
+                <a:cs typeface="Space Grotesk" pitchFamily="2" charset="0"/>
+              </a:rPr>
+              <a:t>Mesures</a:t>
+            </a:r>
+            <a:endParaRPr lang="en-US" sz="2200" dirty="0">
+              <a:solidFill>
+                <a:schemeClr val="accent6">
+                  <a:lumMod val="75000"/>
+                </a:schemeClr>
+              </a:solidFill>
+              <a:latin typeface="Space Grotesk" pitchFamily="2" charset="0"/>
+              <a:cs typeface="Space Grotesk" pitchFamily="2" charset="0"/>
+            </a:endParaRPr>
+          </a:p>
+          <a:p>
+            <a:pPr marL="0" indent="0">
+              <a:buNone/>
+            </a:pPr>
+            <a:r>
+              <a:rPr lang="en-US" sz="2200" dirty="0">
+                <a:solidFill>
+                  <a:schemeClr val="accent6">
+                    <a:lumMod val="75000"/>
+                  </a:schemeClr>
+                </a:solidFill>
+                <a:latin typeface="Space Grotesk" pitchFamily="2" charset="0"/>
+                <a:cs typeface="Space Grotesk" pitchFamily="2" charset="0"/>
+              </a:rPr>
+              <a:t>Conclusion</a:t>
+            </a:r>
+          </a:p>
+          <a:p>
+            <a:endParaRPr lang="fr-CH" sz="1700" dirty="0">
+              <a:solidFill>
+                <a:schemeClr val="tx2"/>
+              </a:solidFill>
+              <a:latin typeface="Space Grotesk" pitchFamily="2" charset="0"/>
+              <a:cs typeface="Space Grotesk" pitchFamily="2" charset="0"/>
+            </a:endParaRPr>
+          </a:p>
+        </p:txBody>
+      </p:sp>
+      <p:sp>
+        <p:nvSpPr>
+          <p:cNvPr id="9" name="Content Placeholder 2">
+            <a:extLst>
+              <a:ext uri="{FF2B5EF4-FFF2-40B4-BE49-F238E27FC236}">
+                <a16:creationId xmlns:a16="http://schemas.microsoft.com/office/drawing/2014/main" id="{2AD2F5DD-F4E9-CBF6-7F37-F32E6804EF03}"/>
+              </a:ext>
+            </a:extLst>
+          </p:cNvPr>
+          <p:cNvSpPr txBox="1">
+            <a:spLocks/>
+          </p:cNvSpPr>
+          <p:nvPr/>
+        </p:nvSpPr>
+        <p:spPr>
+          <a:xfrm>
+            <a:off x="4442959" y="2296770"/>
+            <a:ext cx="4977578" cy="4340737"/>
+          </a:xfrm>
+          <a:prstGeom prst="rect">
+            <a:avLst/>
+          </a:prstGeom>
+        </p:spPr>
+        <p:txBody>
+          <a:bodyPr vert="horz" lIns="91440" tIns="45720" rIns="91440" bIns="45720" rtlCol="0" anchor="ctr">
+            <a:normAutofit/>
+          </a:bodyPr>
+          <a:lstStyle>
+            <a:lvl1pPr marL="228600" indent="-228600" algn="l" defTabSz="914400" rtl="0" eaLnBrk="1" latinLnBrk="0" hangingPunct="1">
+              <a:lnSpc>
+                <a:spcPct val="90000"/>
+              </a:lnSpc>
+              <a:spcBef>
+                <a:spcPts val="1000"/>
+              </a:spcBef>
+              <a:buFont typeface="Arial" panose="020B0604020202020204" pitchFamily="34" charset="0"/>
+              <a:buChar char="•"/>
+              <a:defRPr sz="2800" kern="1200">
+                <a:solidFill>
+                  <a:schemeClr val="tx1"/>
+                </a:solidFill>
+                <a:latin typeface="+mn-lt"/>
+                <a:ea typeface="+mn-ea"/>
+                <a:cs typeface="+mn-cs"/>
+              </a:defRPr>
+            </a:lvl1pPr>
+            <a:lvl2pPr marL="685800" indent="-228600" algn="l" defTabSz="914400" rtl="0" eaLnBrk="1" latinLnBrk="0" hangingPunct="1">
+              <a:lnSpc>
+                <a:spcPct val="90000"/>
+              </a:lnSpc>
+              <a:spcBef>
+                <a:spcPts val="500"/>
+              </a:spcBef>
+              <a:buFont typeface="Arial" panose="020B0604020202020204" pitchFamily="34" charset="0"/>
+              <a:buChar char="•"/>
+              <a:defRPr sz="2400" kern="1200">
+                <a:solidFill>
+                  <a:schemeClr val="tx1"/>
+                </a:solidFill>
+                <a:latin typeface="+mn-lt"/>
+                <a:ea typeface="+mn-ea"/>
+                <a:cs typeface="+mn-cs"/>
+              </a:defRPr>
+            </a:lvl2pPr>
+            <a:lvl3pPr marL="1143000" indent="-228600" algn="l" defTabSz="914400" rtl="0" eaLnBrk="1" latinLnBrk="0" hangingPunct="1">
+              <a:lnSpc>
+                <a:spcPct val="90000"/>
+              </a:lnSpc>
+              <a:spcBef>
+                <a:spcPts val="500"/>
+              </a:spcBef>
+              <a:buFont typeface="Arial" panose="020B0604020202020204" pitchFamily="34" charset="0"/>
+              <a:buChar char="•"/>
+              <a:defRPr sz="2000" kern="1200">
+                <a:solidFill>
+                  <a:schemeClr val="tx1"/>
+                </a:solidFill>
+                <a:latin typeface="+mn-lt"/>
+                <a:ea typeface="+mn-ea"/>
+                <a:cs typeface="+mn-cs"/>
+              </a:defRPr>
+            </a:lvl3pPr>
+            <a:lvl4pPr marL="1600200" indent="-228600" algn="l" defTabSz="914400" rtl="0" eaLnBrk="1" latinLnBrk="0" hangingPunct="1">
+              <a:lnSpc>
+                <a:spcPct val="90000"/>
+              </a:lnSpc>
+              <a:spcBef>
+                <a:spcPts val="500"/>
+              </a:spcBef>
+              <a:buFont typeface="Arial" panose="020B0604020202020204" pitchFamily="34" charset="0"/>
+              <a:buChar char="•"/>
+              <a:defRPr sz="1800" kern="1200">
+                <a:solidFill>
+                  <a:schemeClr val="tx1"/>
+                </a:solidFill>
+                <a:latin typeface="+mn-lt"/>
+                <a:ea typeface="+mn-ea"/>
+                <a:cs typeface="+mn-cs"/>
+              </a:defRPr>
+            </a:lvl4pPr>
+            <a:lvl5pPr marL="2057400" indent="-228600" algn="l" defTabSz="914400" rtl="0" eaLnBrk="1" latinLnBrk="0" hangingPunct="1">
+              <a:lnSpc>
+                <a:spcPct val="90000"/>
+              </a:lnSpc>
+              <a:spcBef>
+                <a:spcPts val="500"/>
+              </a:spcBef>
+              <a:buFont typeface="Arial" panose="020B0604020202020204" pitchFamily="34" charset="0"/>
+              <a:buChar char="•"/>
+              <a:defRPr sz="1800" kern="1200">
+                <a:solidFill>
+                  <a:schemeClr val="tx1"/>
+                </a:solidFill>
+                <a:latin typeface="+mn-lt"/>
+                <a:ea typeface="+mn-ea"/>
+                <a:cs typeface="+mn-cs"/>
+              </a:defRPr>
+            </a:lvl5pPr>
+            <a:lvl6pPr marL="2514600" indent="-228600" algn="l" defTabSz="914400" rtl="0" eaLnBrk="1" latinLnBrk="0" hangingPunct="1">
+              <a:lnSpc>
+                <a:spcPct val="90000"/>
+              </a:lnSpc>
+              <a:spcBef>
+                <a:spcPts val="500"/>
+              </a:spcBef>
+              <a:buFont typeface="Arial" panose="020B0604020202020204" pitchFamily="34" charset="0"/>
+              <a:buChar char="•"/>
+              <a:defRPr sz="1800" kern="1200">
+                <a:solidFill>
+                  <a:schemeClr val="tx1"/>
+                </a:solidFill>
+                <a:latin typeface="+mn-lt"/>
+                <a:ea typeface="+mn-ea"/>
+                <a:cs typeface="+mn-cs"/>
+              </a:defRPr>
+            </a:lvl6pPr>
+            <a:lvl7pPr marL="2971800" indent="-228600" algn="l" defTabSz="914400" rtl="0" eaLnBrk="1" latinLnBrk="0" hangingPunct="1">
+              <a:lnSpc>
+                <a:spcPct val="90000"/>
+              </a:lnSpc>
+              <a:spcBef>
+                <a:spcPts val="500"/>
+              </a:spcBef>
+              <a:buFont typeface="Arial" panose="020B0604020202020204" pitchFamily="34" charset="0"/>
+              <a:buChar char="•"/>
+              <a:defRPr sz="1800" kern="1200">
+                <a:solidFill>
+                  <a:schemeClr val="tx1"/>
+                </a:solidFill>
+                <a:latin typeface="+mn-lt"/>
+                <a:ea typeface="+mn-ea"/>
+                <a:cs typeface="+mn-cs"/>
+              </a:defRPr>
+            </a:lvl7pPr>
+            <a:lvl8pPr marL="3429000" indent="-228600" algn="l" defTabSz="914400" rtl="0" eaLnBrk="1" latinLnBrk="0" hangingPunct="1">
+              <a:lnSpc>
+                <a:spcPct val="90000"/>
+              </a:lnSpc>
+              <a:spcBef>
+                <a:spcPts val="500"/>
+              </a:spcBef>
+              <a:buFont typeface="Arial" panose="020B0604020202020204" pitchFamily="34" charset="0"/>
+              <a:buChar char="•"/>
+              <a:defRPr sz="1800" kern="1200">
+                <a:solidFill>
+                  <a:schemeClr val="tx1"/>
+                </a:solidFill>
+                <a:latin typeface="+mn-lt"/>
+                <a:ea typeface="+mn-ea"/>
+                <a:cs typeface="+mn-cs"/>
+              </a:defRPr>
+            </a:lvl8pPr>
+            <a:lvl9pPr marL="3886200" indent="-228600" algn="l" defTabSz="914400" rtl="0" eaLnBrk="1" latinLnBrk="0" hangingPunct="1">
+              <a:lnSpc>
+                <a:spcPct val="90000"/>
+              </a:lnSpc>
+              <a:spcBef>
+                <a:spcPts val="500"/>
+              </a:spcBef>
+              <a:buFont typeface="Arial" panose="020B0604020202020204" pitchFamily="34" charset="0"/>
+              <a:buChar char="•"/>
+              <a:defRPr sz="1800" kern="1200">
+                <a:solidFill>
+                  <a:schemeClr val="tx1"/>
+                </a:solidFill>
+                <a:latin typeface="+mn-lt"/>
+                <a:ea typeface="+mn-ea"/>
+                <a:cs typeface="+mn-cs"/>
+              </a:defRPr>
+            </a:lvl9pPr>
+          </a:lstStyle>
+          <a:p>
+            <a:pPr marL="0" indent="0">
+              <a:buNone/>
+            </a:pPr>
+            <a:r>
+              <a:rPr lang="fr-CH" sz="2200" dirty="0">
+                <a:solidFill>
+                  <a:schemeClr val="accent2">
+                    <a:lumMod val="75000"/>
+                  </a:schemeClr>
+                </a:solidFill>
+                <a:latin typeface="Space Grotesk" pitchFamily="2" charset="0"/>
+                <a:cs typeface="Space Grotesk" pitchFamily="2" charset="0"/>
+              </a:rPr>
+              <a:t>Mécanique</a:t>
+            </a:r>
+          </a:p>
+          <a:p>
+            <a:pPr marL="0" indent="0">
+              <a:buNone/>
+            </a:pPr>
+            <a:r>
+              <a:rPr lang="fr-CH" sz="2200" dirty="0">
+                <a:solidFill>
+                  <a:schemeClr val="accent2">
+                    <a:lumMod val="75000"/>
+                  </a:schemeClr>
+                </a:solidFill>
+                <a:latin typeface="Space Grotesk" pitchFamily="2" charset="0"/>
+                <a:cs typeface="Space Grotesk" pitchFamily="2" charset="0"/>
+              </a:rPr>
+              <a:t>Electronique</a:t>
+            </a:r>
+          </a:p>
+          <a:p>
+            <a:pPr marL="0" indent="0">
+              <a:buNone/>
+            </a:pPr>
+            <a:r>
+              <a:rPr lang="fr-CH" sz="2200" dirty="0">
+                <a:solidFill>
+                  <a:schemeClr val="accent2">
+                    <a:lumMod val="75000"/>
+                  </a:schemeClr>
+                </a:solidFill>
+                <a:latin typeface="Space Grotesk" pitchFamily="2" charset="0"/>
+                <a:cs typeface="Space Grotesk" pitchFamily="2" charset="0"/>
+              </a:rPr>
+              <a:t>Programmation</a:t>
+            </a:r>
+          </a:p>
+          <a:p>
+            <a:pPr marL="0" indent="0">
+              <a:buNone/>
+            </a:pPr>
+            <a:r>
+              <a:rPr lang="fr-CH" sz="2200" dirty="0">
+                <a:solidFill>
+                  <a:schemeClr val="accent2">
+                    <a:lumMod val="75000"/>
+                  </a:schemeClr>
+                </a:solidFill>
+                <a:latin typeface="Space Grotesk" pitchFamily="2" charset="0"/>
+                <a:cs typeface="Space Grotesk" pitchFamily="2" charset="0"/>
+              </a:rPr>
+              <a:t>Interface de contrôle</a:t>
+            </a:r>
+          </a:p>
+          <a:p>
+            <a:endParaRPr lang="fr-CH" sz="1700" dirty="0">
+              <a:solidFill>
+                <a:schemeClr val="tx2"/>
+              </a:solidFill>
+              <a:latin typeface="Space Grotesk" pitchFamily="2" charset="0"/>
+              <a:cs typeface="Space Grotesk" pitchFamily="2" charset="0"/>
+            </a:endParaRPr>
+          </a:p>
+        </p:txBody>
+      </p:sp>
+      <p:sp>
+        <p:nvSpPr>
+          <p:cNvPr id="12" name="Content Placeholder 2">
+            <a:extLst>
+              <a:ext uri="{FF2B5EF4-FFF2-40B4-BE49-F238E27FC236}">
+                <a16:creationId xmlns:a16="http://schemas.microsoft.com/office/drawing/2014/main" id="{378281E7-CA25-0211-16FE-6AD274191497}"/>
+              </a:ext>
+            </a:extLst>
+          </p:cNvPr>
+          <p:cNvSpPr txBox="1">
+            <a:spLocks/>
+          </p:cNvSpPr>
+          <p:nvPr/>
+        </p:nvSpPr>
+        <p:spPr>
+          <a:xfrm>
+            <a:off x="4442959" y="2674374"/>
+            <a:ext cx="650900" cy="754626"/>
+          </a:xfrm>
+          <a:prstGeom prst="rect">
+            <a:avLst/>
+          </a:prstGeom>
+        </p:spPr>
+        <p:txBody>
+          <a:bodyPr vert="horz" lIns="91440" tIns="45720" rIns="91440" bIns="45720" rtlCol="0" anchor="ctr">
+            <a:noAutofit/>
+          </a:bodyPr>
+          <a:lstStyle>
+            <a:lvl1pPr marL="228600" indent="-228600" algn="l" defTabSz="914400" rtl="0" eaLnBrk="1" latinLnBrk="0" hangingPunct="1">
+              <a:lnSpc>
+                <a:spcPct val="90000"/>
+              </a:lnSpc>
+              <a:spcBef>
+                <a:spcPts val="1000"/>
+              </a:spcBef>
+              <a:buFont typeface="Arial" panose="020B0604020202020204" pitchFamily="34" charset="0"/>
+              <a:buChar char="•"/>
+              <a:defRPr sz="2800" kern="1200">
+                <a:solidFill>
+                  <a:schemeClr val="tx1"/>
+                </a:solidFill>
+                <a:latin typeface="+mn-lt"/>
+                <a:ea typeface="+mn-ea"/>
+                <a:cs typeface="+mn-cs"/>
+              </a:defRPr>
+            </a:lvl1pPr>
+            <a:lvl2pPr marL="685800" indent="-228600" algn="l" defTabSz="914400" rtl="0" eaLnBrk="1" latinLnBrk="0" hangingPunct="1">
+              <a:lnSpc>
+                <a:spcPct val="90000"/>
+              </a:lnSpc>
+              <a:spcBef>
+                <a:spcPts val="500"/>
+              </a:spcBef>
+              <a:buFont typeface="Arial" panose="020B0604020202020204" pitchFamily="34" charset="0"/>
+              <a:buChar char="•"/>
+              <a:defRPr sz="2400" kern="1200">
+                <a:solidFill>
+                  <a:schemeClr val="tx1"/>
+                </a:solidFill>
+                <a:latin typeface="+mn-lt"/>
+                <a:ea typeface="+mn-ea"/>
+                <a:cs typeface="+mn-cs"/>
+              </a:defRPr>
+            </a:lvl2pPr>
+            <a:lvl3pPr marL="1143000" indent="-228600" algn="l" defTabSz="914400" rtl="0" eaLnBrk="1" latinLnBrk="0" hangingPunct="1">
+              <a:lnSpc>
+                <a:spcPct val="90000"/>
+              </a:lnSpc>
+              <a:spcBef>
+                <a:spcPts val="500"/>
+              </a:spcBef>
+              <a:buFont typeface="Arial" panose="020B0604020202020204" pitchFamily="34" charset="0"/>
+              <a:buChar char="•"/>
+              <a:defRPr sz="2000" kern="1200">
+                <a:solidFill>
+                  <a:schemeClr val="tx1"/>
+                </a:solidFill>
+                <a:latin typeface="+mn-lt"/>
+                <a:ea typeface="+mn-ea"/>
+                <a:cs typeface="+mn-cs"/>
+              </a:defRPr>
+            </a:lvl3pPr>
+            <a:lvl4pPr marL="1600200" indent="-228600" algn="l" defTabSz="914400" rtl="0" eaLnBrk="1" latinLnBrk="0" hangingPunct="1">
+              <a:lnSpc>
+                <a:spcPct val="90000"/>
+              </a:lnSpc>
+              <a:spcBef>
+                <a:spcPts val="500"/>
+              </a:spcBef>
+              <a:buFont typeface="Arial" panose="020B0604020202020204" pitchFamily="34" charset="0"/>
+              <a:buChar char="•"/>
+              <a:defRPr sz="1800" kern="1200">
+                <a:solidFill>
+                  <a:schemeClr val="tx1"/>
+                </a:solidFill>
+                <a:latin typeface="+mn-lt"/>
+                <a:ea typeface="+mn-ea"/>
+                <a:cs typeface="+mn-cs"/>
+              </a:defRPr>
+            </a:lvl4pPr>
+            <a:lvl5pPr marL="2057400" indent="-228600" algn="l" defTabSz="914400" rtl="0" eaLnBrk="1" latinLnBrk="0" hangingPunct="1">
+              <a:lnSpc>
+                <a:spcPct val="90000"/>
+              </a:lnSpc>
+              <a:spcBef>
+                <a:spcPts val="500"/>
+              </a:spcBef>
+              <a:buFont typeface="Arial" panose="020B0604020202020204" pitchFamily="34" charset="0"/>
+              <a:buChar char="•"/>
+              <a:defRPr sz="1800" kern="1200">
+                <a:solidFill>
+                  <a:schemeClr val="tx1"/>
+                </a:solidFill>
+                <a:latin typeface="+mn-lt"/>
+                <a:ea typeface="+mn-ea"/>
+                <a:cs typeface="+mn-cs"/>
+              </a:defRPr>
+            </a:lvl5pPr>
+            <a:lvl6pPr marL="2514600" indent="-228600" algn="l" defTabSz="914400" rtl="0" eaLnBrk="1" latinLnBrk="0" hangingPunct="1">
+              <a:lnSpc>
+                <a:spcPct val="90000"/>
+              </a:lnSpc>
+              <a:spcBef>
+                <a:spcPts val="500"/>
+              </a:spcBef>
+              <a:buFont typeface="Arial" panose="020B0604020202020204" pitchFamily="34" charset="0"/>
+              <a:buChar char="•"/>
+              <a:defRPr sz="1800" kern="1200">
+                <a:solidFill>
+                  <a:schemeClr val="tx1"/>
+                </a:solidFill>
+                <a:latin typeface="+mn-lt"/>
+                <a:ea typeface="+mn-ea"/>
+                <a:cs typeface="+mn-cs"/>
+              </a:defRPr>
+            </a:lvl6pPr>
+            <a:lvl7pPr marL="2971800" indent="-228600" algn="l" defTabSz="914400" rtl="0" eaLnBrk="1" latinLnBrk="0" hangingPunct="1">
+              <a:lnSpc>
+                <a:spcPct val="90000"/>
+              </a:lnSpc>
+              <a:spcBef>
+                <a:spcPts val="500"/>
+              </a:spcBef>
+              <a:buFont typeface="Arial" panose="020B0604020202020204" pitchFamily="34" charset="0"/>
+              <a:buChar char="•"/>
+              <a:defRPr sz="1800" kern="1200">
+                <a:solidFill>
+                  <a:schemeClr val="tx1"/>
+                </a:solidFill>
+                <a:latin typeface="+mn-lt"/>
+                <a:ea typeface="+mn-ea"/>
+                <a:cs typeface="+mn-cs"/>
+              </a:defRPr>
+            </a:lvl7pPr>
+            <a:lvl8pPr marL="3429000" indent="-228600" algn="l" defTabSz="914400" rtl="0" eaLnBrk="1" latinLnBrk="0" hangingPunct="1">
+              <a:lnSpc>
+                <a:spcPct val="90000"/>
+              </a:lnSpc>
+              <a:spcBef>
+                <a:spcPts val="500"/>
+              </a:spcBef>
+              <a:buFont typeface="Arial" panose="020B0604020202020204" pitchFamily="34" charset="0"/>
+              <a:buChar char="•"/>
+              <a:defRPr sz="1800" kern="1200">
+                <a:solidFill>
+                  <a:schemeClr val="tx1"/>
+                </a:solidFill>
+                <a:latin typeface="+mn-lt"/>
+                <a:ea typeface="+mn-ea"/>
+                <a:cs typeface="+mn-cs"/>
+              </a:defRPr>
+            </a:lvl8pPr>
+            <a:lvl9pPr marL="3886200" indent="-228600" algn="l" defTabSz="914400" rtl="0" eaLnBrk="1" latinLnBrk="0" hangingPunct="1">
+              <a:lnSpc>
+                <a:spcPct val="90000"/>
+              </a:lnSpc>
+              <a:spcBef>
+                <a:spcPts val="500"/>
+              </a:spcBef>
+              <a:buFont typeface="Arial" panose="020B0604020202020204" pitchFamily="34" charset="0"/>
+              <a:buChar char="•"/>
+              <a:defRPr sz="1800" kern="1200">
+                <a:solidFill>
+                  <a:schemeClr val="tx1"/>
+                </a:solidFill>
+                <a:latin typeface="+mn-lt"/>
+                <a:ea typeface="+mn-ea"/>
+                <a:cs typeface="+mn-cs"/>
+              </a:defRPr>
+            </a:lvl9pPr>
+          </a:lstStyle>
+          <a:p>
+            <a:pPr marL="0" indent="0">
+              <a:buNone/>
+            </a:pPr>
+            <a:r>
+              <a:rPr lang="en-US" sz="5000" b="1" dirty="0">
+                <a:solidFill>
+                  <a:schemeClr val="accent2">
+                    <a:lumMod val="75000"/>
+                  </a:schemeClr>
+                </a:solidFill>
+                <a:latin typeface="Space Grotesk" pitchFamily="2" charset="0"/>
+                <a:cs typeface="Space Grotesk" pitchFamily="2" charset="0"/>
+              </a:rPr>
+              <a:t>2</a:t>
+            </a:r>
+            <a:endParaRPr lang="fr-CH" sz="5000" b="1" dirty="0">
+              <a:solidFill>
+                <a:schemeClr val="accent2">
+                  <a:lumMod val="75000"/>
+                </a:schemeClr>
+              </a:solidFill>
+              <a:latin typeface="Space Grotesk" pitchFamily="2" charset="0"/>
+              <a:cs typeface="Space Grotesk" pitchFamily="2" charset="0"/>
+            </a:endParaRPr>
+          </a:p>
+        </p:txBody>
+      </p:sp>
+      <p:sp>
+        <p:nvSpPr>
+          <p:cNvPr id="20" name="Content Placeholder 2">
+            <a:extLst>
+              <a:ext uri="{FF2B5EF4-FFF2-40B4-BE49-F238E27FC236}">
+                <a16:creationId xmlns:a16="http://schemas.microsoft.com/office/drawing/2014/main" id="{7C082AFD-AC2C-117F-D9D0-7950E02BF694}"/>
+              </a:ext>
+            </a:extLst>
+          </p:cNvPr>
+          <p:cNvSpPr txBox="1">
+            <a:spLocks/>
+          </p:cNvSpPr>
+          <p:nvPr/>
+        </p:nvSpPr>
+        <p:spPr>
+          <a:xfrm>
+            <a:off x="8181054" y="2674374"/>
+            <a:ext cx="650900" cy="754626"/>
+          </a:xfrm>
+          <a:prstGeom prst="rect">
+            <a:avLst/>
+          </a:prstGeom>
+        </p:spPr>
+        <p:txBody>
+          <a:bodyPr vert="horz" lIns="91440" tIns="45720" rIns="91440" bIns="45720" rtlCol="0" anchor="ctr">
+            <a:noAutofit/>
+          </a:bodyPr>
+          <a:lstStyle>
+            <a:lvl1pPr marL="228600" indent="-228600" algn="l" defTabSz="914400" rtl="0" eaLnBrk="1" latinLnBrk="0" hangingPunct="1">
+              <a:lnSpc>
+                <a:spcPct val="90000"/>
+              </a:lnSpc>
+              <a:spcBef>
+                <a:spcPts val="1000"/>
+              </a:spcBef>
+              <a:buFont typeface="Arial" panose="020B0604020202020204" pitchFamily="34" charset="0"/>
+              <a:buChar char="•"/>
+              <a:defRPr sz="2800" kern="1200">
+                <a:solidFill>
+                  <a:schemeClr val="tx1"/>
+                </a:solidFill>
+                <a:latin typeface="+mn-lt"/>
+                <a:ea typeface="+mn-ea"/>
+                <a:cs typeface="+mn-cs"/>
+              </a:defRPr>
+            </a:lvl1pPr>
+            <a:lvl2pPr marL="685800" indent="-228600" algn="l" defTabSz="914400" rtl="0" eaLnBrk="1" latinLnBrk="0" hangingPunct="1">
+              <a:lnSpc>
+                <a:spcPct val="90000"/>
+              </a:lnSpc>
+              <a:spcBef>
+                <a:spcPts val="500"/>
+              </a:spcBef>
+              <a:buFont typeface="Arial" panose="020B0604020202020204" pitchFamily="34" charset="0"/>
+              <a:buChar char="•"/>
+              <a:defRPr sz="2400" kern="1200">
+                <a:solidFill>
+                  <a:schemeClr val="tx1"/>
+                </a:solidFill>
+                <a:latin typeface="+mn-lt"/>
+                <a:ea typeface="+mn-ea"/>
+                <a:cs typeface="+mn-cs"/>
+              </a:defRPr>
+            </a:lvl2pPr>
+            <a:lvl3pPr marL="1143000" indent="-228600" algn="l" defTabSz="914400" rtl="0" eaLnBrk="1" latinLnBrk="0" hangingPunct="1">
+              <a:lnSpc>
+                <a:spcPct val="90000"/>
+              </a:lnSpc>
+              <a:spcBef>
+                <a:spcPts val="500"/>
+              </a:spcBef>
+              <a:buFont typeface="Arial" panose="020B0604020202020204" pitchFamily="34" charset="0"/>
+              <a:buChar char="•"/>
+              <a:defRPr sz="2000" kern="1200">
+                <a:solidFill>
+                  <a:schemeClr val="tx1"/>
+                </a:solidFill>
+                <a:latin typeface="+mn-lt"/>
+                <a:ea typeface="+mn-ea"/>
+                <a:cs typeface="+mn-cs"/>
+              </a:defRPr>
+            </a:lvl3pPr>
+            <a:lvl4pPr marL="1600200" indent="-228600" algn="l" defTabSz="914400" rtl="0" eaLnBrk="1" latinLnBrk="0" hangingPunct="1">
+              <a:lnSpc>
+                <a:spcPct val="90000"/>
+              </a:lnSpc>
+              <a:spcBef>
+                <a:spcPts val="500"/>
+              </a:spcBef>
+              <a:buFont typeface="Arial" panose="020B0604020202020204" pitchFamily="34" charset="0"/>
+              <a:buChar char="•"/>
+              <a:defRPr sz="1800" kern="1200">
+                <a:solidFill>
+                  <a:schemeClr val="tx1"/>
+                </a:solidFill>
+                <a:latin typeface="+mn-lt"/>
+                <a:ea typeface="+mn-ea"/>
+                <a:cs typeface="+mn-cs"/>
+              </a:defRPr>
+            </a:lvl4pPr>
+            <a:lvl5pPr marL="2057400" indent="-228600" algn="l" defTabSz="914400" rtl="0" eaLnBrk="1" latinLnBrk="0" hangingPunct="1">
+              <a:lnSpc>
+                <a:spcPct val="90000"/>
+              </a:lnSpc>
+              <a:spcBef>
+                <a:spcPts val="500"/>
+              </a:spcBef>
+              <a:buFont typeface="Arial" panose="020B0604020202020204" pitchFamily="34" charset="0"/>
+              <a:buChar char="•"/>
+              <a:defRPr sz="1800" kern="1200">
+                <a:solidFill>
+                  <a:schemeClr val="tx1"/>
+                </a:solidFill>
+                <a:latin typeface="+mn-lt"/>
+                <a:ea typeface="+mn-ea"/>
+                <a:cs typeface="+mn-cs"/>
+              </a:defRPr>
+            </a:lvl5pPr>
+            <a:lvl6pPr marL="2514600" indent="-228600" algn="l" defTabSz="914400" rtl="0" eaLnBrk="1" latinLnBrk="0" hangingPunct="1">
+              <a:lnSpc>
+                <a:spcPct val="90000"/>
+              </a:lnSpc>
+              <a:spcBef>
+                <a:spcPts val="500"/>
+              </a:spcBef>
+              <a:buFont typeface="Arial" panose="020B0604020202020204" pitchFamily="34" charset="0"/>
+              <a:buChar char="•"/>
+              <a:defRPr sz="1800" kern="1200">
+                <a:solidFill>
+                  <a:schemeClr val="tx1"/>
+                </a:solidFill>
+                <a:latin typeface="+mn-lt"/>
+                <a:ea typeface="+mn-ea"/>
+                <a:cs typeface="+mn-cs"/>
+              </a:defRPr>
+            </a:lvl6pPr>
+            <a:lvl7pPr marL="2971800" indent="-228600" algn="l" defTabSz="914400" rtl="0" eaLnBrk="1" latinLnBrk="0" hangingPunct="1">
+              <a:lnSpc>
+                <a:spcPct val="90000"/>
+              </a:lnSpc>
+              <a:spcBef>
+                <a:spcPts val="500"/>
+              </a:spcBef>
+              <a:buFont typeface="Arial" panose="020B0604020202020204" pitchFamily="34" charset="0"/>
+              <a:buChar char="•"/>
+              <a:defRPr sz="1800" kern="1200">
+                <a:solidFill>
+                  <a:schemeClr val="tx1"/>
+                </a:solidFill>
+                <a:latin typeface="+mn-lt"/>
+                <a:ea typeface="+mn-ea"/>
+                <a:cs typeface="+mn-cs"/>
+              </a:defRPr>
+            </a:lvl7pPr>
+            <a:lvl8pPr marL="3429000" indent="-228600" algn="l" defTabSz="914400" rtl="0" eaLnBrk="1" latinLnBrk="0" hangingPunct="1">
+              <a:lnSpc>
+                <a:spcPct val="90000"/>
+              </a:lnSpc>
+              <a:spcBef>
+                <a:spcPts val="500"/>
+              </a:spcBef>
+              <a:buFont typeface="Arial" panose="020B0604020202020204" pitchFamily="34" charset="0"/>
+              <a:buChar char="•"/>
+              <a:defRPr sz="1800" kern="1200">
+                <a:solidFill>
+                  <a:schemeClr val="tx1"/>
+                </a:solidFill>
+                <a:latin typeface="+mn-lt"/>
+                <a:ea typeface="+mn-ea"/>
+                <a:cs typeface="+mn-cs"/>
+              </a:defRPr>
+            </a:lvl8pPr>
+            <a:lvl9pPr marL="3886200" indent="-228600" algn="l" defTabSz="914400" rtl="0" eaLnBrk="1" latinLnBrk="0" hangingPunct="1">
+              <a:lnSpc>
+                <a:spcPct val="90000"/>
+              </a:lnSpc>
+              <a:spcBef>
+                <a:spcPts val="500"/>
+              </a:spcBef>
+              <a:buFont typeface="Arial" panose="020B0604020202020204" pitchFamily="34" charset="0"/>
+              <a:buChar char="•"/>
+              <a:defRPr sz="1800" kern="1200">
+                <a:solidFill>
+                  <a:schemeClr val="tx1"/>
+                </a:solidFill>
+                <a:latin typeface="+mn-lt"/>
+                <a:ea typeface="+mn-ea"/>
+                <a:cs typeface="+mn-cs"/>
+              </a:defRPr>
+            </a:lvl9pPr>
+          </a:lstStyle>
+          <a:p>
+            <a:pPr marL="0" indent="0">
+              <a:buNone/>
+            </a:pPr>
+            <a:r>
+              <a:rPr lang="en-US" sz="5000" b="1" dirty="0">
+                <a:solidFill>
+                  <a:schemeClr val="accent6">
+                    <a:lumMod val="75000"/>
+                  </a:schemeClr>
+                </a:solidFill>
+                <a:latin typeface="Space Grotesk" pitchFamily="2" charset="0"/>
+                <a:cs typeface="Space Grotesk" pitchFamily="2" charset="0"/>
+              </a:rPr>
+              <a:t>3</a:t>
+            </a:r>
+            <a:endParaRPr lang="fr-CH" sz="5000" b="1" dirty="0">
+              <a:solidFill>
+                <a:schemeClr val="accent6">
+                  <a:lumMod val="75000"/>
+                </a:schemeClr>
+              </a:solidFill>
+              <a:latin typeface="Space Grotesk" pitchFamily="2" charset="0"/>
+              <a:cs typeface="Space Grotesk" pitchFamily="2" charset="0"/>
+            </a:endParaRPr>
+          </a:p>
+        </p:txBody>
+      </p:sp>
+    </p:spTree>
+    <p:extLst>
+      <p:ext uri="{BB962C8B-B14F-4D97-AF65-F5344CB8AC3E}">
+        <p14:creationId xmlns:p14="http://schemas.microsoft.com/office/powerpoint/2010/main" val="3107572406"/>
+      </p:ext>
+    </p:extLst>
+  </p:cSld>
+  <p:clrMapOvr>
+    <a:masterClrMapping/>
+  </p:clrMapOvr>
+</p:sld>
+</file>
+
+<file path=ppt/slides/slide20.xml><?xml version="1.0" encoding="utf-8"?>
+<p:sld xmlns:a="http://schemas.openxmlformats.org/drawingml/2006/main" xmlns:r="http://schemas.openxmlformats.org/officeDocument/2006/relationships" xmlns:p="http://schemas.openxmlformats.org/presentationml/2006/main">
+  <p:cSld>
+    <p:spTree>
+      <p:nvGrpSpPr>
+        <p:cNvPr id="1" name="">
+          <a:extLst>
+            <a:ext uri="{FF2B5EF4-FFF2-40B4-BE49-F238E27FC236}">
+              <a16:creationId xmlns:a16="http://schemas.microsoft.com/office/drawing/2014/main" id="{3DD41584-8060-1714-F114-D3EA1B66F83C}"/>
+            </a:ext>
+          </a:extLst>
+        </p:cNvPr>
+        <p:cNvGrpSpPr/>
+        <p:nvPr/>
+      </p:nvGrpSpPr>
+      <p:grpSpPr>
+        <a:xfrm>
+          <a:off x="0" y="0"/>
+          <a:ext cx="0" cy="0"/>
+          <a:chOff x="0" y="0"/>
+          <a:chExt cx="0" cy="0"/>
+        </a:xfrm>
+      </p:grpSpPr>
+      <p:sp>
+        <p:nvSpPr>
+          <p:cNvPr id="2" name="Title 1">
+            <a:extLst>
+              <a:ext uri="{FF2B5EF4-FFF2-40B4-BE49-F238E27FC236}">
+                <a16:creationId xmlns:a16="http://schemas.microsoft.com/office/drawing/2014/main" id="{B6E0B395-431C-F027-D791-EB7F25B16953}"/>
+              </a:ext>
+            </a:extLst>
+          </p:cNvPr>
+          <p:cNvSpPr>
+            <a:spLocks noGrp="1"/>
+          </p:cNvSpPr>
+          <p:nvPr>
+            <p:ph type="title"/>
+          </p:nvPr>
+        </p:nvSpPr>
+        <p:spPr>
+          <a:xfrm>
+            <a:off x="838200" y="373901"/>
+            <a:ext cx="10515600" cy="1325563"/>
+          </a:xfrm>
+        </p:spPr>
         <p:txBody>
           <a:bodyPr/>
           <a:lstStyle/>
           <a:p>
             <a:r>
-              <a:rPr lang="en-US" dirty="0"/>
-              <a:t>Introduction</a:t>
-            </a:r>
-            <a:endParaRPr lang="fr-CH" dirty="0"/>
-          </a:p>
-        </p:txBody>
-      </p:sp>
-      <p:sp>
-        <p:nvSpPr>
-          <p:cNvPr id="3" name="Content Placeholder 2">
-            <a:extLst>
-              <a:ext uri="{FF2B5EF4-FFF2-40B4-BE49-F238E27FC236}">
-                <a16:creationId xmlns:a16="http://schemas.microsoft.com/office/drawing/2014/main" id="{71A8CD75-9623-AF8A-54EC-4D54F5CF3129}"/>
-              </a:ext>
-            </a:extLst>
-          </p:cNvPr>
-          <p:cNvSpPr>
-            <a:spLocks noGrp="1"/>
-          </p:cNvSpPr>
+              <a:rPr lang="en-US" dirty="0">
+                <a:solidFill>
+                  <a:schemeClr val="accent6">
+                    <a:lumMod val="75000"/>
+                  </a:schemeClr>
+                </a:solidFill>
+                <a:latin typeface="Space Grotesk" pitchFamily="2" charset="0"/>
+                <a:cs typeface="Space Grotesk" pitchFamily="2" charset="0"/>
+              </a:rPr>
+              <a:t>Simulation</a:t>
+            </a:r>
+            <a:br>
+              <a:rPr lang="en-US" dirty="0">
+                <a:solidFill>
+                  <a:schemeClr val="accent6">
+                    <a:lumMod val="75000"/>
+                  </a:schemeClr>
+                </a:solidFill>
+                <a:latin typeface="Space Grotesk" pitchFamily="2" charset="0"/>
+                <a:cs typeface="Space Grotesk" pitchFamily="2" charset="0"/>
+              </a:rPr>
+            </a:br>
+            <a:r>
+              <a:rPr lang="en-US" sz="2800" dirty="0" err="1">
+                <a:solidFill>
+                  <a:schemeClr val="accent6">
+                    <a:lumMod val="75000"/>
+                  </a:schemeClr>
+                </a:solidFill>
+                <a:latin typeface="Space Grotesk" pitchFamily="2" charset="0"/>
+                <a:cs typeface="Space Grotesk" pitchFamily="2" charset="0"/>
+              </a:rPr>
+              <a:t>Complet</a:t>
+            </a:r>
+            <a:endParaRPr lang="fr-CH" dirty="0">
+              <a:solidFill>
+                <a:schemeClr val="accent6">
+                  <a:lumMod val="75000"/>
+                </a:schemeClr>
+              </a:solidFill>
+              <a:latin typeface="Space Grotesk" pitchFamily="2" charset="0"/>
+              <a:cs typeface="Space Grotesk" pitchFamily="2" charset="0"/>
+            </a:endParaRPr>
+          </a:p>
+        </p:txBody>
+      </p:sp>
+      <p:pic>
+        <p:nvPicPr>
+          <p:cNvPr id="21" name="Content Placeholder 20">
+            <a:extLst>
+              <a:ext uri="{FF2B5EF4-FFF2-40B4-BE49-F238E27FC236}">
+                <a16:creationId xmlns:a16="http://schemas.microsoft.com/office/drawing/2014/main" id="{4A888E36-0815-D86C-E8F6-037BCE61313C}"/>
+              </a:ext>
+            </a:extLst>
+          </p:cNvPr>
+          <p:cNvPicPr>
+            <a:picLocks noGrp="1" noChangeAspect="1"/>
+          </p:cNvPicPr>
           <p:nvPr>
             <p:ph idx="1"/>
+          </p:nvPr>
+        </p:nvPicPr>
+        <p:blipFill>
+          <a:blip r:embed="rId2">
+            <a:extLst>
+              <a:ext uri="{28A0092B-C50C-407E-A947-70E740481C1C}">
+                <a14:useLocalDpi xmlns:a14="http://schemas.microsoft.com/office/drawing/2010/main" val="0"/>
+              </a:ext>
+            </a:extLst>
+          </a:blip>
+          <a:srcRect t="25023" b="22785"/>
+          <a:stretch>
+            <a:fillRect/>
+          </a:stretch>
+        </p:blipFill>
+        <p:spPr>
+          <a:xfrm>
+            <a:off x="488016" y="1809135"/>
+            <a:ext cx="11320526" cy="4565543"/>
+          </a:xfrm>
+          <a:prstGeom prst="rect">
+            <a:avLst/>
+          </a:prstGeom>
+        </p:spPr>
+      </p:pic>
+      <p:sp>
+        <p:nvSpPr>
+          <p:cNvPr id="3" name="Slide Number Placeholder 2">
+            <a:extLst>
+              <a:ext uri="{FF2B5EF4-FFF2-40B4-BE49-F238E27FC236}">
+                <a16:creationId xmlns:a16="http://schemas.microsoft.com/office/drawing/2014/main" id="{27FCE463-8F36-2808-D423-D1678E3A5236}"/>
+              </a:ext>
+            </a:extLst>
+          </p:cNvPr>
+          <p:cNvSpPr>
+            <a:spLocks noGrp="1"/>
+          </p:cNvSpPr>
+          <p:nvPr>
+            <p:ph type="sldNum" sz="quarter" idx="12"/>
           </p:nvPr>
         </p:nvSpPr>
         <p:spPr/>
@@ -3625,39 +8136,2240 @@
           <a:bodyPr/>
           <a:lstStyle/>
           <a:p>
-            <a:r>
-              <a:rPr lang="en-US" dirty="0"/>
+            <a:fld id="{27610C65-3251-4B31-A496-D9D978F99BA5}" type="slidenum">
+              <a:rPr lang="fr-CH" smtClean="0"/>
+              <a:t>20</a:t>
+            </a:fld>
+            <a:endParaRPr lang="fr-CH"/>
+          </a:p>
+        </p:txBody>
+      </p:sp>
+    </p:spTree>
+    <p:extLst>
+      <p:ext uri="{BB962C8B-B14F-4D97-AF65-F5344CB8AC3E}">
+        <p14:creationId xmlns:p14="http://schemas.microsoft.com/office/powerpoint/2010/main" val="3240295531"/>
+      </p:ext>
+    </p:extLst>
+  </p:cSld>
+  <p:clrMapOvr>
+    <a:masterClrMapping/>
+  </p:clrMapOvr>
+  <mc:AlternateContent xmlns:mc="http://schemas.openxmlformats.org/markup-compatibility/2006" xmlns:p159="http://schemas.microsoft.com/office/powerpoint/2015/09/main">
+    <mc:Choice Requires="p159">
+      <p:transition spd="slow">
+        <p159:morph option="byObject"/>
+      </p:transition>
+    </mc:Choice>
+    <mc:Fallback xmlns="">
+      <p:transition spd="slow">
+        <p:fade/>
+      </p:transition>
+    </mc:Fallback>
+  </mc:AlternateContent>
+</p:sld>
+</file>
+
+<file path=ppt/slides/slide21.xml><?xml version="1.0" encoding="utf-8"?>
+<p:sld xmlns:a="http://schemas.openxmlformats.org/drawingml/2006/main" xmlns:r="http://schemas.openxmlformats.org/officeDocument/2006/relationships" xmlns:p="http://schemas.openxmlformats.org/presentationml/2006/main">
+  <p:cSld>
+    <p:spTree>
+      <p:nvGrpSpPr>
+        <p:cNvPr id="1" name="">
+          <a:extLst>
+            <a:ext uri="{FF2B5EF4-FFF2-40B4-BE49-F238E27FC236}">
+              <a16:creationId xmlns:a16="http://schemas.microsoft.com/office/drawing/2014/main" id="{D502E488-83B1-4403-2B9A-AB651C04C753}"/>
+            </a:ext>
+          </a:extLst>
+        </p:cNvPr>
+        <p:cNvGrpSpPr/>
+        <p:nvPr/>
+      </p:nvGrpSpPr>
+      <p:grpSpPr>
+        <a:xfrm>
+          <a:off x="0" y="0"/>
+          <a:ext cx="0" cy="0"/>
+          <a:chOff x="0" y="0"/>
+          <a:chExt cx="0" cy="0"/>
+        </a:xfrm>
+      </p:grpSpPr>
+      <p:sp>
+        <p:nvSpPr>
+          <p:cNvPr id="2" name="Title 1">
+            <a:extLst>
+              <a:ext uri="{FF2B5EF4-FFF2-40B4-BE49-F238E27FC236}">
+                <a16:creationId xmlns:a16="http://schemas.microsoft.com/office/drawing/2014/main" id="{F5F4AEE6-00AF-4E15-FADA-D45ADCE8B43E}"/>
+              </a:ext>
+            </a:extLst>
+          </p:cNvPr>
+          <p:cNvSpPr>
+            <a:spLocks noGrp="1"/>
+          </p:cNvSpPr>
+          <p:nvPr>
+            <p:ph type="title"/>
+          </p:nvPr>
+        </p:nvSpPr>
+        <p:spPr>
+          <a:xfrm>
+            <a:off x="838200" y="373901"/>
+            <a:ext cx="10515600" cy="1325563"/>
+          </a:xfrm>
+        </p:spPr>
+        <p:txBody>
+          <a:bodyPr/>
+          <a:lstStyle/>
+          <a:p>
+            <a:r>
+              <a:rPr lang="en-US" dirty="0">
+                <a:solidFill>
+                  <a:schemeClr val="accent6">
+                    <a:lumMod val="75000"/>
+                  </a:schemeClr>
+                </a:solidFill>
+                <a:latin typeface="Space Grotesk" pitchFamily="2" charset="0"/>
+                <a:cs typeface="Space Grotesk" pitchFamily="2" charset="0"/>
+              </a:rPr>
+              <a:t>Simulation</a:t>
+            </a:r>
+            <a:br>
+              <a:rPr lang="en-US" dirty="0">
+                <a:solidFill>
+                  <a:schemeClr val="accent6">
+                    <a:lumMod val="75000"/>
+                  </a:schemeClr>
+                </a:solidFill>
+                <a:latin typeface="Space Grotesk" pitchFamily="2" charset="0"/>
+                <a:cs typeface="Space Grotesk" pitchFamily="2" charset="0"/>
+              </a:rPr>
+            </a:br>
+            <a:r>
+              <a:rPr lang="en-US" sz="2800" dirty="0">
+                <a:solidFill>
+                  <a:schemeClr val="accent6">
+                    <a:lumMod val="75000"/>
+                  </a:schemeClr>
+                </a:solidFill>
+                <a:latin typeface="Space Grotesk" pitchFamily="2" charset="0"/>
+                <a:cs typeface="Space Grotesk" pitchFamily="2" charset="0"/>
+              </a:rPr>
+              <a:t>Couple + Système à </a:t>
+            </a:r>
+            <a:r>
+              <a:rPr lang="en-US" sz="2800" dirty="0" err="1">
+                <a:solidFill>
+                  <a:schemeClr val="accent6">
+                    <a:lumMod val="75000"/>
+                  </a:schemeClr>
+                </a:solidFill>
+                <a:latin typeface="Space Grotesk" pitchFamily="2" charset="0"/>
+                <a:cs typeface="Space Grotesk" pitchFamily="2" charset="0"/>
+              </a:rPr>
+              <a:t>régler</a:t>
+            </a:r>
+            <a:endParaRPr lang="fr-CH" dirty="0">
+              <a:solidFill>
+                <a:schemeClr val="accent6">
+                  <a:lumMod val="75000"/>
+                </a:schemeClr>
+              </a:solidFill>
+              <a:latin typeface="Space Grotesk" pitchFamily="2" charset="0"/>
+              <a:cs typeface="Space Grotesk" pitchFamily="2" charset="0"/>
+            </a:endParaRPr>
+          </a:p>
+        </p:txBody>
+      </p:sp>
+      <p:pic>
+        <p:nvPicPr>
+          <p:cNvPr id="21" name="Content Placeholder 20">
+            <a:extLst>
+              <a:ext uri="{FF2B5EF4-FFF2-40B4-BE49-F238E27FC236}">
+                <a16:creationId xmlns:a16="http://schemas.microsoft.com/office/drawing/2014/main" id="{E7A74C3C-8038-F413-2F2D-9C02D890F8E7}"/>
+              </a:ext>
+            </a:extLst>
+          </p:cNvPr>
+          <p:cNvPicPr>
+            <a:picLocks noGrp="1" noChangeAspect="1"/>
+          </p:cNvPicPr>
+          <p:nvPr>
+            <p:ph idx="1"/>
+          </p:nvPr>
+        </p:nvPicPr>
+        <p:blipFill>
+          <a:blip r:embed="rId2">
+            <a:extLst>
+              <a:ext uri="{28A0092B-C50C-407E-A947-70E740481C1C}">
+                <a14:useLocalDpi xmlns:a14="http://schemas.microsoft.com/office/drawing/2010/main" val="0"/>
+              </a:ext>
+            </a:extLst>
+          </a:blip>
+          <a:srcRect l="32955" t="44955" r="18704" b="29996"/>
+          <a:stretch>
+            <a:fillRect/>
+          </a:stretch>
+        </p:blipFill>
+        <p:spPr>
+          <a:xfrm>
+            <a:off x="727278" y="2199190"/>
+            <a:ext cx="10247452" cy="4103189"/>
+          </a:xfrm>
+          <a:prstGeom prst="rect">
+            <a:avLst/>
+          </a:prstGeom>
+        </p:spPr>
+      </p:pic>
+      <p:sp>
+        <p:nvSpPr>
+          <p:cNvPr id="3" name="Slide Number Placeholder 2">
+            <a:extLst>
+              <a:ext uri="{FF2B5EF4-FFF2-40B4-BE49-F238E27FC236}">
+                <a16:creationId xmlns:a16="http://schemas.microsoft.com/office/drawing/2014/main" id="{426D9484-AE07-F012-7C1E-C0D8F6D3F2A1}"/>
+              </a:ext>
+            </a:extLst>
+          </p:cNvPr>
+          <p:cNvSpPr>
+            <a:spLocks noGrp="1"/>
+          </p:cNvSpPr>
+          <p:nvPr>
+            <p:ph type="sldNum" sz="quarter" idx="12"/>
+          </p:nvPr>
+        </p:nvSpPr>
+        <p:spPr/>
+        <p:txBody>
+          <a:bodyPr/>
+          <a:lstStyle/>
+          <a:p>
+            <a:fld id="{27610C65-3251-4B31-A496-D9D978F99BA5}" type="slidenum">
+              <a:rPr lang="fr-CH" smtClean="0"/>
+              <a:t>21</a:t>
+            </a:fld>
+            <a:endParaRPr lang="fr-CH"/>
+          </a:p>
+        </p:txBody>
+      </p:sp>
+    </p:spTree>
+    <p:extLst>
+      <p:ext uri="{BB962C8B-B14F-4D97-AF65-F5344CB8AC3E}">
+        <p14:creationId xmlns:p14="http://schemas.microsoft.com/office/powerpoint/2010/main" val="1084217852"/>
+      </p:ext>
+    </p:extLst>
+  </p:cSld>
+  <p:clrMapOvr>
+    <a:masterClrMapping/>
+  </p:clrMapOvr>
+  <mc:AlternateContent xmlns:mc="http://schemas.openxmlformats.org/markup-compatibility/2006" xmlns:p159="http://schemas.microsoft.com/office/powerpoint/2015/09/main">
+    <mc:Choice Requires="p159">
+      <p:transition spd="slow">
+        <p159:morph option="byObject"/>
+      </p:transition>
+    </mc:Choice>
+    <mc:Fallback xmlns="">
+      <p:transition spd="slow">
+        <p:fade/>
+      </p:transition>
+    </mc:Fallback>
+  </mc:AlternateContent>
+</p:sld>
+</file>
+
+<file path=ppt/slides/slide22.xml><?xml version="1.0" encoding="utf-8"?>
+<p:sld xmlns:a="http://schemas.openxmlformats.org/drawingml/2006/main" xmlns:r="http://schemas.openxmlformats.org/officeDocument/2006/relationships" xmlns:p="http://schemas.openxmlformats.org/presentationml/2006/main">
+  <p:cSld>
+    <p:spTree>
+      <p:nvGrpSpPr>
+        <p:cNvPr id="1" name="">
+          <a:extLst>
+            <a:ext uri="{FF2B5EF4-FFF2-40B4-BE49-F238E27FC236}">
+              <a16:creationId xmlns:a16="http://schemas.microsoft.com/office/drawing/2014/main" id="{9FDA68E2-2246-F399-5A2B-E56552730FDB}"/>
+            </a:ext>
+          </a:extLst>
+        </p:cNvPr>
+        <p:cNvGrpSpPr/>
+        <p:nvPr/>
+      </p:nvGrpSpPr>
+      <p:grpSpPr>
+        <a:xfrm>
+          <a:off x="0" y="0"/>
+          <a:ext cx="0" cy="0"/>
+          <a:chOff x="0" y="0"/>
+          <a:chExt cx="0" cy="0"/>
+        </a:xfrm>
+      </p:grpSpPr>
+      <p:sp>
+        <p:nvSpPr>
+          <p:cNvPr id="2" name="Title 1">
+            <a:extLst>
+              <a:ext uri="{FF2B5EF4-FFF2-40B4-BE49-F238E27FC236}">
+                <a16:creationId xmlns:a16="http://schemas.microsoft.com/office/drawing/2014/main" id="{ACE0D000-A601-ABCE-709B-9B55F76CCCA0}"/>
+              </a:ext>
+            </a:extLst>
+          </p:cNvPr>
+          <p:cNvSpPr>
+            <a:spLocks noGrp="1"/>
+          </p:cNvSpPr>
+          <p:nvPr>
+            <p:ph type="title"/>
+          </p:nvPr>
+        </p:nvSpPr>
+        <p:spPr>
+          <a:xfrm>
+            <a:off x="838200" y="314907"/>
+            <a:ext cx="10515600" cy="1325563"/>
+          </a:xfrm>
+        </p:spPr>
+        <p:txBody>
+          <a:bodyPr/>
+          <a:lstStyle/>
+          <a:p>
+            <a:r>
+              <a:rPr lang="en-US" dirty="0">
+                <a:solidFill>
+                  <a:schemeClr val="accent6">
+                    <a:lumMod val="75000"/>
+                  </a:schemeClr>
+                </a:solidFill>
+                <a:latin typeface="Space Grotesk" pitchFamily="2" charset="0"/>
+                <a:cs typeface="Space Grotesk" pitchFamily="2" charset="0"/>
+              </a:rPr>
+              <a:t>Simulation</a:t>
+            </a:r>
+            <a:br>
+              <a:rPr lang="en-US" dirty="0">
+                <a:solidFill>
+                  <a:schemeClr val="accent6">
+                    <a:lumMod val="75000"/>
+                  </a:schemeClr>
+                </a:solidFill>
+                <a:latin typeface="Space Grotesk" pitchFamily="2" charset="0"/>
+                <a:cs typeface="Space Grotesk" pitchFamily="2" charset="0"/>
+              </a:rPr>
+            </a:br>
+            <a:r>
+              <a:rPr lang="en-US" sz="2800" dirty="0" err="1">
+                <a:solidFill>
+                  <a:schemeClr val="accent6">
+                    <a:lumMod val="75000"/>
+                  </a:schemeClr>
+                </a:solidFill>
+                <a:latin typeface="Space Grotesk" pitchFamily="2" charset="0"/>
+                <a:cs typeface="Space Grotesk" pitchFamily="2" charset="0"/>
+              </a:rPr>
+              <a:t>Complet</a:t>
+            </a:r>
+            <a:endParaRPr lang="fr-CH" dirty="0">
+              <a:solidFill>
+                <a:schemeClr val="accent6">
+                  <a:lumMod val="75000"/>
+                </a:schemeClr>
+              </a:solidFill>
+              <a:latin typeface="Space Grotesk" pitchFamily="2" charset="0"/>
+              <a:cs typeface="Space Grotesk" pitchFamily="2" charset="0"/>
+            </a:endParaRPr>
+          </a:p>
+        </p:txBody>
+      </p:sp>
+      <p:sp>
+        <p:nvSpPr>
+          <p:cNvPr id="3" name="Slide Number Placeholder 2">
+            <a:extLst>
+              <a:ext uri="{FF2B5EF4-FFF2-40B4-BE49-F238E27FC236}">
+                <a16:creationId xmlns:a16="http://schemas.microsoft.com/office/drawing/2014/main" id="{F5E3B26E-DEAA-113A-6F4F-622AF3C9C397}"/>
+              </a:ext>
+            </a:extLst>
+          </p:cNvPr>
+          <p:cNvSpPr>
+            <a:spLocks noGrp="1"/>
+          </p:cNvSpPr>
+          <p:nvPr>
+            <p:ph type="sldNum" sz="quarter" idx="12"/>
+          </p:nvPr>
+        </p:nvSpPr>
+        <p:spPr/>
+        <p:txBody>
+          <a:bodyPr/>
+          <a:lstStyle/>
+          <a:p>
+            <a:fld id="{27610C65-3251-4B31-A496-D9D978F99BA5}" type="slidenum">
+              <a:rPr lang="fr-CH" smtClean="0"/>
+              <a:t>22</a:t>
+            </a:fld>
+            <a:endParaRPr lang="fr-CH"/>
+          </a:p>
+        </p:txBody>
+      </p:sp>
+      <p:sp>
+        <p:nvSpPr>
+          <p:cNvPr id="5" name="Content Placeholder 4">
+            <a:extLst>
+              <a:ext uri="{FF2B5EF4-FFF2-40B4-BE49-F238E27FC236}">
+                <a16:creationId xmlns:a16="http://schemas.microsoft.com/office/drawing/2014/main" id="{F9C6287D-A4FB-94FD-B1C1-4FC28878E9A1}"/>
+              </a:ext>
+            </a:extLst>
+          </p:cNvPr>
+          <p:cNvSpPr>
+            <a:spLocks noGrp="1"/>
+          </p:cNvSpPr>
+          <p:nvPr>
+            <p:ph idx="1"/>
+          </p:nvPr>
+        </p:nvSpPr>
+        <p:spPr/>
+        <p:txBody>
+          <a:bodyPr/>
+          <a:lstStyle/>
+          <a:p>
+            <a:endParaRPr lang="fr-CH"/>
+          </a:p>
+        </p:txBody>
+      </p:sp>
+      <p:pic>
+        <p:nvPicPr>
+          <p:cNvPr id="6" name="Content Placeholder 20">
+            <a:extLst>
+              <a:ext uri="{FF2B5EF4-FFF2-40B4-BE49-F238E27FC236}">
+                <a16:creationId xmlns:a16="http://schemas.microsoft.com/office/drawing/2014/main" id="{6764A9F1-9EE2-DF55-79B1-E027F5F5D398}"/>
+              </a:ext>
+            </a:extLst>
+          </p:cNvPr>
+          <p:cNvPicPr>
+            <a:picLocks noChangeAspect="1"/>
+          </p:cNvPicPr>
+          <p:nvPr/>
+        </p:nvPicPr>
+        <p:blipFill>
+          <a:blip r:embed="rId2">
+            <a:extLst>
+              <a:ext uri="{28A0092B-C50C-407E-A947-70E740481C1C}">
+                <a14:useLocalDpi xmlns:a14="http://schemas.microsoft.com/office/drawing/2010/main" val="0"/>
+              </a:ext>
+            </a:extLst>
+          </a:blip>
+          <a:srcRect t="25023" b="22785"/>
+          <a:stretch>
+            <a:fillRect/>
+          </a:stretch>
+        </p:blipFill>
+        <p:spPr>
+          <a:xfrm>
+            <a:off x="488016" y="1809135"/>
+            <a:ext cx="11320526" cy="4565543"/>
+          </a:xfrm>
+          <a:prstGeom prst="rect">
+            <a:avLst/>
+          </a:prstGeom>
+        </p:spPr>
+      </p:pic>
+    </p:spTree>
+    <p:extLst>
+      <p:ext uri="{BB962C8B-B14F-4D97-AF65-F5344CB8AC3E}">
+        <p14:creationId xmlns:p14="http://schemas.microsoft.com/office/powerpoint/2010/main" val="290654552"/>
+      </p:ext>
+    </p:extLst>
+  </p:cSld>
+  <p:clrMapOvr>
+    <a:masterClrMapping/>
+  </p:clrMapOvr>
+  <mc:AlternateContent xmlns:mc="http://schemas.openxmlformats.org/markup-compatibility/2006" xmlns:p159="http://schemas.microsoft.com/office/powerpoint/2015/09/main">
+    <mc:Choice Requires="p159">
+      <p:transition spd="slow">
+        <p159:morph option="byObject"/>
+      </p:transition>
+    </mc:Choice>
+    <mc:Fallback xmlns="">
+      <p:transition spd="slow">
+        <p:fade/>
+      </p:transition>
+    </mc:Fallback>
+  </mc:AlternateContent>
+</p:sld>
+</file>
+
+<file path=ppt/slides/slide23.xml><?xml version="1.0" encoding="utf-8"?>
+<p:sld xmlns:a="http://schemas.openxmlformats.org/drawingml/2006/main" xmlns:r="http://schemas.openxmlformats.org/officeDocument/2006/relationships" xmlns:p="http://schemas.openxmlformats.org/presentationml/2006/main">
+  <p:cSld>
+    <p:spTree>
+      <p:nvGrpSpPr>
+        <p:cNvPr id="1" name="">
+          <a:extLst>
+            <a:ext uri="{FF2B5EF4-FFF2-40B4-BE49-F238E27FC236}">
+              <a16:creationId xmlns:a16="http://schemas.microsoft.com/office/drawing/2014/main" id="{9092A36C-3847-B27F-C08C-2624BC7DF7E2}"/>
+            </a:ext>
+          </a:extLst>
+        </p:cNvPr>
+        <p:cNvGrpSpPr/>
+        <p:nvPr/>
+      </p:nvGrpSpPr>
+      <p:grpSpPr>
+        <a:xfrm>
+          <a:off x="0" y="0"/>
+          <a:ext cx="0" cy="0"/>
+          <a:chOff x="0" y="0"/>
+          <a:chExt cx="0" cy="0"/>
+        </a:xfrm>
+      </p:grpSpPr>
+      <p:sp>
+        <p:nvSpPr>
+          <p:cNvPr id="2" name="Title 1">
+            <a:extLst>
+              <a:ext uri="{FF2B5EF4-FFF2-40B4-BE49-F238E27FC236}">
+                <a16:creationId xmlns:a16="http://schemas.microsoft.com/office/drawing/2014/main" id="{F5D3E420-9E3C-1219-2F48-244ABE4C3157}"/>
+              </a:ext>
+            </a:extLst>
+          </p:cNvPr>
+          <p:cNvSpPr>
+            <a:spLocks noGrp="1"/>
+          </p:cNvSpPr>
+          <p:nvPr>
+            <p:ph type="title"/>
+          </p:nvPr>
+        </p:nvSpPr>
+        <p:spPr>
+          <a:xfrm>
+            <a:off x="838200" y="373901"/>
+            <a:ext cx="10515600" cy="1325563"/>
+          </a:xfrm>
+        </p:spPr>
+        <p:txBody>
+          <a:bodyPr/>
+          <a:lstStyle/>
+          <a:p>
+            <a:r>
+              <a:rPr lang="en-US" dirty="0">
+                <a:solidFill>
+                  <a:schemeClr val="accent6">
+                    <a:lumMod val="75000"/>
+                  </a:schemeClr>
+                </a:solidFill>
+                <a:latin typeface="Space Grotesk" pitchFamily="2" charset="0"/>
+                <a:cs typeface="Space Grotesk" pitchFamily="2" charset="0"/>
+              </a:rPr>
+              <a:t>Simulation</a:t>
+            </a:r>
+            <a:br>
+              <a:rPr lang="en-US" dirty="0">
+                <a:solidFill>
+                  <a:schemeClr val="accent6">
+                    <a:lumMod val="75000"/>
+                  </a:schemeClr>
+                </a:solidFill>
+                <a:latin typeface="Space Grotesk" pitchFamily="2" charset="0"/>
+                <a:cs typeface="Space Grotesk" pitchFamily="2" charset="0"/>
+              </a:rPr>
+            </a:br>
+            <a:r>
+              <a:rPr lang="en-US" sz="2800" dirty="0" err="1">
+                <a:solidFill>
+                  <a:schemeClr val="accent6">
+                    <a:lumMod val="75000"/>
+                  </a:schemeClr>
+                </a:solidFill>
+                <a:latin typeface="Space Grotesk" pitchFamily="2" charset="0"/>
+                <a:cs typeface="Space Grotesk" pitchFamily="2" charset="0"/>
+              </a:rPr>
+              <a:t>Modélisation</a:t>
+            </a:r>
+            <a:r>
+              <a:rPr lang="en-US" sz="2800" dirty="0">
+                <a:solidFill>
+                  <a:schemeClr val="accent6">
+                    <a:lumMod val="75000"/>
+                  </a:schemeClr>
+                </a:solidFill>
+                <a:latin typeface="Space Grotesk" pitchFamily="2" charset="0"/>
+                <a:cs typeface="Space Grotesk" pitchFamily="2" charset="0"/>
+              </a:rPr>
+              <a:t> IMU</a:t>
+            </a:r>
+            <a:endParaRPr lang="fr-CH" dirty="0">
+              <a:solidFill>
+                <a:schemeClr val="accent6">
+                  <a:lumMod val="75000"/>
+                </a:schemeClr>
+              </a:solidFill>
+              <a:latin typeface="Space Grotesk" pitchFamily="2" charset="0"/>
+              <a:cs typeface="Space Grotesk" pitchFamily="2" charset="0"/>
+            </a:endParaRPr>
+          </a:p>
+        </p:txBody>
+      </p:sp>
+      <p:pic>
+        <p:nvPicPr>
+          <p:cNvPr id="21" name="Content Placeholder 20">
+            <a:extLst>
+              <a:ext uri="{FF2B5EF4-FFF2-40B4-BE49-F238E27FC236}">
+                <a16:creationId xmlns:a16="http://schemas.microsoft.com/office/drawing/2014/main" id="{CBA0350A-CF81-96D9-08F0-2B9189F9DBBC}"/>
+              </a:ext>
+            </a:extLst>
+          </p:cNvPr>
+          <p:cNvPicPr>
+            <a:picLocks noGrp="1" noChangeAspect="1"/>
+          </p:cNvPicPr>
+          <p:nvPr>
+            <p:ph idx="1"/>
+          </p:nvPr>
+        </p:nvPicPr>
+        <p:blipFill>
+          <a:blip r:embed="rId2">
+            <a:extLst>
+              <a:ext uri="{28A0092B-C50C-407E-A947-70E740481C1C}">
+                <a14:useLocalDpi xmlns:a14="http://schemas.microsoft.com/office/drawing/2010/main" val="0"/>
+              </a:ext>
+            </a:extLst>
+          </a:blip>
+          <a:srcRect l="60947" t="45215" r="-298" b="26527"/>
+          <a:stretch>
+            <a:fillRect/>
+          </a:stretch>
+        </p:blipFill>
+        <p:spPr>
+          <a:xfrm>
+            <a:off x="1365811" y="1731319"/>
+            <a:ext cx="8565267" cy="4752780"/>
+          </a:xfrm>
+          <a:prstGeom prst="rect">
+            <a:avLst/>
+          </a:prstGeom>
+        </p:spPr>
+      </p:pic>
+      <p:sp>
+        <p:nvSpPr>
+          <p:cNvPr id="3" name="Slide Number Placeholder 2">
+            <a:extLst>
+              <a:ext uri="{FF2B5EF4-FFF2-40B4-BE49-F238E27FC236}">
+                <a16:creationId xmlns:a16="http://schemas.microsoft.com/office/drawing/2014/main" id="{732E304B-AF37-EBC3-848C-229EFCED4F20}"/>
+              </a:ext>
+            </a:extLst>
+          </p:cNvPr>
+          <p:cNvSpPr>
+            <a:spLocks noGrp="1"/>
+          </p:cNvSpPr>
+          <p:nvPr>
+            <p:ph type="sldNum" sz="quarter" idx="12"/>
+          </p:nvPr>
+        </p:nvSpPr>
+        <p:spPr/>
+        <p:txBody>
+          <a:bodyPr/>
+          <a:lstStyle/>
+          <a:p>
+            <a:fld id="{27610C65-3251-4B31-A496-D9D978F99BA5}" type="slidenum">
+              <a:rPr lang="fr-CH" smtClean="0"/>
+              <a:t>23</a:t>
+            </a:fld>
+            <a:endParaRPr lang="fr-CH"/>
+          </a:p>
+        </p:txBody>
+      </p:sp>
+    </p:spTree>
+    <p:extLst>
+      <p:ext uri="{BB962C8B-B14F-4D97-AF65-F5344CB8AC3E}">
+        <p14:creationId xmlns:p14="http://schemas.microsoft.com/office/powerpoint/2010/main" val="693186289"/>
+      </p:ext>
+    </p:extLst>
+  </p:cSld>
+  <p:clrMapOvr>
+    <a:masterClrMapping/>
+  </p:clrMapOvr>
+  <mc:AlternateContent xmlns:mc="http://schemas.openxmlformats.org/markup-compatibility/2006" xmlns:p159="http://schemas.microsoft.com/office/powerpoint/2015/09/main">
+    <mc:Choice Requires="p159">
+      <p:transition spd="slow">
+        <p159:morph option="byObject"/>
+      </p:transition>
+    </mc:Choice>
+    <mc:Fallback xmlns="">
+      <p:transition spd="slow">
+        <p:fade/>
+      </p:transition>
+    </mc:Fallback>
+  </mc:AlternateContent>
+</p:sld>
+</file>
+
+<file path=ppt/slides/slide24.xml><?xml version="1.0" encoding="utf-8"?>
+<p:sld xmlns:a="http://schemas.openxmlformats.org/drawingml/2006/main" xmlns:r="http://schemas.openxmlformats.org/officeDocument/2006/relationships" xmlns:p="http://schemas.openxmlformats.org/presentationml/2006/main">
+  <p:cSld>
+    <p:spTree>
+      <p:nvGrpSpPr>
+        <p:cNvPr id="1" name="">
+          <a:extLst>
+            <a:ext uri="{FF2B5EF4-FFF2-40B4-BE49-F238E27FC236}">
+              <a16:creationId xmlns:a16="http://schemas.microsoft.com/office/drawing/2014/main" id="{CED3AC1C-9820-7EDA-8F72-09399B47679B}"/>
+            </a:ext>
+          </a:extLst>
+        </p:cNvPr>
+        <p:cNvGrpSpPr/>
+        <p:nvPr/>
+      </p:nvGrpSpPr>
+      <p:grpSpPr>
+        <a:xfrm>
+          <a:off x="0" y="0"/>
+          <a:ext cx="0" cy="0"/>
+          <a:chOff x="0" y="0"/>
+          <a:chExt cx="0" cy="0"/>
+        </a:xfrm>
+      </p:grpSpPr>
+      <p:sp>
+        <p:nvSpPr>
+          <p:cNvPr id="2" name="Title 1">
+            <a:extLst>
+              <a:ext uri="{FF2B5EF4-FFF2-40B4-BE49-F238E27FC236}">
+                <a16:creationId xmlns:a16="http://schemas.microsoft.com/office/drawing/2014/main" id="{539992B5-81B1-E85A-BB6B-C88E734C2539}"/>
+              </a:ext>
+            </a:extLst>
+          </p:cNvPr>
+          <p:cNvSpPr>
+            <a:spLocks noGrp="1"/>
+          </p:cNvSpPr>
+          <p:nvPr>
+            <p:ph type="title"/>
+          </p:nvPr>
+        </p:nvSpPr>
+        <p:spPr>
+          <a:xfrm>
+            <a:off x="838200" y="373901"/>
+            <a:ext cx="10515600" cy="1325563"/>
+          </a:xfrm>
+        </p:spPr>
+        <p:txBody>
+          <a:bodyPr/>
+          <a:lstStyle/>
+          <a:p>
+            <a:r>
+              <a:rPr lang="en-US" dirty="0">
+                <a:solidFill>
+                  <a:schemeClr val="accent6">
+                    <a:lumMod val="75000"/>
+                  </a:schemeClr>
+                </a:solidFill>
+                <a:latin typeface="Space Grotesk" pitchFamily="2" charset="0"/>
+                <a:cs typeface="Space Grotesk" pitchFamily="2" charset="0"/>
+              </a:rPr>
+              <a:t>Simulation</a:t>
+            </a:r>
+            <a:br>
+              <a:rPr lang="en-US" dirty="0">
+                <a:solidFill>
+                  <a:schemeClr val="accent6">
+                    <a:lumMod val="75000"/>
+                  </a:schemeClr>
+                </a:solidFill>
+                <a:latin typeface="Space Grotesk" pitchFamily="2" charset="0"/>
+                <a:cs typeface="Space Grotesk" pitchFamily="2" charset="0"/>
+              </a:rPr>
+            </a:br>
+            <a:r>
+              <a:rPr lang="en-US" sz="2800" dirty="0" err="1">
+                <a:solidFill>
+                  <a:schemeClr val="accent6">
+                    <a:lumMod val="75000"/>
+                  </a:schemeClr>
+                </a:solidFill>
+                <a:latin typeface="Space Grotesk" pitchFamily="2" charset="0"/>
+                <a:cs typeface="Space Grotesk" pitchFamily="2" charset="0"/>
+              </a:rPr>
+              <a:t>Modélisation</a:t>
+            </a:r>
+            <a:r>
+              <a:rPr lang="en-US" sz="2800" dirty="0">
+                <a:solidFill>
+                  <a:schemeClr val="accent6">
+                    <a:lumMod val="75000"/>
+                  </a:schemeClr>
+                </a:solidFill>
+                <a:latin typeface="Space Grotesk" pitchFamily="2" charset="0"/>
+                <a:cs typeface="Space Grotesk" pitchFamily="2" charset="0"/>
+              </a:rPr>
+              <a:t> IMU</a:t>
+            </a:r>
+            <a:endParaRPr lang="fr-CH" dirty="0">
+              <a:solidFill>
+                <a:schemeClr val="accent6">
+                  <a:lumMod val="75000"/>
+                </a:schemeClr>
+              </a:solidFill>
+              <a:latin typeface="Space Grotesk" pitchFamily="2" charset="0"/>
+              <a:cs typeface="Space Grotesk" pitchFamily="2" charset="0"/>
+            </a:endParaRPr>
+          </a:p>
+        </p:txBody>
+      </p:sp>
+      <p:pic>
+        <p:nvPicPr>
+          <p:cNvPr id="6" name="Content Placeholder 5">
+            <a:extLst>
+              <a:ext uri="{FF2B5EF4-FFF2-40B4-BE49-F238E27FC236}">
+                <a16:creationId xmlns:a16="http://schemas.microsoft.com/office/drawing/2014/main" id="{C1053EA7-6462-BB9E-BEFC-B8C805BC52C5}"/>
+              </a:ext>
+            </a:extLst>
+          </p:cNvPr>
+          <p:cNvPicPr>
+            <a:picLocks noGrp="1" noChangeAspect="1"/>
+          </p:cNvPicPr>
+          <p:nvPr>
+            <p:ph idx="1"/>
+          </p:nvPr>
+        </p:nvPicPr>
+        <p:blipFill>
+          <a:blip r:embed="rId2">
+            <a:extLst>
+              <a:ext uri="{28A0092B-C50C-407E-A947-70E740481C1C}">
+                <a14:useLocalDpi xmlns:a14="http://schemas.microsoft.com/office/drawing/2010/main" val="0"/>
+              </a:ext>
+            </a:extLst>
+          </a:blip>
+          <a:stretch>
+            <a:fillRect/>
+          </a:stretch>
+        </p:blipFill>
+        <p:spPr>
+          <a:xfrm>
+            <a:off x="838200" y="2556843"/>
+            <a:ext cx="10515600" cy="2888901"/>
+          </a:xfrm>
+          <a:prstGeom prst="rect">
+            <a:avLst/>
+          </a:prstGeom>
+        </p:spPr>
+      </p:pic>
+      <p:sp>
+        <p:nvSpPr>
+          <p:cNvPr id="3" name="Slide Number Placeholder 2">
+            <a:extLst>
+              <a:ext uri="{FF2B5EF4-FFF2-40B4-BE49-F238E27FC236}">
+                <a16:creationId xmlns:a16="http://schemas.microsoft.com/office/drawing/2014/main" id="{A83AD50D-07E5-0262-3ED9-62354D037683}"/>
+              </a:ext>
+            </a:extLst>
+          </p:cNvPr>
+          <p:cNvSpPr>
+            <a:spLocks noGrp="1"/>
+          </p:cNvSpPr>
+          <p:nvPr>
+            <p:ph type="sldNum" sz="quarter" idx="12"/>
+          </p:nvPr>
+        </p:nvSpPr>
+        <p:spPr/>
+        <p:txBody>
+          <a:bodyPr/>
+          <a:lstStyle/>
+          <a:p>
+            <a:fld id="{27610C65-3251-4B31-A496-D9D978F99BA5}" type="slidenum">
+              <a:rPr lang="fr-CH" smtClean="0"/>
+              <a:t>24</a:t>
+            </a:fld>
+            <a:endParaRPr lang="fr-CH"/>
+          </a:p>
+        </p:txBody>
+      </p:sp>
+    </p:spTree>
+    <p:extLst>
+      <p:ext uri="{BB962C8B-B14F-4D97-AF65-F5344CB8AC3E}">
+        <p14:creationId xmlns:p14="http://schemas.microsoft.com/office/powerpoint/2010/main" val="805331928"/>
+      </p:ext>
+    </p:extLst>
+  </p:cSld>
+  <p:clrMapOvr>
+    <a:masterClrMapping/>
+  </p:clrMapOvr>
+  <mc:AlternateContent xmlns:mc="http://schemas.openxmlformats.org/markup-compatibility/2006" xmlns:p159="http://schemas.microsoft.com/office/powerpoint/2015/09/main">
+    <mc:Choice Requires="p159">
+      <p:transition spd="slow">
+        <p159:morph option="byObject"/>
+      </p:transition>
+    </mc:Choice>
+    <mc:Fallback xmlns="">
+      <p:transition spd="slow">
+        <p:fade/>
+      </p:transition>
+    </mc:Fallback>
+  </mc:AlternateContent>
+</p:sld>
+</file>
+
+<file path=ppt/slides/slide25.xml><?xml version="1.0" encoding="utf-8"?>
+<p:sld xmlns:a="http://schemas.openxmlformats.org/drawingml/2006/main" xmlns:r="http://schemas.openxmlformats.org/officeDocument/2006/relationships" xmlns:p="http://schemas.openxmlformats.org/presentationml/2006/main">
+  <p:cSld>
+    <p:spTree>
+      <p:nvGrpSpPr>
+        <p:cNvPr id="1" name="">
+          <a:extLst>
+            <a:ext uri="{FF2B5EF4-FFF2-40B4-BE49-F238E27FC236}">
+              <a16:creationId xmlns:a16="http://schemas.microsoft.com/office/drawing/2014/main" id="{65FAC875-E332-E01F-EA32-BC39F53EC43D}"/>
+            </a:ext>
+          </a:extLst>
+        </p:cNvPr>
+        <p:cNvGrpSpPr/>
+        <p:nvPr/>
+      </p:nvGrpSpPr>
+      <p:grpSpPr>
+        <a:xfrm>
+          <a:off x="0" y="0"/>
+          <a:ext cx="0" cy="0"/>
+          <a:chOff x="0" y="0"/>
+          <a:chExt cx="0" cy="0"/>
+        </a:xfrm>
+      </p:grpSpPr>
+      <p:sp>
+        <p:nvSpPr>
+          <p:cNvPr id="2" name="Title 1">
+            <a:extLst>
+              <a:ext uri="{FF2B5EF4-FFF2-40B4-BE49-F238E27FC236}">
+                <a16:creationId xmlns:a16="http://schemas.microsoft.com/office/drawing/2014/main" id="{F523383F-72E1-8883-9171-791B54D42CBD}"/>
+              </a:ext>
+            </a:extLst>
+          </p:cNvPr>
+          <p:cNvSpPr>
+            <a:spLocks noGrp="1"/>
+          </p:cNvSpPr>
+          <p:nvPr>
+            <p:ph type="title"/>
+          </p:nvPr>
+        </p:nvSpPr>
+        <p:spPr>
+          <a:xfrm>
+            <a:off x="838200" y="373901"/>
+            <a:ext cx="10515600" cy="1325563"/>
+          </a:xfrm>
+        </p:spPr>
+        <p:txBody>
+          <a:bodyPr/>
+          <a:lstStyle/>
+          <a:p>
+            <a:r>
+              <a:rPr lang="en-US" dirty="0" err="1">
+                <a:solidFill>
+                  <a:schemeClr val="accent6">
+                    <a:lumMod val="75000"/>
+                  </a:schemeClr>
+                </a:solidFill>
+                <a:latin typeface="Space Grotesk" pitchFamily="2" charset="0"/>
+                <a:cs typeface="Space Grotesk" pitchFamily="2" charset="0"/>
+              </a:rPr>
+              <a:t>Mesures</a:t>
+            </a:r>
+            <a:br>
+              <a:rPr lang="en-US" dirty="0">
+                <a:solidFill>
+                  <a:schemeClr val="accent6">
+                    <a:lumMod val="75000"/>
+                  </a:schemeClr>
+                </a:solidFill>
+                <a:latin typeface="Space Grotesk" pitchFamily="2" charset="0"/>
+                <a:cs typeface="Space Grotesk" pitchFamily="2" charset="0"/>
+              </a:rPr>
+            </a:br>
+            <a:r>
+              <a:rPr lang="en-US" sz="2800" dirty="0" err="1">
+                <a:solidFill>
+                  <a:schemeClr val="accent6">
+                    <a:lumMod val="75000"/>
+                  </a:schemeClr>
+                </a:solidFill>
+                <a:latin typeface="Space Grotesk" pitchFamily="2" charset="0"/>
+                <a:cs typeface="Space Grotesk" pitchFamily="2" charset="0"/>
+              </a:rPr>
+              <a:t>Maintient</a:t>
+            </a:r>
+            <a:endParaRPr lang="fr-CH" dirty="0">
+              <a:solidFill>
+                <a:schemeClr val="accent6">
+                  <a:lumMod val="75000"/>
+                </a:schemeClr>
+              </a:solidFill>
+              <a:latin typeface="Space Grotesk" pitchFamily="2" charset="0"/>
+              <a:cs typeface="Space Grotesk" pitchFamily="2" charset="0"/>
+            </a:endParaRPr>
+          </a:p>
+        </p:txBody>
+      </p:sp>
+      <p:sp>
+        <p:nvSpPr>
+          <p:cNvPr id="3" name="Slide Number Placeholder 2">
+            <a:extLst>
+              <a:ext uri="{FF2B5EF4-FFF2-40B4-BE49-F238E27FC236}">
+                <a16:creationId xmlns:a16="http://schemas.microsoft.com/office/drawing/2014/main" id="{3AE553C7-B2CE-1850-DA0F-D24522359B3D}"/>
+              </a:ext>
+            </a:extLst>
+          </p:cNvPr>
+          <p:cNvSpPr>
+            <a:spLocks noGrp="1"/>
+          </p:cNvSpPr>
+          <p:nvPr>
+            <p:ph type="sldNum" sz="quarter" idx="12"/>
+          </p:nvPr>
+        </p:nvSpPr>
+        <p:spPr/>
+        <p:txBody>
+          <a:bodyPr/>
+          <a:lstStyle/>
+          <a:p>
+            <a:fld id="{27610C65-3251-4B31-A496-D9D978F99BA5}" type="slidenum">
+              <a:rPr lang="fr-CH" smtClean="0"/>
+              <a:t>25</a:t>
+            </a:fld>
+            <a:endParaRPr lang="fr-CH"/>
+          </a:p>
+        </p:txBody>
+      </p:sp>
+      <p:pic>
+        <p:nvPicPr>
+          <p:cNvPr id="7" name="Picture 6">
+            <a:extLst>
+              <a:ext uri="{FF2B5EF4-FFF2-40B4-BE49-F238E27FC236}">
+                <a16:creationId xmlns:a16="http://schemas.microsoft.com/office/drawing/2014/main" id="{337802EA-5A42-7474-76E7-50F29CA2678A}"/>
+              </a:ext>
+            </a:extLst>
+          </p:cNvPr>
+          <p:cNvPicPr>
+            <a:picLocks noChangeAspect="1"/>
+          </p:cNvPicPr>
+          <p:nvPr/>
+        </p:nvPicPr>
+        <p:blipFill>
+          <a:blip r:embed="rId2"/>
+          <a:stretch>
+            <a:fillRect/>
+          </a:stretch>
+        </p:blipFill>
+        <p:spPr>
+          <a:xfrm>
+            <a:off x="501701" y="1699464"/>
+            <a:ext cx="5520611" cy="4493374"/>
+          </a:xfrm>
+          <a:prstGeom prst="rect">
+            <a:avLst/>
+          </a:prstGeom>
+        </p:spPr>
+      </p:pic>
+      <p:pic>
+        <p:nvPicPr>
+          <p:cNvPr id="10" name="Picture 9">
+            <a:extLst>
+              <a:ext uri="{FF2B5EF4-FFF2-40B4-BE49-F238E27FC236}">
+                <a16:creationId xmlns:a16="http://schemas.microsoft.com/office/drawing/2014/main" id="{10C2A993-EE5B-31B6-35D1-E81E3DA168CC}"/>
+              </a:ext>
+            </a:extLst>
+          </p:cNvPr>
+          <p:cNvPicPr>
+            <a:picLocks noChangeAspect="1"/>
+          </p:cNvPicPr>
+          <p:nvPr/>
+        </p:nvPicPr>
+        <p:blipFill>
+          <a:blip r:embed="rId3"/>
+          <a:stretch>
+            <a:fillRect/>
+          </a:stretch>
+        </p:blipFill>
+        <p:spPr>
+          <a:xfrm>
+            <a:off x="6169689" y="1749292"/>
+            <a:ext cx="5344885" cy="4393717"/>
+          </a:xfrm>
+          <a:prstGeom prst="rect">
+            <a:avLst/>
+          </a:prstGeom>
+        </p:spPr>
+      </p:pic>
+    </p:spTree>
+    <p:extLst>
+      <p:ext uri="{BB962C8B-B14F-4D97-AF65-F5344CB8AC3E}">
+        <p14:creationId xmlns:p14="http://schemas.microsoft.com/office/powerpoint/2010/main" val="4279131423"/>
+      </p:ext>
+    </p:extLst>
+  </p:cSld>
+  <p:clrMapOvr>
+    <a:masterClrMapping/>
+  </p:clrMapOvr>
+  <p:transition spd="slow"/>
+</p:sld>
+</file>
+
+<file path=ppt/slides/slide26.xml><?xml version="1.0" encoding="utf-8"?>
+<p:sld xmlns:a="http://schemas.openxmlformats.org/drawingml/2006/main" xmlns:r="http://schemas.openxmlformats.org/officeDocument/2006/relationships" xmlns:p="http://schemas.openxmlformats.org/presentationml/2006/main">
+  <p:cSld>
+    <p:spTree>
+      <p:nvGrpSpPr>
+        <p:cNvPr id="1" name="">
+          <a:extLst>
+            <a:ext uri="{FF2B5EF4-FFF2-40B4-BE49-F238E27FC236}">
+              <a16:creationId xmlns:a16="http://schemas.microsoft.com/office/drawing/2014/main" id="{3BC09E02-EF4D-3A9C-1E73-5A5DE05F271E}"/>
+            </a:ext>
+          </a:extLst>
+        </p:cNvPr>
+        <p:cNvGrpSpPr/>
+        <p:nvPr/>
+      </p:nvGrpSpPr>
+      <p:grpSpPr>
+        <a:xfrm>
+          <a:off x="0" y="0"/>
+          <a:ext cx="0" cy="0"/>
+          <a:chOff x="0" y="0"/>
+          <a:chExt cx="0" cy="0"/>
+        </a:xfrm>
+      </p:grpSpPr>
+      <p:sp>
+        <p:nvSpPr>
+          <p:cNvPr id="2" name="Title 1">
+            <a:extLst>
+              <a:ext uri="{FF2B5EF4-FFF2-40B4-BE49-F238E27FC236}">
+                <a16:creationId xmlns:a16="http://schemas.microsoft.com/office/drawing/2014/main" id="{EDFAAAAC-0D39-7AC4-FD49-12C46EFE2060}"/>
+              </a:ext>
+            </a:extLst>
+          </p:cNvPr>
+          <p:cNvSpPr>
+            <a:spLocks noGrp="1"/>
+          </p:cNvSpPr>
+          <p:nvPr>
+            <p:ph type="title"/>
+          </p:nvPr>
+        </p:nvSpPr>
+        <p:spPr>
+          <a:xfrm>
+            <a:off x="838200" y="373901"/>
+            <a:ext cx="10515600" cy="1325563"/>
+          </a:xfrm>
+        </p:spPr>
+        <p:txBody>
+          <a:bodyPr/>
+          <a:lstStyle/>
+          <a:p>
+            <a:r>
+              <a:rPr lang="en-US" dirty="0" err="1">
+                <a:solidFill>
+                  <a:schemeClr val="accent6">
+                    <a:lumMod val="75000"/>
+                  </a:schemeClr>
+                </a:solidFill>
+                <a:latin typeface="Space Grotesk" pitchFamily="2" charset="0"/>
+                <a:cs typeface="Space Grotesk" pitchFamily="2" charset="0"/>
+              </a:rPr>
+              <a:t>Mesures</a:t>
+            </a:r>
+            <a:br>
+              <a:rPr lang="en-US" dirty="0">
+                <a:solidFill>
+                  <a:schemeClr val="accent6">
+                    <a:lumMod val="75000"/>
+                  </a:schemeClr>
+                </a:solidFill>
+                <a:latin typeface="Space Grotesk" pitchFamily="2" charset="0"/>
+                <a:cs typeface="Space Grotesk" pitchFamily="2" charset="0"/>
+              </a:rPr>
+            </a:br>
+            <a:r>
+              <a:rPr lang="en-US" sz="2800" dirty="0">
+                <a:solidFill>
+                  <a:schemeClr val="accent6">
+                    <a:lumMod val="75000"/>
+                  </a:schemeClr>
+                </a:solidFill>
+                <a:latin typeface="Space Grotesk" pitchFamily="2" charset="0"/>
+                <a:cs typeface="Space Grotesk" pitchFamily="2" charset="0"/>
+              </a:rPr>
+              <a:t>Types de roues</a:t>
+            </a:r>
+            <a:endParaRPr lang="fr-CH" dirty="0">
+              <a:solidFill>
+                <a:schemeClr val="accent6">
+                  <a:lumMod val="75000"/>
+                </a:schemeClr>
+              </a:solidFill>
+              <a:latin typeface="Space Grotesk" pitchFamily="2" charset="0"/>
+              <a:cs typeface="Space Grotesk" pitchFamily="2" charset="0"/>
+            </a:endParaRPr>
+          </a:p>
+        </p:txBody>
+      </p:sp>
+      <p:pic>
+        <p:nvPicPr>
+          <p:cNvPr id="7" name="Content Placeholder 6">
+            <a:extLst>
+              <a:ext uri="{FF2B5EF4-FFF2-40B4-BE49-F238E27FC236}">
+                <a16:creationId xmlns:a16="http://schemas.microsoft.com/office/drawing/2014/main" id="{4D411B63-8B7E-8656-A2A7-1C31B57303B0}"/>
+              </a:ext>
+            </a:extLst>
+          </p:cNvPr>
+          <p:cNvPicPr>
+            <a:picLocks noGrp="1" noChangeAspect="1"/>
+          </p:cNvPicPr>
+          <p:nvPr>
+            <p:ph idx="1"/>
+          </p:nvPr>
+        </p:nvPicPr>
+        <p:blipFill>
+          <a:blip r:embed="rId2"/>
+          <a:stretch>
+            <a:fillRect/>
+          </a:stretch>
+        </p:blipFill>
+        <p:spPr>
+          <a:xfrm>
+            <a:off x="5863213" y="1883499"/>
+            <a:ext cx="5282743" cy="4351338"/>
+          </a:xfrm>
+          <a:prstGeom prst="rect">
+            <a:avLst/>
+          </a:prstGeom>
+        </p:spPr>
+      </p:pic>
+      <p:sp>
+        <p:nvSpPr>
+          <p:cNvPr id="3" name="Slide Number Placeholder 2">
+            <a:extLst>
+              <a:ext uri="{FF2B5EF4-FFF2-40B4-BE49-F238E27FC236}">
+                <a16:creationId xmlns:a16="http://schemas.microsoft.com/office/drawing/2014/main" id="{258AD4E8-8532-1E8C-D19C-9A87276AD3F6}"/>
+              </a:ext>
+            </a:extLst>
+          </p:cNvPr>
+          <p:cNvSpPr>
+            <a:spLocks noGrp="1"/>
+          </p:cNvSpPr>
+          <p:nvPr>
+            <p:ph type="sldNum" sz="quarter" idx="12"/>
+          </p:nvPr>
+        </p:nvSpPr>
+        <p:spPr/>
+        <p:txBody>
+          <a:bodyPr/>
+          <a:lstStyle/>
+          <a:p>
+            <a:fld id="{27610C65-3251-4B31-A496-D9D978F99BA5}" type="slidenum">
+              <a:rPr lang="fr-CH" smtClean="0"/>
+              <a:t>26</a:t>
+            </a:fld>
+            <a:endParaRPr lang="fr-CH"/>
+          </a:p>
+        </p:txBody>
+      </p:sp>
+      <p:pic>
+        <p:nvPicPr>
+          <p:cNvPr id="9" name="Picture 8">
+            <a:extLst>
+              <a:ext uri="{FF2B5EF4-FFF2-40B4-BE49-F238E27FC236}">
+                <a16:creationId xmlns:a16="http://schemas.microsoft.com/office/drawing/2014/main" id="{A895DED7-A2C5-20E5-07ED-B60502F01301}"/>
+              </a:ext>
+            </a:extLst>
+          </p:cNvPr>
+          <p:cNvPicPr>
+            <a:picLocks noChangeAspect="1"/>
+          </p:cNvPicPr>
+          <p:nvPr/>
+        </p:nvPicPr>
+        <p:blipFill>
+          <a:blip r:embed="rId3"/>
+          <a:stretch>
+            <a:fillRect/>
+          </a:stretch>
+        </p:blipFill>
+        <p:spPr>
+          <a:xfrm>
+            <a:off x="336519" y="1883499"/>
+            <a:ext cx="5398874" cy="4447853"/>
+          </a:xfrm>
+          <a:prstGeom prst="rect">
+            <a:avLst/>
+          </a:prstGeom>
+        </p:spPr>
+      </p:pic>
+    </p:spTree>
+    <p:extLst>
+      <p:ext uri="{BB962C8B-B14F-4D97-AF65-F5344CB8AC3E}">
+        <p14:creationId xmlns:p14="http://schemas.microsoft.com/office/powerpoint/2010/main" val="58532022"/>
+      </p:ext>
+    </p:extLst>
+  </p:cSld>
+  <p:clrMapOvr>
+    <a:masterClrMapping/>
+  </p:clrMapOvr>
+</p:sld>
+</file>
+
+<file path=ppt/slides/slide27.xml><?xml version="1.0" encoding="utf-8"?>
+<p:sld xmlns:a="http://schemas.openxmlformats.org/drawingml/2006/main" xmlns:r="http://schemas.openxmlformats.org/officeDocument/2006/relationships" xmlns:p="http://schemas.openxmlformats.org/presentationml/2006/main">
+  <p:cSld>
+    <p:spTree>
+      <p:nvGrpSpPr>
+        <p:cNvPr id="1" name="">
+          <a:extLst>
+            <a:ext uri="{FF2B5EF4-FFF2-40B4-BE49-F238E27FC236}">
+              <a16:creationId xmlns:a16="http://schemas.microsoft.com/office/drawing/2014/main" id="{014EFA39-89F4-F46E-D725-0465D6179874}"/>
+            </a:ext>
+          </a:extLst>
+        </p:cNvPr>
+        <p:cNvGrpSpPr/>
+        <p:nvPr/>
+      </p:nvGrpSpPr>
+      <p:grpSpPr>
+        <a:xfrm>
+          <a:off x="0" y="0"/>
+          <a:ext cx="0" cy="0"/>
+          <a:chOff x="0" y="0"/>
+          <a:chExt cx="0" cy="0"/>
+        </a:xfrm>
+      </p:grpSpPr>
+      <p:sp>
+        <p:nvSpPr>
+          <p:cNvPr id="2" name="Title 1">
+            <a:extLst>
+              <a:ext uri="{FF2B5EF4-FFF2-40B4-BE49-F238E27FC236}">
+                <a16:creationId xmlns:a16="http://schemas.microsoft.com/office/drawing/2014/main" id="{D4FA7C41-E14A-6BE4-37F6-4F9E7F29210D}"/>
+              </a:ext>
+            </a:extLst>
+          </p:cNvPr>
+          <p:cNvSpPr>
+            <a:spLocks noGrp="1"/>
+          </p:cNvSpPr>
+          <p:nvPr>
+            <p:ph type="title"/>
+          </p:nvPr>
+        </p:nvSpPr>
+        <p:spPr>
+          <a:xfrm>
+            <a:off x="838200" y="373901"/>
+            <a:ext cx="10515600" cy="1325563"/>
+          </a:xfrm>
+        </p:spPr>
+        <p:txBody>
+          <a:bodyPr/>
+          <a:lstStyle/>
+          <a:p>
+            <a:r>
+              <a:rPr lang="en-US" dirty="0" err="1">
+                <a:solidFill>
+                  <a:schemeClr val="accent6">
+                    <a:lumMod val="75000"/>
+                  </a:schemeClr>
+                </a:solidFill>
+                <a:latin typeface="Space Grotesk" pitchFamily="2" charset="0"/>
+                <a:cs typeface="Space Grotesk" pitchFamily="2" charset="0"/>
+              </a:rPr>
+              <a:t>Mesures</a:t>
+            </a:r>
+            <a:br>
+              <a:rPr lang="en-US" dirty="0">
+                <a:solidFill>
+                  <a:schemeClr val="accent6">
+                    <a:lumMod val="75000"/>
+                  </a:schemeClr>
+                </a:solidFill>
+                <a:latin typeface="Space Grotesk" pitchFamily="2" charset="0"/>
+                <a:cs typeface="Space Grotesk" pitchFamily="2" charset="0"/>
+              </a:rPr>
+            </a:br>
+            <a:r>
+              <a:rPr lang="en-US" sz="2800" dirty="0">
+                <a:solidFill>
+                  <a:schemeClr val="accent6">
+                    <a:lumMod val="75000"/>
+                  </a:schemeClr>
+                </a:solidFill>
+                <a:latin typeface="Space Grotesk" pitchFamily="2" charset="0"/>
+                <a:cs typeface="Space Grotesk" pitchFamily="2" charset="0"/>
+              </a:rPr>
+              <a:t>Valeurs </a:t>
+            </a:r>
+            <a:r>
+              <a:rPr lang="en-US" sz="2800" dirty="0" err="1">
+                <a:solidFill>
+                  <a:schemeClr val="accent6">
+                    <a:lumMod val="75000"/>
+                  </a:schemeClr>
+                </a:solidFill>
+                <a:latin typeface="Space Grotesk" pitchFamily="2" charset="0"/>
+                <a:cs typeface="Space Grotesk" pitchFamily="2" charset="0"/>
+              </a:rPr>
+              <a:t>limites</a:t>
+            </a:r>
+            <a:endParaRPr lang="fr-CH" dirty="0">
+              <a:solidFill>
+                <a:schemeClr val="accent6">
+                  <a:lumMod val="75000"/>
+                </a:schemeClr>
+              </a:solidFill>
+              <a:latin typeface="Space Grotesk" pitchFamily="2" charset="0"/>
+              <a:cs typeface="Space Grotesk" pitchFamily="2" charset="0"/>
+            </a:endParaRPr>
+          </a:p>
+        </p:txBody>
+      </p:sp>
+      <p:sp>
+        <p:nvSpPr>
+          <p:cNvPr id="3" name="Slide Number Placeholder 2">
+            <a:extLst>
+              <a:ext uri="{FF2B5EF4-FFF2-40B4-BE49-F238E27FC236}">
+                <a16:creationId xmlns:a16="http://schemas.microsoft.com/office/drawing/2014/main" id="{52351527-4151-A843-25FD-C11D02CCBF68}"/>
+              </a:ext>
+            </a:extLst>
+          </p:cNvPr>
+          <p:cNvSpPr>
+            <a:spLocks noGrp="1"/>
+          </p:cNvSpPr>
+          <p:nvPr>
+            <p:ph type="sldNum" sz="quarter" idx="12"/>
+          </p:nvPr>
+        </p:nvSpPr>
+        <p:spPr/>
+        <p:txBody>
+          <a:bodyPr/>
+          <a:lstStyle/>
+          <a:p>
+            <a:fld id="{27610C65-3251-4B31-A496-D9D978F99BA5}" type="slidenum">
+              <a:rPr lang="fr-CH" smtClean="0"/>
+              <a:t>27</a:t>
+            </a:fld>
+            <a:endParaRPr lang="fr-CH"/>
+          </a:p>
+        </p:txBody>
+      </p:sp>
+      <p:pic>
+        <p:nvPicPr>
+          <p:cNvPr id="6" name="Picture 5">
+            <a:extLst>
+              <a:ext uri="{FF2B5EF4-FFF2-40B4-BE49-F238E27FC236}">
+                <a16:creationId xmlns:a16="http://schemas.microsoft.com/office/drawing/2014/main" id="{D256A479-38E1-2682-C1B2-4337DB00548C}"/>
+              </a:ext>
+            </a:extLst>
+          </p:cNvPr>
+          <p:cNvPicPr>
+            <a:picLocks noChangeAspect="1"/>
+          </p:cNvPicPr>
+          <p:nvPr/>
+        </p:nvPicPr>
+        <p:blipFill>
+          <a:blip r:embed="rId2"/>
+          <a:stretch>
+            <a:fillRect/>
+          </a:stretch>
+        </p:blipFill>
+        <p:spPr>
+          <a:xfrm>
+            <a:off x="564623" y="1948513"/>
+            <a:ext cx="5098757" cy="4158788"/>
+          </a:xfrm>
+          <a:prstGeom prst="rect">
+            <a:avLst/>
+          </a:prstGeom>
+        </p:spPr>
+      </p:pic>
+      <p:pic>
+        <p:nvPicPr>
+          <p:cNvPr id="9" name="Picture 8">
+            <a:extLst>
+              <a:ext uri="{FF2B5EF4-FFF2-40B4-BE49-F238E27FC236}">
+                <a16:creationId xmlns:a16="http://schemas.microsoft.com/office/drawing/2014/main" id="{7FD48511-E5E5-A54A-3787-F1B08443079A}"/>
+              </a:ext>
+            </a:extLst>
+          </p:cNvPr>
+          <p:cNvPicPr>
+            <a:picLocks noChangeAspect="1"/>
+          </p:cNvPicPr>
+          <p:nvPr/>
+        </p:nvPicPr>
+        <p:blipFill>
+          <a:blip r:embed="rId3"/>
+          <a:stretch>
+            <a:fillRect/>
+          </a:stretch>
+        </p:blipFill>
+        <p:spPr>
+          <a:xfrm>
+            <a:off x="5793981" y="2078982"/>
+            <a:ext cx="4902814" cy="3958957"/>
+          </a:xfrm>
+          <a:prstGeom prst="rect">
+            <a:avLst/>
+          </a:prstGeom>
+        </p:spPr>
+      </p:pic>
+    </p:spTree>
+    <p:extLst>
+      <p:ext uri="{BB962C8B-B14F-4D97-AF65-F5344CB8AC3E}">
+        <p14:creationId xmlns:p14="http://schemas.microsoft.com/office/powerpoint/2010/main" val="906608879"/>
+      </p:ext>
+    </p:extLst>
+  </p:cSld>
+  <p:clrMapOvr>
+    <a:masterClrMapping/>
+  </p:clrMapOvr>
+</p:sld>
+</file>
+
+<file path=ppt/slides/slide28.xml><?xml version="1.0" encoding="utf-8"?>
+<p:sld xmlns:a="http://schemas.openxmlformats.org/drawingml/2006/main" xmlns:r="http://schemas.openxmlformats.org/officeDocument/2006/relationships" xmlns:p="http://schemas.openxmlformats.org/presentationml/2006/main">
+  <p:cSld>
+    <p:spTree>
+      <p:nvGrpSpPr>
+        <p:cNvPr id="1" name="">
+          <a:extLst>
+            <a:ext uri="{FF2B5EF4-FFF2-40B4-BE49-F238E27FC236}">
+              <a16:creationId xmlns:a16="http://schemas.microsoft.com/office/drawing/2014/main" id="{372C050D-A755-FBD9-1F48-9225CAE5EAD2}"/>
+            </a:ext>
+          </a:extLst>
+        </p:cNvPr>
+        <p:cNvGrpSpPr/>
+        <p:nvPr/>
+      </p:nvGrpSpPr>
+      <p:grpSpPr>
+        <a:xfrm>
+          <a:off x="0" y="0"/>
+          <a:ext cx="0" cy="0"/>
+          <a:chOff x="0" y="0"/>
+          <a:chExt cx="0" cy="0"/>
+        </a:xfrm>
+      </p:grpSpPr>
+      <p:sp>
+        <p:nvSpPr>
+          <p:cNvPr id="2" name="Title 1">
+            <a:extLst>
+              <a:ext uri="{FF2B5EF4-FFF2-40B4-BE49-F238E27FC236}">
+                <a16:creationId xmlns:a16="http://schemas.microsoft.com/office/drawing/2014/main" id="{142FE63C-6CFD-D47C-C605-45A38032DAE5}"/>
+              </a:ext>
+            </a:extLst>
+          </p:cNvPr>
+          <p:cNvSpPr>
+            <a:spLocks noGrp="1"/>
+          </p:cNvSpPr>
+          <p:nvPr>
+            <p:ph type="title"/>
+          </p:nvPr>
+        </p:nvSpPr>
+        <p:spPr>
+          <a:xfrm>
+            <a:off x="838200" y="373901"/>
+            <a:ext cx="10515600" cy="1325563"/>
+          </a:xfrm>
+        </p:spPr>
+        <p:txBody>
+          <a:bodyPr/>
+          <a:lstStyle/>
+          <a:p>
+            <a:r>
+              <a:rPr lang="en-US" dirty="0">
+                <a:solidFill>
+                  <a:schemeClr val="accent6">
+                    <a:lumMod val="75000"/>
+                  </a:schemeClr>
+                </a:solidFill>
+                <a:latin typeface="Space Grotesk" pitchFamily="2" charset="0"/>
+                <a:cs typeface="Space Grotesk" pitchFamily="2" charset="0"/>
+              </a:rPr>
+              <a:t>Conclusion</a:t>
+            </a:r>
+            <a:br>
+              <a:rPr lang="en-US" dirty="0">
+                <a:solidFill>
+                  <a:schemeClr val="accent6">
+                    <a:lumMod val="75000"/>
+                  </a:schemeClr>
+                </a:solidFill>
+                <a:latin typeface="Space Grotesk" pitchFamily="2" charset="0"/>
+                <a:cs typeface="Space Grotesk" pitchFamily="2" charset="0"/>
+              </a:rPr>
+            </a:br>
+            <a:r>
+              <a:rPr lang="en-US" sz="2800" dirty="0" err="1">
+                <a:solidFill>
+                  <a:schemeClr val="accent6">
+                    <a:lumMod val="75000"/>
+                  </a:schemeClr>
+                </a:solidFill>
+                <a:latin typeface="Space Grotesk" pitchFamily="2" charset="0"/>
+                <a:cs typeface="Space Grotesk" pitchFamily="2" charset="0"/>
+              </a:rPr>
+              <a:t>Résultats</a:t>
+            </a:r>
+            <a:r>
+              <a:rPr lang="en-US" sz="2800" dirty="0">
+                <a:solidFill>
+                  <a:schemeClr val="accent6">
+                    <a:lumMod val="75000"/>
+                  </a:schemeClr>
+                </a:solidFill>
+                <a:latin typeface="Space Grotesk" pitchFamily="2" charset="0"/>
+                <a:cs typeface="Space Grotesk" pitchFamily="2" charset="0"/>
+              </a:rPr>
+              <a:t> </a:t>
+            </a:r>
+            <a:r>
+              <a:rPr lang="en-US" sz="2800" dirty="0" err="1">
+                <a:solidFill>
+                  <a:schemeClr val="accent6">
+                    <a:lumMod val="75000"/>
+                  </a:schemeClr>
+                </a:solidFill>
+                <a:latin typeface="Space Grotesk" pitchFamily="2" charset="0"/>
+                <a:cs typeface="Space Grotesk" pitchFamily="2" charset="0"/>
+              </a:rPr>
+              <a:t>justifiés</a:t>
+            </a:r>
+            <a:endParaRPr lang="fr-CH" dirty="0">
+              <a:solidFill>
+                <a:schemeClr val="accent6">
+                  <a:lumMod val="75000"/>
+                </a:schemeClr>
+              </a:solidFill>
+              <a:latin typeface="Space Grotesk" pitchFamily="2" charset="0"/>
+              <a:cs typeface="Space Grotesk" pitchFamily="2" charset="0"/>
+            </a:endParaRPr>
+          </a:p>
+        </p:txBody>
+      </p:sp>
+      <p:sp>
+        <p:nvSpPr>
+          <p:cNvPr id="4" name="Content Placeholder 3">
+            <a:extLst>
+              <a:ext uri="{FF2B5EF4-FFF2-40B4-BE49-F238E27FC236}">
+                <a16:creationId xmlns:a16="http://schemas.microsoft.com/office/drawing/2014/main" id="{600D2B1E-DB5E-893C-3106-33ACB9D66B19}"/>
+              </a:ext>
+            </a:extLst>
+          </p:cNvPr>
+          <p:cNvSpPr>
+            <a:spLocks noGrp="1"/>
+          </p:cNvSpPr>
+          <p:nvPr>
+            <p:ph idx="1"/>
+          </p:nvPr>
+        </p:nvSpPr>
+        <p:spPr>
+          <a:xfrm>
+            <a:off x="818536" y="1825625"/>
+            <a:ext cx="10515600" cy="4351338"/>
+          </a:xfrm>
+        </p:spPr>
+        <p:txBody>
+          <a:bodyPr/>
+          <a:lstStyle/>
+          <a:p>
+            <a:r>
+              <a:rPr lang="en-US" dirty="0">
+                <a:latin typeface="Space Grotesk" pitchFamily="2" charset="0"/>
+                <a:cs typeface="Space Grotesk" pitchFamily="2" charset="0"/>
+              </a:rPr>
+              <a:t>Vitesse </a:t>
+            </a:r>
+            <a:r>
+              <a:rPr lang="en-US" dirty="0" err="1">
+                <a:latin typeface="Space Grotesk" pitchFamily="2" charset="0"/>
+                <a:cs typeface="Space Grotesk" pitchFamily="2" charset="0"/>
+              </a:rPr>
+              <a:t>maximale</a:t>
+            </a:r>
+            <a:endParaRPr lang="en-US" dirty="0">
+              <a:latin typeface="Space Grotesk" pitchFamily="2" charset="0"/>
+              <a:cs typeface="Space Grotesk" pitchFamily="2" charset="0"/>
+            </a:endParaRPr>
+          </a:p>
+          <a:p>
+            <a:r>
+              <a:rPr lang="fr-CH" dirty="0">
+                <a:latin typeface="Space Grotesk" pitchFamily="2" charset="0"/>
+                <a:cs typeface="Space Grotesk" pitchFamily="2" charset="0"/>
+              </a:rPr>
+              <a:t>Roues </a:t>
+            </a:r>
+            <a:r>
+              <a:rPr lang="fr-CH" b="0" dirty="0">
+                <a:latin typeface="Space Grotesk" pitchFamily="2" charset="0"/>
+                <a:cs typeface="Space Grotesk" pitchFamily="2" charset="0"/>
+              </a:rPr>
+              <a:t>PLA, ALU</a:t>
+            </a:r>
+          </a:p>
+          <a:p>
+            <a:r>
+              <a:rPr lang="fr-CH">
+                <a:latin typeface="Space Grotesk" pitchFamily="2" charset="0"/>
+                <a:cs typeface="Space Grotesk" pitchFamily="2" charset="0"/>
+              </a:rPr>
+              <a:t>Valeurs limites</a:t>
+            </a:r>
+            <a:endParaRPr lang="fr-CH" b="0" dirty="0">
+              <a:latin typeface="Space Grotesk" pitchFamily="2" charset="0"/>
+              <a:cs typeface="Space Grotesk" pitchFamily="2" charset="0"/>
+            </a:endParaRPr>
+          </a:p>
+          <a:p>
+            <a:r>
+              <a:rPr lang="en-US" i="1" dirty="0">
+                <a:latin typeface="Space Grotesk" pitchFamily="2" charset="0"/>
+                <a:cs typeface="Space Grotesk" pitchFamily="2" charset="0"/>
+              </a:rPr>
+              <a:t>Chute libre</a:t>
+            </a:r>
+            <a:endParaRPr lang="fr-CH" b="0" dirty="0">
+              <a:latin typeface="Space Grotesk" pitchFamily="2" charset="0"/>
+              <a:cs typeface="Space Grotesk" pitchFamily="2" charset="0"/>
+            </a:endParaRPr>
+          </a:p>
+          <a:p>
+            <a:r>
+              <a:rPr lang="fr-CH" i="1" dirty="0">
+                <a:latin typeface="Space Grotesk" pitchFamily="2" charset="0"/>
+                <a:cs typeface="Space Grotesk" pitchFamily="2" charset="0"/>
+              </a:rPr>
+              <a:t>Impact de l’IMU</a:t>
+            </a:r>
+            <a:endParaRPr lang="fr-CH" b="0" i="1" dirty="0">
+              <a:latin typeface="Space Grotesk" pitchFamily="2" charset="0"/>
+              <a:cs typeface="Space Grotesk" pitchFamily="2" charset="0"/>
+            </a:endParaRPr>
+          </a:p>
+        </p:txBody>
+      </p:sp>
+      <p:sp>
+        <p:nvSpPr>
+          <p:cNvPr id="5" name="Slide Number Placeholder 4">
+            <a:extLst>
+              <a:ext uri="{FF2B5EF4-FFF2-40B4-BE49-F238E27FC236}">
+                <a16:creationId xmlns:a16="http://schemas.microsoft.com/office/drawing/2014/main" id="{E1A0AB77-5290-243E-0602-EB106E3A1A71}"/>
+              </a:ext>
+            </a:extLst>
+          </p:cNvPr>
+          <p:cNvSpPr>
+            <a:spLocks noGrp="1"/>
+          </p:cNvSpPr>
+          <p:nvPr>
+            <p:ph type="sldNum" sz="quarter" idx="12"/>
+          </p:nvPr>
+        </p:nvSpPr>
+        <p:spPr/>
+        <p:txBody>
+          <a:bodyPr/>
+          <a:lstStyle/>
+          <a:p>
+            <a:fld id="{27610C65-3251-4B31-A496-D9D978F99BA5}" type="slidenum">
+              <a:rPr lang="fr-CH" smtClean="0">
+                <a:latin typeface="Space Grotesk" pitchFamily="2" charset="0"/>
+                <a:cs typeface="Space Grotesk" pitchFamily="2" charset="0"/>
+              </a:rPr>
+              <a:t>28</a:t>
+            </a:fld>
+            <a:endParaRPr lang="fr-CH">
+              <a:latin typeface="Space Grotesk" pitchFamily="2" charset="0"/>
+              <a:cs typeface="Space Grotesk" pitchFamily="2" charset="0"/>
+            </a:endParaRPr>
+          </a:p>
+        </p:txBody>
+      </p:sp>
+    </p:spTree>
+    <p:extLst>
+      <p:ext uri="{BB962C8B-B14F-4D97-AF65-F5344CB8AC3E}">
+        <p14:creationId xmlns:p14="http://schemas.microsoft.com/office/powerpoint/2010/main" val="4109962189"/>
+      </p:ext>
+    </p:extLst>
+  </p:cSld>
+  <p:clrMapOvr>
+    <a:masterClrMapping/>
+  </p:clrMapOvr>
+</p:sld>
+</file>
+
+<file path=ppt/slides/slide29.xml><?xml version="1.0" encoding="utf-8"?>
+<p:sld xmlns:a="http://schemas.openxmlformats.org/drawingml/2006/main" xmlns:r="http://schemas.openxmlformats.org/officeDocument/2006/relationships" xmlns:p="http://schemas.openxmlformats.org/presentationml/2006/main">
+  <p:cSld>
+    <p:spTree>
+      <p:nvGrpSpPr>
+        <p:cNvPr id="1" name="">
+          <a:extLst>
+            <a:ext uri="{FF2B5EF4-FFF2-40B4-BE49-F238E27FC236}">
+              <a16:creationId xmlns:a16="http://schemas.microsoft.com/office/drawing/2014/main" id="{1F23E9DC-8F36-E791-C1C9-3965504DA02E}"/>
+            </a:ext>
+          </a:extLst>
+        </p:cNvPr>
+        <p:cNvGrpSpPr/>
+        <p:nvPr/>
+      </p:nvGrpSpPr>
+      <p:grpSpPr>
+        <a:xfrm>
+          <a:off x="0" y="0"/>
+          <a:ext cx="0" cy="0"/>
+          <a:chOff x="0" y="0"/>
+          <a:chExt cx="0" cy="0"/>
+        </a:xfrm>
+      </p:grpSpPr>
+      <p:sp>
+        <p:nvSpPr>
+          <p:cNvPr id="2" name="Title 1">
+            <a:extLst>
+              <a:ext uri="{FF2B5EF4-FFF2-40B4-BE49-F238E27FC236}">
+                <a16:creationId xmlns:a16="http://schemas.microsoft.com/office/drawing/2014/main" id="{F4CE3917-FB7D-6DA7-7A24-333AE473FDFF}"/>
+              </a:ext>
+            </a:extLst>
+          </p:cNvPr>
+          <p:cNvSpPr>
+            <a:spLocks noGrp="1"/>
+          </p:cNvSpPr>
+          <p:nvPr>
+            <p:ph type="title"/>
+          </p:nvPr>
+        </p:nvSpPr>
+        <p:spPr>
+          <a:xfrm>
+            <a:off x="838200" y="373901"/>
+            <a:ext cx="10515600" cy="1325563"/>
+          </a:xfrm>
+        </p:spPr>
+        <p:txBody>
+          <a:bodyPr/>
+          <a:lstStyle/>
+          <a:p>
+            <a:r>
+              <a:rPr lang="en-US" dirty="0">
+                <a:solidFill>
+                  <a:schemeClr val="accent6">
+                    <a:lumMod val="75000"/>
+                  </a:schemeClr>
+                </a:solidFill>
+                <a:latin typeface="Space Grotesk" pitchFamily="2" charset="0"/>
+                <a:cs typeface="Space Grotesk" pitchFamily="2" charset="0"/>
+              </a:rPr>
+              <a:t>Conclusion</a:t>
+            </a:r>
+            <a:br>
+              <a:rPr lang="en-US" dirty="0">
+                <a:solidFill>
+                  <a:schemeClr val="accent6">
+                    <a:lumMod val="75000"/>
+                  </a:schemeClr>
+                </a:solidFill>
+                <a:latin typeface="Space Grotesk" pitchFamily="2" charset="0"/>
+                <a:cs typeface="Space Grotesk" pitchFamily="2" charset="0"/>
+              </a:rPr>
+            </a:br>
+            <a:r>
+              <a:rPr lang="en-US" sz="2800" dirty="0" err="1">
+                <a:solidFill>
+                  <a:schemeClr val="accent6">
+                    <a:lumMod val="75000"/>
+                  </a:schemeClr>
+                </a:solidFill>
+                <a:latin typeface="Space Grotesk" pitchFamily="2" charset="0"/>
+                <a:cs typeface="Space Grotesk" pitchFamily="2" charset="0"/>
+              </a:rPr>
+              <a:t>Améliorations</a:t>
+            </a:r>
+            <a:r>
+              <a:rPr lang="en-US" sz="2800" dirty="0">
+                <a:solidFill>
+                  <a:schemeClr val="accent6">
+                    <a:lumMod val="75000"/>
+                  </a:schemeClr>
+                </a:solidFill>
+                <a:latin typeface="Space Grotesk" pitchFamily="2" charset="0"/>
+                <a:cs typeface="Space Grotesk" pitchFamily="2" charset="0"/>
+              </a:rPr>
+              <a:t> possibles</a:t>
+            </a:r>
+            <a:endParaRPr lang="fr-CH" dirty="0">
+              <a:solidFill>
+                <a:schemeClr val="accent6">
+                  <a:lumMod val="75000"/>
+                </a:schemeClr>
+              </a:solidFill>
+              <a:latin typeface="Space Grotesk" pitchFamily="2" charset="0"/>
+              <a:cs typeface="Space Grotesk" pitchFamily="2" charset="0"/>
+            </a:endParaRPr>
+          </a:p>
+        </p:txBody>
+      </p:sp>
+      <p:sp>
+        <p:nvSpPr>
+          <p:cNvPr id="4" name="Content Placeholder 3">
+            <a:extLst>
+              <a:ext uri="{FF2B5EF4-FFF2-40B4-BE49-F238E27FC236}">
+                <a16:creationId xmlns:a16="http://schemas.microsoft.com/office/drawing/2014/main" id="{0C4C2BAB-3704-A811-5E64-25C4E413A668}"/>
+              </a:ext>
+            </a:extLst>
+          </p:cNvPr>
+          <p:cNvSpPr>
+            <a:spLocks noGrp="1"/>
+          </p:cNvSpPr>
+          <p:nvPr>
+            <p:ph idx="1"/>
+          </p:nvPr>
+        </p:nvSpPr>
+        <p:spPr>
+          <a:xfrm>
+            <a:off x="818536" y="1825625"/>
+            <a:ext cx="10515600" cy="4351338"/>
+          </a:xfrm>
+        </p:spPr>
+        <p:txBody>
+          <a:bodyPr/>
+          <a:lstStyle/>
+          <a:p>
+            <a:r>
+              <a:rPr lang="en-US" dirty="0" err="1">
+                <a:latin typeface="Space Grotesk" pitchFamily="2" charset="0"/>
+                <a:cs typeface="Space Grotesk" pitchFamily="2" charset="0"/>
+              </a:rPr>
+              <a:t>Déplacement</a:t>
+            </a:r>
+            <a:r>
+              <a:rPr lang="en-US" dirty="0">
+                <a:latin typeface="Space Grotesk" pitchFamily="2" charset="0"/>
+                <a:cs typeface="Space Grotesk" pitchFamily="2" charset="0"/>
+              </a:rPr>
+              <a:t> </a:t>
+            </a:r>
+            <a:r>
+              <a:rPr lang="en-US" dirty="0" err="1">
+                <a:latin typeface="Space Grotesk" pitchFamily="2" charset="0"/>
+                <a:cs typeface="Space Grotesk" pitchFamily="2" charset="0"/>
+              </a:rPr>
+              <a:t>autonome</a:t>
+            </a:r>
+            <a:r>
+              <a:rPr lang="en-US" dirty="0">
+                <a:latin typeface="Space Grotesk" pitchFamily="2" charset="0"/>
+                <a:cs typeface="Space Grotesk" pitchFamily="2" charset="0"/>
+              </a:rPr>
+              <a:t> (</a:t>
+            </a:r>
+            <a:r>
+              <a:rPr lang="en-US" dirty="0" err="1">
+                <a:latin typeface="Space Grotesk" pitchFamily="2" charset="0"/>
+                <a:cs typeface="Space Grotesk" pitchFamily="2" charset="0"/>
+              </a:rPr>
+              <a:t>capteurs</a:t>
+            </a:r>
+            <a:r>
+              <a:rPr lang="en-US" dirty="0">
+                <a:latin typeface="Space Grotesk" pitchFamily="2" charset="0"/>
+                <a:cs typeface="Space Grotesk" pitchFamily="2" charset="0"/>
+              </a:rPr>
+              <a:t>)</a:t>
+            </a:r>
+          </a:p>
+          <a:p>
+            <a:r>
+              <a:rPr lang="en-US" dirty="0">
+                <a:latin typeface="Space Grotesk" pitchFamily="2" charset="0"/>
+                <a:cs typeface="Space Grotesk" pitchFamily="2" charset="0"/>
+              </a:rPr>
+              <a:t>Couple </a:t>
+            </a:r>
+            <a:r>
+              <a:rPr lang="en-US" dirty="0" err="1">
+                <a:latin typeface="Space Grotesk" pitchFamily="2" charset="0"/>
+                <a:cs typeface="Space Grotesk" pitchFamily="2" charset="0"/>
+              </a:rPr>
+              <a:t>adaptif</a:t>
+            </a:r>
+            <a:r>
+              <a:rPr lang="en-US" dirty="0">
+                <a:latin typeface="Space Grotesk" pitchFamily="2" charset="0"/>
+                <a:cs typeface="Space Grotesk" pitchFamily="2" charset="0"/>
+              </a:rPr>
+              <a:t> des </a:t>
+            </a:r>
+            <a:r>
+              <a:rPr lang="en-US" dirty="0" err="1">
+                <a:latin typeface="Space Grotesk" pitchFamily="2" charset="0"/>
+                <a:cs typeface="Space Grotesk" pitchFamily="2" charset="0"/>
+              </a:rPr>
+              <a:t>moteurs</a:t>
+            </a:r>
+            <a:r>
+              <a:rPr lang="en-US" dirty="0">
+                <a:latin typeface="Space Grotesk" pitchFamily="2" charset="0"/>
+                <a:cs typeface="Space Grotesk" pitchFamily="2" charset="0"/>
+              </a:rPr>
+              <a:t> pas à pas</a:t>
+            </a:r>
+          </a:p>
+        </p:txBody>
+      </p:sp>
+      <p:sp>
+        <p:nvSpPr>
+          <p:cNvPr id="3" name="Slide Number Placeholder 2">
+            <a:extLst>
+              <a:ext uri="{FF2B5EF4-FFF2-40B4-BE49-F238E27FC236}">
+                <a16:creationId xmlns:a16="http://schemas.microsoft.com/office/drawing/2014/main" id="{E4EE8CD0-D897-0F37-CE6F-C365E8A3B5D0}"/>
+              </a:ext>
+            </a:extLst>
+          </p:cNvPr>
+          <p:cNvSpPr>
+            <a:spLocks noGrp="1"/>
+          </p:cNvSpPr>
+          <p:nvPr>
+            <p:ph type="sldNum" sz="quarter" idx="12"/>
+          </p:nvPr>
+        </p:nvSpPr>
+        <p:spPr/>
+        <p:txBody>
+          <a:bodyPr/>
+          <a:lstStyle/>
+          <a:p>
+            <a:fld id="{27610C65-3251-4B31-A496-D9D978F99BA5}" type="slidenum">
+              <a:rPr lang="fr-CH" smtClean="0">
+                <a:latin typeface="Space Grotesk" pitchFamily="2" charset="0"/>
+                <a:cs typeface="Space Grotesk" pitchFamily="2" charset="0"/>
+              </a:rPr>
+              <a:t>29</a:t>
+            </a:fld>
+            <a:endParaRPr lang="fr-CH">
+              <a:latin typeface="Space Grotesk" pitchFamily="2" charset="0"/>
+              <a:cs typeface="Space Grotesk" pitchFamily="2" charset="0"/>
+            </a:endParaRPr>
+          </a:p>
+        </p:txBody>
+      </p:sp>
+    </p:spTree>
+    <p:extLst>
+      <p:ext uri="{BB962C8B-B14F-4D97-AF65-F5344CB8AC3E}">
+        <p14:creationId xmlns:p14="http://schemas.microsoft.com/office/powerpoint/2010/main" val="1152373146"/>
+      </p:ext>
+    </p:extLst>
+  </p:cSld>
+  <p:clrMapOvr>
+    <a:masterClrMapping/>
+  </p:clrMapOvr>
+</p:sld>
+</file>
+
+<file path=ppt/slides/slide3.xml><?xml version="1.0" encoding="utf-8"?>
+<p:sld xmlns:a="http://schemas.openxmlformats.org/drawingml/2006/main" xmlns:r="http://schemas.openxmlformats.org/officeDocument/2006/relationships" xmlns:p="http://schemas.openxmlformats.org/presentationml/2006/main">
+  <p:cSld>
+    <p:bg>
+      <p:bgPr>
+        <a:solidFill>
+          <a:schemeClr val="bg1"/>
+        </a:solidFill>
+        <a:effectLst/>
+      </p:bgPr>
+    </p:bg>
+    <p:spTree>
+      <p:nvGrpSpPr>
+        <p:cNvPr id="1" name=""/>
+        <p:cNvGrpSpPr/>
+        <p:nvPr/>
+      </p:nvGrpSpPr>
+      <p:grpSpPr>
+        <a:xfrm>
+          <a:off x="0" y="0"/>
+          <a:ext cx="0" cy="0"/>
+          <a:chOff x="0" y="0"/>
+          <a:chExt cx="0" cy="0"/>
+        </a:xfrm>
+      </p:grpSpPr>
+      <p:sp>
+        <p:nvSpPr>
+          <p:cNvPr id="2" name="Title 1">
+            <a:extLst>
+              <a:ext uri="{FF2B5EF4-FFF2-40B4-BE49-F238E27FC236}">
+                <a16:creationId xmlns:a16="http://schemas.microsoft.com/office/drawing/2014/main" id="{40C85619-A7CF-CFBF-4566-13A23166F336}"/>
+              </a:ext>
+            </a:extLst>
+          </p:cNvPr>
+          <p:cNvSpPr>
+            <a:spLocks noGrp="1"/>
+          </p:cNvSpPr>
+          <p:nvPr>
+            <p:ph type="title"/>
+          </p:nvPr>
+        </p:nvSpPr>
+        <p:spPr>
+          <a:xfrm>
+            <a:off x="1179073" y="211389"/>
+            <a:ext cx="9833548" cy="1066802"/>
+          </a:xfrm>
+        </p:spPr>
+        <p:txBody>
+          <a:bodyPr anchor="b">
+            <a:normAutofit/>
+          </a:bodyPr>
+          <a:lstStyle/>
+          <a:p>
+            <a:r>
+              <a:rPr lang="en-US" dirty="0">
+                <a:solidFill>
+                  <a:srgbClr val="0070C0"/>
+                </a:solidFill>
+                <a:latin typeface="Space Grotesk" pitchFamily="2" charset="0"/>
+                <a:cs typeface="Space Grotesk" pitchFamily="2" charset="0"/>
+              </a:rPr>
+              <a:t>Introduction</a:t>
+            </a:r>
+            <a:endParaRPr lang="fr-CH" sz="3600" dirty="0">
+              <a:solidFill>
+                <a:srgbClr val="0070C0"/>
+              </a:solidFill>
+              <a:latin typeface="Space Grotesk" pitchFamily="2" charset="0"/>
+              <a:cs typeface="Space Grotesk" pitchFamily="2" charset="0"/>
+            </a:endParaRPr>
+          </a:p>
+        </p:txBody>
+      </p:sp>
+      <p:sp>
+        <p:nvSpPr>
+          <p:cNvPr id="3" name="Content Placeholder 2">
+            <a:extLst>
+              <a:ext uri="{FF2B5EF4-FFF2-40B4-BE49-F238E27FC236}">
+                <a16:creationId xmlns:a16="http://schemas.microsoft.com/office/drawing/2014/main" id="{71A8CD75-9623-AF8A-54EC-4D54F5CF3129}"/>
+              </a:ext>
+            </a:extLst>
+          </p:cNvPr>
+          <p:cNvSpPr>
+            <a:spLocks noGrp="1"/>
+          </p:cNvSpPr>
+          <p:nvPr>
+            <p:ph idx="1"/>
+          </p:nvPr>
+        </p:nvSpPr>
+        <p:spPr>
+          <a:xfrm>
+            <a:off x="1179073" y="1597689"/>
+            <a:ext cx="9833548" cy="3905762"/>
+          </a:xfrm>
+        </p:spPr>
+        <p:txBody>
+          <a:bodyPr anchor="ctr">
+            <a:normAutofit/>
+          </a:bodyPr>
+          <a:lstStyle/>
+          <a:p>
+            <a:pPr>
+              <a:lnSpc>
+                <a:spcPct val="150000"/>
+              </a:lnSpc>
+            </a:pPr>
+            <a:r>
+              <a:rPr lang="en-US" dirty="0">
+                <a:latin typeface="Space Grotesk" pitchFamily="2" charset="0"/>
+                <a:cs typeface="Space Grotesk" pitchFamily="2" charset="0"/>
+              </a:rPr>
               <a:t>Application notions </a:t>
             </a:r>
             <a:r>
-              <a:rPr lang="en-US" dirty="0" err="1"/>
+              <a:rPr lang="en-US" dirty="0" err="1">
+                <a:latin typeface="Space Grotesk" pitchFamily="2" charset="0"/>
+                <a:cs typeface="Space Grotesk" pitchFamily="2" charset="0"/>
+              </a:rPr>
               <a:t>théoriques</a:t>
             </a:r>
-            <a:endParaRPr lang="en-US" dirty="0"/>
-          </a:p>
-          <a:p>
-            <a:r>
-              <a:rPr lang="en-US" dirty="0" err="1"/>
+            <a:endParaRPr lang="en-US" dirty="0">
+              <a:latin typeface="Space Grotesk" pitchFamily="2" charset="0"/>
+              <a:cs typeface="Space Grotesk" pitchFamily="2" charset="0"/>
+            </a:endParaRPr>
+          </a:p>
+          <a:p>
+            <a:pPr>
+              <a:lnSpc>
+                <a:spcPct val="150000"/>
+              </a:lnSpc>
+            </a:pPr>
+            <a:r>
+              <a:rPr lang="fr-CH" dirty="0">
+                <a:latin typeface="Space Grotesk" pitchFamily="2" charset="0"/>
+                <a:cs typeface="Space Grotesk" pitchFamily="2" charset="0"/>
+              </a:rPr>
+              <a:t>Multiple domaines</a:t>
+            </a:r>
+            <a:endParaRPr lang="en-US" dirty="0">
+              <a:latin typeface="Space Grotesk" pitchFamily="2" charset="0"/>
+              <a:cs typeface="Space Grotesk" pitchFamily="2" charset="0"/>
+            </a:endParaRPr>
+          </a:p>
+          <a:p>
+            <a:pPr>
+              <a:lnSpc>
+                <a:spcPct val="150000"/>
+              </a:lnSpc>
+            </a:pPr>
+            <a:r>
+              <a:rPr lang="en-US" dirty="0" err="1">
+                <a:latin typeface="Space Grotesk" pitchFamily="2" charset="0"/>
+                <a:cs typeface="Space Grotesk" pitchFamily="2" charset="0"/>
+              </a:rPr>
               <a:t>Projet</a:t>
             </a:r>
             <a:r>
-              <a:rPr lang="en-US" dirty="0"/>
+              <a:rPr lang="en-US" dirty="0">
+                <a:latin typeface="Space Grotesk" pitchFamily="2" charset="0"/>
+                <a:cs typeface="Space Grotesk" pitchFamily="2" charset="0"/>
+              </a:rPr>
               <a:t> </a:t>
             </a:r>
             <a:r>
-              <a:rPr lang="en-US" dirty="0" err="1"/>
+              <a:rPr lang="en-US" dirty="0" err="1">
+                <a:latin typeface="Space Grotesk" pitchFamily="2" charset="0"/>
+                <a:cs typeface="Space Grotesk" pitchFamily="2" charset="0"/>
+              </a:rPr>
               <a:t>complet</a:t>
             </a:r>
-            <a:endParaRPr lang="fr-CH" dirty="0"/>
-          </a:p>
-          <a:p>
-            <a:r>
-              <a:rPr lang="fr-CH" dirty="0"/>
-              <a:t>Validation modèle</a:t>
-            </a:r>
-          </a:p>
-          <a:p>
-            <a:endParaRPr lang="en-US" dirty="0"/>
+            <a:endParaRPr lang="fr-CH" dirty="0">
+              <a:latin typeface="Space Grotesk" pitchFamily="2" charset="0"/>
+              <a:cs typeface="Space Grotesk" pitchFamily="2" charset="0"/>
+            </a:endParaRPr>
+          </a:p>
+          <a:p>
+            <a:pPr>
+              <a:lnSpc>
+                <a:spcPct val="150000"/>
+              </a:lnSpc>
+            </a:pPr>
+            <a:r>
+              <a:rPr lang="fr-CH" dirty="0">
+                <a:latin typeface="Space Grotesk" pitchFamily="2" charset="0"/>
+                <a:cs typeface="Space Grotesk" pitchFamily="2" charset="0"/>
+              </a:rPr>
+              <a:t>Validation modèle théorique</a:t>
+            </a:r>
+          </a:p>
+          <a:p>
+            <a:endParaRPr lang="en-US" sz="1800" dirty="0">
+              <a:solidFill>
+                <a:schemeClr val="tx2"/>
+              </a:solidFill>
+              <a:latin typeface="Space Grotesk" pitchFamily="2" charset="0"/>
+              <a:cs typeface="Space Grotesk" pitchFamily="2" charset="0"/>
+            </a:endParaRPr>
+          </a:p>
+        </p:txBody>
+      </p:sp>
+      <p:sp>
+        <p:nvSpPr>
+          <p:cNvPr id="4" name="Slide Number Placeholder 3">
+            <a:extLst>
+              <a:ext uri="{FF2B5EF4-FFF2-40B4-BE49-F238E27FC236}">
+                <a16:creationId xmlns:a16="http://schemas.microsoft.com/office/drawing/2014/main" id="{8AAF8F49-AF01-F6FE-C0BD-428331C7FB74}"/>
+              </a:ext>
+            </a:extLst>
+          </p:cNvPr>
+          <p:cNvSpPr>
+            <a:spLocks noGrp="1"/>
+          </p:cNvSpPr>
+          <p:nvPr>
+            <p:ph type="sldNum" sz="quarter" idx="12"/>
+          </p:nvPr>
+        </p:nvSpPr>
+        <p:spPr/>
+        <p:txBody>
+          <a:bodyPr>
+            <a:normAutofit/>
+          </a:bodyPr>
+          <a:lstStyle/>
+          <a:p>
+            <a:pPr>
+              <a:spcAft>
+                <a:spcPts val="600"/>
+              </a:spcAft>
+            </a:pPr>
+            <a:fld id="{27610C65-3251-4B31-A496-D9D978F99BA5}" type="slidenum">
+              <a:rPr lang="fr-CH" smtClean="0">
+                <a:latin typeface="Space Grotesk" pitchFamily="2" charset="0"/>
+                <a:cs typeface="Space Grotesk" pitchFamily="2" charset="0"/>
+              </a:rPr>
+              <a:pPr>
+                <a:spcAft>
+                  <a:spcPts val="600"/>
+                </a:spcAft>
+              </a:pPr>
+              <a:t>3</a:t>
+            </a:fld>
+            <a:endParaRPr lang="fr-CH">
+              <a:latin typeface="Space Grotesk" pitchFamily="2" charset="0"/>
+              <a:cs typeface="Space Grotesk" pitchFamily="2" charset="0"/>
+            </a:endParaRPr>
           </a:p>
         </p:txBody>
       </p:sp>
@@ -3677,9 +10389,23 @@
 <file path=ppt/slides/slide4.xml><?xml version="1.0" encoding="utf-8"?>
 <p:sld xmlns:a="http://schemas.openxmlformats.org/drawingml/2006/main" xmlns:r="http://schemas.openxmlformats.org/officeDocument/2006/relationships" xmlns:p="http://schemas.openxmlformats.org/presentationml/2006/main">
   <p:cSld>
+    <p:bg>
+      <p:bgPr>
+        <a:solidFill>
+          <a:schemeClr val="bg1"/>
+        </a:solidFill>
+        <a:effectLst/>
+      </p:bgPr>
+    </p:bg>
     <p:spTree>
       <p:nvGrpSpPr>
-        <p:cNvPr id="1" name=""/>
+        <p:cNvPr id="1" name="">
+          <a:extLst>
+            <a:ext uri="{FF2B5EF4-FFF2-40B4-BE49-F238E27FC236}">
+              <a16:creationId xmlns:a16="http://schemas.microsoft.com/office/drawing/2014/main" id="{09B2FAF5-012E-F935-A709-8A7ED1650B36}"/>
+            </a:ext>
+          </a:extLst>
+        </p:cNvPr>
         <p:cNvGrpSpPr/>
         <p:nvPr/>
       </p:nvGrpSpPr>
@@ -3696,7 +10422,7 @@
           <p:cNvPr id="2" name="Title 1">
             <a:extLst>
               <a:ext uri="{FF2B5EF4-FFF2-40B4-BE49-F238E27FC236}">
-                <a16:creationId xmlns:a16="http://schemas.microsoft.com/office/drawing/2014/main" id="{A26BB377-43B8-B6EB-408F-9848A5CC5C51}"/>
+                <a16:creationId xmlns:a16="http://schemas.microsoft.com/office/drawing/2014/main" id="{04F8DD07-1DA7-EE18-EBBC-618E32B9F43A}"/>
               </a:ext>
             </a:extLst>
           </p:cNvPr>
@@ -3707,81 +10433,258 @@
             <p:ph type="title"/>
           </p:nvPr>
         </p:nvSpPr>
+        <p:spPr>
+          <a:xfrm>
+            <a:off x="1179226" y="136525"/>
+            <a:ext cx="9833548" cy="1066802"/>
+          </a:xfrm>
+        </p:spPr>
+        <p:txBody>
+          <a:bodyPr anchor="b">
+            <a:normAutofit/>
+          </a:bodyPr>
+          <a:lstStyle/>
+          <a:p>
+            <a:r>
+              <a:rPr lang="en-US" dirty="0">
+                <a:solidFill>
+                  <a:srgbClr val="0070C0"/>
+                </a:solidFill>
+                <a:latin typeface="Space Grotesk" pitchFamily="2" charset="0"/>
+                <a:cs typeface="Space Grotesk" pitchFamily="2" charset="0"/>
+              </a:rPr>
+              <a:t>Cahier des charges</a:t>
+            </a:r>
+            <a:endParaRPr lang="fr-CH" dirty="0">
+              <a:solidFill>
+                <a:srgbClr val="0070C0"/>
+              </a:solidFill>
+              <a:latin typeface="Space Grotesk" pitchFamily="2" charset="0"/>
+              <a:cs typeface="Space Grotesk" pitchFamily="2" charset="0"/>
+            </a:endParaRPr>
+          </a:p>
+        </p:txBody>
+      </p:sp>
+      <p:sp>
+        <p:nvSpPr>
+          <p:cNvPr id="3" name="Content Placeholder 2">
+            <a:extLst>
+              <a:ext uri="{FF2B5EF4-FFF2-40B4-BE49-F238E27FC236}">
+                <a16:creationId xmlns:a16="http://schemas.microsoft.com/office/drawing/2014/main" id="{B793DB4F-8D17-ACD5-93E3-098636153777}"/>
+              </a:ext>
+            </a:extLst>
+          </p:cNvPr>
+          <p:cNvSpPr>
+            <a:spLocks noGrp="1"/>
+          </p:cNvSpPr>
+          <p:nvPr>
+            <p:ph idx="1"/>
+          </p:nvPr>
+        </p:nvSpPr>
+        <p:spPr>
+          <a:xfrm>
+            <a:off x="1267716" y="1661652"/>
+            <a:ext cx="9833548" cy="4395019"/>
+          </a:xfrm>
+        </p:spPr>
+        <p:txBody>
+          <a:bodyPr vert="horz" lIns="91440" tIns="45720" rIns="91440" bIns="45720" rtlCol="0" anchor="ctr">
+            <a:noAutofit/>
+          </a:bodyPr>
+          <a:lstStyle/>
+          <a:p>
+            <a:pPr>
+              <a:lnSpc>
+                <a:spcPct val="100000"/>
+              </a:lnSpc>
+            </a:pPr>
+            <a:r>
+              <a:rPr lang="en-US" dirty="0">
+                <a:latin typeface="Space Grotesk" pitchFamily="2" charset="0"/>
+                <a:cs typeface="Space Grotesk" pitchFamily="2" charset="0"/>
+              </a:rPr>
+              <a:t>Conception</a:t>
+            </a:r>
+          </a:p>
+          <a:p>
+            <a:pPr>
+              <a:lnSpc>
+                <a:spcPct val="100000"/>
+              </a:lnSpc>
+            </a:pPr>
+            <a:r>
+              <a:rPr lang="en-US" dirty="0" err="1">
+                <a:latin typeface="Space Grotesk" pitchFamily="2" charset="0"/>
+                <a:cs typeface="Space Grotesk" pitchFamily="2" charset="0"/>
+              </a:rPr>
+              <a:t>Analyse</a:t>
+            </a:r>
+            <a:r>
+              <a:rPr lang="en-US" dirty="0">
+                <a:latin typeface="Space Grotesk" pitchFamily="2" charset="0"/>
+                <a:cs typeface="Space Grotesk" pitchFamily="2" charset="0"/>
+              </a:rPr>
+              <a:t> </a:t>
+            </a:r>
+            <a:r>
+              <a:rPr lang="en-US" dirty="0" err="1">
+                <a:latin typeface="Space Grotesk" pitchFamily="2" charset="0"/>
+                <a:cs typeface="Space Grotesk" pitchFamily="2" charset="0"/>
+              </a:rPr>
+              <a:t>Théorique</a:t>
+            </a:r>
+            <a:endParaRPr lang="en-US" dirty="0">
+              <a:latin typeface="Space Grotesk" pitchFamily="2" charset="0"/>
+              <a:cs typeface="Space Grotesk" pitchFamily="2" charset="0"/>
+            </a:endParaRPr>
+          </a:p>
+          <a:p>
+            <a:pPr>
+              <a:lnSpc>
+                <a:spcPct val="100000"/>
+              </a:lnSpc>
+            </a:pPr>
+            <a:r>
+              <a:rPr lang="en-US" dirty="0" err="1">
+                <a:latin typeface="Space Grotesk" pitchFamily="2" charset="0"/>
+                <a:cs typeface="Space Grotesk" pitchFamily="2" charset="0"/>
+              </a:rPr>
+              <a:t>Réalisation</a:t>
+            </a:r>
+            <a:endParaRPr lang="en-US" dirty="0">
+              <a:latin typeface="Space Grotesk" pitchFamily="2" charset="0"/>
+              <a:cs typeface="Space Grotesk" pitchFamily="2" charset="0"/>
+            </a:endParaRPr>
+          </a:p>
+          <a:p>
+            <a:pPr>
+              <a:lnSpc>
+                <a:spcPct val="100000"/>
+              </a:lnSpc>
+            </a:pPr>
+            <a:r>
+              <a:rPr lang="en-US" dirty="0" err="1">
+                <a:latin typeface="Space Grotesk" pitchFamily="2" charset="0"/>
+                <a:cs typeface="Space Grotesk" pitchFamily="2" charset="0"/>
+              </a:rPr>
+              <a:t>Programmation</a:t>
+            </a:r>
+            <a:endParaRPr lang="en-US" dirty="0">
+              <a:latin typeface="Space Grotesk" pitchFamily="2" charset="0"/>
+              <a:cs typeface="Space Grotesk" pitchFamily="2" charset="0"/>
+            </a:endParaRPr>
+          </a:p>
+          <a:p>
+            <a:pPr>
+              <a:lnSpc>
+                <a:spcPct val="100000"/>
+              </a:lnSpc>
+            </a:pPr>
+            <a:endParaRPr lang="en-US" dirty="0">
+              <a:latin typeface="Space Grotesk" pitchFamily="2" charset="0"/>
+              <a:cs typeface="Space Grotesk" pitchFamily="2" charset="0"/>
+            </a:endParaRPr>
+          </a:p>
+          <a:p>
+            <a:pPr>
+              <a:lnSpc>
+                <a:spcPct val="100000"/>
+              </a:lnSpc>
+            </a:pPr>
+            <a:r>
+              <a:rPr lang="en-US" dirty="0">
+                <a:latin typeface="Space Grotesk" pitchFamily="2" charset="0"/>
+                <a:cs typeface="Space Grotesk" pitchFamily="2" charset="0"/>
+              </a:rPr>
+              <a:t>30’ </a:t>
+            </a:r>
+            <a:r>
+              <a:rPr lang="en-US" dirty="0" err="1">
+                <a:latin typeface="Space Grotesk" pitchFamily="2" charset="0"/>
+                <a:cs typeface="Space Grotesk" pitchFamily="2" charset="0"/>
+              </a:rPr>
+              <a:t>d’autonomie</a:t>
+            </a:r>
+            <a:endParaRPr lang="en-US" dirty="0">
+              <a:latin typeface="Space Grotesk" pitchFamily="2" charset="0"/>
+              <a:cs typeface="Space Grotesk" pitchFamily="2" charset="0"/>
+            </a:endParaRPr>
+          </a:p>
+          <a:p>
+            <a:pPr>
+              <a:lnSpc>
+                <a:spcPct val="100000"/>
+              </a:lnSpc>
+            </a:pPr>
+            <a:r>
+              <a:rPr lang="en-US" dirty="0">
+                <a:latin typeface="Space Grotesk" pitchFamily="2" charset="0"/>
+                <a:cs typeface="Space Grotesk" pitchFamily="2" charset="0"/>
+              </a:rPr>
+              <a:t>Hauteur </a:t>
+            </a:r>
+            <a:r>
+              <a:rPr lang="en-US" dirty="0" err="1">
+                <a:latin typeface="Space Grotesk" pitchFamily="2" charset="0"/>
+                <a:cs typeface="Space Grotesk" pitchFamily="2" charset="0"/>
+              </a:rPr>
+              <a:t>maximale</a:t>
+            </a:r>
+            <a:r>
+              <a:rPr lang="en-US" dirty="0">
+                <a:latin typeface="Space Grotesk" pitchFamily="2" charset="0"/>
+                <a:cs typeface="Space Grotesk" pitchFamily="2" charset="0"/>
+              </a:rPr>
+              <a:t> de 30 cm</a:t>
+            </a:r>
+          </a:p>
+        </p:txBody>
+      </p:sp>
+      <p:sp>
+        <p:nvSpPr>
+          <p:cNvPr id="4" name="Slide Number Placeholder 3">
+            <a:extLst>
+              <a:ext uri="{FF2B5EF4-FFF2-40B4-BE49-F238E27FC236}">
+                <a16:creationId xmlns:a16="http://schemas.microsoft.com/office/drawing/2014/main" id="{FB43C72A-B4E7-CE26-5397-9A9C5B6F120F}"/>
+              </a:ext>
+            </a:extLst>
+          </p:cNvPr>
+          <p:cNvSpPr>
+            <a:spLocks noGrp="1"/>
+          </p:cNvSpPr>
+          <p:nvPr>
+            <p:ph type="sldNum" sz="quarter" idx="12"/>
+          </p:nvPr>
+        </p:nvSpPr>
         <p:spPr/>
         <p:txBody>
-          <a:bodyPr/>
+          <a:bodyPr>
+            <a:normAutofit/>
+          </a:bodyPr>
           <a:lstStyle/>
           <a:p>
-            <a:r>
-              <a:rPr lang="en-US" dirty="0"/>
-              <a:t>Principe physique</a:t>
-            </a:r>
-            <a:endParaRPr lang="fr-CH" dirty="0"/>
-          </a:p>
-        </p:txBody>
-      </p:sp>
-      <p:sp>
-        <p:nvSpPr>
-          <p:cNvPr id="3" name="Content Placeholder 2">
-            <a:extLst>
-              <a:ext uri="{FF2B5EF4-FFF2-40B4-BE49-F238E27FC236}">
-                <a16:creationId xmlns:a16="http://schemas.microsoft.com/office/drawing/2014/main" id="{CA31C101-5C79-3869-87BC-62878B9A9E90}"/>
-              </a:ext>
-            </a:extLst>
-          </p:cNvPr>
-          <p:cNvSpPr>
-            <a:spLocks noGrp="1"/>
-          </p:cNvSpPr>
-          <p:nvPr>
-            <p:ph idx="1"/>
-          </p:nvPr>
-        </p:nvSpPr>
-        <p:spPr/>
-        <p:txBody>
-          <a:bodyPr/>
-          <a:lstStyle/>
-          <a:p>
-            <a:r>
-              <a:rPr lang="en-US" dirty="0"/>
-              <a:t>Pendule inverse</a:t>
-            </a:r>
-          </a:p>
-          <a:p>
-            <a:r>
-              <a:rPr lang="en-US" dirty="0" err="1"/>
-              <a:t>Naturellement</a:t>
-            </a:r>
-            <a:r>
-              <a:rPr lang="en-US" dirty="0"/>
-              <a:t> instable</a:t>
-            </a:r>
-          </a:p>
-          <a:p>
-            <a:r>
-              <a:rPr lang="en-US" dirty="0"/>
-              <a:t>Equations </a:t>
-            </a:r>
-            <a:r>
-              <a:rPr lang="en-US" dirty="0" err="1"/>
-              <a:t>différentielles</a:t>
-            </a:r>
-            <a:r>
-              <a:rPr lang="en-US" dirty="0"/>
-              <a:t> ETH</a:t>
-            </a:r>
-          </a:p>
-          <a:p>
-            <a:endParaRPr lang="en-US" dirty="0"/>
-          </a:p>
-          <a:p>
-            <a:endParaRPr lang="fr-CH" dirty="0"/>
+            <a:pPr>
+              <a:spcAft>
+                <a:spcPts val="600"/>
+              </a:spcAft>
+            </a:pPr>
+            <a:fld id="{27610C65-3251-4B31-A496-D9D978F99BA5}" type="slidenum">
+              <a:rPr lang="fr-CH" smtClean="0"/>
+              <a:pPr>
+                <a:spcAft>
+                  <a:spcPts val="600"/>
+                </a:spcAft>
+              </a:pPr>
+              <a:t>4</a:t>
+            </a:fld>
+            <a:endParaRPr lang="fr-CH"/>
           </a:p>
         </p:txBody>
       </p:sp>
     </p:spTree>
     <p:extLst>
       <p:ext uri="{BB962C8B-B14F-4D97-AF65-F5344CB8AC3E}">
-        <p14:creationId xmlns:p14="http://schemas.microsoft.com/office/powerpoint/2010/main" val="3032491418"/>
+        <p14:creationId xmlns:p14="http://schemas.microsoft.com/office/powerpoint/2010/main" val="4142113721"/>
       </p:ext>
     </p:extLst>
   </p:cSld>
@@ -3813,7 +10716,7 @@
           <p:cNvPr id="2" name="Title 1">
             <a:extLst>
               <a:ext uri="{FF2B5EF4-FFF2-40B4-BE49-F238E27FC236}">
-                <a16:creationId xmlns:a16="http://schemas.microsoft.com/office/drawing/2014/main" id="{3EA1F33C-B944-E8A4-1D9D-37EC88CE19C0}"/>
+                <a16:creationId xmlns:a16="http://schemas.microsoft.com/office/drawing/2014/main" id="{A26BB377-43B8-B6EB-408F-9848A5CC5C51}"/>
               </a:ext>
             </a:extLst>
           </p:cNvPr>
@@ -3824,23 +10727,33 @@
             <p:ph type="title"/>
           </p:nvPr>
         </p:nvSpPr>
-        <p:spPr/>
+        <p:spPr>
+          <a:xfrm>
+            <a:off x="838200" y="345127"/>
+            <a:ext cx="10515600" cy="1325563"/>
+          </a:xfrm>
+        </p:spPr>
         <p:txBody>
           <a:bodyPr/>
           <a:lstStyle/>
           <a:p>
             <a:r>
-              <a:rPr lang="en-US" dirty="0"/>
-              <a:t>Maquette</a:t>
-            </a:r>
-            <a:br>
-              <a:rPr lang="en-US" dirty="0"/>
-            </a:br>
-            <a:r>
-              <a:rPr lang="en-US" sz="2800" dirty="0" err="1"/>
-              <a:t>Mécanique</a:t>
-            </a:r>
-            <a:endParaRPr lang="fr-CH" dirty="0"/>
+              <a:rPr lang="en-US" dirty="0">
+                <a:solidFill>
+                  <a:srgbClr val="0070C0"/>
+                </a:solidFill>
+                <a:latin typeface="Space Grotesk" pitchFamily="2" charset="0"/>
+                <a:cs typeface="Space Grotesk" pitchFamily="2" charset="0"/>
+              </a:rPr>
+              <a:t>Principe physique</a:t>
+            </a:r>
+            <a:endParaRPr lang="fr-CH" dirty="0">
+              <a:solidFill>
+                <a:srgbClr val="0070C0"/>
+              </a:solidFill>
+              <a:latin typeface="Space Grotesk" pitchFamily="2" charset="0"/>
+              <a:cs typeface="Space Grotesk" pitchFamily="2" charset="0"/>
+            </a:endParaRPr>
           </a:p>
         </p:txBody>
       </p:sp>
@@ -3849,7 +10762,7 @@
           <p:cNvPr id="3" name="Content Placeholder 2">
             <a:extLst>
               <a:ext uri="{FF2B5EF4-FFF2-40B4-BE49-F238E27FC236}">
-                <a16:creationId xmlns:a16="http://schemas.microsoft.com/office/drawing/2014/main" id="{2F78CC26-517E-1F7D-89B4-922117E12924}"/>
+                <a16:creationId xmlns:a16="http://schemas.microsoft.com/office/drawing/2014/main" id="{CA31C101-5C79-3869-87BC-62878B9A9E90}"/>
               </a:ext>
             </a:extLst>
           </p:cNvPr>
@@ -3865,19 +10778,102 @@
           <a:bodyPr/>
           <a:lstStyle/>
           <a:p>
-            <a:r>
-              <a:rPr lang="en-US" dirty="0"/>
-              <a:t>Fusion360</a:t>
-            </a:r>
-          </a:p>
-          <a:p>
-            <a:r>
-              <a:rPr lang="en-US" dirty="0"/>
-              <a:t>FDM, CNC</a:t>
-            </a:r>
+            <a:pPr>
+              <a:lnSpc>
+                <a:spcPct val="150000"/>
+              </a:lnSpc>
+            </a:pPr>
+            <a:r>
+              <a:rPr lang="en-US" dirty="0">
+                <a:latin typeface="Space Grotesk" pitchFamily="2" charset="0"/>
+                <a:cs typeface="Space Grotesk" pitchFamily="2" charset="0"/>
+              </a:rPr>
+              <a:t>Pendule inverse</a:t>
+            </a:r>
+          </a:p>
+          <a:p>
+            <a:pPr>
+              <a:lnSpc>
+                <a:spcPct val="150000"/>
+              </a:lnSpc>
+            </a:pPr>
+            <a:r>
+              <a:rPr lang="en-US" dirty="0" err="1">
+                <a:latin typeface="Space Grotesk" pitchFamily="2" charset="0"/>
+                <a:cs typeface="Space Grotesk" pitchFamily="2" charset="0"/>
+              </a:rPr>
+              <a:t>Naturellement</a:t>
+            </a:r>
+            <a:r>
+              <a:rPr lang="en-US" dirty="0">
+                <a:latin typeface="Space Grotesk" pitchFamily="2" charset="0"/>
+                <a:cs typeface="Space Grotesk" pitchFamily="2" charset="0"/>
+              </a:rPr>
+              <a:t> instable</a:t>
+            </a:r>
+          </a:p>
+          <a:p>
+            <a:pPr>
+              <a:lnSpc>
+                <a:spcPct val="150000"/>
+              </a:lnSpc>
+            </a:pPr>
+            <a:r>
+              <a:rPr lang="en-US" dirty="0">
+                <a:latin typeface="Space Grotesk" pitchFamily="2" charset="0"/>
+                <a:cs typeface="Space Grotesk" pitchFamily="2" charset="0"/>
+              </a:rPr>
+              <a:t>Equations </a:t>
+            </a:r>
+            <a:r>
+              <a:rPr lang="en-US" dirty="0" err="1">
+                <a:latin typeface="Space Grotesk" pitchFamily="2" charset="0"/>
+                <a:cs typeface="Space Grotesk" pitchFamily="2" charset="0"/>
+              </a:rPr>
+              <a:t>différentielles</a:t>
+            </a:r>
+            <a:r>
+              <a:rPr lang="en-US" dirty="0">
+                <a:latin typeface="Space Grotesk" pitchFamily="2" charset="0"/>
+                <a:cs typeface="Space Grotesk" pitchFamily="2" charset="0"/>
+              </a:rPr>
+              <a:t> ETH</a:t>
+            </a:r>
+          </a:p>
+          <a:p>
+            <a:endParaRPr lang="en-US" dirty="0"/>
           </a:p>
           <a:p>
             <a:endParaRPr lang="fr-CH" dirty="0"/>
+          </a:p>
+        </p:txBody>
+      </p:sp>
+      <p:sp>
+        <p:nvSpPr>
+          <p:cNvPr id="8" name="Slide Number Placeholder 7">
+            <a:extLst>
+              <a:ext uri="{FF2B5EF4-FFF2-40B4-BE49-F238E27FC236}">
+                <a16:creationId xmlns:a16="http://schemas.microsoft.com/office/drawing/2014/main" id="{B033CF91-D0B9-A92A-8170-373418F27F92}"/>
+              </a:ext>
+            </a:extLst>
+          </p:cNvPr>
+          <p:cNvSpPr>
+            <a:spLocks noGrp="1"/>
+          </p:cNvSpPr>
+          <p:nvPr>
+            <p:ph type="sldNum" sz="quarter" idx="12"/>
+          </p:nvPr>
+        </p:nvSpPr>
+        <p:spPr/>
+        <p:txBody>
+          <a:bodyPr/>
+          <a:lstStyle/>
+          <a:p>
+            <a:fld id="{27610C65-3251-4B31-A496-D9D978F99BA5}" type="slidenum">
+              <a:rPr lang="fr-CH" smtClean="0"/>
+              <a:t>5</a:t>
+            </a:fld>
+            <a:endParaRPr lang="fr-CH"/>
           </a:p>
         </p:txBody>
       </p:sp>
@@ -3886,7 +10882,7 @@
           <p:cNvPr id="5" name="Picture 4">
             <a:extLst>
               <a:ext uri="{FF2B5EF4-FFF2-40B4-BE49-F238E27FC236}">
-                <a16:creationId xmlns:a16="http://schemas.microsoft.com/office/drawing/2014/main" id="{04F90013-D541-70A3-25F4-FC9C69BD383B}"/>
+                <a16:creationId xmlns:a16="http://schemas.microsoft.com/office/drawing/2014/main" id="{C6B2C888-D977-FABA-5E34-A0B20CEA5188}"/>
               </a:ext>
             </a:extLst>
           </p:cNvPr>
@@ -3909,8 +10905,429 @@
         </p:blipFill>
         <p:spPr>
           <a:xfrm>
-            <a:off x="5220372" y="1536655"/>
+            <a:off x="7405627" y="606629"/>
+            <a:ext cx="4095659" cy="3218017"/>
+          </a:xfrm>
+          <a:prstGeom prst="rect">
+            <a:avLst/>
+          </a:prstGeom>
+        </p:spPr>
+      </p:pic>
+      <p:pic>
+        <p:nvPicPr>
+          <p:cNvPr id="7" name="Picture 6">
+            <a:extLst>
+              <a:ext uri="{FF2B5EF4-FFF2-40B4-BE49-F238E27FC236}">
+                <a16:creationId xmlns:a16="http://schemas.microsoft.com/office/drawing/2014/main" id="{B7C46F58-B2E1-A418-8E6C-0C4F7F3EC33E}"/>
+              </a:ext>
+            </a:extLst>
+          </p:cNvPr>
+          <p:cNvPicPr>
+            <a:picLocks noChangeAspect="1"/>
+          </p:cNvPicPr>
+          <p:nvPr/>
+        </p:nvPicPr>
+        <p:blipFill>
+          <a:blip r:embed="rId3"/>
+          <a:stretch>
+            <a:fillRect/>
+          </a:stretch>
+        </p:blipFill>
+        <p:spPr>
+          <a:xfrm>
+            <a:off x="3909866" y="4642362"/>
+            <a:ext cx="7738906" cy="1534601"/>
+          </a:xfrm>
+          <a:prstGeom prst="rect">
+            <a:avLst/>
+          </a:prstGeom>
+        </p:spPr>
+      </p:pic>
+    </p:spTree>
+    <p:extLst>
+      <p:ext uri="{BB962C8B-B14F-4D97-AF65-F5344CB8AC3E}">
+        <p14:creationId xmlns:p14="http://schemas.microsoft.com/office/powerpoint/2010/main" val="3032491418"/>
+      </p:ext>
+    </p:extLst>
+  </p:cSld>
+  <p:clrMapOvr>
+    <a:masterClrMapping/>
+  </p:clrMapOvr>
+</p:sld>
+</file>
+
+<file path=ppt/slides/slide6.xml><?xml version="1.0" encoding="utf-8"?>
+<p:sld xmlns:a="http://schemas.openxmlformats.org/drawingml/2006/main" xmlns:r="http://schemas.openxmlformats.org/officeDocument/2006/relationships" xmlns:p="http://schemas.openxmlformats.org/presentationml/2006/main">
+  <p:cSld>
+    <p:spTree>
+      <p:nvGrpSpPr>
+        <p:cNvPr id="1" name="">
+          <a:extLst>
+            <a:ext uri="{FF2B5EF4-FFF2-40B4-BE49-F238E27FC236}">
+              <a16:creationId xmlns:a16="http://schemas.microsoft.com/office/drawing/2014/main" id="{79383301-D571-EE22-003A-C2E8E3AFE7BF}"/>
+            </a:ext>
+          </a:extLst>
+        </p:cNvPr>
+        <p:cNvGrpSpPr/>
+        <p:nvPr/>
+      </p:nvGrpSpPr>
+      <p:grpSpPr>
+        <a:xfrm>
+          <a:off x="0" y="0"/>
+          <a:ext cx="0" cy="0"/>
+          <a:chOff x="0" y="0"/>
+          <a:chExt cx="0" cy="0"/>
+        </a:xfrm>
+      </p:grpSpPr>
+      <p:sp>
+        <p:nvSpPr>
+          <p:cNvPr id="2" name="Title 1">
+            <a:extLst>
+              <a:ext uri="{FF2B5EF4-FFF2-40B4-BE49-F238E27FC236}">
+                <a16:creationId xmlns:a16="http://schemas.microsoft.com/office/drawing/2014/main" id="{13C1E6E9-4F02-FD89-8781-222B3E87320F}"/>
+              </a:ext>
+            </a:extLst>
+          </p:cNvPr>
+          <p:cNvSpPr>
+            <a:spLocks noGrp="1"/>
+          </p:cNvSpPr>
+          <p:nvPr>
+            <p:ph type="title"/>
+          </p:nvPr>
+        </p:nvSpPr>
+        <p:spPr>
+          <a:xfrm>
+            <a:off x="945361" y="325796"/>
+            <a:ext cx="10515600" cy="1325563"/>
+          </a:xfrm>
+        </p:spPr>
+        <p:txBody>
+          <a:bodyPr/>
+          <a:lstStyle/>
+          <a:p>
+            <a:r>
+              <a:rPr lang="en-US" dirty="0" err="1">
+                <a:solidFill>
+                  <a:srgbClr val="0070C0"/>
+                </a:solidFill>
+                <a:latin typeface="Space Grotesk" pitchFamily="2" charset="0"/>
+                <a:cs typeface="Space Grotesk" pitchFamily="2" charset="0"/>
+              </a:rPr>
+              <a:t>Régulation</a:t>
+            </a:r>
+            <a:endParaRPr lang="fr-CH" dirty="0">
+              <a:solidFill>
+                <a:srgbClr val="0070C0"/>
+              </a:solidFill>
+              <a:latin typeface="Space Grotesk" pitchFamily="2" charset="0"/>
+              <a:cs typeface="Space Grotesk" pitchFamily="2" charset="0"/>
+            </a:endParaRPr>
+          </a:p>
+        </p:txBody>
+      </p:sp>
+      <p:sp>
+        <p:nvSpPr>
+          <p:cNvPr id="8" name="Slide Number Placeholder 7">
+            <a:extLst>
+              <a:ext uri="{FF2B5EF4-FFF2-40B4-BE49-F238E27FC236}">
+                <a16:creationId xmlns:a16="http://schemas.microsoft.com/office/drawing/2014/main" id="{AE98DF20-D17A-D9AE-B991-43573F5D5850}"/>
+              </a:ext>
+            </a:extLst>
+          </p:cNvPr>
+          <p:cNvSpPr>
+            <a:spLocks noGrp="1"/>
+          </p:cNvSpPr>
+          <p:nvPr>
+            <p:ph type="sldNum" sz="quarter" idx="12"/>
+          </p:nvPr>
+        </p:nvSpPr>
+        <p:spPr/>
+        <p:txBody>
+          <a:bodyPr/>
+          <a:lstStyle/>
+          <a:p>
+            <a:fld id="{27610C65-3251-4B31-A496-D9D978F99BA5}" type="slidenum">
+              <a:rPr lang="fr-CH" smtClean="0"/>
+              <a:t>6</a:t>
+            </a:fld>
+            <a:endParaRPr lang="fr-CH"/>
+          </a:p>
+        </p:txBody>
+      </p:sp>
+      <p:pic>
+        <p:nvPicPr>
+          <p:cNvPr id="6" name="Content Placeholder 20">
+            <a:extLst>
+              <a:ext uri="{FF2B5EF4-FFF2-40B4-BE49-F238E27FC236}">
+                <a16:creationId xmlns:a16="http://schemas.microsoft.com/office/drawing/2014/main" id="{A2270F9A-C5DF-8B1D-806C-5CC4E7B1A2DB}"/>
+              </a:ext>
+            </a:extLst>
+          </p:cNvPr>
+          <p:cNvPicPr>
+            <a:picLocks noChangeAspect="1"/>
+          </p:cNvPicPr>
+          <p:nvPr/>
+        </p:nvPicPr>
+        <p:blipFill>
+          <a:blip r:embed="rId2">
+            <a:extLst>
+              <a:ext uri="{28A0092B-C50C-407E-A947-70E740481C1C}">
+                <a14:useLocalDpi xmlns:a14="http://schemas.microsoft.com/office/drawing/2010/main" val="0"/>
+              </a:ext>
+            </a:extLst>
+          </a:blip>
+          <a:srcRect t="56193" r="69998" b="34002"/>
+          <a:stretch>
+            <a:fillRect/>
+          </a:stretch>
+        </p:blipFill>
+        <p:spPr>
+          <a:xfrm>
+            <a:off x="752370" y="2170444"/>
+            <a:ext cx="10901583" cy="2753248"/>
+          </a:xfrm>
+          <a:prstGeom prst="rect">
+            <a:avLst/>
+          </a:prstGeom>
+        </p:spPr>
+      </p:pic>
+    </p:spTree>
+    <p:extLst>
+      <p:ext uri="{BB962C8B-B14F-4D97-AF65-F5344CB8AC3E}">
+        <p14:creationId xmlns:p14="http://schemas.microsoft.com/office/powerpoint/2010/main" val="4074311295"/>
+      </p:ext>
+    </p:extLst>
+  </p:cSld>
+  <p:clrMapOvr>
+    <a:masterClrMapping/>
+  </p:clrMapOvr>
+</p:sld>
+</file>
+
+<file path=ppt/slides/slide7.xml><?xml version="1.0" encoding="utf-8"?>
+<p:sld xmlns:a="http://schemas.openxmlformats.org/drawingml/2006/main" xmlns:r="http://schemas.openxmlformats.org/officeDocument/2006/relationships" xmlns:p="http://schemas.openxmlformats.org/presentationml/2006/main">
+  <p:cSld>
+    <p:spTree>
+      <p:nvGrpSpPr>
+        <p:cNvPr id="1" name=""/>
+        <p:cNvGrpSpPr/>
+        <p:nvPr/>
+      </p:nvGrpSpPr>
+      <p:grpSpPr>
+        <a:xfrm>
+          <a:off x="0" y="0"/>
+          <a:ext cx="0" cy="0"/>
+          <a:chOff x="0" y="0"/>
+          <a:chExt cx="0" cy="0"/>
+        </a:xfrm>
+      </p:grpSpPr>
+      <p:sp>
+        <p:nvSpPr>
+          <p:cNvPr id="2" name="Title 1">
+            <a:extLst>
+              <a:ext uri="{FF2B5EF4-FFF2-40B4-BE49-F238E27FC236}">
+                <a16:creationId xmlns:a16="http://schemas.microsoft.com/office/drawing/2014/main" id="{3EA1F33C-B944-E8A4-1D9D-37EC88CE19C0}"/>
+              </a:ext>
+            </a:extLst>
+          </p:cNvPr>
+          <p:cNvSpPr>
+            <a:spLocks noGrp="1"/>
+          </p:cNvSpPr>
+          <p:nvPr>
+            <p:ph type="title"/>
+          </p:nvPr>
+        </p:nvSpPr>
+        <p:spPr>
+          <a:xfrm>
+            <a:off x="838200" y="410368"/>
+            <a:ext cx="10515600" cy="1325563"/>
+          </a:xfrm>
+        </p:spPr>
+        <p:txBody>
+          <a:bodyPr>
+            <a:normAutofit/>
+          </a:bodyPr>
+          <a:lstStyle/>
+          <a:p>
+            <a:r>
+              <a:rPr lang="en-US" dirty="0" err="1">
+                <a:solidFill>
+                  <a:schemeClr val="accent2">
+                    <a:lumMod val="75000"/>
+                  </a:schemeClr>
+                </a:solidFill>
+                <a:latin typeface="Space Grotesk" pitchFamily="2" charset="0"/>
+                <a:cs typeface="Space Grotesk" pitchFamily="2" charset="0"/>
+              </a:rPr>
+              <a:t>Mécanique</a:t>
+            </a:r>
+            <a:br>
+              <a:rPr lang="en-US" dirty="0"/>
+            </a:br>
+            <a:endParaRPr lang="fr-CH" dirty="0"/>
+          </a:p>
+        </p:txBody>
+      </p:sp>
+      <p:sp>
+        <p:nvSpPr>
+          <p:cNvPr id="3" name="Content Placeholder 2">
+            <a:extLst>
+              <a:ext uri="{FF2B5EF4-FFF2-40B4-BE49-F238E27FC236}">
+                <a16:creationId xmlns:a16="http://schemas.microsoft.com/office/drawing/2014/main" id="{2F78CC26-517E-1F7D-89B4-922117E12924}"/>
+              </a:ext>
+            </a:extLst>
+          </p:cNvPr>
+          <p:cNvSpPr>
+            <a:spLocks noGrp="1"/>
+          </p:cNvSpPr>
+          <p:nvPr>
+            <p:ph idx="1"/>
+          </p:nvPr>
+        </p:nvSpPr>
+        <p:spPr/>
+        <p:txBody>
+          <a:bodyPr/>
+          <a:lstStyle/>
+          <a:p>
+            <a:r>
+              <a:rPr lang="en-US" dirty="0">
+                <a:latin typeface="Space Grotesk" pitchFamily="2" charset="0"/>
+                <a:cs typeface="Space Grotesk" pitchFamily="2" charset="0"/>
+              </a:rPr>
+              <a:t>Fusion360</a:t>
+            </a:r>
+          </a:p>
+          <a:p>
+            <a:r>
+              <a:rPr lang="en-US" dirty="0">
+                <a:latin typeface="Space Grotesk" pitchFamily="2" charset="0"/>
+                <a:cs typeface="Space Grotesk" pitchFamily="2" charset="0"/>
+              </a:rPr>
+              <a:t>FDM, CNC</a:t>
+            </a:r>
+            <a:br>
+              <a:rPr lang="en-US" dirty="0">
+                <a:latin typeface="Space Grotesk" pitchFamily="2" charset="0"/>
+                <a:cs typeface="Space Grotesk" pitchFamily="2" charset="0"/>
+              </a:rPr>
+            </a:br>
+            <a:r>
+              <a:rPr lang="en-US" dirty="0">
+                <a:latin typeface="Space Grotesk" pitchFamily="2" charset="0"/>
+                <a:cs typeface="Space Grotesk" pitchFamily="2" charset="0"/>
+              </a:rPr>
+              <a:t>Laser</a:t>
+            </a:r>
+          </a:p>
+          <a:p>
+            <a:r>
+              <a:rPr lang="en-US" dirty="0">
+                <a:latin typeface="Space Grotesk" pitchFamily="2" charset="0"/>
+                <a:cs typeface="Space Grotesk" pitchFamily="2" charset="0"/>
+              </a:rPr>
+              <a:t>PLA, TPU</a:t>
+            </a:r>
+          </a:p>
+          <a:p>
+            <a:endParaRPr lang="fr-CH" dirty="0"/>
+          </a:p>
+        </p:txBody>
+      </p:sp>
+      <p:sp>
+        <p:nvSpPr>
+          <p:cNvPr id="7" name="Slide Number Placeholder 6">
+            <a:extLst>
+              <a:ext uri="{FF2B5EF4-FFF2-40B4-BE49-F238E27FC236}">
+                <a16:creationId xmlns:a16="http://schemas.microsoft.com/office/drawing/2014/main" id="{D2575920-1812-EDAB-1716-BEDE1064E62C}"/>
+              </a:ext>
+            </a:extLst>
+          </p:cNvPr>
+          <p:cNvSpPr>
+            <a:spLocks noGrp="1"/>
+          </p:cNvSpPr>
+          <p:nvPr>
+            <p:ph type="sldNum" sz="quarter" idx="12"/>
+          </p:nvPr>
+        </p:nvSpPr>
+        <p:spPr/>
+        <p:txBody>
+          <a:bodyPr/>
+          <a:lstStyle/>
+          <a:p>
+            <a:fld id="{27610C65-3251-4B31-A496-D9D978F99BA5}" type="slidenum">
+              <a:rPr lang="fr-CH" smtClean="0"/>
+              <a:t>7</a:t>
+            </a:fld>
+            <a:endParaRPr lang="fr-CH"/>
+          </a:p>
+        </p:txBody>
+      </p:sp>
+      <p:pic>
+        <p:nvPicPr>
+          <p:cNvPr id="5" name="Picture 4">
+            <a:extLst>
+              <a:ext uri="{FF2B5EF4-FFF2-40B4-BE49-F238E27FC236}">
+                <a16:creationId xmlns:a16="http://schemas.microsoft.com/office/drawing/2014/main" id="{04F90013-D541-70A3-25F4-FC9C69BD383B}"/>
+              </a:ext>
+            </a:extLst>
+          </p:cNvPr>
+          <p:cNvPicPr>
+            <a:picLocks noChangeAspect="1"/>
+          </p:cNvPicPr>
+          <p:nvPr/>
+        </p:nvPicPr>
+        <p:blipFill>
+          <a:blip r:embed="rId2">
+            <a:extLst>
+              <a:ext uri="{28A0092B-C50C-407E-A947-70E740481C1C}">
+                <a14:useLocalDpi xmlns:a14="http://schemas.microsoft.com/office/drawing/2010/main" val="0"/>
+              </a:ext>
+            </a:extLst>
+          </a:blip>
+          <a:stretch>
+            <a:fillRect/>
+          </a:stretch>
+        </p:blipFill>
+        <p:spPr>
+          <a:xfrm>
+            <a:off x="3504922" y="1690688"/>
             <a:ext cx="4906854" cy="3385833"/>
+          </a:xfrm>
+          <a:prstGeom prst="rect">
+            <a:avLst/>
+          </a:prstGeom>
+        </p:spPr>
+      </p:pic>
+      <p:pic>
+        <p:nvPicPr>
+          <p:cNvPr id="6" name="Picture 5">
+            <a:extLst>
+              <a:ext uri="{FF2B5EF4-FFF2-40B4-BE49-F238E27FC236}">
+                <a16:creationId xmlns:a16="http://schemas.microsoft.com/office/drawing/2014/main" id="{5E4F0866-873A-8351-C540-E84E08134D9F}"/>
+              </a:ext>
+            </a:extLst>
+          </p:cNvPr>
+          <p:cNvPicPr>
+            <a:picLocks noChangeAspect="1"/>
+          </p:cNvPicPr>
+          <p:nvPr/>
+        </p:nvPicPr>
+        <p:blipFill>
+          <a:blip r:embed="rId3">
+            <a:extLst>
+              <a:ext uri="{28A0092B-C50C-407E-A947-70E740481C1C}">
+                <a14:useLocalDpi xmlns:a14="http://schemas.microsoft.com/office/drawing/2010/main" val="0"/>
+              </a:ext>
+            </a:extLst>
+          </a:blip>
+          <a:stretch>
+            <a:fillRect/>
+          </a:stretch>
+        </p:blipFill>
+        <p:spPr>
+          <a:xfrm>
+            <a:off x="9079475" y="1468771"/>
+            <a:ext cx="2872249" cy="3829665"/>
           </a:xfrm>
           <a:prstGeom prst="rect">
             <a:avLst/>
@@ -3921,6 +11338,438 @@
     <p:extLst>
       <p:ext uri="{BB962C8B-B14F-4D97-AF65-F5344CB8AC3E}">
         <p14:creationId xmlns:p14="http://schemas.microsoft.com/office/powerpoint/2010/main" val="2175441939"/>
+      </p:ext>
+    </p:extLst>
+  </p:cSld>
+  <p:clrMapOvr>
+    <a:masterClrMapping/>
+  </p:clrMapOvr>
+</p:sld>
+</file>
+
+<file path=ppt/slides/slide8.xml><?xml version="1.0" encoding="utf-8"?>
+<p:sld xmlns:a="http://schemas.openxmlformats.org/drawingml/2006/main" xmlns:r="http://schemas.openxmlformats.org/officeDocument/2006/relationships" xmlns:p="http://schemas.openxmlformats.org/presentationml/2006/main">
+  <p:cSld>
+    <p:spTree>
+      <p:nvGrpSpPr>
+        <p:cNvPr id="1" name="">
+          <a:extLst>
+            <a:ext uri="{FF2B5EF4-FFF2-40B4-BE49-F238E27FC236}">
+              <a16:creationId xmlns:a16="http://schemas.microsoft.com/office/drawing/2014/main" id="{DD4DC33B-306B-1A6B-15B8-7D44F9A95569}"/>
+            </a:ext>
+          </a:extLst>
+        </p:cNvPr>
+        <p:cNvGrpSpPr/>
+        <p:nvPr/>
+      </p:nvGrpSpPr>
+      <p:grpSpPr>
+        <a:xfrm>
+          <a:off x="0" y="0"/>
+          <a:ext cx="0" cy="0"/>
+          <a:chOff x="0" y="0"/>
+          <a:chExt cx="0" cy="0"/>
+        </a:xfrm>
+      </p:grpSpPr>
+      <p:sp>
+        <p:nvSpPr>
+          <p:cNvPr id="2" name="Title 1">
+            <a:extLst>
+              <a:ext uri="{FF2B5EF4-FFF2-40B4-BE49-F238E27FC236}">
+                <a16:creationId xmlns:a16="http://schemas.microsoft.com/office/drawing/2014/main" id="{A0DFE096-46FB-B176-8EF5-CA992198E3F6}"/>
+              </a:ext>
+            </a:extLst>
+          </p:cNvPr>
+          <p:cNvSpPr>
+            <a:spLocks noGrp="1"/>
+          </p:cNvSpPr>
+          <p:nvPr>
+            <p:ph type="title"/>
+          </p:nvPr>
+        </p:nvSpPr>
+        <p:spPr/>
+        <p:txBody>
+          <a:bodyPr/>
+          <a:lstStyle/>
+          <a:p>
+            <a:r>
+              <a:rPr lang="en-US" dirty="0" err="1">
+                <a:solidFill>
+                  <a:schemeClr val="accent2">
+                    <a:lumMod val="75000"/>
+                  </a:schemeClr>
+                </a:solidFill>
+                <a:latin typeface="Space Grotesk" pitchFamily="2" charset="0"/>
+                <a:cs typeface="Space Grotesk" pitchFamily="2" charset="0"/>
+              </a:rPr>
+              <a:t>Electronique</a:t>
+            </a:r>
+            <a:br>
+              <a:rPr lang="en-US" dirty="0">
+                <a:solidFill>
+                  <a:schemeClr val="accent2">
+                    <a:lumMod val="75000"/>
+                  </a:schemeClr>
+                </a:solidFill>
+                <a:latin typeface="Space Grotesk" pitchFamily="2" charset="0"/>
+                <a:cs typeface="Space Grotesk" pitchFamily="2" charset="0"/>
+              </a:rPr>
+            </a:br>
+            <a:r>
+              <a:rPr lang="en-US" sz="2800" dirty="0" err="1">
+                <a:solidFill>
+                  <a:schemeClr val="accent2">
+                    <a:lumMod val="75000"/>
+                  </a:schemeClr>
+                </a:solidFill>
+                <a:latin typeface="Space Grotesk" pitchFamily="2" charset="0"/>
+                <a:cs typeface="Space Grotesk" pitchFamily="2" charset="0"/>
+              </a:rPr>
+              <a:t>Schéma</a:t>
+            </a:r>
+            <a:r>
+              <a:rPr lang="en-US" sz="2800" dirty="0">
+                <a:solidFill>
+                  <a:schemeClr val="accent2">
+                    <a:lumMod val="75000"/>
+                  </a:schemeClr>
+                </a:solidFill>
+                <a:latin typeface="Space Grotesk" pitchFamily="2" charset="0"/>
+                <a:cs typeface="Space Grotesk" pitchFamily="2" charset="0"/>
+              </a:rPr>
+              <a:t> bloc</a:t>
+            </a:r>
+            <a:endParaRPr lang="fr-CH" dirty="0">
+              <a:solidFill>
+                <a:schemeClr val="accent2">
+                  <a:lumMod val="75000"/>
+                </a:schemeClr>
+              </a:solidFill>
+              <a:latin typeface="Space Grotesk" pitchFamily="2" charset="0"/>
+              <a:cs typeface="Space Grotesk" pitchFamily="2" charset="0"/>
+            </a:endParaRPr>
+          </a:p>
+        </p:txBody>
+      </p:sp>
+      <p:sp>
+        <p:nvSpPr>
+          <p:cNvPr id="11" name="Slide Number Placeholder 10">
+            <a:extLst>
+              <a:ext uri="{FF2B5EF4-FFF2-40B4-BE49-F238E27FC236}">
+                <a16:creationId xmlns:a16="http://schemas.microsoft.com/office/drawing/2014/main" id="{27BA885B-097C-057E-7B77-970BD416091D}"/>
+              </a:ext>
+            </a:extLst>
+          </p:cNvPr>
+          <p:cNvSpPr>
+            <a:spLocks noGrp="1"/>
+          </p:cNvSpPr>
+          <p:nvPr>
+            <p:ph type="sldNum" sz="quarter" idx="12"/>
+          </p:nvPr>
+        </p:nvSpPr>
+        <p:spPr/>
+        <p:txBody>
+          <a:bodyPr/>
+          <a:lstStyle/>
+          <a:p>
+            <a:fld id="{27610C65-3251-4B31-A496-D9D978F99BA5}" type="slidenum">
+              <a:rPr lang="fr-CH" smtClean="0"/>
+              <a:t>8</a:t>
+            </a:fld>
+            <a:endParaRPr lang="fr-CH"/>
+          </a:p>
+        </p:txBody>
+      </p:sp>
+      <p:pic>
+        <p:nvPicPr>
+          <p:cNvPr id="10" name="Picture 9">
+            <a:extLst>
+              <a:ext uri="{FF2B5EF4-FFF2-40B4-BE49-F238E27FC236}">
+                <a16:creationId xmlns:a16="http://schemas.microsoft.com/office/drawing/2014/main" id="{DA56F785-31FB-C910-C378-5531CD492EE3}"/>
+              </a:ext>
+            </a:extLst>
+          </p:cNvPr>
+          <p:cNvPicPr>
+            <a:picLocks noChangeAspect="1"/>
+          </p:cNvPicPr>
+          <p:nvPr/>
+        </p:nvPicPr>
+        <p:blipFill>
+          <a:blip r:embed="rId2">
+            <a:extLst>
+              <a:ext uri="{28A0092B-C50C-407E-A947-70E740481C1C}">
+                <a14:useLocalDpi xmlns:a14="http://schemas.microsoft.com/office/drawing/2010/main" val="0"/>
+              </a:ext>
+            </a:extLst>
+          </a:blip>
+          <a:stretch>
+            <a:fillRect/>
+          </a:stretch>
+        </p:blipFill>
+        <p:spPr>
+          <a:xfrm>
+            <a:off x="2225558" y="1690688"/>
+            <a:ext cx="7882003" cy="4516023"/>
+          </a:xfrm>
+          <a:prstGeom prst="rect">
+            <a:avLst/>
+          </a:prstGeom>
+        </p:spPr>
+      </p:pic>
+    </p:spTree>
+    <p:extLst>
+      <p:ext uri="{BB962C8B-B14F-4D97-AF65-F5344CB8AC3E}">
+        <p14:creationId xmlns:p14="http://schemas.microsoft.com/office/powerpoint/2010/main" val="1753240152"/>
+      </p:ext>
+    </p:extLst>
+  </p:cSld>
+  <p:clrMapOvr>
+    <a:masterClrMapping/>
+  </p:clrMapOvr>
+</p:sld>
+</file>
+
+<file path=ppt/slides/slide9.xml><?xml version="1.0" encoding="utf-8"?>
+<p:sld xmlns:a="http://schemas.openxmlformats.org/drawingml/2006/main" xmlns:r="http://schemas.openxmlformats.org/officeDocument/2006/relationships" xmlns:p="http://schemas.openxmlformats.org/presentationml/2006/main">
+  <p:cSld>
+    <p:spTree>
+      <p:nvGrpSpPr>
+        <p:cNvPr id="1" name="">
+          <a:extLst>
+            <a:ext uri="{FF2B5EF4-FFF2-40B4-BE49-F238E27FC236}">
+              <a16:creationId xmlns:a16="http://schemas.microsoft.com/office/drawing/2014/main" id="{D7FE8D77-9004-1BFC-9BDB-CF2CCD235BBE}"/>
+            </a:ext>
+          </a:extLst>
+        </p:cNvPr>
+        <p:cNvGrpSpPr/>
+        <p:nvPr/>
+      </p:nvGrpSpPr>
+      <p:grpSpPr>
+        <a:xfrm>
+          <a:off x="0" y="0"/>
+          <a:ext cx="0" cy="0"/>
+          <a:chOff x="0" y="0"/>
+          <a:chExt cx="0" cy="0"/>
+        </a:xfrm>
+      </p:grpSpPr>
+      <p:sp>
+        <p:nvSpPr>
+          <p:cNvPr id="2" name="Title 1">
+            <a:extLst>
+              <a:ext uri="{FF2B5EF4-FFF2-40B4-BE49-F238E27FC236}">
+                <a16:creationId xmlns:a16="http://schemas.microsoft.com/office/drawing/2014/main" id="{C1BEC280-D9EA-FEE9-D99E-30DBFE931E76}"/>
+              </a:ext>
+            </a:extLst>
+          </p:cNvPr>
+          <p:cNvSpPr>
+            <a:spLocks noGrp="1"/>
+          </p:cNvSpPr>
+          <p:nvPr>
+            <p:ph type="title"/>
+          </p:nvPr>
+        </p:nvSpPr>
+        <p:spPr>
+          <a:xfrm>
+            <a:off x="838200" y="410368"/>
+            <a:ext cx="10515600" cy="1325563"/>
+          </a:xfrm>
+        </p:spPr>
+        <p:txBody>
+          <a:bodyPr/>
+          <a:lstStyle/>
+          <a:p>
+            <a:r>
+              <a:rPr lang="en-US" dirty="0" err="1">
+                <a:solidFill>
+                  <a:schemeClr val="accent2">
+                    <a:lumMod val="75000"/>
+                  </a:schemeClr>
+                </a:solidFill>
+                <a:latin typeface="Space Grotesk" pitchFamily="2" charset="0"/>
+                <a:cs typeface="Space Grotesk" pitchFamily="2" charset="0"/>
+              </a:rPr>
+              <a:t>Electronique</a:t>
+            </a:r>
+            <a:br>
+              <a:rPr lang="en-US" dirty="0">
+                <a:solidFill>
+                  <a:schemeClr val="accent2">
+                    <a:lumMod val="75000"/>
+                  </a:schemeClr>
+                </a:solidFill>
+                <a:latin typeface="Space Grotesk" pitchFamily="2" charset="0"/>
+                <a:cs typeface="Space Grotesk" pitchFamily="2" charset="0"/>
+              </a:rPr>
+            </a:br>
+            <a:r>
+              <a:rPr lang="en-US" sz="2800" dirty="0">
+                <a:solidFill>
+                  <a:schemeClr val="accent2">
+                    <a:lumMod val="75000"/>
+                  </a:schemeClr>
+                </a:solidFill>
+                <a:latin typeface="Space Grotesk" pitchFamily="2" charset="0"/>
+                <a:cs typeface="Space Grotesk" pitchFamily="2" charset="0"/>
+              </a:rPr>
+              <a:t>PCB</a:t>
+            </a:r>
+            <a:endParaRPr lang="fr-CH" dirty="0">
+              <a:solidFill>
+                <a:schemeClr val="accent2">
+                  <a:lumMod val="75000"/>
+                </a:schemeClr>
+              </a:solidFill>
+              <a:latin typeface="Space Grotesk" pitchFamily="2" charset="0"/>
+              <a:cs typeface="Space Grotesk" pitchFamily="2" charset="0"/>
+            </a:endParaRPr>
+          </a:p>
+        </p:txBody>
+      </p:sp>
+      <p:sp>
+        <p:nvSpPr>
+          <p:cNvPr id="3" name="Content Placeholder 2">
+            <a:extLst>
+              <a:ext uri="{FF2B5EF4-FFF2-40B4-BE49-F238E27FC236}">
+                <a16:creationId xmlns:a16="http://schemas.microsoft.com/office/drawing/2014/main" id="{5FA13A43-A085-DAFC-8B0D-85B0569A3C8A}"/>
+              </a:ext>
+            </a:extLst>
+          </p:cNvPr>
+          <p:cNvSpPr>
+            <a:spLocks noGrp="1"/>
+          </p:cNvSpPr>
+          <p:nvPr>
+            <p:ph idx="1"/>
+          </p:nvPr>
+        </p:nvSpPr>
+        <p:spPr/>
+        <p:txBody>
+          <a:bodyPr/>
+          <a:lstStyle/>
+          <a:p>
+            <a:pPr>
+              <a:lnSpc>
+                <a:spcPct val="150000"/>
+              </a:lnSpc>
+            </a:pPr>
+            <a:r>
+              <a:rPr lang="en-US" dirty="0" err="1">
+                <a:latin typeface="Space Grotesk" pitchFamily="2" charset="0"/>
+                <a:cs typeface="Space Grotesk" pitchFamily="2" charset="0"/>
+              </a:rPr>
+              <a:t>KiCad</a:t>
+            </a:r>
+            <a:r>
+              <a:rPr lang="en-US" dirty="0">
+                <a:latin typeface="Space Grotesk" pitchFamily="2" charset="0"/>
+                <a:cs typeface="Space Grotesk" pitchFamily="2" charset="0"/>
+              </a:rPr>
+              <a:t> 9.0</a:t>
+            </a:r>
+          </a:p>
+          <a:p>
+            <a:pPr>
+              <a:lnSpc>
+                <a:spcPct val="150000"/>
+              </a:lnSpc>
+            </a:pPr>
+            <a:r>
+              <a:rPr lang="en-US" dirty="0">
+                <a:latin typeface="Space Grotesk" pitchFamily="2" charset="0"/>
+                <a:cs typeface="Space Grotesk" pitchFamily="2" charset="0"/>
+              </a:rPr>
+              <a:t>JLCPCB</a:t>
+            </a:r>
+          </a:p>
+          <a:p>
+            <a:pPr>
+              <a:lnSpc>
+                <a:spcPct val="150000"/>
+              </a:lnSpc>
+            </a:pPr>
+            <a:r>
+              <a:rPr lang="en-US" dirty="0">
+                <a:latin typeface="Space Grotesk" pitchFamily="2" charset="0"/>
+                <a:cs typeface="Space Grotesk" pitchFamily="2" charset="0"/>
+              </a:rPr>
+              <a:t>4 Couches</a:t>
+            </a:r>
+          </a:p>
+          <a:p>
+            <a:endParaRPr lang="en-US" dirty="0"/>
+          </a:p>
+          <a:p>
+            <a:endParaRPr lang="fr-CH" dirty="0"/>
+          </a:p>
+        </p:txBody>
+      </p:sp>
+      <p:sp>
+        <p:nvSpPr>
+          <p:cNvPr id="9" name="Slide Number Placeholder 8">
+            <a:extLst>
+              <a:ext uri="{FF2B5EF4-FFF2-40B4-BE49-F238E27FC236}">
+                <a16:creationId xmlns:a16="http://schemas.microsoft.com/office/drawing/2014/main" id="{89CD8FE4-DB44-2FA1-82E0-06071149242D}"/>
+              </a:ext>
+            </a:extLst>
+          </p:cNvPr>
+          <p:cNvSpPr>
+            <a:spLocks noGrp="1"/>
+          </p:cNvSpPr>
+          <p:nvPr>
+            <p:ph type="sldNum" sz="quarter" idx="12"/>
+          </p:nvPr>
+        </p:nvSpPr>
+        <p:spPr/>
+        <p:txBody>
+          <a:bodyPr/>
+          <a:lstStyle/>
+          <a:p>
+            <a:fld id="{27610C65-3251-4B31-A496-D9D978F99BA5}" type="slidenum">
+              <a:rPr lang="fr-CH" smtClean="0"/>
+              <a:t>9</a:t>
+            </a:fld>
+            <a:endParaRPr lang="fr-CH"/>
+          </a:p>
+        </p:txBody>
+      </p:sp>
+      <p:pic>
+        <p:nvPicPr>
+          <p:cNvPr id="6" name="Picture 5">
+            <a:extLst>
+              <a:ext uri="{FF2B5EF4-FFF2-40B4-BE49-F238E27FC236}">
+                <a16:creationId xmlns:a16="http://schemas.microsoft.com/office/drawing/2014/main" id="{40B6FA80-D5BD-B930-B1A4-144F0B21B4BA}"/>
+              </a:ext>
+            </a:extLst>
+          </p:cNvPr>
+          <p:cNvPicPr>
+            <a:picLocks noChangeAspect="1"/>
+          </p:cNvPicPr>
+          <p:nvPr/>
+        </p:nvPicPr>
+        <p:blipFill>
+          <a:blip r:embed="rId2">
+            <a:extLst>
+              <a:ext uri="{28A0092B-C50C-407E-A947-70E740481C1C}">
+                <a14:useLocalDpi xmlns:a14="http://schemas.microsoft.com/office/drawing/2010/main" val="0"/>
+              </a:ext>
+            </a:extLst>
+          </a:blip>
+          <a:stretch>
+            <a:fillRect/>
+          </a:stretch>
+        </p:blipFill>
+        <p:spPr>
+          <a:xfrm>
+            <a:off x="5235510" y="1476170"/>
+            <a:ext cx="5825782" cy="3331246"/>
+          </a:xfrm>
+          <a:prstGeom prst="rect">
+            <a:avLst/>
+          </a:prstGeom>
+        </p:spPr>
+      </p:pic>
+    </p:spTree>
+    <p:extLst>
+      <p:ext uri="{BB962C8B-B14F-4D97-AF65-F5344CB8AC3E}">
+        <p14:creationId xmlns:p14="http://schemas.microsoft.com/office/powerpoint/2010/main" val="3395439332"/>
       </p:ext>
     </p:extLst>
   </p:cSld>
@@ -4243,4 +12092,319 @@
     </a:ext>
   </a:extLst>
 </a:theme>
+</file>
+
+<file path=ppt/theme/theme2.xml><?xml version="1.0" encoding="utf-8"?>
+<a:theme xmlns:a="http://schemas.openxmlformats.org/drawingml/2006/main" name="Office Theme">
+  <a:themeElements>
+    <a:clrScheme name="Office">
+      <a:dk1>
+        <a:sysClr val="windowText" lastClr="000000"/>
+      </a:dk1>
+      <a:lt1>
+        <a:sysClr val="window" lastClr="FFFFFF"/>
+      </a:lt1>
+      <a:dk2>
+        <a:srgbClr val="0E2841"/>
+      </a:dk2>
+      <a:lt2>
+        <a:srgbClr val="E8E8E8"/>
+      </a:lt2>
+      <a:accent1>
+        <a:srgbClr val="156082"/>
+      </a:accent1>
+      <a:accent2>
+        <a:srgbClr val="E97132"/>
+      </a:accent2>
+      <a:accent3>
+        <a:srgbClr val="196B24"/>
+      </a:accent3>
+      <a:accent4>
+        <a:srgbClr val="0F9ED5"/>
+      </a:accent4>
+      <a:accent5>
+        <a:srgbClr val="A02B93"/>
+      </a:accent5>
+      <a:accent6>
+        <a:srgbClr val="4EA72E"/>
+      </a:accent6>
+      <a:hlink>
+        <a:srgbClr val="467886"/>
+      </a:hlink>
+      <a:folHlink>
+        <a:srgbClr val="96607D"/>
+      </a:folHlink>
+    </a:clrScheme>
+    <a:fontScheme name="Office">
+      <a:majorFont>
+        <a:latin typeface="Aptos Display" panose="02110004020202020204"/>
+        <a:ea typeface=""/>
+        <a:cs typeface=""/>
+        <a:font script="Jpan" typeface="游ゴシック Light"/>
+        <a:font script="Hang" typeface="맑은 고딕"/>
+        <a:font script="Hans" typeface="等线 Light"/>
+        <a:font script="Hant" typeface="新細明體"/>
+        <a:font script="Arab" typeface="Times New Roman"/>
+        <a:font script="Hebr" typeface="Times New Roman"/>
+        <a:font script="Thai" typeface="Angsana New"/>
+        <a:font script="Ethi" typeface="Nyala"/>
+        <a:font script="Beng" typeface="Vrinda"/>
+        <a:font script="Gujr" typeface="Shruti"/>
+        <a:font script="Khmr" typeface="MoolBoran"/>
+        <a:font script="Knda" typeface="Tunga"/>
+        <a:font script="Guru" typeface="Raavi"/>
+        <a:font script="Cans" typeface="Euphemia"/>
+        <a:font script="Cher" typeface="Plantagenet Cherokee"/>
+        <a:font script="Yiii" typeface="Microsoft Yi Baiti"/>
+        <a:font script="Tibt" typeface="Microsoft Himalaya"/>
+        <a:font script="Thaa" typeface="MV Boli"/>
+        <a:font script="Deva" typeface="Mangal"/>
+        <a:font script="Telu" typeface="Gautami"/>
+        <a:font script="Taml" typeface="Latha"/>
+        <a:font script="Syrc" typeface="Estrangelo Edessa"/>
+        <a:font script="Orya" typeface="Kalinga"/>
+        <a:font script="Mlym" typeface="Kartika"/>
+        <a:font script="Laoo" typeface="DokChampa"/>
+        <a:font script="Sinh" typeface="Iskoola Pota"/>
+        <a:font script="Mong" typeface="Mongolian Baiti"/>
+        <a:font script="Viet" typeface="Times New Roman"/>
+        <a:font script="Uigh" typeface="Microsoft Uighur"/>
+        <a:font script="Geor" typeface="Sylfaen"/>
+        <a:font script="Armn" typeface="Arial"/>
+        <a:font script="Bugi" typeface="Leelawadee UI"/>
+        <a:font script="Bopo" typeface="Microsoft JhengHei"/>
+        <a:font script="Java" typeface="Javanese Text"/>
+        <a:font script="Lisu" typeface="Segoe UI"/>
+        <a:font script="Mymr" typeface="Myanmar Text"/>
+        <a:font script="Nkoo" typeface="Ebrima"/>
+        <a:font script="Olck" typeface="Nirmala UI"/>
+        <a:font script="Osma" typeface="Ebrima"/>
+        <a:font script="Phag" typeface="Phagspa"/>
+        <a:font script="Syrn" typeface="Estrangelo Edessa"/>
+        <a:font script="Syrj" typeface="Estrangelo Edessa"/>
+        <a:font script="Syre" typeface="Estrangelo Edessa"/>
+        <a:font script="Sora" typeface="Nirmala UI"/>
+        <a:font script="Tale" typeface="Microsoft Tai Le"/>
+        <a:font script="Talu" typeface="Microsoft New Tai Lue"/>
+        <a:font script="Tfng" typeface="Ebrima"/>
+      </a:majorFont>
+      <a:minorFont>
+        <a:latin typeface="Aptos" panose="02110004020202020204"/>
+        <a:ea typeface=""/>
+        <a:cs typeface=""/>
+        <a:font script="Jpan" typeface="游ゴシック"/>
+        <a:font script="Hang" typeface="맑은 고딕"/>
+        <a:font script="Hans" typeface="等线"/>
+        <a:font script="Hant" typeface="新細明體"/>
+        <a:font script="Arab" typeface="Arial"/>
+        <a:font script="Hebr" typeface="Arial"/>
+        <a:font script="Thai" typeface="Cordia New"/>
+        <a:font script="Ethi" typeface="Nyala"/>
+        <a:font script="Beng" typeface="Vrinda"/>
+        <a:font script="Gujr" typeface="Shruti"/>
+        <a:font script="Khmr" typeface="DaunPenh"/>
+        <a:font script="Knda" typeface="Tunga"/>
+        <a:font script="Guru" typeface="Raavi"/>
+        <a:font script="Cans" typeface="Euphemia"/>
+        <a:font script="Cher" typeface="Plantagenet Cherokee"/>
+        <a:font script="Yiii" typeface="Microsoft Yi Baiti"/>
+        <a:font script="Tibt" typeface="Microsoft Himalaya"/>
+        <a:font script="Thaa" typeface="MV Boli"/>
+        <a:font script="Deva" typeface="Mangal"/>
+        <a:font script="Telu" typeface="Gautami"/>
+        <a:font script="Taml" typeface="Latha"/>
+        <a:font script="Syrc" typeface="Estrangelo Edessa"/>
+        <a:font script="Orya" typeface="Kalinga"/>
+        <a:font script="Mlym" typeface="Kartika"/>
+        <a:font script="Laoo" typeface="DokChampa"/>
+        <a:font script="Sinh" typeface="Iskoola Pota"/>
+        <a:font script="Mong" typeface="Mongolian Baiti"/>
+        <a:font script="Viet" typeface="Arial"/>
+        <a:font script="Uigh" typeface="Microsoft Uighur"/>
+        <a:font script="Geor" typeface="Sylfaen"/>
+        <a:font script="Armn" typeface="Arial"/>
+        <a:font script="Bugi" typeface="Leelawadee UI"/>
+        <a:font script="Bopo" typeface="Microsoft JhengHei"/>
+        <a:font script="Java" typeface="Javanese Text"/>
+        <a:font script="Lisu" typeface="Segoe UI"/>
+        <a:font script="Mymr" typeface="Myanmar Text"/>
+        <a:font script="Nkoo" typeface="Ebrima"/>
+        <a:font script="Olck" typeface="Nirmala UI"/>
+        <a:font script="Osma" typeface="Ebrima"/>
+        <a:font script="Phag" typeface="Phagspa"/>
+        <a:font script="Syrn" typeface="Estrangelo Edessa"/>
+        <a:font script="Syrj" typeface="Estrangelo Edessa"/>
+        <a:font script="Syre" typeface="Estrangelo Edessa"/>
+        <a:font script="Sora" typeface="Nirmala UI"/>
+        <a:font script="Tale" typeface="Microsoft Tai Le"/>
+        <a:font script="Talu" typeface="Microsoft New Tai Lue"/>
+        <a:font script="Tfng" typeface="Ebrima"/>
+      </a:minorFont>
+    </a:fontScheme>
+    <a:fmtScheme name="Office">
+      <a:fillStyleLst>
+        <a:solidFill>
+          <a:schemeClr val="phClr"/>
+        </a:solidFill>
+        <a:gradFill rotWithShape="1">
+          <a:gsLst>
+            <a:gs pos="0">
+              <a:schemeClr val="phClr">
+                <a:lumMod val="110000"/>
+                <a:satMod val="105000"/>
+                <a:tint val="67000"/>
+              </a:schemeClr>
+            </a:gs>
+            <a:gs pos="50000">
+              <a:schemeClr val="phClr">
+                <a:lumMod val="105000"/>
+                <a:satMod val="103000"/>
+                <a:tint val="73000"/>
+              </a:schemeClr>
+            </a:gs>
+            <a:gs pos="100000">
+              <a:schemeClr val="phClr">
+                <a:lumMod val="105000"/>
+                <a:satMod val="109000"/>
+                <a:tint val="81000"/>
+              </a:schemeClr>
+            </a:gs>
+          </a:gsLst>
+          <a:lin ang="5400000" scaled="0"/>
+        </a:gradFill>
+        <a:gradFill rotWithShape="1">
+          <a:gsLst>
+            <a:gs pos="0">
+              <a:schemeClr val="phClr">
+                <a:satMod val="103000"/>
+                <a:lumMod val="102000"/>
+                <a:tint val="94000"/>
+              </a:schemeClr>
+            </a:gs>
+            <a:gs pos="50000">
+              <a:schemeClr val="phClr">
+                <a:satMod val="110000"/>
+                <a:lumMod val="100000"/>
+                <a:shade val="100000"/>
+              </a:schemeClr>
+            </a:gs>
+            <a:gs pos="100000">
+              <a:schemeClr val="phClr">
+                <a:lumMod val="99000"/>
+                <a:satMod val="120000"/>
+                <a:shade val="78000"/>
+              </a:schemeClr>
+            </a:gs>
+          </a:gsLst>
+          <a:lin ang="5400000" scaled="0"/>
+        </a:gradFill>
+      </a:fillStyleLst>
+      <a:lnStyleLst>
+        <a:ln w="12700" cap="flat" cmpd="sng" algn="ctr">
+          <a:solidFill>
+            <a:schemeClr val="phClr"/>
+          </a:solidFill>
+          <a:prstDash val="solid"/>
+          <a:miter lim="800000"/>
+        </a:ln>
+        <a:ln w="19050" cap="flat" cmpd="sng" algn="ctr">
+          <a:solidFill>
+            <a:schemeClr val="phClr"/>
+          </a:solidFill>
+          <a:prstDash val="solid"/>
+          <a:miter lim="800000"/>
+        </a:ln>
+        <a:ln w="25400" cap="flat" cmpd="sng" algn="ctr">
+          <a:solidFill>
+            <a:schemeClr val="phClr"/>
+          </a:solidFill>
+          <a:prstDash val="solid"/>
+          <a:miter lim="800000"/>
+        </a:ln>
+      </a:lnStyleLst>
+      <a:effectStyleLst>
+        <a:effectStyle>
+          <a:effectLst/>
+        </a:effectStyle>
+        <a:effectStyle>
+          <a:effectLst/>
+        </a:effectStyle>
+        <a:effectStyle>
+          <a:effectLst>
+            <a:outerShdw blurRad="57150" dist="19050" dir="5400000" algn="ctr" rotWithShape="0">
+              <a:srgbClr val="000000">
+                <a:alpha val="63000"/>
+              </a:srgbClr>
+            </a:outerShdw>
+          </a:effectLst>
+        </a:effectStyle>
+      </a:effectStyleLst>
+      <a:bgFillStyleLst>
+        <a:solidFill>
+          <a:schemeClr val="phClr"/>
+        </a:solidFill>
+        <a:solidFill>
+          <a:schemeClr val="phClr">
+            <a:tint val="95000"/>
+            <a:satMod val="170000"/>
+          </a:schemeClr>
+        </a:solidFill>
+        <a:gradFill rotWithShape="1">
+          <a:gsLst>
+            <a:gs pos="0">
+              <a:schemeClr val="phClr">
+                <a:tint val="93000"/>
+                <a:satMod val="150000"/>
+                <a:shade val="98000"/>
+                <a:lumMod val="102000"/>
+              </a:schemeClr>
+            </a:gs>
+            <a:gs pos="50000">
+              <a:schemeClr val="phClr">
+                <a:tint val="98000"/>
+                <a:satMod val="130000"/>
+                <a:shade val="90000"/>
+                <a:lumMod val="103000"/>
+              </a:schemeClr>
+            </a:gs>
+            <a:gs pos="100000">
+              <a:schemeClr val="phClr">
+                <a:shade val="63000"/>
+                <a:satMod val="120000"/>
+              </a:schemeClr>
+            </a:gs>
+          </a:gsLst>
+          <a:lin ang="5400000" scaled="0"/>
+        </a:gradFill>
+      </a:bgFillStyleLst>
+    </a:fmtScheme>
+  </a:themeElements>
+  <a:objectDefaults>
+    <a:lnDef>
+      <a:spPr/>
+      <a:bodyPr/>
+      <a:lstStyle/>
+      <a:style>
+        <a:lnRef idx="2">
+          <a:schemeClr val="accent1"/>
+        </a:lnRef>
+        <a:fillRef idx="0">
+          <a:schemeClr val="accent1"/>
+        </a:fillRef>
+        <a:effectRef idx="1">
+          <a:schemeClr val="accent1"/>
+        </a:effectRef>
+        <a:fontRef idx="minor">
+          <a:schemeClr val="tx1"/>
+        </a:fontRef>
+      </a:style>
+    </a:lnDef>
+  </a:objectDefaults>
+  <a:extraClrSchemeLst/>
+  <a:extLst>
+    <a:ext uri="{05A4C25C-085E-4340-85A3-A5531E510DB2}">
+      <thm15:themeFamily xmlns:thm15="http://schemas.microsoft.com/office/thememl/2012/main" name="Office Theme" id="{2E142A2C-CD16-42D6-873A-C26D2A0506FA}" vid="{1BDDFF52-6CD6-40A5-AB3C-68EB2F1E4D0A}"/>
+    </a:ext>
+  </a:extLst>
+</a:theme>
 </file>
--- a/A_Documentation/Defense.pptx
+++ b/A_Documentation/Defense.pptx
@@ -225,7 +225,7 @@
           <a:p>
             <a:fld id="{C6333347-8B99-4D12-8D18-1FE76537B012}" type="datetimeFigureOut">
               <a:rPr lang="fr-CH" smtClean="0"/>
-              <a:t>06.09.2026</a:t>
+              <a:t>07.09.2026</a:t>
             </a:fld>
             <a:endParaRPr lang="fr-CH"/>
           </a:p>
@@ -642,7 +642,7 @@
           <a:p>
             <a:fld id="{4402F845-7D1D-4BC7-9D07-41BA32719176}" type="datetime1">
               <a:rPr lang="fr-CH" smtClean="0"/>
-              <a:t>06.09.2026</a:t>
+              <a:t>07.09.2026</a:t>
             </a:fld>
             <a:endParaRPr lang="fr-CH"/>
           </a:p>
@@ -842,7 +842,7 @@
           <a:p>
             <a:fld id="{14CC4612-9EF6-4B04-A368-185401C2C328}" type="datetime1">
               <a:rPr lang="fr-CH" smtClean="0"/>
-              <a:t>06.09.2026</a:t>
+              <a:t>07.09.2026</a:t>
             </a:fld>
             <a:endParaRPr lang="fr-CH"/>
           </a:p>
@@ -1053,7 +1053,7 @@
           <a:p>
             <a:fld id="{14CC4612-9EF6-4B04-A368-185401C2C328}" type="datetime1">
               <a:rPr lang="fr-CH" smtClean="0"/>
-              <a:t>06.09.2026</a:t>
+              <a:t>07.09.2026</a:t>
             </a:fld>
             <a:endParaRPr lang="fr-CH"/>
           </a:p>
@@ -1254,7 +1254,7 @@
           <a:p>
             <a:fld id="{B00C96F7-2F60-4A9F-A586-72D490FA45D0}" type="datetime1">
               <a:rPr lang="fr-CH" smtClean="0"/>
-              <a:t>06.09.2026</a:t>
+              <a:t>07.09.2026</a:t>
             </a:fld>
             <a:endParaRPr lang="fr-CH"/>
           </a:p>
@@ -1530,7 +1530,7 @@
           <a:p>
             <a:fld id="{14CC4612-9EF6-4B04-A368-185401C2C328}" type="datetime1">
               <a:rPr lang="fr-CH" smtClean="0"/>
-              <a:t>06.09.2026</a:t>
+              <a:t>07.09.2026</a:t>
             </a:fld>
             <a:endParaRPr lang="fr-CH"/>
           </a:p>
@@ -1799,7 +1799,7 @@
           <a:p>
             <a:fld id="{14CC4612-9EF6-4B04-A368-185401C2C328}" type="datetime1">
               <a:rPr lang="fr-CH" smtClean="0"/>
-              <a:t>06.09.2026</a:t>
+              <a:t>07.09.2026</a:t>
             </a:fld>
             <a:endParaRPr lang="fr-CH"/>
           </a:p>
@@ -2215,7 +2215,7 @@
           <a:p>
             <a:fld id="{14CC4612-9EF6-4B04-A368-185401C2C328}" type="datetime1">
               <a:rPr lang="fr-CH" smtClean="0"/>
-              <a:t>06.09.2026</a:t>
+              <a:t>07.09.2026</a:t>
             </a:fld>
             <a:endParaRPr lang="fr-CH"/>
           </a:p>
@@ -2358,7 +2358,7 @@
           <a:p>
             <a:fld id="{14CC4612-9EF6-4B04-A368-185401C2C328}" type="datetime1">
               <a:rPr lang="fr-CH" smtClean="0"/>
-              <a:t>06.09.2026</a:t>
+              <a:t>07.09.2026</a:t>
             </a:fld>
             <a:endParaRPr lang="fr-CH"/>
           </a:p>
@@ -2472,7 +2472,7 @@
           <a:p>
             <a:fld id="{14CC4612-9EF6-4B04-A368-185401C2C328}" type="datetime1">
               <a:rPr lang="fr-CH" smtClean="0"/>
-              <a:t>06.09.2026</a:t>
+              <a:t>07.09.2026</a:t>
             </a:fld>
             <a:endParaRPr lang="fr-CH"/>
           </a:p>
@@ -2786,7 +2786,7 @@
           <a:p>
             <a:fld id="{14CC4612-9EF6-4B04-A368-185401C2C328}" type="datetime1">
               <a:rPr lang="fr-CH" smtClean="0"/>
-              <a:t>06.09.2026</a:t>
+              <a:t>07.09.2026</a:t>
             </a:fld>
             <a:endParaRPr lang="fr-CH"/>
           </a:p>
@@ -3076,7 +3076,7 @@
           <a:p>
             <a:fld id="{14CC4612-9EF6-4B04-A368-185401C2C328}" type="datetime1">
               <a:rPr lang="fr-CH" smtClean="0"/>
-              <a:t>06.09.2026</a:t>
+              <a:t>07.09.2026</a:t>
             </a:fld>
             <a:endParaRPr lang="fr-CH"/>
           </a:p>
@@ -3320,7 +3320,7 @@
           <a:p>
             <a:fld id="{14CC4612-9EF6-4B04-A368-185401C2C328}" type="datetime1">
               <a:rPr lang="fr-CH" smtClean="0"/>
-              <a:t>06.09.2026</a:t>
+              <a:t>07.09.2026</a:t>
             </a:fld>
             <a:endParaRPr lang="fr-CH"/>
           </a:p>
@@ -3813,7 +3813,7 @@
                 <a:latin typeface="Space Grotesk" pitchFamily="2" charset="0"/>
                 <a:cs typeface="Space Grotesk" pitchFamily="2" charset="0"/>
               </a:rPr>
-              <a:t>GE EEM</a:t>
+              <a:t>GE TIN EEM</a:t>
             </a:r>
           </a:p>
           <a:p>
@@ -5085,6 +5085,11 @@
             </a:lvl9pPr>
           </a:lstStyle>
           <a:p>
+            <a:pPr>
+              <a:lnSpc>
+                <a:spcPct val="150000"/>
+              </a:lnSpc>
+            </a:pPr>
             <a:r>
               <a:rPr lang="en-US" dirty="0">
                 <a:latin typeface="Space Grotesk" pitchFamily="2" charset="0"/>
@@ -5094,6 +5099,11 @@
             </a:r>
           </a:p>
           <a:p>
+            <a:pPr>
+              <a:lnSpc>
+                <a:spcPct val="150000"/>
+              </a:lnSpc>
+            </a:pPr>
             <a:r>
               <a:rPr lang="en-US" dirty="0">
                 <a:latin typeface="Space Grotesk" pitchFamily="2" charset="0"/>
@@ -5103,6 +5113,11 @@
             </a:r>
           </a:p>
           <a:p>
+            <a:pPr>
+              <a:lnSpc>
+                <a:spcPct val="150000"/>
+              </a:lnSpc>
+            </a:pPr>
             <a:r>
               <a:rPr lang="en-US" dirty="0">
                 <a:latin typeface="Space Grotesk" pitchFamily="2" charset="0"/>
@@ -6016,6 +6031,11 @@
           <a:bodyPr/>
           <a:lstStyle/>
           <a:p>
+            <a:pPr>
+              <a:lnSpc>
+                <a:spcPct val="150000"/>
+              </a:lnSpc>
+            </a:pPr>
             <a:r>
               <a:rPr lang="en-US" dirty="0">
                 <a:latin typeface="Space Grotesk" pitchFamily="2" charset="0"/>
@@ -6036,6 +6056,11 @@
             </a:endParaRPr>
           </a:p>
           <a:p>
+            <a:pPr>
+              <a:lnSpc>
+                <a:spcPct val="150000"/>
+              </a:lnSpc>
+            </a:pPr>
             <a:r>
               <a:rPr lang="en-US" dirty="0" err="1">
                 <a:latin typeface="Space Grotesk" pitchFamily="2" charset="0"/>
@@ -6063,6 +6088,11 @@
             </a:endParaRPr>
           </a:p>
           <a:p>
+            <a:pPr>
+              <a:lnSpc>
+                <a:spcPct val="150000"/>
+              </a:lnSpc>
+            </a:pPr>
             <a:r>
               <a:rPr lang="en-US" dirty="0" err="1">
                 <a:latin typeface="Space Grotesk" pitchFamily="2" charset="0"/>
@@ -6090,6 +6120,41 @@
                 <a:cs typeface="Space Grotesk" pitchFamily="2" charset="0"/>
               </a:rPr>
               <a:t> du chassis</a:t>
+            </a:r>
+          </a:p>
+          <a:p>
+            <a:pPr>
+              <a:lnSpc>
+                <a:spcPct val="150000"/>
+              </a:lnSpc>
+            </a:pPr>
+            <a:r>
+              <a:rPr lang="en-US" dirty="0" err="1">
+                <a:latin typeface="Space Grotesk" pitchFamily="2" charset="0"/>
+                <a:cs typeface="Space Grotesk" pitchFamily="2" charset="0"/>
+              </a:rPr>
+              <a:t>Adhérence</a:t>
+            </a:r>
+            <a:r>
+              <a:rPr lang="en-US" dirty="0">
+                <a:latin typeface="Space Grotesk" pitchFamily="2" charset="0"/>
+                <a:cs typeface="Space Grotesk" pitchFamily="2" charset="0"/>
+              </a:rPr>
+              <a:t> </a:t>
+            </a:r>
+            <a:r>
+              <a:rPr lang="en-US" dirty="0" err="1">
+                <a:latin typeface="Space Grotesk" pitchFamily="2" charset="0"/>
+                <a:cs typeface="Space Grotesk" pitchFamily="2" charset="0"/>
+              </a:rPr>
+              <a:t>parfaite</a:t>
+            </a:r>
+            <a:r>
+              <a:rPr lang="en-US" dirty="0">
+                <a:latin typeface="Space Grotesk" pitchFamily="2" charset="0"/>
+                <a:cs typeface="Space Grotesk" pitchFamily="2" charset="0"/>
+              </a:rPr>
+              <a:t> au sol</a:t>
             </a:r>
           </a:p>
           <a:p>
@@ -9775,12 +9840,17 @@
           </a:p>
           <a:p>
             <a:r>
-              <a:rPr lang="fr-CH">
+              <a:rPr lang="fr-CH" dirty="0">
                 <a:latin typeface="Space Grotesk" pitchFamily="2" charset="0"/>
                 <a:cs typeface="Space Grotesk" pitchFamily="2" charset="0"/>
               </a:rPr>
               <a:t>Valeurs limites</a:t>
             </a:r>
+          </a:p>
+          <a:p>
+            <a:pPr marL="0" indent="0">
+              <a:buNone/>
+            </a:pPr>
             <a:endParaRPr lang="fr-CH" b="0" dirty="0">
               <a:latin typeface="Space Grotesk" pitchFamily="2" charset="0"/>
               <a:cs typeface="Space Grotesk" pitchFamily="2" charset="0"/>
@@ -9996,6 +10066,22 @@
           <a:bodyPr/>
           <a:lstStyle/>
           <a:p>
+            <a:pPr>
+              <a:lnSpc>
+                <a:spcPct val="150000"/>
+              </a:lnSpc>
+            </a:pPr>
+            <a:endParaRPr lang="en-US" dirty="0">
+              <a:latin typeface="Space Grotesk" pitchFamily="2" charset="0"/>
+              <a:cs typeface="Space Grotesk" pitchFamily="2" charset="0"/>
+            </a:endParaRPr>
+          </a:p>
+          <a:p>
+            <a:pPr>
+              <a:lnSpc>
+                <a:spcPct val="150000"/>
+              </a:lnSpc>
+            </a:pPr>
             <a:r>
               <a:rPr lang="en-US" dirty="0" err="1">
                 <a:latin typeface="Space Grotesk" pitchFamily="2" charset="0"/>
@@ -10040,6 +10126,11 @@
             </a:r>
           </a:p>
           <a:p>
+            <a:pPr>
+              <a:lnSpc>
+                <a:spcPct val="150000"/>
+              </a:lnSpc>
+            </a:pPr>
             <a:r>
               <a:rPr lang="en-US" dirty="0">
                 <a:latin typeface="Space Grotesk" pitchFamily="2" charset="0"/>
@@ -10074,6 +10165,27 @@
                 <a:cs typeface="Space Grotesk" pitchFamily="2" charset="0"/>
               </a:rPr>
               <a:t> pas à pas</a:t>
+            </a:r>
+          </a:p>
+          <a:p>
+            <a:pPr>
+              <a:lnSpc>
+                <a:spcPct val="150000"/>
+              </a:lnSpc>
+            </a:pPr>
+            <a:r>
+              <a:rPr lang="en-US" dirty="0" err="1">
+                <a:latin typeface="Space Grotesk" pitchFamily="2" charset="0"/>
+                <a:cs typeface="Space Grotesk" pitchFamily="2" charset="0"/>
+              </a:rPr>
+              <a:t>Régulation</a:t>
+            </a:r>
+            <a:r>
+              <a:rPr lang="en-US" dirty="0">
+                <a:latin typeface="Space Grotesk" pitchFamily="2" charset="0"/>
+                <a:cs typeface="Space Grotesk" pitchFamily="2" charset="0"/>
+              </a:rPr>
+              <a:t> LQR</a:t>
             </a:r>
           </a:p>
         </p:txBody>
